--- a/lci_esophagectomy_consult.pptx
+++ b/lci_esophagectomy_consult.pptx
@@ -69,6 +69,11 @@
     <p:sldId id="317" r:id="rId63"/>
     <p:sldId id="318" r:id="rId64"/>
     <p:sldId id="319" r:id="rId65"/>
+    <p:sldId id="320" r:id="rId66"/>
+    <p:sldId id="321" r:id="rId67"/>
+    <p:sldId id="322" r:id="rId68"/>
+    <p:sldId id="323" r:id="rId69"/>
+    <p:sldId id="324" r:id="rId70"/>
   </p:sldIdLst>
   <p:sldSz cx="9144000" cy="5143500" type="screen16x9"/>
   <p:notesSz cx="6858000" cy="9144000"/>
@@ -3607,6 +3612,440 @@
             </a:pPr>
             <a:r>
               <a:rPr/>
+              <a:t>Parking and Arrival</a:t>
+            </a:r>
+          </a:p>
+        </p:txBody>
+      </p:sp>
+      <p:sp>
+        <p:nvSpPr>
+          <p:cNvPr id="3" name="Content Placeholder 2"/>
+          <p:cNvSpPr>
+            <a:spLocks noGrp="1"/>
+          </p:cNvSpPr>
+          <p:nvPr>
+            <p:ph idx="1"/>
+          </p:nvPr>
+        </p:nvSpPr>
+        <p:spPr/>
+        <p:txBody>
+          <a:bodyPr/>
+          <a:lstStyle/>
+          <a:p>
+            <a:pPr lvl="0"/>
+            <a:r>
+              <a:rPr/>
+              <a:t>Blue Parking Deck: XXX Medical Center Drive, Charlotte ND 28204</a:t>
+            </a:r>
+          </a:p>
+          <a:p>
+            <a:pPr lvl="0"/>
+            <a:r>
+              <a:rPr/>
+              <a:t>Enter Building through Dixon Tower (Traffic circle with Fountains)</a:t>
+            </a:r>
+          </a:p>
+          <a:p>
+            <a:pPr lvl="0"/>
+            <a:r>
+              <a:rPr/>
+              <a:t>Check in at the desk and tell them you will have surgery</a:t>
+            </a:r>
+          </a:p>
+          <a:p>
+            <a:pPr lvl="0"/>
+            <a:r>
+              <a:rPr/>
+              <a:t>Escort service will direct you to the Preoperative area on 5th floor</a:t>
+            </a:r>
+          </a:p>
+        </p:txBody>
+      </p:sp>
+    </p:spTree>
+  </p:cSld>
+</p:sld>
+</file>
+
+<file path=ppt/slides/slide11.xml><?xml version="1.0" encoding="utf-8"?>
+<p:sld xmlns:a="http://schemas.openxmlformats.org/drawingml/2006/main" xmlns:r="http://schemas.openxmlformats.org/officeDocument/2006/relationships" xmlns:p="http://schemas.openxmlformats.org/presentationml/2006/main">
+  <p:cSld>
+    <p:spTree>
+      <p:nvGrpSpPr>
+        <p:cNvPr id="1" name=""/>
+        <p:cNvGrpSpPr/>
+        <p:nvPr/>
+      </p:nvGrpSpPr>
+      <p:grpSpPr>
+        <a:xfrm>
+          <a:off x="0" y="0"/>
+          <a:ext cx="0" cy="0"/>
+          <a:chOff x="0" y="0"/>
+          <a:chExt cx="0" cy="0"/>
+        </a:xfrm>
+      </p:grpSpPr>
+      <p:sp>
+        <p:nvSpPr>
+          <p:cNvPr id="2" name="Title 1"/>
+          <p:cNvSpPr>
+            <a:spLocks noGrp="1"/>
+          </p:cNvSpPr>
+          <p:nvPr>
+            <p:ph type="title"/>
+          </p:nvPr>
+        </p:nvSpPr>
+        <p:spPr>
+          <a:xfrm>
+            <a:off x="284309" y="205979"/>
+            <a:ext cx="8552330" cy="662317"/>
+          </a:xfrm>
+        </p:spPr>
+        <p:txBody>
+          <a:bodyPr/>
+          <a:lstStyle/>
+          <a:p>
+            <a:pPr lvl="0" indent="0" marL="0">
+              <a:buNone/>
+            </a:pPr>
+            <a:r>
+              <a:rPr/>
+              <a:t>Day of Surgery</a:t>
+            </a:r>
+          </a:p>
+        </p:txBody>
+      </p:sp>
+      <p:sp>
+        <p:nvSpPr>
+          <p:cNvPr id="3" name="Content Placeholder 2"/>
+          <p:cNvSpPr>
+            <a:spLocks noGrp="1"/>
+          </p:cNvSpPr>
+          <p:nvPr>
+            <p:ph idx="1"/>
+          </p:nvPr>
+        </p:nvSpPr>
+        <p:spPr/>
+        <p:txBody>
+          <a:bodyPr/>
+          <a:lstStyle/>
+          <a:p>
+            <a:pPr lvl="0"/>
+            <a:r>
+              <a:rPr/>
+              <a:t>Waiting Room on 5th floor for families</a:t>
+            </a:r>
+          </a:p>
+          <a:p>
+            <a:pPr lvl="0"/>
+            <a:r>
+              <a:rPr/>
+              <a:t>Surgery completed 3pm - 5pm</a:t>
+            </a:r>
+          </a:p>
+          <a:p>
+            <a:pPr lvl="0"/>
+            <a:r>
+              <a:rPr/>
+              <a:t>Transfer to Surgical Intensive Care Unit 4pm - 6pm</a:t>
+            </a:r>
+          </a:p>
+          <a:p>
+            <a:pPr lvl="0"/>
+            <a:r>
+              <a:rPr/>
+              <a:t>Visitors permitted into the ICU 5pm - 7pm</a:t>
+            </a:r>
+          </a:p>
+        </p:txBody>
+      </p:sp>
+    </p:spTree>
+  </p:cSld>
+</p:sld>
+</file>
+
+<file path=ppt/slides/slide12.xml><?xml version="1.0" encoding="utf-8"?>
+<p:sld xmlns:a="http://schemas.openxmlformats.org/drawingml/2006/main" xmlns:r="http://schemas.openxmlformats.org/officeDocument/2006/relationships" xmlns:p="http://schemas.openxmlformats.org/presentationml/2006/main">
+  <p:cSld>
+    <p:spTree>
+      <p:nvGrpSpPr>
+        <p:cNvPr id="1" name=""/>
+        <p:cNvGrpSpPr/>
+        <p:nvPr/>
+      </p:nvGrpSpPr>
+      <p:grpSpPr>
+        <a:xfrm>
+          <a:off x="0" y="0"/>
+          <a:ext cx="0" cy="0"/>
+          <a:chOff x="0" y="0"/>
+          <a:chExt cx="0" cy="0"/>
+        </a:xfrm>
+      </p:grpSpPr>
+      <p:sp>
+        <p:nvSpPr>
+          <p:cNvPr id="2" name="Title 1"/>
+          <p:cNvSpPr>
+            <a:spLocks noGrp="1"/>
+          </p:cNvSpPr>
+          <p:nvPr>
+            <p:ph type="title"/>
+          </p:nvPr>
+        </p:nvSpPr>
+        <p:spPr>
+          <a:xfrm>
+            <a:off x="284309" y="205979"/>
+            <a:ext cx="8552330" cy="662317"/>
+          </a:xfrm>
+        </p:spPr>
+        <p:txBody>
+          <a:bodyPr/>
+          <a:lstStyle/>
+          <a:p>
+            <a:pPr lvl="0" indent="0" marL="0">
+              <a:buNone/>
+            </a:pPr>
+            <a:r>
+              <a:rPr/>
+              <a:t>Visitor’s Policy</a:t>
+            </a:r>
+          </a:p>
+        </p:txBody>
+      </p:sp>
+      <p:sp>
+        <p:nvSpPr>
+          <p:cNvPr id="3" name="Content Placeholder 2"/>
+          <p:cNvSpPr>
+            <a:spLocks noGrp="1"/>
+          </p:cNvSpPr>
+          <p:nvPr>
+            <p:ph idx="1"/>
+          </p:nvPr>
+        </p:nvSpPr>
+        <p:spPr/>
+        <p:txBody>
+          <a:bodyPr/>
+          <a:lstStyle/>
+          <a:p>
+            <a:pPr lvl="0" indent="0" marL="0">
+              <a:buNone/>
+            </a:pPr>
+            <a:r>
+              <a:rPr/>
+              <a:t>Intensive Care Unit</a:t>
+            </a:r>
+          </a:p>
+          <a:p>
+            <a:pPr lvl="0"/>
+            <a:r>
+              <a:rPr/>
+              <a:t>Two visitors at a time 8am - 8pm</a:t>
+            </a:r>
+          </a:p>
+          <a:p>
+            <a:pPr lvl="0"/>
+            <a:r>
+              <a:rPr/>
+              <a:t>One “Care Partner” can stay overnight in ICU</a:t>
+            </a:r>
+          </a:p>
+          <a:p>
+            <a:pPr lvl="0" indent="0" marL="0">
+              <a:buNone/>
+            </a:pPr>
+            <a:r>
+              <a:rPr/>
+              <a:t>Ward</a:t>
+            </a:r>
+          </a:p>
+          <a:p>
+            <a:pPr lvl="0"/>
+            <a:r>
+              <a:rPr/>
+              <a:t>All rooms are private rooms</a:t>
+            </a:r>
+          </a:p>
+          <a:p>
+            <a:pPr lvl="0"/>
+            <a:r>
+              <a:rPr/>
+              <a:t>Day bed available for a family member</a:t>
+            </a:r>
+          </a:p>
+          <a:p>
+            <a:pPr lvl="0"/>
+            <a:r>
+              <a:rPr/>
+              <a:t>Visiting hours 8am - 8pm</a:t>
+            </a:r>
+          </a:p>
+          <a:p>
+            <a:pPr lvl="0" indent="0" marL="0">
+              <a:buNone/>
+            </a:pPr>
+            <a:r>
+              <a:rPr/>
+              <a:t>No visitors please who have a cough or fever!</a:t>
+            </a:r>
+          </a:p>
+        </p:txBody>
+      </p:sp>
+    </p:spTree>
+  </p:cSld>
+</p:sld>
+</file>
+
+<file path=ppt/slides/slide13.xml><?xml version="1.0" encoding="utf-8"?>
+<p:sld xmlns:a="http://schemas.openxmlformats.org/drawingml/2006/main" xmlns:r="http://schemas.openxmlformats.org/officeDocument/2006/relationships" xmlns:p="http://schemas.openxmlformats.org/presentationml/2006/main">
+  <p:cSld>
+    <p:spTree>
+      <p:nvGrpSpPr>
+        <p:cNvPr id="1" name=""/>
+        <p:cNvGrpSpPr/>
+        <p:nvPr/>
+      </p:nvGrpSpPr>
+      <p:grpSpPr>
+        <a:xfrm>
+          <a:off x="0" y="0"/>
+          <a:ext cx="0" cy="0"/>
+          <a:chOff x="0" y="0"/>
+          <a:chExt cx="0" cy="0"/>
+        </a:xfrm>
+      </p:grpSpPr>
+      <p:sp>
+        <p:nvSpPr>
+          <p:cNvPr id="2" name="Title 1"/>
+          <p:cNvSpPr>
+            <a:spLocks noGrp="1"/>
+          </p:cNvSpPr>
+          <p:nvPr>
+            <p:ph type="title"/>
+          </p:nvPr>
+        </p:nvSpPr>
+        <p:spPr>
+          <a:xfrm>
+            <a:off x="284309" y="205979"/>
+            <a:ext cx="8552330" cy="662317"/>
+          </a:xfrm>
+        </p:spPr>
+        <p:txBody>
+          <a:bodyPr/>
+          <a:lstStyle/>
+          <a:p>
+            <a:pPr lvl="0" indent="0" marL="0">
+              <a:buNone/>
+            </a:pPr>
+            <a:r>
+              <a:rPr/>
+              <a:t>Preparation for Surgery</a:t>
+            </a:r>
+          </a:p>
+        </p:txBody>
+      </p:sp>
+      <p:sp>
+        <p:nvSpPr>
+          <p:cNvPr id="3" name="Content Placeholder 2"/>
+          <p:cNvSpPr>
+            <a:spLocks noGrp="1"/>
+          </p:cNvSpPr>
+          <p:nvPr>
+            <p:ph idx="1"/>
+          </p:nvPr>
+        </p:nvSpPr>
+        <p:spPr/>
+        <p:txBody>
+          <a:bodyPr/>
+          <a:lstStyle/>
+          <a:p>
+            <a:pPr lvl="0" indent="0" marL="0">
+              <a:buNone/>
+            </a:pPr>
+            <a:r>
+              <a:rPr/>
+              <a:t>Medical evaluation may be needed before surgery:</a:t>
+            </a:r>
+          </a:p>
+          <a:p>
+            <a:pPr lvl="0"/>
+            <a:r>
+              <a:rPr/>
+              <a:t>Pulmonary Function Tests to test lung function</a:t>
+            </a:r>
+          </a:p>
+          <a:p>
+            <a:pPr lvl="0"/>
+            <a:r>
+              <a:rPr/>
+              <a:t>Cardiology evaluation to test heart function</a:t>
+            </a:r>
+          </a:p>
+          <a:p>
+            <a:pPr lvl="1"/>
+            <a:r>
+              <a:rPr/>
+              <a:t>Echocardiogram</a:t>
+            </a:r>
+          </a:p>
+          <a:p>
+            <a:pPr lvl="1"/>
+            <a:r>
+              <a:rPr/>
+              <a:t>Stress Test</a:t>
+            </a:r>
+          </a:p>
+          <a:p>
+            <a:pPr lvl="1"/>
+            <a:r>
+              <a:rPr/>
+              <a:t>Holter monitor</a:t>
+            </a:r>
+          </a:p>
+        </p:txBody>
+      </p:sp>
+    </p:spTree>
+  </p:cSld>
+</p:sld>
+</file>
+
+<file path=ppt/slides/slide14.xml><?xml version="1.0" encoding="utf-8"?>
+<p:sld xmlns:a="http://schemas.openxmlformats.org/drawingml/2006/main" xmlns:r="http://schemas.openxmlformats.org/officeDocument/2006/relationships" xmlns:p="http://schemas.openxmlformats.org/presentationml/2006/main">
+  <p:cSld>
+    <p:spTree>
+      <p:nvGrpSpPr>
+        <p:cNvPr id="1" name=""/>
+        <p:cNvGrpSpPr/>
+        <p:nvPr/>
+      </p:nvGrpSpPr>
+      <p:grpSpPr>
+        <a:xfrm>
+          <a:off x="0" y="0"/>
+          <a:ext cx="0" cy="0"/>
+          <a:chOff x="0" y="0"/>
+          <a:chExt cx="0" cy="0"/>
+        </a:xfrm>
+      </p:grpSpPr>
+      <p:sp>
+        <p:nvSpPr>
+          <p:cNvPr id="2" name="Title 1"/>
+          <p:cNvSpPr>
+            <a:spLocks noGrp="1"/>
+          </p:cNvSpPr>
+          <p:nvPr>
+            <p:ph type="title"/>
+          </p:nvPr>
+        </p:nvSpPr>
+        <p:spPr>
+          <a:xfrm>
+            <a:off x="284309" y="205979"/>
+            <a:ext cx="8552330" cy="662317"/>
+          </a:xfrm>
+        </p:spPr>
+        <p:txBody>
+          <a:bodyPr/>
+          <a:lstStyle/>
+          <a:p>
+            <a:pPr lvl="0" indent="0" marL="0">
+              <a:buNone/>
+            </a:pPr>
+            <a:r>
+              <a:rPr/>
               <a:t>Esophagectomy for Cancers of the Esophagus or GE Junction</a:t>
             </a:r>
           </a:p>
@@ -3656,6 +4095,13 @@
                 <a:r>
                   <a:rPr/>
                   <a:t>Surgery scheduled after medical evaluation</a:t>
+                </a:r>
+              </a:p>
+              <a:p>
+                <a:pPr lvl="0"/>
+                <a:r>
+                  <a:rPr/>
+                  <a:t>Aim for surgery within 6 weeks of consultation</a:t>
                 </a:r>
               </a:p>
               <a:p>
@@ -3716,469 +4162,31 @@
                   <a:t>Medical evaluation</a:t>
                 </a:r>
               </a:p>
+              <a:p>
+                <a:pPr lvl="0"/>
+                <a:r>
+                  <a:rPr/>
+                  <a:t>Timing between end of preoperative therapy and surgery</a:t>
+                </a:r>
+              </a:p>
+              <a:p>
+                <a:pPr lvl="1"/>
+                <a:r>
+                  <a:rPr/>
+                  <a:t>Chemotherapy + radiation: 6-8 weeks</a:t>
+                </a:r>
+              </a:p>
+              <a:p>
+                <a:pPr lvl="1"/>
+                <a:r>
+                  <a:rPr/>
+                  <a:t>Chemotherapy: 4-8 weeks</a:t>
+                </a:r>
+              </a:p>
             </p:txBody>
           </p:sp>
         </mc:Choice>
       </mc:AlternateContent>
-    </p:spTree>
-  </p:cSld>
-</p:sld>
-</file>
-
-<file path=ppt/slides/slide11.xml><?xml version="1.0" encoding="utf-8"?>
-<p:sld xmlns:a="http://schemas.openxmlformats.org/drawingml/2006/main" xmlns:r="http://schemas.openxmlformats.org/officeDocument/2006/relationships" xmlns:p="http://schemas.openxmlformats.org/presentationml/2006/main">
-  <p:cSld>
-    <p:spTree>
-      <p:nvGrpSpPr>
-        <p:cNvPr id="1" name=""/>
-        <p:cNvGrpSpPr/>
-        <p:nvPr/>
-      </p:nvGrpSpPr>
-      <p:grpSpPr>
-        <a:xfrm>
-          <a:off x="0" y="0"/>
-          <a:ext cx="0" cy="0"/>
-          <a:chOff x="0" y="0"/>
-          <a:chExt cx="0" cy="0"/>
-        </a:xfrm>
-      </p:grpSpPr>
-      <p:sp>
-        <p:nvSpPr>
-          <p:cNvPr id="2" name="Title 1"/>
-          <p:cNvSpPr>
-            <a:spLocks noGrp="1"/>
-          </p:cNvSpPr>
-          <p:nvPr>
-            <p:ph type="title"/>
-          </p:nvPr>
-        </p:nvSpPr>
-        <p:spPr>
-          <a:xfrm>
-            <a:off x="284309" y="205979"/>
-            <a:ext cx="8552330" cy="662317"/>
-          </a:xfrm>
-        </p:spPr>
-        <p:txBody>
-          <a:bodyPr/>
-          <a:lstStyle/>
-          <a:p>
-            <a:pPr lvl="0" indent="0" marL="0">
-              <a:buNone/>
-            </a:pPr>
-            <a:r>
-              <a:rPr/>
-              <a:t>Preoperative Visits</a:t>
-            </a:r>
-          </a:p>
-        </p:txBody>
-      </p:sp>
-      <p:sp>
-        <p:nvSpPr>
-          <p:cNvPr id="3" name="Content Placeholder 2"/>
-          <p:cNvSpPr>
-            <a:spLocks noGrp="1"/>
-          </p:cNvSpPr>
-          <p:nvPr>
-            <p:ph idx="1"/>
-          </p:nvPr>
-        </p:nvSpPr>
-        <p:spPr/>
-        <p:txBody>
-          <a:bodyPr/>
-          <a:lstStyle/>
-          <a:p>
-            <a:pPr lvl="0" indent="0" marL="0">
-              <a:buNone/>
-            </a:pPr>
-            <a:r>
-              <a:rPr/>
-              <a:t>Medical Oncology - Monitor chemotherapy and side effects</a:t>
-            </a:r>
-          </a:p>
-          <a:p>
-            <a:pPr lvl="0" indent="0" marL="0">
-              <a:buNone/>
-            </a:pPr>
-            <a:r>
-              <a:rPr/>
-              <a:t>Radiation Oncology - Monitor radiation and side effects</a:t>
-            </a:r>
-          </a:p>
-          <a:p>
-            <a:pPr lvl="0" indent="0" marL="0">
-              <a:buNone/>
-            </a:pPr>
-            <a:r>
-              <a:rPr/>
-              <a:t>Surgical Oncology</a:t>
-            </a:r>
-          </a:p>
-          <a:p>
-            <a:pPr lvl="0"/>
-            <a:r>
-              <a:rPr/>
-              <a:t>Consult visit with Dr Salo</a:t>
-            </a:r>
-          </a:p>
-          <a:p>
-            <a:pPr lvl="0"/>
-            <a:r>
-              <a:rPr/>
-              <a:t>Mid-treatment visits with Dr Salo / Kate Duncan</a:t>
-            </a:r>
-          </a:p>
-          <a:p>
-            <a:pPr lvl="0"/>
-            <a:r>
-              <a:rPr/>
-              <a:t>Preop visit with Dr Salo (may be virtual)</a:t>
-            </a:r>
-          </a:p>
-          <a:p>
-            <a:pPr lvl="0"/>
-            <a:r>
-              <a:rPr/>
-              <a:t>In-person preop visit with Kate Duncan and Liz Koch</a:t>
-            </a:r>
-          </a:p>
-        </p:txBody>
-      </p:sp>
-    </p:spTree>
-  </p:cSld>
-</p:sld>
-</file>
-
-<file path=ppt/slides/slide12.xml><?xml version="1.0" encoding="utf-8"?>
-<p:sld xmlns:a="http://schemas.openxmlformats.org/drawingml/2006/main" xmlns:r="http://schemas.openxmlformats.org/officeDocument/2006/relationships" xmlns:p="http://schemas.openxmlformats.org/presentationml/2006/main">
-  <p:cSld>
-    <p:spTree>
-      <p:nvGrpSpPr>
-        <p:cNvPr id="1" name=""/>
-        <p:cNvGrpSpPr/>
-        <p:nvPr/>
-      </p:nvGrpSpPr>
-      <p:grpSpPr>
-        <a:xfrm>
-          <a:off x="0" y="0"/>
-          <a:ext cx="0" cy="0"/>
-          <a:chOff x="0" y="0"/>
-          <a:chExt cx="0" cy="0"/>
-        </a:xfrm>
-      </p:grpSpPr>
-      <p:sp>
-        <p:nvSpPr>
-          <p:cNvPr id="2" name="Title 1"/>
-          <p:cNvSpPr>
-            <a:spLocks noGrp="1"/>
-          </p:cNvSpPr>
-          <p:nvPr>
-            <p:ph type="title"/>
-          </p:nvPr>
-        </p:nvSpPr>
-        <p:spPr>
-          <a:xfrm>
-            <a:off x="284309" y="205979"/>
-            <a:ext cx="8552330" cy="662317"/>
-          </a:xfrm>
-        </p:spPr>
-        <p:txBody>
-          <a:bodyPr/>
-          <a:lstStyle/>
-          <a:p>
-            <a:pPr lvl="0" indent="0" marL="0">
-              <a:buNone/>
-            </a:pPr>
-            <a:r>
-              <a:rPr/>
-              <a:t>Surgery for Esophageal Cancer</a:t>
-            </a:r>
-          </a:p>
-        </p:txBody>
-      </p:sp>
-      <p:sp>
-        <p:nvSpPr>
-          <p:cNvPr id="3" name="Content Placeholder 2"/>
-          <p:cNvSpPr>
-            <a:spLocks noGrp="1"/>
-          </p:cNvSpPr>
-          <p:nvPr>
-            <p:ph idx="1"/>
-          </p:nvPr>
-        </p:nvSpPr>
-        <p:spPr/>
-        <p:txBody>
-          <a:bodyPr/>
-          <a:lstStyle/>
-          <a:p>
-            <a:pPr lvl="0" indent="0" marL="0">
-              <a:buNone/>
-            </a:pPr>
-            <a:r>
-              <a:rPr/>
-              <a:t>Surgery for esophageal cancer is performed for:</a:t>
-            </a:r>
-          </a:p>
-          <a:p>
-            <a:pPr lvl="0"/>
-            <a:r>
-              <a:rPr/>
-              <a:t>Superficial Tumors (T1) not removed by endoscopy</a:t>
-            </a:r>
-          </a:p>
-          <a:p>
-            <a:pPr lvl="0"/>
-            <a:r>
-              <a:rPr/>
-              <a:t>Localized Tumors (T2 N0 M0)</a:t>
-            </a:r>
-          </a:p>
-          <a:p>
-            <a:pPr lvl="0"/>
-            <a:r>
-              <a:rPr/>
-              <a:t>Locally Advanced (T3 M0) after preop therapy</a:t>
-            </a:r>
-          </a:p>
-        </p:txBody>
-      </p:sp>
-    </p:spTree>
-  </p:cSld>
-</p:sld>
-</file>
-
-<file path=ppt/slides/slide13.xml><?xml version="1.0" encoding="utf-8"?>
-<p:sld xmlns:a="http://schemas.openxmlformats.org/drawingml/2006/main" xmlns:r="http://schemas.openxmlformats.org/officeDocument/2006/relationships" xmlns:p="http://schemas.openxmlformats.org/presentationml/2006/main">
-  <p:cSld>
-    <p:spTree>
-      <p:nvGrpSpPr>
-        <p:cNvPr id="1" name=""/>
-        <p:cNvGrpSpPr/>
-        <p:nvPr/>
-      </p:nvGrpSpPr>
-      <p:grpSpPr>
-        <a:xfrm>
-          <a:off x="0" y="0"/>
-          <a:ext cx="0" cy="0"/>
-          <a:chOff x="0" y="0"/>
-          <a:chExt cx="0" cy="0"/>
-        </a:xfrm>
-      </p:grpSpPr>
-      <p:sp>
-        <p:nvSpPr>
-          <p:cNvPr id="2" name="Title 1"/>
-          <p:cNvSpPr>
-            <a:spLocks noGrp="1"/>
-          </p:cNvSpPr>
-          <p:nvPr>
-            <p:ph type="title"/>
-          </p:nvPr>
-        </p:nvSpPr>
-        <p:spPr>
-          <a:xfrm>
-            <a:off x="315045" y="205979"/>
-            <a:ext cx="8529278" cy="857250"/>
-          </a:xfrm>
-        </p:spPr>
-        <p:txBody>
-          <a:bodyPr/>
-          <a:lstStyle/>
-          <a:p>
-            <a:pPr lvl="0" indent="0" marL="0">
-              <a:buNone/>
-            </a:pPr>
-            <a:r>
-              <a:rPr/>
-              <a:t>Goals of Surgery</a:t>
-            </a:r>
-          </a:p>
-        </p:txBody>
-      </p:sp>
-      <p:sp>
-        <p:nvSpPr>
-          <p:cNvPr id="3" name="Content Placeholder 2"/>
-          <p:cNvSpPr>
-            <a:spLocks noGrp="1"/>
-          </p:cNvSpPr>
-          <p:nvPr>
-            <p:ph idx="1" sz="half"/>
-          </p:nvPr>
-        </p:nvSpPr>
-        <p:spPr/>
-        <p:txBody>
-          <a:bodyPr/>
-          <a:lstStyle/>
-          <a:p>
-            <a:pPr lvl="0"/>
-            <a:r>
-              <a:rPr/>
-              <a:t>Remove tumor from esophagus</a:t>
-            </a:r>
-          </a:p>
-          <a:p>
-            <a:pPr lvl="0"/>
-            <a:r>
-              <a:rPr/>
-              <a:t>Remove surrounding lymph nodes</a:t>
-            </a:r>
-          </a:p>
-          <a:p>
-            <a:pPr lvl="0"/>
-            <a:r>
-              <a:rPr/>
-              <a:t>Create a new esophagus</a:t>
-            </a:r>
-          </a:p>
-        </p:txBody>
-      </p:sp>
-      <p:pic>
-        <p:nvPicPr>
-          <p:cNvPr descr="images/Eso_Resection1_ai.png" id="0" name="Picture 1"/>
-          <p:cNvPicPr>
-            <a:picLocks noGrp="1" noChangeAspect="1"/>
-          </p:cNvPicPr>
-          <p:nvPr/>
-        </p:nvPicPr>
-        <p:blipFill>
-          <a:blip r:embed="rId2"/>
-          <a:stretch>
-            <a:fillRect/>
-          </a:stretch>
-        </p:blipFill>
-        <p:spPr bwMode="auto">
-          <a:xfrm>
-            <a:off x="4914900" y="1193800"/>
-            <a:ext cx="3632200" cy="3733800"/>
-          </a:xfrm>
-          <a:prstGeom prst="rect">
-            <a:avLst/>
-          </a:prstGeom>
-          <a:noFill/>
-          <a:ln w="9525">
-            <a:noFill/>
-            <a:headEnd/>
-            <a:tailEnd/>
-          </a:ln>
-        </p:spPr>
-      </p:pic>
-    </p:spTree>
-  </p:cSld>
-</p:sld>
-</file>
-
-<file path=ppt/slides/slide14.xml><?xml version="1.0" encoding="utf-8"?>
-<p:sld xmlns:a="http://schemas.openxmlformats.org/drawingml/2006/main" xmlns:r="http://schemas.openxmlformats.org/officeDocument/2006/relationships" xmlns:p="http://schemas.openxmlformats.org/presentationml/2006/main">
-  <p:cSld>
-    <p:spTree>
-      <p:nvGrpSpPr>
-        <p:cNvPr id="1" name=""/>
-        <p:cNvGrpSpPr/>
-        <p:nvPr/>
-      </p:nvGrpSpPr>
-      <p:grpSpPr>
-        <a:xfrm>
-          <a:off x="0" y="0"/>
-          <a:ext cx="0" cy="0"/>
-          <a:chOff x="0" y="0"/>
-          <a:chExt cx="0" cy="0"/>
-        </a:xfrm>
-      </p:grpSpPr>
-      <p:sp>
-        <p:nvSpPr>
-          <p:cNvPr id="2" name="Title 1"/>
-          <p:cNvSpPr>
-            <a:spLocks noGrp="1"/>
-          </p:cNvSpPr>
-          <p:nvPr>
-            <p:ph type="title"/>
-          </p:nvPr>
-        </p:nvSpPr>
-        <p:spPr>
-          <a:xfrm>
-            <a:off x="315045" y="205979"/>
-            <a:ext cx="8529278" cy="857250"/>
-          </a:xfrm>
-        </p:spPr>
-        <p:txBody>
-          <a:bodyPr/>
-          <a:lstStyle/>
-          <a:p>
-            <a:pPr lvl="0" indent="0" marL="0">
-              <a:buNone/>
-            </a:pPr>
-            <a:r>
-              <a:rPr/>
-              <a:t>Ivor Lewis (Transthoracic) Esophagectomy</a:t>
-            </a:r>
-          </a:p>
-        </p:txBody>
-      </p:sp>
-      <p:sp>
-        <p:nvSpPr>
-          <p:cNvPr id="3" name="Content Placeholder 2"/>
-          <p:cNvSpPr>
-            <a:spLocks noGrp="1"/>
-          </p:cNvSpPr>
-          <p:nvPr>
-            <p:ph idx="1" sz="half"/>
-          </p:nvPr>
-        </p:nvSpPr>
-        <p:spPr/>
-        <p:txBody>
-          <a:bodyPr/>
-          <a:lstStyle/>
-          <a:p>
-            <a:pPr lvl="0"/>
-            <a:r>
-              <a:rPr/>
-              <a:t>Removes tumor and lower 1/3 esophagus</a:t>
-            </a:r>
-          </a:p>
-          <a:p>
-            <a:pPr lvl="0"/>
-            <a:r>
-              <a:rPr/>
-              <a:t>Removes surrounding lymph nodes</a:t>
-            </a:r>
-          </a:p>
-          <a:p>
-            <a:pPr lvl="0"/>
-            <a:r>
-              <a:rPr/>
-              <a:t>GI tract reconstructed</a:t>
-            </a:r>
-          </a:p>
-        </p:txBody>
-      </p:sp>
-      <p:pic>
-        <p:nvPicPr>
-          <p:cNvPr descr="images/Eso_Resection2_ai.png" id="0" name="Picture 1"/>
-          <p:cNvPicPr>
-            <a:picLocks noGrp="1" noChangeAspect="1"/>
-          </p:cNvPicPr>
-          <p:nvPr/>
-        </p:nvPicPr>
-        <p:blipFill>
-          <a:blip r:embed="rId2"/>
-          <a:stretch>
-            <a:fillRect/>
-          </a:stretch>
-        </p:blipFill>
-        <p:spPr bwMode="auto">
-          <a:xfrm>
-            <a:off x="4914900" y="1193800"/>
-            <a:ext cx="3632200" cy="3733800"/>
-          </a:xfrm>
-          <a:prstGeom prst="rect">
-            <a:avLst/>
-          </a:prstGeom>
-          <a:noFill/>
-          <a:ln w="9525">
-            <a:noFill/>
-            <a:headEnd/>
-            <a:tailEnd/>
-          </a:ln>
-        </p:spPr>
-      </p:pic>
     </p:spTree>
   </p:cSld>
 </p:sld>
@@ -4213,20 +4221,20 @@
         </p:nvSpPr>
         <p:spPr>
           <a:xfrm>
-            <a:off x="315045" y="205979"/>
-            <a:ext cx="8529278" cy="857250"/>
-          </a:xfrm>
-        </p:spPr>
-        <p:txBody>
-          <a:bodyPr/>
-          <a:lstStyle/>
-          <a:p>
-            <a:pPr lvl="0" indent="0" marL="0">
-              <a:buNone/>
-            </a:pPr>
-            <a:r>
-              <a:rPr/>
-              <a:t>Reconstruction</a:t>
+            <a:off x="284309" y="205979"/>
+            <a:ext cx="8552330" cy="662317"/>
+          </a:xfrm>
+        </p:spPr>
+        <p:txBody>
+          <a:bodyPr/>
+          <a:lstStyle/>
+          <a:p>
+            <a:pPr lvl="0" indent="0" marL="0">
+              <a:buNone/>
+            </a:pPr>
+            <a:r>
+              <a:rPr/>
+              <a:t>Preoperative Visits</a:t>
             </a:r>
           </a:p>
         </p:txBody>
@@ -4238,7 +4246,7 @@
             <a:spLocks noGrp="1"/>
           </p:cNvSpPr>
           <p:nvPr>
-            <p:ph idx="1" sz="half"/>
+            <p:ph idx="1"/>
           </p:nvPr>
         </p:nvSpPr>
         <p:spPr/>
@@ -4251,41 +4259,57 @@
             </a:pPr>
             <a:r>
               <a:rPr/>
-              <a:t>New esophagus is created from the stomach in the abdomen by fashioning it into a tube.</a:t>
-            </a:r>
-          </a:p>
-        </p:txBody>
-      </p:sp>
-      <p:pic>
-        <p:nvPicPr>
-          <p:cNvPr descr="images/Eso_Resection3_ai.png" id="0" name="Picture 1"/>
-          <p:cNvPicPr>
-            <a:picLocks noGrp="1" noChangeAspect="1"/>
-          </p:cNvPicPr>
-          <p:nvPr/>
-        </p:nvPicPr>
-        <p:blipFill>
-          <a:blip r:embed="rId2"/>
-          <a:stretch>
-            <a:fillRect/>
-          </a:stretch>
-        </p:blipFill>
-        <p:spPr bwMode="auto">
-          <a:xfrm>
-            <a:off x="4914900" y="1193800"/>
-            <a:ext cx="3632200" cy="3733800"/>
-          </a:xfrm>
-          <a:prstGeom prst="rect">
-            <a:avLst/>
-          </a:prstGeom>
-          <a:noFill/>
-          <a:ln w="9525">
-            <a:noFill/>
-            <a:headEnd/>
-            <a:tailEnd/>
-          </a:ln>
-        </p:spPr>
-      </p:pic>
+              <a:t>Medical Oncology - Monitor chemotherapy and side effects</a:t>
+            </a:r>
+          </a:p>
+          <a:p>
+            <a:pPr lvl="0" indent="0" marL="0">
+              <a:buNone/>
+            </a:pPr>
+            <a:r>
+              <a:rPr/>
+              <a:t>Radiation Oncology - Monitor radiation and side effects</a:t>
+            </a:r>
+          </a:p>
+          <a:p>
+            <a:pPr lvl="0" indent="0" marL="0">
+              <a:buNone/>
+            </a:pPr>
+            <a:r>
+              <a:rPr/>
+              <a:t>Surgical Oncology</a:t>
+            </a:r>
+          </a:p>
+          <a:p>
+            <a:pPr lvl="0"/>
+            <a:r>
+              <a:rPr/>
+              <a:t>Consult visit with Dr Salo</a:t>
+            </a:r>
+          </a:p>
+          <a:p>
+            <a:pPr lvl="0"/>
+            <a:r>
+              <a:rPr/>
+              <a:t>Mid-treatment visits with Dr Salo / Kate Duncan</a:t>
+            </a:r>
+          </a:p>
+          <a:p>
+            <a:pPr lvl="0"/>
+            <a:r>
+              <a:rPr/>
+              <a:t>Preop visit with Dr Salo (may be virtual)</a:t>
+            </a:r>
+          </a:p>
+          <a:p>
+            <a:pPr lvl="0"/>
+            <a:r>
+              <a:rPr/>
+              <a:t>In-person preop visit with Kate Duncan and Liz Koch</a:t>
+            </a:r>
+          </a:p>
+        </p:txBody>
+      </p:sp>
     </p:spTree>
   </p:cSld>
 </p:sld>
@@ -4320,6 +4344,583 @@
         </p:nvSpPr>
         <p:spPr>
           <a:xfrm>
+            <a:off x="284309" y="205979"/>
+            <a:ext cx="8552330" cy="662317"/>
+          </a:xfrm>
+        </p:spPr>
+        <p:txBody>
+          <a:bodyPr/>
+          <a:lstStyle/>
+          <a:p>
+            <a:pPr lvl="0" indent="0" marL="0">
+              <a:buNone/>
+            </a:pPr>
+            <a:r>
+              <a:rPr/>
+              <a:t>Surgery for Esophageal Cancer</a:t>
+            </a:r>
+          </a:p>
+        </p:txBody>
+      </p:sp>
+      <p:sp>
+        <p:nvSpPr>
+          <p:cNvPr id="3" name="Content Placeholder 2"/>
+          <p:cNvSpPr>
+            <a:spLocks noGrp="1"/>
+          </p:cNvSpPr>
+          <p:nvPr>
+            <p:ph idx="1"/>
+          </p:nvPr>
+        </p:nvSpPr>
+        <p:spPr/>
+        <p:txBody>
+          <a:bodyPr/>
+          <a:lstStyle/>
+          <a:p>
+            <a:pPr lvl="0" indent="0" marL="0">
+              <a:buNone/>
+            </a:pPr>
+            <a:r>
+              <a:rPr/>
+              <a:t>Surgery for esophageal cancer is performed for:</a:t>
+            </a:r>
+          </a:p>
+          <a:p>
+            <a:pPr lvl="0"/>
+            <a:r>
+              <a:rPr/>
+              <a:t>Superficial Tumors (T1) not removed by endoscopy</a:t>
+            </a:r>
+          </a:p>
+          <a:p>
+            <a:pPr lvl="0"/>
+            <a:r>
+              <a:rPr/>
+              <a:t>Localized Tumors (T2 N0 M0)</a:t>
+            </a:r>
+          </a:p>
+          <a:p>
+            <a:pPr lvl="0"/>
+            <a:r>
+              <a:rPr/>
+              <a:t>Locally Advanced (T3 M0) after preop therapy</a:t>
+            </a:r>
+          </a:p>
+        </p:txBody>
+      </p:sp>
+    </p:spTree>
+  </p:cSld>
+</p:sld>
+</file>
+
+<file path=ppt/slides/slide17.xml><?xml version="1.0" encoding="utf-8"?>
+<p:sld xmlns:a="http://schemas.openxmlformats.org/drawingml/2006/main" xmlns:r="http://schemas.openxmlformats.org/officeDocument/2006/relationships" xmlns:p="http://schemas.openxmlformats.org/presentationml/2006/main">
+  <p:cSld>
+    <p:spTree>
+      <p:nvGrpSpPr>
+        <p:cNvPr id="1" name=""/>
+        <p:cNvGrpSpPr/>
+        <p:nvPr/>
+      </p:nvGrpSpPr>
+      <p:grpSpPr>
+        <a:xfrm>
+          <a:off x="0" y="0"/>
+          <a:ext cx="0" cy="0"/>
+          <a:chOff x="0" y="0"/>
+          <a:chExt cx="0" cy="0"/>
+        </a:xfrm>
+      </p:grpSpPr>
+      <p:sp>
+        <p:nvSpPr>
+          <p:cNvPr id="2" name="Title 1"/>
+          <p:cNvSpPr>
+            <a:spLocks noGrp="1"/>
+          </p:cNvSpPr>
+          <p:nvPr>
+            <p:ph type="title"/>
+          </p:nvPr>
+        </p:nvSpPr>
+        <p:spPr>
+          <a:xfrm>
+            <a:off x="315045" y="205979"/>
+            <a:ext cx="8529278" cy="857250"/>
+          </a:xfrm>
+        </p:spPr>
+        <p:txBody>
+          <a:bodyPr/>
+          <a:lstStyle/>
+          <a:p>
+            <a:pPr lvl="0" indent="0" marL="0">
+              <a:buNone/>
+            </a:pPr>
+            <a:r>
+              <a:rPr/>
+              <a:t>Goals of Surgery</a:t>
+            </a:r>
+          </a:p>
+        </p:txBody>
+      </p:sp>
+      <p:sp>
+        <p:nvSpPr>
+          <p:cNvPr id="3" name="Content Placeholder 2"/>
+          <p:cNvSpPr>
+            <a:spLocks noGrp="1"/>
+          </p:cNvSpPr>
+          <p:nvPr>
+            <p:ph idx="1" sz="half"/>
+          </p:nvPr>
+        </p:nvSpPr>
+        <p:spPr/>
+        <p:txBody>
+          <a:bodyPr/>
+          <a:lstStyle/>
+          <a:p>
+            <a:pPr lvl="0"/>
+            <a:r>
+              <a:rPr/>
+              <a:t>Remove tumor from esophagus</a:t>
+            </a:r>
+          </a:p>
+          <a:p>
+            <a:pPr lvl="0"/>
+            <a:r>
+              <a:rPr/>
+              <a:t>Remove surrounding lymph nodes</a:t>
+            </a:r>
+          </a:p>
+          <a:p>
+            <a:pPr lvl="0"/>
+            <a:r>
+              <a:rPr/>
+              <a:t>Create a new esophagus</a:t>
+            </a:r>
+          </a:p>
+        </p:txBody>
+      </p:sp>
+      <p:pic>
+        <p:nvPicPr>
+          <p:cNvPr descr="images/Eso_Resection1_ai.png" id="0" name="Picture 1"/>
+          <p:cNvPicPr>
+            <a:picLocks noGrp="1" noChangeAspect="1"/>
+          </p:cNvPicPr>
+          <p:nvPr/>
+        </p:nvPicPr>
+        <p:blipFill>
+          <a:blip r:embed="rId2"/>
+          <a:stretch>
+            <a:fillRect/>
+          </a:stretch>
+        </p:blipFill>
+        <p:spPr bwMode="auto">
+          <a:xfrm>
+            <a:off x="4914900" y="1193800"/>
+            <a:ext cx="3632200" cy="3733800"/>
+          </a:xfrm>
+          <a:prstGeom prst="rect">
+            <a:avLst/>
+          </a:prstGeom>
+          <a:noFill/>
+          <a:ln w="9525">
+            <a:noFill/>
+            <a:headEnd/>
+            <a:tailEnd/>
+          </a:ln>
+        </p:spPr>
+      </p:pic>
+    </p:spTree>
+  </p:cSld>
+</p:sld>
+</file>
+
+<file path=ppt/slides/slide18.xml><?xml version="1.0" encoding="utf-8"?>
+<p:sld xmlns:a="http://schemas.openxmlformats.org/drawingml/2006/main" xmlns:r="http://schemas.openxmlformats.org/officeDocument/2006/relationships" xmlns:p="http://schemas.openxmlformats.org/presentationml/2006/main">
+  <p:cSld>
+    <p:spTree>
+      <p:nvGrpSpPr>
+        <p:cNvPr id="1" name=""/>
+        <p:cNvGrpSpPr/>
+        <p:nvPr/>
+      </p:nvGrpSpPr>
+      <p:grpSpPr>
+        <a:xfrm>
+          <a:off x="0" y="0"/>
+          <a:ext cx="0" cy="0"/>
+          <a:chOff x="0" y="0"/>
+          <a:chExt cx="0" cy="0"/>
+        </a:xfrm>
+      </p:grpSpPr>
+      <p:sp>
+        <p:nvSpPr>
+          <p:cNvPr id="2" name="Title 1"/>
+          <p:cNvSpPr>
+            <a:spLocks noGrp="1"/>
+          </p:cNvSpPr>
+          <p:nvPr>
+            <p:ph type="title"/>
+          </p:nvPr>
+        </p:nvSpPr>
+        <p:spPr>
+          <a:xfrm>
+            <a:off x="315045" y="205979"/>
+            <a:ext cx="8529278" cy="857250"/>
+          </a:xfrm>
+        </p:spPr>
+        <p:txBody>
+          <a:bodyPr/>
+          <a:lstStyle/>
+          <a:p>
+            <a:pPr lvl="0" indent="0" marL="0">
+              <a:buNone/>
+            </a:pPr>
+            <a:r>
+              <a:rPr/>
+              <a:t>Ivor Lewis (Transthoracic) Esophagectomy</a:t>
+            </a:r>
+          </a:p>
+        </p:txBody>
+      </p:sp>
+      <p:sp>
+        <p:nvSpPr>
+          <p:cNvPr id="3" name="Content Placeholder 2"/>
+          <p:cNvSpPr>
+            <a:spLocks noGrp="1"/>
+          </p:cNvSpPr>
+          <p:nvPr>
+            <p:ph idx="1" sz="half"/>
+          </p:nvPr>
+        </p:nvSpPr>
+        <p:spPr/>
+        <p:txBody>
+          <a:bodyPr/>
+          <a:lstStyle/>
+          <a:p>
+            <a:pPr lvl="0"/>
+            <a:r>
+              <a:rPr/>
+              <a:t>Removes tumor and lower 1/2 esophagus</a:t>
+            </a:r>
+          </a:p>
+          <a:p>
+            <a:pPr lvl="0"/>
+            <a:r>
+              <a:rPr/>
+              <a:t>Removes surrounding lymph nodes</a:t>
+            </a:r>
+          </a:p>
+          <a:p>
+            <a:pPr lvl="0"/>
+            <a:r>
+              <a:rPr/>
+              <a:t>GI tract reconstructed</a:t>
+            </a:r>
+          </a:p>
+        </p:txBody>
+      </p:sp>
+      <p:pic>
+        <p:nvPicPr>
+          <p:cNvPr descr="images/Eso_Resection2_ai.png" id="0" name="Picture 1"/>
+          <p:cNvPicPr>
+            <a:picLocks noGrp="1" noChangeAspect="1"/>
+          </p:cNvPicPr>
+          <p:nvPr/>
+        </p:nvPicPr>
+        <p:blipFill>
+          <a:blip r:embed="rId2"/>
+          <a:stretch>
+            <a:fillRect/>
+          </a:stretch>
+        </p:blipFill>
+        <p:spPr bwMode="auto">
+          <a:xfrm>
+            <a:off x="4914900" y="1193800"/>
+            <a:ext cx="3632200" cy="3733800"/>
+          </a:xfrm>
+          <a:prstGeom prst="rect">
+            <a:avLst/>
+          </a:prstGeom>
+          <a:noFill/>
+          <a:ln w="9525">
+            <a:noFill/>
+            <a:headEnd/>
+            <a:tailEnd/>
+          </a:ln>
+        </p:spPr>
+      </p:pic>
+    </p:spTree>
+  </p:cSld>
+</p:sld>
+</file>
+
+<file path=ppt/slides/slide19.xml><?xml version="1.0" encoding="utf-8"?>
+<p:sld xmlns:a="http://schemas.openxmlformats.org/drawingml/2006/main" xmlns:r="http://schemas.openxmlformats.org/officeDocument/2006/relationships" xmlns:p="http://schemas.openxmlformats.org/presentationml/2006/main">
+  <p:cSld>
+    <p:spTree>
+      <p:nvGrpSpPr>
+        <p:cNvPr id="1" name=""/>
+        <p:cNvGrpSpPr/>
+        <p:nvPr/>
+      </p:nvGrpSpPr>
+      <p:grpSpPr>
+        <a:xfrm>
+          <a:off x="0" y="0"/>
+          <a:ext cx="0" cy="0"/>
+          <a:chOff x="0" y="0"/>
+          <a:chExt cx="0" cy="0"/>
+        </a:xfrm>
+      </p:grpSpPr>
+      <p:sp>
+        <p:nvSpPr>
+          <p:cNvPr id="2" name="Title 1"/>
+          <p:cNvSpPr>
+            <a:spLocks noGrp="1"/>
+          </p:cNvSpPr>
+          <p:nvPr>
+            <p:ph type="title"/>
+          </p:nvPr>
+        </p:nvSpPr>
+        <p:spPr>
+          <a:xfrm>
+            <a:off x="315045" y="205979"/>
+            <a:ext cx="8529278" cy="857250"/>
+          </a:xfrm>
+        </p:spPr>
+        <p:txBody>
+          <a:bodyPr/>
+          <a:lstStyle/>
+          <a:p>
+            <a:pPr lvl="0" indent="0" marL="0">
+              <a:buNone/>
+            </a:pPr>
+            <a:r>
+              <a:rPr/>
+              <a:t>Reconstruction</a:t>
+            </a:r>
+          </a:p>
+        </p:txBody>
+      </p:sp>
+      <p:sp>
+        <p:nvSpPr>
+          <p:cNvPr id="3" name="Content Placeholder 2"/>
+          <p:cNvSpPr>
+            <a:spLocks noGrp="1"/>
+          </p:cNvSpPr>
+          <p:nvPr>
+            <p:ph idx="1" sz="half"/>
+          </p:nvPr>
+        </p:nvSpPr>
+        <p:spPr/>
+        <p:txBody>
+          <a:bodyPr/>
+          <a:lstStyle/>
+          <a:p>
+            <a:pPr lvl="0" indent="0" marL="0">
+              <a:buNone/>
+            </a:pPr>
+            <a:r>
+              <a:rPr/>
+              <a:t>New esophagus is created from the stomach in the abdomen by fashioning it into a tube.</a:t>
+            </a:r>
+          </a:p>
+        </p:txBody>
+      </p:sp>
+      <p:pic>
+        <p:nvPicPr>
+          <p:cNvPr descr="images/Eso_Resection3_ai.png" id="0" name="Picture 1"/>
+          <p:cNvPicPr>
+            <a:picLocks noGrp="1" noChangeAspect="1"/>
+          </p:cNvPicPr>
+          <p:nvPr/>
+        </p:nvPicPr>
+        <p:blipFill>
+          <a:blip r:embed="rId2"/>
+          <a:stretch>
+            <a:fillRect/>
+          </a:stretch>
+        </p:blipFill>
+        <p:spPr bwMode="auto">
+          <a:xfrm>
+            <a:off x="4914900" y="1193800"/>
+            <a:ext cx="3632200" cy="3733800"/>
+          </a:xfrm>
+          <a:prstGeom prst="rect">
+            <a:avLst/>
+          </a:prstGeom>
+          <a:noFill/>
+          <a:ln w="9525">
+            <a:noFill/>
+            <a:headEnd/>
+            <a:tailEnd/>
+          </a:ln>
+        </p:spPr>
+      </p:pic>
+    </p:spTree>
+  </p:cSld>
+</p:sld>
+</file>
+
+<file path=ppt/slides/slide2.xml><?xml version="1.0" encoding="utf-8"?>
+<p:sld xmlns:a="http://schemas.openxmlformats.org/drawingml/2006/main" xmlns:r="http://schemas.openxmlformats.org/officeDocument/2006/relationships" xmlns:p="http://schemas.openxmlformats.org/presentationml/2006/main">
+  <p:cSld>
+    <p:spTree>
+      <p:nvGrpSpPr>
+        <p:cNvPr id="1" name=""/>
+        <p:cNvGrpSpPr/>
+        <p:nvPr/>
+      </p:nvGrpSpPr>
+      <p:grpSpPr>
+        <a:xfrm>
+          <a:off x="0" y="0"/>
+          <a:ext cx="0" cy="0"/>
+          <a:chOff x="0" y="0"/>
+          <a:chExt cx="0" cy="0"/>
+        </a:xfrm>
+      </p:grpSpPr>
+      <p:sp>
+        <p:nvSpPr>
+          <p:cNvPr id="2" name="Title 1"/>
+          <p:cNvSpPr>
+            <a:spLocks noGrp="1"/>
+          </p:cNvSpPr>
+          <p:nvPr>
+            <p:ph type="title"/>
+          </p:nvPr>
+        </p:nvSpPr>
+        <p:spPr>
+          <a:xfrm>
+            <a:off x="284309" y="205979"/>
+            <a:ext cx="8552330" cy="662317"/>
+          </a:xfrm>
+        </p:spPr>
+        <p:txBody>
+          <a:bodyPr/>
+          <a:lstStyle/>
+          <a:p>
+            <a:pPr lvl="0" indent="0" marL="0">
+              <a:buNone/>
+            </a:pPr>
+            <a:r>
+              <a:rPr/>
+              <a:t>Team Members - Physicians</a:t>
+            </a:r>
+          </a:p>
+        </p:txBody>
+      </p:sp>
+      <p:sp>
+        <p:nvSpPr>
+          <p:cNvPr id="3" name="Content Placeholder 2"/>
+          <p:cNvSpPr>
+            <a:spLocks noGrp="1"/>
+          </p:cNvSpPr>
+          <p:nvPr>
+            <p:ph idx="1"/>
+          </p:nvPr>
+        </p:nvSpPr>
+        <p:spPr/>
+        <p:txBody>
+          <a:bodyPr/>
+          <a:lstStyle/>
+          <a:p>
+            <a:pPr lvl="0" indent="0" marL="0">
+              <a:buNone/>
+            </a:pPr>
+            <a:r>
+              <a:rPr/>
+              <a:t>Primary Care Provider</a:t>
+            </a:r>
+          </a:p>
+          <a:p>
+            <a:pPr lvl="0" indent="0" marL="0">
+              <a:buNone/>
+            </a:pPr>
+            <a:r>
+              <a:rPr/>
+              <a:t>Gastroenterologist</a:t>
+            </a:r>
+          </a:p>
+          <a:p>
+            <a:pPr lvl="0" indent="0" marL="0">
+              <a:buNone/>
+            </a:pPr>
+            <a:r>
+              <a:rPr/>
+              <a:t>Medical Oncologist (chemotherapy)</a:t>
+            </a:r>
+          </a:p>
+          <a:p>
+            <a:pPr lvl="0" indent="0" marL="0">
+              <a:buNone/>
+            </a:pPr>
+            <a:r>
+              <a:rPr/>
+              <a:t>Radiation Oncologist (radiation)</a:t>
+            </a:r>
+          </a:p>
+          <a:p>
+            <a:pPr lvl="0" indent="0" marL="0">
+              <a:buNone/>
+            </a:pPr>
+            <a:r>
+              <a:rPr/>
+              <a:t>Surgeons</a:t>
+            </a:r>
+          </a:p>
+          <a:p>
+            <a:pPr lvl="0"/>
+            <a:r>
+              <a:rPr/>
+              <a:t>Jonathan Salo MD</a:t>
+            </a:r>
+          </a:p>
+          <a:p>
+            <a:pPr lvl="0"/>
+            <a:r>
+              <a:rPr/>
+              <a:t>Kelli Salter MD</a:t>
+            </a:r>
+          </a:p>
+          <a:p>
+            <a:pPr lvl="0"/>
+            <a:r>
+              <a:rPr/>
+              <a:t>Michael Roach MD</a:t>
+            </a:r>
+          </a:p>
+        </p:txBody>
+      </p:sp>
+    </p:spTree>
+  </p:cSld>
+</p:sld>
+</file>
+
+<file path=ppt/slides/slide20.xml><?xml version="1.0" encoding="utf-8"?>
+<p:sld xmlns:a="http://schemas.openxmlformats.org/drawingml/2006/main" xmlns:r="http://schemas.openxmlformats.org/officeDocument/2006/relationships" xmlns:p="http://schemas.openxmlformats.org/presentationml/2006/main">
+  <p:cSld>
+    <p:spTree>
+      <p:nvGrpSpPr>
+        <p:cNvPr id="1" name=""/>
+        <p:cNvGrpSpPr/>
+        <p:nvPr/>
+      </p:nvGrpSpPr>
+      <p:grpSpPr>
+        <a:xfrm>
+          <a:off x="0" y="0"/>
+          <a:ext cx="0" cy="0"/>
+          <a:chOff x="0" y="0"/>
+          <a:chExt cx="0" cy="0"/>
+        </a:xfrm>
+      </p:grpSpPr>
+      <p:sp>
+        <p:nvSpPr>
+          <p:cNvPr id="2" name="Title 1"/>
+          <p:cNvSpPr>
+            <a:spLocks noGrp="1"/>
+          </p:cNvSpPr>
+          <p:nvPr>
+            <p:ph type="title"/>
+          </p:nvPr>
+        </p:nvSpPr>
+        <p:spPr>
+          <a:xfrm>
             <a:off x="315045" y="205979"/>
             <a:ext cx="8529278" cy="857250"/>
           </a:xfrm>
@@ -4406,7 +5007,7 @@
 </p:sld>
 </file>
 
-<file path=ppt/slides/slide17.xml><?xml version="1.0" encoding="utf-8"?>
+<file path=ppt/slides/slide21.xml><?xml version="1.0" encoding="utf-8"?>
 <p:sld xmlns:a="http://schemas.openxmlformats.org/drawingml/2006/main" xmlns:r="http://schemas.openxmlformats.org/officeDocument/2006/relationships" xmlns:p="http://schemas.openxmlformats.org/presentationml/2006/main">
   <p:cSld>
     <p:spTree>
@@ -4543,584 +5144,6 @@
 </p:sld>
 </file>
 
-<file path=ppt/slides/slide18.xml><?xml version="1.0" encoding="utf-8"?>
-<p:sld xmlns:a="http://schemas.openxmlformats.org/drawingml/2006/main" xmlns:r="http://schemas.openxmlformats.org/officeDocument/2006/relationships" xmlns:p="http://schemas.openxmlformats.org/presentationml/2006/main">
-  <p:cSld>
-    <p:spTree>
-      <p:nvGrpSpPr>
-        <p:cNvPr id="1" name=""/>
-        <p:cNvGrpSpPr/>
-        <p:nvPr/>
-      </p:nvGrpSpPr>
-      <p:grpSpPr>
-        <a:xfrm>
-          <a:off x="0" y="0"/>
-          <a:ext cx="0" cy="0"/>
-          <a:chOff x="0" y="0"/>
-          <a:chExt cx="0" cy="0"/>
-        </a:xfrm>
-      </p:grpSpPr>
-      <p:sp>
-        <p:nvSpPr>
-          <p:cNvPr id="2" name="Title 1"/>
-          <p:cNvSpPr>
-            <a:spLocks noGrp="1"/>
-          </p:cNvSpPr>
-          <p:nvPr>
-            <p:ph type="title"/>
-          </p:nvPr>
-        </p:nvSpPr>
-        <p:spPr>
-          <a:xfrm>
-            <a:off x="315045" y="205979"/>
-            <a:ext cx="8529278" cy="857250"/>
-          </a:xfrm>
-        </p:spPr>
-        <p:txBody>
-          <a:bodyPr/>
-          <a:lstStyle/>
-          <a:p>
-            <a:pPr lvl="0" indent="0" marL="0">
-              <a:buNone/>
-            </a:pPr>
-            <a:r>
-              <a:rPr/>
-              <a:t>Open Ivor Lewis</a:t>
-            </a:r>
-          </a:p>
-        </p:txBody>
-      </p:sp>
-      <p:sp>
-        <p:nvSpPr>
-          <p:cNvPr id="3" name="Content Placeholder 2"/>
-          <p:cNvSpPr>
-            <a:spLocks noGrp="1"/>
-          </p:cNvSpPr>
-          <p:nvPr>
-            <p:ph idx="1" sz="half"/>
-          </p:nvPr>
-        </p:nvSpPr>
-        <p:spPr/>
-        <p:txBody>
-          <a:bodyPr/>
-          <a:lstStyle/>
-          <a:p>
-            <a:pPr lvl="0" indent="0" marL="0">
-              <a:buNone/>
-            </a:pPr>
-            <a:r>
-              <a:rPr/>
-              <a:t>Mininally-invasive approach feasible in 95% of cases</a:t>
-            </a:r>
-          </a:p>
-          <a:p>
-            <a:pPr lvl="0" indent="0" marL="0">
-              <a:buNone/>
-            </a:pPr>
-            <a:r>
-              <a:rPr/>
-              <a:t>In some cases, an open approach is still necessary.</a:t>
-            </a:r>
-          </a:p>
-        </p:txBody>
-      </p:sp>
-      <p:pic>
-        <p:nvPicPr>
-          <p:cNvPr descr="images/IvorLewisArtboard.png" id="0" name="Picture 1"/>
-          <p:cNvPicPr>
-            <a:picLocks noGrp="1" noChangeAspect="1"/>
-          </p:cNvPicPr>
-          <p:nvPr/>
-        </p:nvPicPr>
-        <p:blipFill>
-          <a:blip r:embed="rId2"/>
-          <a:stretch>
-            <a:fillRect/>
-          </a:stretch>
-        </p:blipFill>
-        <p:spPr bwMode="auto">
-          <a:xfrm>
-            <a:off x="4914900" y="1193800"/>
-            <a:ext cx="3632200" cy="3733800"/>
-          </a:xfrm>
-          <a:prstGeom prst="rect">
-            <a:avLst/>
-          </a:prstGeom>
-          <a:noFill/>
-          <a:ln w="9525">
-            <a:noFill/>
-            <a:headEnd/>
-            <a:tailEnd/>
-          </a:ln>
-        </p:spPr>
-      </p:pic>
-    </p:spTree>
-  </p:cSld>
-</p:sld>
-</file>
-
-<file path=ppt/slides/slide19.xml><?xml version="1.0" encoding="utf-8"?>
-<p:sld xmlns:a="http://schemas.openxmlformats.org/drawingml/2006/main" xmlns:r="http://schemas.openxmlformats.org/officeDocument/2006/relationships" xmlns:p="http://schemas.openxmlformats.org/presentationml/2006/main">
-  <p:cSld>
-    <p:spTree>
-      <p:nvGrpSpPr>
-        <p:cNvPr id="1" name=""/>
-        <p:cNvGrpSpPr/>
-        <p:nvPr/>
-      </p:nvGrpSpPr>
-      <p:grpSpPr>
-        <a:xfrm>
-          <a:off x="0" y="0"/>
-          <a:ext cx="0" cy="0"/>
-          <a:chOff x="0" y="0"/>
-          <a:chExt cx="0" cy="0"/>
-        </a:xfrm>
-      </p:grpSpPr>
-      <p:sp>
-        <p:nvSpPr>
-          <p:cNvPr id="2" name="Title 1"/>
-          <p:cNvSpPr>
-            <a:spLocks noGrp="1"/>
-          </p:cNvSpPr>
-          <p:nvPr>
-            <p:ph type="title"/>
-          </p:nvPr>
-        </p:nvSpPr>
-        <p:spPr>
-          <a:xfrm>
-            <a:off x="315045" y="205979"/>
-            <a:ext cx="8529278" cy="857250"/>
-          </a:xfrm>
-        </p:spPr>
-        <p:txBody>
-          <a:bodyPr/>
-          <a:lstStyle/>
-          <a:p>
-            <a:pPr lvl="0" indent="0" marL="0">
-              <a:buNone/>
-            </a:pPr>
-            <a:r>
-              <a:rPr/>
-              <a:t>Total Esophagectomy</a:t>
-            </a:r>
-          </a:p>
-        </p:txBody>
-      </p:sp>
-      <p:sp>
-        <p:nvSpPr>
-          <p:cNvPr id="3" name="Content Placeholder 2"/>
-          <p:cNvSpPr>
-            <a:spLocks noGrp="1"/>
-          </p:cNvSpPr>
-          <p:nvPr>
-            <p:ph idx="1" sz="half"/>
-          </p:nvPr>
-        </p:nvSpPr>
-        <p:spPr/>
-        <p:txBody>
-          <a:bodyPr/>
-          <a:lstStyle/>
-          <a:p>
-            <a:pPr lvl="0" indent="0" marL="0">
-              <a:buNone/>
-            </a:pPr>
-            <a:r>
-              <a:rPr/>
-              <a:t>For patients with tumors in the upper esophagus, we need to remove more of the esophagus</a:t>
-            </a:r>
-          </a:p>
-          <a:p>
-            <a:pPr lvl="0" indent="0" marL="0">
-              <a:buNone/>
-            </a:pPr>
-            <a:r>
-              <a:rPr/>
-              <a:t>We need to remove the whole esophagus, including the portion in the neck</a:t>
-            </a:r>
-          </a:p>
-        </p:txBody>
-      </p:sp>
-      <p:pic>
-        <p:nvPicPr>
-          <p:cNvPr descr="images/Eso_ProxTumorArtboard.png" id="0" name="Picture 1"/>
-          <p:cNvPicPr>
-            <a:picLocks noGrp="1" noChangeAspect="1"/>
-          </p:cNvPicPr>
-          <p:nvPr/>
-        </p:nvPicPr>
-        <p:blipFill>
-          <a:blip r:embed="rId2"/>
-          <a:stretch>
-            <a:fillRect/>
-          </a:stretch>
-        </p:blipFill>
-        <p:spPr bwMode="auto">
-          <a:xfrm>
-            <a:off x="4914900" y="1193800"/>
-            <a:ext cx="3632200" cy="3733800"/>
-          </a:xfrm>
-          <a:prstGeom prst="rect">
-            <a:avLst/>
-          </a:prstGeom>
-          <a:noFill/>
-          <a:ln w="9525">
-            <a:noFill/>
-            <a:headEnd/>
-            <a:tailEnd/>
-          </a:ln>
-        </p:spPr>
-      </p:pic>
-    </p:spTree>
-  </p:cSld>
-</p:sld>
-</file>
-
-<file path=ppt/slides/slide2.xml><?xml version="1.0" encoding="utf-8"?>
-<p:sld xmlns:a="http://schemas.openxmlformats.org/drawingml/2006/main" xmlns:r="http://schemas.openxmlformats.org/officeDocument/2006/relationships" xmlns:p="http://schemas.openxmlformats.org/presentationml/2006/main">
-  <p:cSld>
-    <p:spTree>
-      <p:nvGrpSpPr>
-        <p:cNvPr id="1" name=""/>
-        <p:cNvGrpSpPr/>
-        <p:nvPr/>
-      </p:nvGrpSpPr>
-      <p:grpSpPr>
-        <a:xfrm>
-          <a:off x="0" y="0"/>
-          <a:ext cx="0" cy="0"/>
-          <a:chOff x="0" y="0"/>
-          <a:chExt cx="0" cy="0"/>
-        </a:xfrm>
-      </p:grpSpPr>
-      <p:sp>
-        <p:nvSpPr>
-          <p:cNvPr id="2" name="Title 1"/>
-          <p:cNvSpPr>
-            <a:spLocks noGrp="1"/>
-          </p:cNvSpPr>
-          <p:nvPr>
-            <p:ph type="title"/>
-          </p:nvPr>
-        </p:nvSpPr>
-        <p:spPr>
-          <a:xfrm>
-            <a:off x="284309" y="205979"/>
-            <a:ext cx="8552330" cy="662317"/>
-          </a:xfrm>
-        </p:spPr>
-        <p:txBody>
-          <a:bodyPr/>
-          <a:lstStyle/>
-          <a:p>
-            <a:pPr lvl="0" indent="0" marL="0">
-              <a:buNone/>
-            </a:pPr>
-            <a:r>
-              <a:rPr/>
-              <a:t>Team Members - Physicians</a:t>
-            </a:r>
-          </a:p>
-        </p:txBody>
-      </p:sp>
-      <p:sp>
-        <p:nvSpPr>
-          <p:cNvPr id="3" name="Content Placeholder 2"/>
-          <p:cNvSpPr>
-            <a:spLocks noGrp="1"/>
-          </p:cNvSpPr>
-          <p:nvPr>
-            <p:ph idx="1"/>
-          </p:nvPr>
-        </p:nvSpPr>
-        <p:spPr/>
-        <p:txBody>
-          <a:bodyPr/>
-          <a:lstStyle/>
-          <a:p>
-            <a:pPr lvl="0" indent="0" marL="0">
-              <a:buNone/>
-            </a:pPr>
-            <a:r>
-              <a:rPr/>
-              <a:t>Primary Care Provider</a:t>
-            </a:r>
-          </a:p>
-          <a:p>
-            <a:pPr lvl="0" indent="0" marL="0">
-              <a:buNone/>
-            </a:pPr>
-            <a:r>
-              <a:rPr/>
-              <a:t>Gastroenterologist</a:t>
-            </a:r>
-          </a:p>
-          <a:p>
-            <a:pPr lvl="0" indent="0" marL="0">
-              <a:buNone/>
-            </a:pPr>
-            <a:r>
-              <a:rPr/>
-              <a:t>Medical Oncologist (chemotherapy)</a:t>
-            </a:r>
-          </a:p>
-          <a:p>
-            <a:pPr lvl="0" indent="0" marL="0">
-              <a:buNone/>
-            </a:pPr>
-            <a:r>
-              <a:rPr/>
-              <a:t>Radiation Oncologist (radiation)</a:t>
-            </a:r>
-          </a:p>
-          <a:p>
-            <a:pPr lvl="0" indent="0" marL="0">
-              <a:buNone/>
-            </a:pPr>
-            <a:r>
-              <a:rPr/>
-              <a:t>Surgeons</a:t>
-            </a:r>
-          </a:p>
-          <a:p>
-            <a:pPr lvl="0"/>
-            <a:r>
-              <a:rPr/>
-              <a:t>Jonathan Salo MD</a:t>
-            </a:r>
-          </a:p>
-          <a:p>
-            <a:pPr lvl="0"/>
-            <a:r>
-              <a:rPr/>
-              <a:t>Kelli Salter MD</a:t>
-            </a:r>
-          </a:p>
-          <a:p>
-            <a:pPr lvl="0"/>
-            <a:r>
-              <a:rPr/>
-              <a:t>Michael Roach MD</a:t>
-            </a:r>
-          </a:p>
-        </p:txBody>
-      </p:sp>
-    </p:spTree>
-  </p:cSld>
-</p:sld>
-</file>
-
-<file path=ppt/slides/slide20.xml><?xml version="1.0" encoding="utf-8"?>
-<p:sld xmlns:a="http://schemas.openxmlformats.org/drawingml/2006/main" xmlns:r="http://schemas.openxmlformats.org/officeDocument/2006/relationships" xmlns:p="http://schemas.openxmlformats.org/presentationml/2006/main">
-  <p:cSld>
-    <p:spTree>
-      <p:nvGrpSpPr>
-        <p:cNvPr id="1" name=""/>
-        <p:cNvGrpSpPr/>
-        <p:nvPr/>
-      </p:nvGrpSpPr>
-      <p:grpSpPr>
-        <a:xfrm>
-          <a:off x="0" y="0"/>
-          <a:ext cx="0" cy="0"/>
-          <a:chOff x="0" y="0"/>
-          <a:chExt cx="0" cy="0"/>
-        </a:xfrm>
-      </p:grpSpPr>
-      <p:sp>
-        <p:nvSpPr>
-          <p:cNvPr id="2" name="Title 1"/>
-          <p:cNvSpPr>
-            <a:spLocks noGrp="1"/>
-          </p:cNvSpPr>
-          <p:nvPr>
-            <p:ph type="title"/>
-          </p:nvPr>
-        </p:nvSpPr>
-        <p:spPr>
-          <a:xfrm>
-            <a:off x="315045" y="205979"/>
-            <a:ext cx="8529278" cy="857250"/>
-          </a:xfrm>
-        </p:spPr>
-        <p:txBody>
-          <a:bodyPr/>
-          <a:lstStyle/>
-          <a:p>
-            <a:pPr lvl="0" indent="0" marL="0">
-              <a:buNone/>
-            </a:pPr>
-            <a:r>
-              <a:rPr/>
-              <a:t>McKeown Esophagectomy</a:t>
-            </a:r>
-          </a:p>
-        </p:txBody>
-      </p:sp>
-      <p:pic>
-        <p:nvPicPr>
-          <p:cNvPr descr="images/Eso_ResectionTotalArtboard.png" id="0" name="Picture 1"/>
-          <p:cNvPicPr>
-            <a:picLocks noGrp="1" noChangeAspect="1"/>
-          </p:cNvPicPr>
-          <p:nvPr/>
-        </p:nvPicPr>
-        <p:blipFill>
-          <a:blip r:embed="rId2"/>
-          <a:stretch>
-            <a:fillRect/>
-          </a:stretch>
-        </p:blipFill>
-        <p:spPr bwMode="auto">
-          <a:xfrm>
-            <a:off x="571500" y="1193800"/>
-            <a:ext cx="3632200" cy="3733800"/>
-          </a:xfrm>
-          <a:prstGeom prst="rect">
-            <a:avLst/>
-          </a:prstGeom>
-          <a:noFill/>
-          <a:ln w="9525">
-            <a:noFill/>
-            <a:headEnd/>
-            <a:tailEnd/>
-          </a:ln>
-        </p:spPr>
-      </p:pic>
-      <p:pic>
-        <p:nvPicPr>
-          <p:cNvPr descr="images/Eso_MIE_McKeownArtboard.png" id="0" name="Picture 1"/>
-          <p:cNvPicPr>
-            <a:picLocks noGrp="1" noChangeAspect="1"/>
-          </p:cNvPicPr>
-          <p:nvPr/>
-        </p:nvPicPr>
-        <p:blipFill>
-          <a:blip r:embed="rId3"/>
-          <a:stretch>
-            <a:fillRect/>
-          </a:stretch>
-        </p:blipFill>
-        <p:spPr bwMode="auto">
-          <a:xfrm>
-            <a:off x="4914900" y="1193800"/>
-            <a:ext cx="3632200" cy="3733800"/>
-          </a:xfrm>
-          <a:prstGeom prst="rect">
-            <a:avLst/>
-          </a:prstGeom>
-          <a:noFill/>
-          <a:ln w="9525">
-            <a:noFill/>
-            <a:headEnd/>
-            <a:tailEnd/>
-          </a:ln>
-        </p:spPr>
-      </p:pic>
-    </p:spTree>
-  </p:cSld>
-</p:sld>
-</file>
-
-<file path=ppt/slides/slide21.xml><?xml version="1.0" encoding="utf-8"?>
-<p:sld xmlns:a="http://schemas.openxmlformats.org/drawingml/2006/main" xmlns:r="http://schemas.openxmlformats.org/officeDocument/2006/relationships" xmlns:p="http://schemas.openxmlformats.org/presentationml/2006/main">
-  <p:cSld>
-    <p:spTree>
-      <p:nvGrpSpPr>
-        <p:cNvPr id="1" name=""/>
-        <p:cNvGrpSpPr/>
-        <p:nvPr/>
-      </p:nvGrpSpPr>
-      <p:grpSpPr>
-        <a:xfrm>
-          <a:off x="0" y="0"/>
-          <a:ext cx="0" cy="0"/>
-          <a:chOff x="0" y="0"/>
-          <a:chExt cx="0" cy="0"/>
-        </a:xfrm>
-      </p:grpSpPr>
-      <p:sp>
-        <p:nvSpPr>
-          <p:cNvPr id="2" name="Title 1"/>
-          <p:cNvSpPr>
-            <a:spLocks noGrp="1"/>
-          </p:cNvSpPr>
-          <p:nvPr>
-            <p:ph type="title"/>
-          </p:nvPr>
-        </p:nvSpPr>
-        <p:spPr>
-          <a:xfrm>
-            <a:off x="284309" y="205979"/>
-            <a:ext cx="8552330" cy="662317"/>
-          </a:xfrm>
-        </p:spPr>
-        <p:txBody>
-          <a:bodyPr/>
-          <a:lstStyle/>
-          <a:p>
-            <a:pPr lvl="0" indent="0" marL="0">
-              <a:buNone/>
-            </a:pPr>
-            <a:r>
-              <a:rPr/>
-              <a:t>Risks of Esophagectomy</a:t>
-            </a:r>
-          </a:p>
-        </p:txBody>
-      </p:sp>
-      <p:sp>
-        <p:nvSpPr>
-          <p:cNvPr id="3" name="Content Placeholder 2"/>
-          <p:cNvSpPr>
-            <a:spLocks noGrp="1"/>
-          </p:cNvSpPr>
-          <p:nvPr>
-            <p:ph idx="1"/>
-          </p:nvPr>
-        </p:nvSpPr>
-        <p:spPr/>
-        <p:txBody>
-          <a:bodyPr/>
-          <a:lstStyle/>
-          <a:p>
-            <a:pPr lvl="0" indent="0" marL="0">
-              <a:buNone/>
-            </a:pPr>
-            <a:r>
-              <a:rPr/>
-              <a:t>Esophagectomy is a complex operation, with a real risk of complications.</a:t>
-            </a:r>
-          </a:p>
-          <a:p>
-            <a:pPr lvl="0" indent="0" marL="0">
-              <a:buNone/>
-            </a:pPr>
-            <a:r>
-              <a:rPr/>
-              <a:t>Two significant complications:</a:t>
-            </a:r>
-          </a:p>
-          <a:p>
-            <a:pPr lvl="0"/>
-            <a:r>
-              <a:rPr/>
-              <a:t>Anastomotic leak</a:t>
-            </a:r>
-          </a:p>
-          <a:p>
-            <a:pPr lvl="0"/>
-            <a:r>
-              <a:rPr/>
-              <a:t>Pneumonia</a:t>
-            </a:r>
-          </a:p>
-        </p:txBody>
-      </p:sp>
-    </p:spTree>
-  </p:cSld>
-</p:sld>
-</file>
-
 <file path=ppt/slides/slide22.xml><?xml version="1.0" encoding="utf-8"?>
 <p:sld xmlns:a="http://schemas.openxmlformats.org/drawingml/2006/main" xmlns:r="http://schemas.openxmlformats.org/officeDocument/2006/relationships" xmlns:p="http://schemas.openxmlformats.org/presentationml/2006/main">
   <p:cSld>
@@ -5163,7 +5186,7 @@
             </a:pPr>
             <a:r>
               <a:rPr/>
-              <a:t>Anastomotic Leak</a:t>
+              <a:t>Open Ivor Lewis</a:t>
             </a:r>
           </a:p>
         </p:txBody>
@@ -5188,14 +5211,23 @@
             </a:pPr>
             <a:r>
               <a:rPr/>
-              <a:t>The anastomosis is surgical connection between the esophagus and the stomach.</a:t>
+              <a:t>Mininally-invasive approach feasible in 98% of cases</a:t>
+            </a:r>
+          </a:p>
+          <a:p>
+            <a:pPr lvl="0" indent="0" marL="0">
+              <a:buNone/>
+            </a:pPr>
+            <a:r>
+              <a:rPr/>
+              <a:t>In some cases, an open approach is still necessary (2%)</a:t>
             </a:r>
           </a:p>
         </p:txBody>
       </p:sp>
       <p:pic>
         <p:nvPicPr>
-          <p:cNvPr descr="images/Eso_IvorLewis_Anastomosis.png" id="0" name="Picture 1"/>
+          <p:cNvPr descr="images/IvorLewisArtboard.png" id="0" name="Picture 1"/>
           <p:cNvPicPr>
             <a:picLocks noGrp="1" noChangeAspect="1"/>
           </p:cNvPicPr>
@@ -5270,7 +5302,7 @@
             </a:pPr>
             <a:r>
               <a:rPr/>
-              <a:t>Anastomotic Leak</a:t>
+              <a:t>Total Esophagectomy</a:t>
             </a:r>
           </a:p>
         </p:txBody>
@@ -5295,35 +5327,23 @@
             </a:pPr>
             <a:r>
               <a:rPr/>
-              <a:t>If healing doesn’t occur:</a:t>
-            </a:r>
-          </a:p>
-          <a:p>
-            <a:pPr lvl="0"/>
-            <a:r>
-              <a:rPr/>
-              <a:t>Leakage of fluid from the esophagus</a:t>
-            </a:r>
-          </a:p>
-          <a:p>
-            <a:pPr lvl="0"/>
-            <a:r>
-              <a:rPr/>
-              <a:t>Infection in the space between the lungs</a:t>
-            </a:r>
-          </a:p>
-          <a:p>
-            <a:pPr lvl="0"/>
-            <a:r>
-              <a:rPr/>
-              <a:t>Requires additional time in the hospital</a:t>
+              <a:t>For patients with tumors in the upper esophagus, we need to remove more of the esophagus</a:t>
+            </a:r>
+          </a:p>
+          <a:p>
+            <a:pPr lvl="0" indent="0" marL="0">
+              <a:buNone/>
+            </a:pPr>
+            <a:r>
+              <a:rPr/>
+              <a:t>We need to remove the whole esophagus, including the portion in the neck</a:t>
             </a:r>
           </a:p>
         </p:txBody>
       </p:sp>
       <p:pic>
         <p:nvPicPr>
-          <p:cNvPr descr="images/Eso_IvorLewis_Leak.png" id="0" name="Picture 1"/>
+          <p:cNvPr descr="images/Eso_ProxTumorArtboard.png" id="0" name="Picture 1"/>
           <p:cNvPicPr>
             <a:picLocks noGrp="1" noChangeAspect="1"/>
           </p:cNvPicPr>
@@ -5398,60 +5418,14 @@
             </a:pPr>
             <a:r>
               <a:rPr/>
-              <a:t>Anastomotic Leak</a:t>
-            </a:r>
-          </a:p>
-        </p:txBody>
-      </p:sp>
-      <p:sp>
-        <p:nvSpPr>
-          <p:cNvPr id="3" name="Content Placeholder 2"/>
-          <p:cNvSpPr>
-            <a:spLocks noGrp="1"/>
-          </p:cNvSpPr>
-          <p:nvPr>
-            <p:ph idx="1" sz="half"/>
-          </p:nvPr>
-        </p:nvSpPr>
-        <p:spPr/>
-        <p:txBody>
-          <a:bodyPr/>
-          <a:lstStyle/>
-          <a:p>
-            <a:pPr lvl="0" indent="0" marL="0">
-              <a:buNone/>
-            </a:pPr>
-            <a:r>
-              <a:rPr/>
-              <a:t>If leak occurs:</a:t>
-            </a:r>
-          </a:p>
-          <a:p>
-            <a:pPr lvl="0"/>
-            <a:r>
-              <a:rPr/>
-              <a:t>Some leaks will seal</a:t>
-            </a:r>
-          </a:p>
-          <a:p>
-            <a:pPr lvl="0"/>
-            <a:r>
-              <a:rPr/>
-              <a:t>Stent may be required to help healing</a:t>
-            </a:r>
-          </a:p>
-          <a:p>
-            <a:pPr lvl="0"/>
-            <a:r>
-              <a:rPr/>
-              <a:t>Occasionally additional surgey is required</a:t>
+              <a:t>McKeown Esophagectomy</a:t>
             </a:r>
           </a:p>
         </p:txBody>
       </p:sp>
       <p:pic>
         <p:nvPicPr>
-          <p:cNvPr descr="images/Eso_IvorLewis_Leak.png" id="0" name="Picture 1"/>
+          <p:cNvPr descr="images/Eso_ResectionTotalArtboard.png" id="0" name="Picture 1"/>
           <p:cNvPicPr>
             <a:picLocks noGrp="1" noChangeAspect="1"/>
           </p:cNvPicPr>
@@ -5459,6 +5433,36 @@
         </p:nvPicPr>
         <p:blipFill>
           <a:blip r:embed="rId2"/>
+          <a:stretch>
+            <a:fillRect/>
+          </a:stretch>
+        </p:blipFill>
+        <p:spPr bwMode="auto">
+          <a:xfrm>
+            <a:off x="571500" y="1193800"/>
+            <a:ext cx="3632200" cy="3733800"/>
+          </a:xfrm>
+          <a:prstGeom prst="rect">
+            <a:avLst/>
+          </a:prstGeom>
+          <a:noFill/>
+          <a:ln w="9525">
+            <a:noFill/>
+            <a:headEnd/>
+            <a:tailEnd/>
+          </a:ln>
+        </p:spPr>
+      </p:pic>
+      <p:pic>
+        <p:nvPicPr>
+          <p:cNvPr descr="images/Eso_MIE_McKeownArtboard.png" id="0" name="Picture 1"/>
+          <p:cNvPicPr>
+            <a:picLocks noGrp="1" noChangeAspect="1"/>
+          </p:cNvPicPr>
+          <p:nvPr/>
+        </p:nvPicPr>
+        <p:blipFill>
+          <a:blip r:embed="rId3"/>
           <a:stretch>
             <a:fillRect/>
           </a:stretch>
@@ -5513,20 +5517,20 @@
         </p:nvSpPr>
         <p:spPr>
           <a:xfrm>
-            <a:off x="315045" y="205979"/>
-            <a:ext cx="8529278" cy="857250"/>
-          </a:xfrm>
-        </p:spPr>
-        <p:txBody>
-          <a:bodyPr/>
-          <a:lstStyle/>
-          <a:p>
-            <a:pPr lvl="0" indent="0" marL="0">
-              <a:buNone/>
-            </a:pPr>
-            <a:r>
-              <a:rPr/>
-              <a:t>Anastomotic Leak</a:t>
+            <a:off x="284309" y="205979"/>
+            <a:ext cx="8552330" cy="662317"/>
+          </a:xfrm>
+        </p:spPr>
+        <p:txBody>
+          <a:bodyPr/>
+          <a:lstStyle/>
+          <a:p>
+            <a:pPr lvl="0" indent="0" marL="0">
+              <a:buNone/>
+            </a:pPr>
+            <a:r>
+              <a:rPr/>
+              <a:t>Risks of Esophagectomy</a:t>
             </a:r>
           </a:p>
         </p:txBody>
@@ -5538,7 +5542,7 @@
             <a:spLocks noGrp="1"/>
           </p:cNvSpPr>
           <p:nvPr>
-            <p:ph idx="1" sz="half"/>
+            <p:ph idx="1"/>
           </p:nvPr>
         </p:nvSpPr>
         <p:spPr/>
@@ -5551,62 +5555,34 @@
             </a:pPr>
             <a:r>
               <a:rPr/>
-              <a:t>Risk of leak depends on:</a:t>
-            </a:r>
-          </a:p>
-          <a:p>
-            <a:pPr lvl="0"/>
-            <a:r>
-              <a:rPr/>
-              <a:t>Type of operation performed</a:t>
-            </a:r>
-          </a:p>
-          <a:p>
-            <a:pPr lvl="0"/>
-            <a:r>
-              <a:rPr/>
-              <a:t>Nutritional status of patient</a:t>
-            </a:r>
-          </a:p>
-          <a:p>
-            <a:pPr lvl="0"/>
-            <a:r>
-              <a:rPr/>
-              <a:t>Experience of the surgeon</a:t>
-            </a:r>
-          </a:p>
-        </p:txBody>
-      </p:sp>
-      <p:pic>
-        <p:nvPicPr>
-          <p:cNvPr descr="images/Eso_IvorLewis_Leak.png" id="0" name="Picture 1"/>
-          <p:cNvPicPr>
-            <a:picLocks noGrp="1" noChangeAspect="1"/>
-          </p:cNvPicPr>
-          <p:nvPr/>
-        </p:nvPicPr>
-        <p:blipFill>
-          <a:blip r:embed="rId2"/>
-          <a:stretch>
-            <a:fillRect/>
-          </a:stretch>
-        </p:blipFill>
-        <p:spPr bwMode="auto">
-          <a:xfrm>
-            <a:off x="4914900" y="1193800"/>
-            <a:ext cx="3632200" cy="3733800"/>
-          </a:xfrm>
-          <a:prstGeom prst="rect">
-            <a:avLst/>
-          </a:prstGeom>
-          <a:noFill/>
-          <a:ln w="9525">
-            <a:noFill/>
-            <a:headEnd/>
-            <a:tailEnd/>
-          </a:ln>
-        </p:spPr>
-      </p:pic>
+              <a:t>Esophagectomy is a complex operation, with a real risk of complications.</a:t>
+            </a:r>
+          </a:p>
+          <a:p>
+            <a:pPr lvl="0" indent="0" marL="0">
+              <a:buNone/>
+            </a:pPr>
+            <a:r>
+              <a:rPr/>
+              <a:t>Two significant complications:</a:t>
+            </a:r>
+          </a:p>
+          <a:p>
+            <a:pPr lvl="0"/>
+            <a:r>
+              <a:rPr/>
+              <a:t>Anastomotic leak</a:t>
+            </a:r>
+          </a:p>
+          <a:p>
+            <a:pPr lvl="0"/>
+            <a:r>
+              <a:rPr/>
+              <a:t>Pneumonia</a:t>
+            </a:r>
+          </a:p>
+        </p:txBody>
+      </p:sp>
     </p:spTree>
   </p:cSld>
 </p:sld>
@@ -5654,7 +5630,7 @@
             </a:pPr>
             <a:r>
               <a:rPr/>
-              <a:t>Pneumonia</a:t>
+              <a:t>Anastomotic Leak</a:t>
             </a:r>
           </a:p>
         </p:txBody>
@@ -5674,31 +5650,19 @@
           <a:bodyPr/>
           <a:lstStyle/>
           <a:p>
-            <a:pPr lvl="0"/>
-            <a:r>
-              <a:rPr/>
-              <a:t>Occurs in 10-15% of patients after esophagectomy.</a:t>
-            </a:r>
-          </a:p>
-          <a:p>
-            <a:pPr lvl="0"/>
-            <a:r>
-              <a:rPr/>
-              <a:t>Requires treatment with antibiotics</a:t>
-            </a:r>
-          </a:p>
-          <a:p>
-            <a:pPr lvl="0"/>
-            <a:r>
-              <a:rPr/>
-              <a:t>Requires a longer hospitalization.</a:t>
+            <a:pPr lvl="0" indent="0" marL="0">
+              <a:buNone/>
+            </a:pPr>
+            <a:r>
+              <a:rPr/>
+              <a:t>The anastomosis is surgical connection between the esophagus and the stomach.</a:t>
             </a:r>
           </a:p>
         </p:txBody>
       </p:sp>
       <p:pic>
         <p:nvPicPr>
-          <p:cNvPr descr="images/Eso_LungsArtboard.png" id="0" name="Picture 1"/>
+          <p:cNvPr descr="images/Eso_IvorLewis_Anastomosis.png" id="0" name="Picture 1"/>
           <p:cNvPicPr>
             <a:picLocks noGrp="1" noChangeAspect="1"/>
           </p:cNvPicPr>
@@ -5760,20 +5724,20 @@
         </p:nvSpPr>
         <p:spPr>
           <a:xfrm>
-            <a:off x="284309" y="205979"/>
-            <a:ext cx="8552330" cy="662317"/>
-          </a:xfrm>
-        </p:spPr>
-        <p:txBody>
-          <a:bodyPr/>
-          <a:lstStyle/>
-          <a:p>
-            <a:pPr lvl="0" indent="0" marL="0">
-              <a:buNone/>
-            </a:pPr>
-            <a:r>
-              <a:rPr/>
-              <a:t>Preventing Pneumonia</a:t>
+            <a:off x="315045" y="205979"/>
+            <a:ext cx="8529278" cy="857250"/>
+          </a:xfrm>
+        </p:spPr>
+        <p:txBody>
+          <a:bodyPr/>
+          <a:lstStyle/>
+          <a:p>
+            <a:pPr lvl="0" indent="0" marL="0">
+              <a:buNone/>
+            </a:pPr>
+            <a:r>
+              <a:rPr/>
+              <a:t>Anastomotic Leak</a:t>
             </a:r>
           </a:p>
         </p:txBody>
@@ -5785,7 +5749,7 @@
             <a:spLocks noGrp="1"/>
           </p:cNvSpPr>
           <p:nvPr>
-            <p:ph idx="1"/>
+            <p:ph idx="1" sz="half"/>
           </p:nvPr>
         </p:nvSpPr>
         <p:spPr/>
@@ -5798,55 +5762,62 @@
             </a:pPr>
             <a:r>
               <a:rPr/>
-              <a:t>Several ways to help prevent pneumonia:</a:t>
-            </a:r>
-          </a:p>
-          <a:p>
-            <a:pPr lvl="0"/>
-            <a:r>
-              <a:rPr/>
-              <a:t>Deep breathing</a:t>
-            </a:r>
-          </a:p>
-          <a:p>
-            <a:pPr lvl="0"/>
-            <a:r>
-              <a:rPr/>
-              <a:t>Coughing</a:t>
-            </a:r>
-          </a:p>
-          <a:p>
-            <a:pPr lvl="0"/>
-            <a:r>
-              <a:rPr/>
-              <a:t>Walking</a:t>
-            </a:r>
-          </a:p>
-          <a:p>
-            <a:pPr lvl="0" indent="0" marL="0">
-              <a:buNone/>
-            </a:pPr>
-            <a:r>
-              <a:rPr/>
-              <a:t>After surgery, this means:</a:t>
-            </a:r>
-          </a:p>
-          <a:p>
-            <a:pPr lvl="0"/>
-            <a:r>
-              <a:rPr/>
-              <a:t>Sitting in a chair most of the day</a:t>
-            </a:r>
-          </a:p>
-          <a:p>
-            <a:pPr lvl="0"/>
-            <a:r>
-              <a:rPr/>
-              <a:t>Walking in the halls as soon as possible</a:t>
-            </a:r>
-          </a:p>
-        </p:txBody>
-      </p:sp>
+              <a:t>If healing doesn’t occur:</a:t>
+            </a:r>
+          </a:p>
+          <a:p>
+            <a:pPr lvl="0"/>
+            <a:r>
+              <a:rPr/>
+              <a:t>Leakage of fluid from the esophagus</a:t>
+            </a:r>
+          </a:p>
+          <a:p>
+            <a:pPr lvl="0"/>
+            <a:r>
+              <a:rPr/>
+              <a:t>Infection in the space between the lungs</a:t>
+            </a:r>
+          </a:p>
+          <a:p>
+            <a:pPr lvl="0"/>
+            <a:r>
+              <a:rPr/>
+              <a:t>Requires additional time in the hospital</a:t>
+            </a:r>
+          </a:p>
+        </p:txBody>
+      </p:sp>
+      <p:pic>
+        <p:nvPicPr>
+          <p:cNvPr descr="images/Eso_IvorLewis_Leak.png" id="0" name="Picture 1"/>
+          <p:cNvPicPr>
+            <a:picLocks noGrp="1" noChangeAspect="1"/>
+          </p:cNvPicPr>
+          <p:nvPr/>
+        </p:nvPicPr>
+        <p:blipFill>
+          <a:blip r:embed="rId2"/>
+          <a:stretch>
+            <a:fillRect/>
+          </a:stretch>
+        </p:blipFill>
+        <p:spPr bwMode="auto">
+          <a:xfrm>
+            <a:off x="4914900" y="1193800"/>
+            <a:ext cx="3632200" cy="3733800"/>
+          </a:xfrm>
+          <a:prstGeom prst="rect">
+            <a:avLst/>
+          </a:prstGeom>
+          <a:noFill/>
+          <a:ln w="9525">
+            <a:noFill/>
+            <a:headEnd/>
+            <a:tailEnd/>
+          </a:ln>
+        </p:spPr>
+      </p:pic>
     </p:spTree>
   </p:cSld>
 </p:sld>
@@ -5894,14 +5865,60 @@
             </a:pPr>
             <a:r>
               <a:rPr/>
-              <a:t>Minimally-invasive Esophagectomy</a:t>
+              <a:t>Anastomotic Leak</a:t>
+            </a:r>
+          </a:p>
+        </p:txBody>
+      </p:sp>
+      <p:sp>
+        <p:nvSpPr>
+          <p:cNvPr id="3" name="Content Placeholder 2"/>
+          <p:cNvSpPr>
+            <a:spLocks noGrp="1"/>
+          </p:cNvSpPr>
+          <p:nvPr>
+            <p:ph idx="1" sz="half"/>
+          </p:nvPr>
+        </p:nvSpPr>
+        <p:spPr/>
+        <p:txBody>
+          <a:bodyPr/>
+          <a:lstStyle/>
+          <a:p>
+            <a:pPr lvl="0" indent="0" marL="0">
+              <a:buNone/>
+            </a:pPr>
+            <a:r>
+              <a:rPr/>
+              <a:t>If leak occurs:</a:t>
+            </a:r>
+          </a:p>
+          <a:p>
+            <a:pPr lvl="0"/>
+            <a:r>
+              <a:rPr/>
+              <a:t>Some leaks will seal</a:t>
+            </a:r>
+          </a:p>
+          <a:p>
+            <a:pPr lvl="0"/>
+            <a:r>
+              <a:rPr/>
+              <a:t>Stent may be required to help healing</a:t>
+            </a:r>
+          </a:p>
+          <a:p>
+            <a:pPr lvl="0"/>
+            <a:r>
+              <a:rPr/>
+              <a:t>Occasionally additional surgey is required</a:t>
             </a:r>
           </a:p>
         </p:txBody>
       </p:sp>
       <p:pic>
         <p:nvPicPr>
-          <p:cNvPr descr="images/mie_abd.png" id="0" name="Picture 1"/>
+          <p:cNvPr descr="images/Eso_IvorLewis_Leak.png" id="0" name="Picture 1"/>
           <p:cNvPicPr>
             <a:picLocks noGrp="1" noChangeAspect="1"/>
           </p:cNvPicPr>
@@ -5915,38 +5932,8 @@
         </p:blipFill>
         <p:spPr bwMode="auto">
           <a:xfrm>
-            <a:off x="304800" y="1498600"/>
-            <a:ext cx="4178300" cy="3136900"/>
-          </a:xfrm>
-          <a:prstGeom prst="rect">
-            <a:avLst/>
-          </a:prstGeom>
-          <a:noFill/>
-          <a:ln w="9525">
-            <a:noFill/>
-            <a:headEnd/>
-            <a:tailEnd/>
-          </a:ln>
-        </p:spPr>
-      </p:pic>
-      <p:pic>
-        <p:nvPicPr>
-          <p:cNvPr descr="images/mie_chest.png" id="0" name="Picture 1"/>
-          <p:cNvPicPr>
-            <a:picLocks noGrp="1" noChangeAspect="1"/>
-          </p:cNvPicPr>
-          <p:nvPr/>
-        </p:nvPicPr>
-        <p:blipFill>
-          <a:blip r:embed="rId3"/>
-          <a:stretch>
-            <a:fillRect/>
-          </a:stretch>
-        </p:blipFill>
-        <p:spPr bwMode="auto">
-          <a:xfrm>
-            <a:off x="4635500" y="1485900"/>
-            <a:ext cx="4191000" cy="3149600"/>
+            <a:off x="4914900" y="1193800"/>
+            <a:ext cx="3632200" cy="3733800"/>
           </a:xfrm>
           <a:prstGeom prst="rect">
             <a:avLst/>
@@ -5993,20 +5980,20 @@
         </p:nvSpPr>
         <p:spPr>
           <a:xfrm>
-            <a:off x="284309" y="205979"/>
-            <a:ext cx="8552330" cy="662317"/>
-          </a:xfrm>
-        </p:spPr>
-        <p:txBody>
-          <a:bodyPr/>
-          <a:lstStyle/>
-          <a:p>
-            <a:pPr lvl="0" indent="0" marL="0">
-              <a:buNone/>
-            </a:pPr>
-            <a:r>
-              <a:rPr/>
-              <a:t>Risks of Surgery</a:t>
+            <a:off x="315045" y="205979"/>
+            <a:ext cx="8529278" cy="857250"/>
+          </a:xfrm>
+        </p:spPr>
+        <p:txBody>
+          <a:bodyPr/>
+          <a:lstStyle/>
+          <a:p>
+            <a:pPr lvl="0" indent="0" marL="0">
+              <a:buNone/>
+            </a:pPr>
+            <a:r>
+              <a:rPr/>
+              <a:t>Anastomotic Leak</a:t>
             </a:r>
           </a:p>
         </p:txBody>
@@ -6018,7 +6005,7 @@
             <a:spLocks noGrp="1"/>
           </p:cNvSpPr>
           <p:nvPr>
-            <p:ph idx="1"/>
+            <p:ph idx="1" sz="half"/>
           </p:nvPr>
         </p:nvSpPr>
         <p:spPr/>
@@ -6031,46 +6018,62 @@
             </a:pPr>
             <a:r>
               <a:rPr/>
-              <a:t>Risks related to anesthesia</a:t>
-            </a:r>
-          </a:p>
-          <a:p>
-            <a:pPr lvl="0"/>
-            <a:r>
-              <a:rPr/>
-              <a:t>Heart attack (5%)</a:t>
-            </a:r>
-          </a:p>
-          <a:p>
-            <a:pPr lvl="0"/>
-            <a:r>
-              <a:rPr/>
-              <a:t>Irregular heart rhythm (15%)</a:t>
-            </a:r>
-          </a:p>
-          <a:p>
-            <a:pPr lvl="0"/>
-            <a:r>
-              <a:rPr/>
-              <a:t>Pneumonia (10%)</a:t>
-            </a:r>
-          </a:p>
-          <a:p>
-            <a:pPr lvl="0"/>
-            <a:r>
-              <a:rPr/>
-              <a:t>Blood clots in legs (&lt;5%)</a:t>
-            </a:r>
-          </a:p>
-          <a:p>
-            <a:pPr lvl="0"/>
-            <a:r>
-              <a:rPr/>
-              <a:t>Pulmonary embolism (2%)</a:t>
-            </a:r>
-          </a:p>
-        </p:txBody>
-      </p:sp>
+              <a:t>Risk of leak depends on:</a:t>
+            </a:r>
+          </a:p>
+          <a:p>
+            <a:pPr lvl="0"/>
+            <a:r>
+              <a:rPr/>
+              <a:t>Type of operation performed</a:t>
+            </a:r>
+          </a:p>
+          <a:p>
+            <a:pPr lvl="0"/>
+            <a:r>
+              <a:rPr/>
+              <a:t>Nutritional status of patient</a:t>
+            </a:r>
+          </a:p>
+          <a:p>
+            <a:pPr lvl="0"/>
+            <a:r>
+              <a:rPr/>
+              <a:t>Experience of the surgeon</a:t>
+            </a:r>
+          </a:p>
+        </p:txBody>
+      </p:sp>
+      <p:pic>
+        <p:nvPicPr>
+          <p:cNvPr descr="images/Eso_IvorLewis_Leak.png" id="0" name="Picture 1"/>
+          <p:cNvPicPr>
+            <a:picLocks noGrp="1" noChangeAspect="1"/>
+          </p:cNvPicPr>
+          <p:nvPr/>
+        </p:nvPicPr>
+        <p:blipFill>
+          <a:blip r:embed="rId2"/>
+          <a:stretch>
+            <a:fillRect/>
+          </a:stretch>
+        </p:blipFill>
+        <p:spPr bwMode="auto">
+          <a:xfrm>
+            <a:off x="4914900" y="1193800"/>
+            <a:ext cx="3632200" cy="3733800"/>
+          </a:xfrm>
+          <a:prstGeom prst="rect">
+            <a:avLst/>
+          </a:prstGeom>
+          <a:noFill/>
+          <a:ln w="9525">
+            <a:noFill/>
+            <a:headEnd/>
+            <a:tailEnd/>
+          </a:ln>
+        </p:spPr>
+      </p:pic>
     </p:spTree>
   </p:cSld>
 </p:sld>
@@ -6184,21 +6187,7 @@
             </a:pPr>
             <a:r>
               <a:rPr/>
-              <a:t>Navigators</a:t>
-            </a:r>
-          </a:p>
-          <a:p>
-            <a:pPr lvl="0"/>
-            <a:r>
-              <a:rPr/>
-              <a:t>Laura Swift</a:t>
-            </a:r>
-          </a:p>
-          <a:p>
-            <a:pPr lvl="0"/>
-            <a:r>
-              <a:rPr/>
-              <a:t>Lorna Espinal</a:t>
+              <a:t>Navigators: Laura Swift RN &amp; Lorna Espinal RN</a:t>
             </a:r>
           </a:p>
           <a:p>
@@ -6246,20 +6235,20 @@
         </p:nvSpPr>
         <p:spPr>
           <a:xfrm>
-            <a:off x="284309" y="205979"/>
-            <a:ext cx="8552330" cy="662317"/>
-          </a:xfrm>
-        </p:spPr>
-        <p:txBody>
-          <a:bodyPr/>
-          <a:lstStyle/>
-          <a:p>
-            <a:pPr lvl="0" indent="0" marL="0">
-              <a:buNone/>
-            </a:pPr>
-            <a:r>
-              <a:rPr/>
-              <a:t>Risks of Surgery</a:t>
+            <a:off x="315045" y="205979"/>
+            <a:ext cx="8529278" cy="857250"/>
+          </a:xfrm>
+        </p:spPr>
+        <p:txBody>
+          <a:bodyPr/>
+          <a:lstStyle/>
+          <a:p>
+            <a:pPr lvl="0" indent="0" marL="0">
+              <a:buNone/>
+            </a:pPr>
+            <a:r>
+              <a:rPr/>
+              <a:t>Pneumonia</a:t>
             </a:r>
           </a:p>
         </p:txBody>
@@ -6271,7 +6260,7 @@
             <a:spLocks noGrp="1"/>
           </p:cNvSpPr>
           <p:nvPr>
-            <p:ph idx="1"/>
+            <p:ph idx="1" sz="half"/>
           </p:nvPr>
         </p:nvSpPr>
         <p:spPr/>
@@ -6279,64 +6268,528 @@
           <a:bodyPr/>
           <a:lstStyle/>
           <a:p>
-            <a:pPr lvl="0" indent="0" marL="0">
-              <a:buNone/>
-            </a:pPr>
-            <a:r>
-              <a:rPr/>
-              <a:t>Risks related to Surgery</a:t>
-            </a:r>
-          </a:p>
-          <a:p>
-            <a:pPr lvl="0"/>
-            <a:r>
-              <a:rPr/>
-              <a:t>Anastomotic leak (5%)</a:t>
-            </a:r>
-          </a:p>
-          <a:p>
-            <a:pPr lvl="0"/>
-            <a:r>
-              <a:rPr/>
-              <a:t>Stricture at anastomosis (15%)</a:t>
-            </a:r>
-          </a:p>
-          <a:p>
-            <a:pPr lvl="0"/>
-            <a:r>
-              <a:rPr/>
-              <a:t>Death within 90 days of surgery</a:t>
-            </a:r>
-          </a:p>
-          <a:p>
-            <a:pPr lvl="1"/>
-            <a:r>
-              <a:rPr/>
-              <a:t>Low risk patients = 2%</a:t>
-            </a:r>
-          </a:p>
-          <a:p>
-            <a:pPr lvl="1"/>
-            <a:r>
-              <a:rPr/>
-              <a:t>Intermediate risk = 10%</a:t>
-            </a:r>
-          </a:p>
-          <a:p>
-            <a:pPr lvl="1"/>
-            <a:r>
-              <a:rPr/>
-              <a:t>High risk = 30%</a:t>
-            </a:r>
-          </a:p>
-        </p:txBody>
-      </p:sp>
+            <a:pPr lvl="0"/>
+            <a:r>
+              <a:rPr/>
+              <a:t>Occurs in 10-15% of patients after esophagectomy.</a:t>
+            </a:r>
+          </a:p>
+          <a:p>
+            <a:pPr lvl="0"/>
+            <a:r>
+              <a:rPr/>
+              <a:t>Requires treatment with antibiotics</a:t>
+            </a:r>
+          </a:p>
+          <a:p>
+            <a:pPr lvl="0"/>
+            <a:r>
+              <a:rPr/>
+              <a:t>Requires a longer hospitalization.</a:t>
+            </a:r>
+          </a:p>
+        </p:txBody>
+      </p:sp>
+      <p:pic>
+        <p:nvPicPr>
+          <p:cNvPr descr="images/Eso_LungsArtboard.png" id="0" name="Picture 1"/>
+          <p:cNvPicPr>
+            <a:picLocks noGrp="1" noChangeAspect="1"/>
+          </p:cNvPicPr>
+          <p:nvPr/>
+        </p:nvPicPr>
+        <p:blipFill>
+          <a:blip r:embed="rId2"/>
+          <a:stretch>
+            <a:fillRect/>
+          </a:stretch>
+        </p:blipFill>
+        <p:spPr bwMode="auto">
+          <a:xfrm>
+            <a:off x="4914900" y="1193800"/>
+            <a:ext cx="3632200" cy="3733800"/>
+          </a:xfrm>
+          <a:prstGeom prst="rect">
+            <a:avLst/>
+          </a:prstGeom>
+          <a:noFill/>
+          <a:ln w="9525">
+            <a:noFill/>
+            <a:headEnd/>
+            <a:tailEnd/>
+          </a:ln>
+        </p:spPr>
+      </p:pic>
     </p:spTree>
   </p:cSld>
 </p:sld>
 </file>
 
 <file path=ppt/slides/slide31.xml><?xml version="1.0" encoding="utf-8"?>
+<p:sld xmlns:a="http://schemas.openxmlformats.org/drawingml/2006/main" xmlns:r="http://schemas.openxmlformats.org/officeDocument/2006/relationships" xmlns:p="http://schemas.openxmlformats.org/presentationml/2006/main">
+  <p:cSld>
+    <p:spTree>
+      <p:nvGrpSpPr>
+        <p:cNvPr id="1" name=""/>
+        <p:cNvGrpSpPr/>
+        <p:nvPr/>
+      </p:nvGrpSpPr>
+      <p:grpSpPr>
+        <a:xfrm>
+          <a:off x="0" y="0"/>
+          <a:ext cx="0" cy="0"/>
+          <a:chOff x="0" y="0"/>
+          <a:chExt cx="0" cy="0"/>
+        </a:xfrm>
+      </p:grpSpPr>
+      <p:sp>
+        <p:nvSpPr>
+          <p:cNvPr id="2" name="Title 1"/>
+          <p:cNvSpPr>
+            <a:spLocks noGrp="1"/>
+          </p:cNvSpPr>
+          <p:nvPr>
+            <p:ph type="title"/>
+          </p:nvPr>
+        </p:nvSpPr>
+        <p:spPr>
+          <a:xfrm>
+            <a:off x="284309" y="205979"/>
+            <a:ext cx="8552330" cy="662317"/>
+          </a:xfrm>
+        </p:spPr>
+        <p:txBody>
+          <a:bodyPr/>
+          <a:lstStyle/>
+          <a:p>
+            <a:pPr lvl="0" indent="0" marL="0">
+              <a:buNone/>
+            </a:pPr>
+            <a:r>
+              <a:rPr/>
+              <a:t>Preventing Pneumonia</a:t>
+            </a:r>
+          </a:p>
+        </p:txBody>
+      </p:sp>
+      <p:sp>
+        <p:nvSpPr>
+          <p:cNvPr id="3" name="Content Placeholder 2"/>
+          <p:cNvSpPr>
+            <a:spLocks noGrp="1"/>
+          </p:cNvSpPr>
+          <p:nvPr>
+            <p:ph idx="1"/>
+          </p:nvPr>
+        </p:nvSpPr>
+        <p:spPr/>
+        <p:txBody>
+          <a:bodyPr/>
+          <a:lstStyle/>
+          <a:p>
+            <a:pPr lvl="0" indent="0" marL="0">
+              <a:buNone/>
+            </a:pPr>
+            <a:r>
+              <a:rPr/>
+              <a:t>Several ways to help prevent pneumonia:</a:t>
+            </a:r>
+          </a:p>
+          <a:p>
+            <a:pPr lvl="0"/>
+            <a:r>
+              <a:rPr/>
+              <a:t>Deep breathing</a:t>
+            </a:r>
+          </a:p>
+          <a:p>
+            <a:pPr lvl="0"/>
+            <a:r>
+              <a:rPr/>
+              <a:t>Coughing</a:t>
+            </a:r>
+          </a:p>
+          <a:p>
+            <a:pPr lvl="0"/>
+            <a:r>
+              <a:rPr/>
+              <a:t>Walking</a:t>
+            </a:r>
+          </a:p>
+          <a:p>
+            <a:pPr lvl="0" indent="0" marL="0">
+              <a:buNone/>
+            </a:pPr>
+            <a:r>
+              <a:rPr/>
+              <a:t>After surgery, this means:</a:t>
+            </a:r>
+          </a:p>
+          <a:p>
+            <a:pPr lvl="0"/>
+            <a:r>
+              <a:rPr/>
+              <a:t>Sitting in a chair most of the day</a:t>
+            </a:r>
+          </a:p>
+          <a:p>
+            <a:pPr lvl="0"/>
+            <a:r>
+              <a:rPr/>
+              <a:t>Walking in the halls as soon as possible</a:t>
+            </a:r>
+          </a:p>
+        </p:txBody>
+      </p:sp>
+    </p:spTree>
+  </p:cSld>
+</p:sld>
+</file>
+
+<file path=ppt/slides/slide32.xml><?xml version="1.0" encoding="utf-8"?>
+<p:sld xmlns:a="http://schemas.openxmlformats.org/drawingml/2006/main" xmlns:r="http://schemas.openxmlformats.org/officeDocument/2006/relationships" xmlns:p="http://schemas.openxmlformats.org/presentationml/2006/main">
+  <p:cSld>
+    <p:spTree>
+      <p:nvGrpSpPr>
+        <p:cNvPr id="1" name=""/>
+        <p:cNvGrpSpPr/>
+        <p:nvPr/>
+      </p:nvGrpSpPr>
+      <p:grpSpPr>
+        <a:xfrm>
+          <a:off x="0" y="0"/>
+          <a:ext cx="0" cy="0"/>
+          <a:chOff x="0" y="0"/>
+          <a:chExt cx="0" cy="0"/>
+        </a:xfrm>
+      </p:grpSpPr>
+      <p:sp>
+        <p:nvSpPr>
+          <p:cNvPr id="2" name="Title 1"/>
+          <p:cNvSpPr>
+            <a:spLocks noGrp="1"/>
+          </p:cNvSpPr>
+          <p:nvPr>
+            <p:ph type="title"/>
+          </p:nvPr>
+        </p:nvSpPr>
+        <p:spPr>
+          <a:xfrm>
+            <a:off x="315045" y="205979"/>
+            <a:ext cx="8529278" cy="857250"/>
+          </a:xfrm>
+        </p:spPr>
+        <p:txBody>
+          <a:bodyPr/>
+          <a:lstStyle/>
+          <a:p>
+            <a:pPr lvl="0" indent="0" marL="0">
+              <a:buNone/>
+            </a:pPr>
+            <a:r>
+              <a:rPr/>
+              <a:t>Minimally-invasive Esophagectomy</a:t>
+            </a:r>
+          </a:p>
+        </p:txBody>
+      </p:sp>
+      <p:pic>
+        <p:nvPicPr>
+          <p:cNvPr descr="images/mie_abd.png" id="0" name="Picture 1"/>
+          <p:cNvPicPr>
+            <a:picLocks noGrp="1" noChangeAspect="1"/>
+          </p:cNvPicPr>
+          <p:nvPr/>
+        </p:nvPicPr>
+        <p:blipFill>
+          <a:blip r:embed="rId2"/>
+          <a:stretch>
+            <a:fillRect/>
+          </a:stretch>
+        </p:blipFill>
+        <p:spPr bwMode="auto">
+          <a:xfrm>
+            <a:off x="304800" y="1498600"/>
+            <a:ext cx="4178300" cy="3136900"/>
+          </a:xfrm>
+          <a:prstGeom prst="rect">
+            <a:avLst/>
+          </a:prstGeom>
+          <a:noFill/>
+          <a:ln w="9525">
+            <a:noFill/>
+            <a:headEnd/>
+            <a:tailEnd/>
+          </a:ln>
+        </p:spPr>
+      </p:pic>
+      <p:pic>
+        <p:nvPicPr>
+          <p:cNvPr descr="images/mie_chest.png" id="0" name="Picture 1"/>
+          <p:cNvPicPr>
+            <a:picLocks noGrp="1" noChangeAspect="1"/>
+          </p:cNvPicPr>
+          <p:nvPr/>
+        </p:nvPicPr>
+        <p:blipFill>
+          <a:blip r:embed="rId3"/>
+          <a:stretch>
+            <a:fillRect/>
+          </a:stretch>
+        </p:blipFill>
+        <p:spPr bwMode="auto">
+          <a:xfrm>
+            <a:off x="4635500" y="1485900"/>
+            <a:ext cx="4191000" cy="3149600"/>
+          </a:xfrm>
+          <a:prstGeom prst="rect">
+            <a:avLst/>
+          </a:prstGeom>
+          <a:noFill/>
+          <a:ln w="9525">
+            <a:noFill/>
+            <a:headEnd/>
+            <a:tailEnd/>
+          </a:ln>
+        </p:spPr>
+      </p:pic>
+    </p:spTree>
+  </p:cSld>
+</p:sld>
+</file>
+
+<file path=ppt/slides/slide33.xml><?xml version="1.0" encoding="utf-8"?>
+<p:sld xmlns:a="http://schemas.openxmlformats.org/drawingml/2006/main" xmlns:r="http://schemas.openxmlformats.org/officeDocument/2006/relationships" xmlns:p="http://schemas.openxmlformats.org/presentationml/2006/main">
+  <p:cSld>
+    <p:spTree>
+      <p:nvGrpSpPr>
+        <p:cNvPr id="1" name=""/>
+        <p:cNvGrpSpPr/>
+        <p:nvPr/>
+      </p:nvGrpSpPr>
+      <p:grpSpPr>
+        <a:xfrm>
+          <a:off x="0" y="0"/>
+          <a:ext cx="0" cy="0"/>
+          <a:chOff x="0" y="0"/>
+          <a:chExt cx="0" cy="0"/>
+        </a:xfrm>
+      </p:grpSpPr>
+      <p:sp>
+        <p:nvSpPr>
+          <p:cNvPr id="2" name="Title 1"/>
+          <p:cNvSpPr>
+            <a:spLocks noGrp="1"/>
+          </p:cNvSpPr>
+          <p:nvPr>
+            <p:ph type="title"/>
+          </p:nvPr>
+        </p:nvSpPr>
+        <p:spPr>
+          <a:xfrm>
+            <a:off x="284309" y="205979"/>
+            <a:ext cx="8552330" cy="662317"/>
+          </a:xfrm>
+        </p:spPr>
+        <p:txBody>
+          <a:bodyPr/>
+          <a:lstStyle/>
+          <a:p>
+            <a:pPr lvl="0" indent="0" marL="0">
+              <a:buNone/>
+            </a:pPr>
+            <a:r>
+              <a:rPr/>
+              <a:t>Risks of Surgery</a:t>
+            </a:r>
+          </a:p>
+        </p:txBody>
+      </p:sp>
+      <p:sp>
+        <p:nvSpPr>
+          <p:cNvPr id="3" name="Content Placeholder 2"/>
+          <p:cNvSpPr>
+            <a:spLocks noGrp="1"/>
+          </p:cNvSpPr>
+          <p:nvPr>
+            <p:ph idx="1"/>
+          </p:nvPr>
+        </p:nvSpPr>
+        <p:spPr/>
+        <p:txBody>
+          <a:bodyPr/>
+          <a:lstStyle/>
+          <a:p>
+            <a:pPr lvl="0" indent="0" marL="0">
+              <a:buNone/>
+            </a:pPr>
+            <a:r>
+              <a:rPr/>
+              <a:t>Risks related to anesthesia</a:t>
+            </a:r>
+          </a:p>
+          <a:p>
+            <a:pPr lvl="0"/>
+            <a:r>
+              <a:rPr/>
+              <a:t>Heart attack (5%)</a:t>
+            </a:r>
+          </a:p>
+          <a:p>
+            <a:pPr lvl="0"/>
+            <a:r>
+              <a:rPr/>
+              <a:t>Irregular heart rhythm (15%)</a:t>
+            </a:r>
+          </a:p>
+          <a:p>
+            <a:pPr lvl="0"/>
+            <a:r>
+              <a:rPr/>
+              <a:t>Pneumonia (10%)</a:t>
+            </a:r>
+          </a:p>
+          <a:p>
+            <a:pPr lvl="0"/>
+            <a:r>
+              <a:rPr/>
+              <a:t>Blood clots in legs (&lt;5%)</a:t>
+            </a:r>
+          </a:p>
+          <a:p>
+            <a:pPr lvl="0"/>
+            <a:r>
+              <a:rPr/>
+              <a:t>Pulmonary embolism (2%)</a:t>
+            </a:r>
+          </a:p>
+        </p:txBody>
+      </p:sp>
+    </p:spTree>
+  </p:cSld>
+</p:sld>
+</file>
+
+<file path=ppt/slides/slide34.xml><?xml version="1.0" encoding="utf-8"?>
+<p:sld xmlns:a="http://schemas.openxmlformats.org/drawingml/2006/main" xmlns:r="http://schemas.openxmlformats.org/officeDocument/2006/relationships" xmlns:p="http://schemas.openxmlformats.org/presentationml/2006/main">
+  <p:cSld>
+    <p:spTree>
+      <p:nvGrpSpPr>
+        <p:cNvPr id="1" name=""/>
+        <p:cNvGrpSpPr/>
+        <p:nvPr/>
+      </p:nvGrpSpPr>
+      <p:grpSpPr>
+        <a:xfrm>
+          <a:off x="0" y="0"/>
+          <a:ext cx="0" cy="0"/>
+          <a:chOff x="0" y="0"/>
+          <a:chExt cx="0" cy="0"/>
+        </a:xfrm>
+      </p:grpSpPr>
+      <p:sp>
+        <p:nvSpPr>
+          <p:cNvPr id="2" name="Title 1"/>
+          <p:cNvSpPr>
+            <a:spLocks noGrp="1"/>
+          </p:cNvSpPr>
+          <p:nvPr>
+            <p:ph type="title"/>
+          </p:nvPr>
+        </p:nvSpPr>
+        <p:spPr>
+          <a:xfrm>
+            <a:off x="284309" y="205979"/>
+            <a:ext cx="8552330" cy="662317"/>
+          </a:xfrm>
+        </p:spPr>
+        <p:txBody>
+          <a:bodyPr/>
+          <a:lstStyle/>
+          <a:p>
+            <a:pPr lvl="0" indent="0" marL="0">
+              <a:buNone/>
+            </a:pPr>
+            <a:r>
+              <a:rPr/>
+              <a:t>Risks of Surgery</a:t>
+            </a:r>
+          </a:p>
+        </p:txBody>
+      </p:sp>
+      <p:sp>
+        <p:nvSpPr>
+          <p:cNvPr id="3" name="Content Placeholder 2"/>
+          <p:cNvSpPr>
+            <a:spLocks noGrp="1"/>
+          </p:cNvSpPr>
+          <p:nvPr>
+            <p:ph idx="1"/>
+          </p:nvPr>
+        </p:nvSpPr>
+        <p:spPr/>
+        <p:txBody>
+          <a:bodyPr/>
+          <a:lstStyle/>
+          <a:p>
+            <a:pPr lvl="0" indent="0" marL="0">
+              <a:buNone/>
+            </a:pPr>
+            <a:r>
+              <a:rPr/>
+              <a:t>Risks related to Surgery</a:t>
+            </a:r>
+          </a:p>
+          <a:p>
+            <a:pPr lvl="0"/>
+            <a:r>
+              <a:rPr/>
+              <a:t>Anastomotic leak (5%)</a:t>
+            </a:r>
+          </a:p>
+          <a:p>
+            <a:pPr lvl="0"/>
+            <a:r>
+              <a:rPr/>
+              <a:t>Stricture at anastomosis (15%)</a:t>
+            </a:r>
+          </a:p>
+          <a:p>
+            <a:pPr lvl="0"/>
+            <a:r>
+              <a:rPr/>
+              <a:t>Death within 90 days of surgery</a:t>
+            </a:r>
+          </a:p>
+          <a:p>
+            <a:pPr lvl="1"/>
+            <a:r>
+              <a:rPr/>
+              <a:t>Low risk patients = 2%</a:t>
+            </a:r>
+          </a:p>
+          <a:p>
+            <a:pPr lvl="1"/>
+            <a:r>
+              <a:rPr/>
+              <a:t>Intermediate risk = 10%</a:t>
+            </a:r>
+          </a:p>
+          <a:p>
+            <a:pPr lvl="1"/>
+            <a:r>
+              <a:rPr/>
+              <a:t>High risk = 30%</a:t>
+            </a:r>
+          </a:p>
+        </p:txBody>
+      </p:sp>
+    </p:spTree>
+  </p:cSld>
+</p:sld>
+</file>
+
+<file path=ppt/slides/slide35.xml><?xml version="1.0" encoding="utf-8"?>
 <p:sld xmlns:a="http://schemas.openxmlformats.org/drawingml/2006/main" xmlns:r="http://schemas.openxmlformats.org/officeDocument/2006/relationships" xmlns:p="http://schemas.openxmlformats.org/presentationml/2006/main">
   <p:cSld>
     <p:spTree>
@@ -6587,419 +7040,6 @@
 </p:sld>
 </file>
 
-<file path=ppt/slides/slide32.xml><?xml version="1.0" encoding="utf-8"?>
-<p:sld xmlns:a="http://schemas.openxmlformats.org/drawingml/2006/main" xmlns:r="http://schemas.openxmlformats.org/officeDocument/2006/relationships" xmlns:p="http://schemas.openxmlformats.org/presentationml/2006/main">
-  <p:cSld>
-    <p:spTree>
-      <p:nvGrpSpPr>
-        <p:cNvPr id="1" name=""/>
-        <p:cNvGrpSpPr/>
-        <p:nvPr/>
-      </p:nvGrpSpPr>
-      <p:grpSpPr>
-        <a:xfrm>
-          <a:off x="0" y="0"/>
-          <a:ext cx="0" cy="0"/>
-          <a:chOff x="0" y="0"/>
-          <a:chExt cx="0" cy="0"/>
-        </a:xfrm>
-      </p:grpSpPr>
-      <p:sp>
-        <p:nvSpPr>
-          <p:cNvPr id="2" name="Title 1"/>
-          <p:cNvSpPr>
-            <a:spLocks noGrp="1"/>
-          </p:cNvSpPr>
-          <p:nvPr>
-            <p:ph type="title"/>
-          </p:nvPr>
-        </p:nvSpPr>
-        <p:spPr>
-          <a:xfrm>
-            <a:off x="284309" y="205979"/>
-            <a:ext cx="8552330" cy="662317"/>
-          </a:xfrm>
-        </p:spPr>
-        <p:txBody>
-          <a:bodyPr/>
-          <a:lstStyle/>
-          <a:p>
-            <a:pPr lvl="0" indent="0" marL="0">
-              <a:buNone/>
-            </a:pPr>
-            <a:r>
-              <a:rPr/>
-              <a:t>Day Prior to Surgery</a:t>
-            </a:r>
-          </a:p>
-        </p:txBody>
-      </p:sp>
-      <p:sp>
-        <p:nvSpPr>
-          <p:cNvPr id="3" name="Content Placeholder 2"/>
-          <p:cNvSpPr>
-            <a:spLocks noGrp="1"/>
-          </p:cNvSpPr>
-          <p:nvPr>
-            <p:ph idx="1"/>
-          </p:nvPr>
-        </p:nvSpPr>
-        <p:spPr/>
-        <p:txBody>
-          <a:bodyPr/>
-          <a:lstStyle/>
-          <a:p>
-            <a:pPr lvl="0"/>
-            <a:r>
-              <a:rPr/>
-              <a:t>Clear liquids for 24 hours prior to surgery</a:t>
-            </a:r>
-          </a:p>
-          <a:p>
-            <a:pPr lvl="0"/>
-            <a:r>
-              <a:rPr/>
-              <a:t>Check with Pre-op nurse regarding medicines day prior to surgery</a:t>
-            </a:r>
-          </a:p>
-          <a:p>
-            <a:pPr lvl="0"/>
-            <a:r>
-              <a:rPr/>
-              <a:t>No tube feedings the night before surgery</a:t>
-            </a:r>
-          </a:p>
-        </p:txBody>
-      </p:sp>
-    </p:spTree>
-  </p:cSld>
-</p:sld>
-</file>
-
-<file path=ppt/slides/slide33.xml><?xml version="1.0" encoding="utf-8"?>
-<p:sld xmlns:a="http://schemas.openxmlformats.org/drawingml/2006/main" xmlns:r="http://schemas.openxmlformats.org/officeDocument/2006/relationships" xmlns:p="http://schemas.openxmlformats.org/presentationml/2006/main">
-  <p:cSld>
-    <p:spTree>
-      <p:nvGrpSpPr>
-        <p:cNvPr id="1" name=""/>
-        <p:cNvGrpSpPr/>
-        <p:nvPr/>
-      </p:nvGrpSpPr>
-      <p:grpSpPr>
-        <a:xfrm>
-          <a:off x="0" y="0"/>
-          <a:ext cx="0" cy="0"/>
-          <a:chOff x="0" y="0"/>
-          <a:chExt cx="0" cy="0"/>
-        </a:xfrm>
-      </p:grpSpPr>
-      <p:sp>
-        <p:nvSpPr>
-          <p:cNvPr id="2" name="Title 1"/>
-          <p:cNvSpPr>
-            <a:spLocks noGrp="1"/>
-          </p:cNvSpPr>
-          <p:nvPr>
-            <p:ph type="title"/>
-          </p:nvPr>
-        </p:nvSpPr>
-        <p:spPr>
-          <a:xfrm>
-            <a:off x="284309" y="205979"/>
-            <a:ext cx="8552330" cy="662317"/>
-          </a:xfrm>
-        </p:spPr>
-        <p:txBody>
-          <a:bodyPr/>
-          <a:lstStyle/>
-          <a:p>
-            <a:pPr lvl="0" indent="0" marL="0">
-              <a:buNone/>
-            </a:pPr>
-            <a:r>
-              <a:rPr/>
-              <a:t>Day of Surgery</a:t>
-            </a:r>
-          </a:p>
-        </p:txBody>
-      </p:sp>
-      <p:sp>
-        <p:nvSpPr>
-          <p:cNvPr id="3" name="Content Placeholder 2"/>
-          <p:cNvSpPr>
-            <a:spLocks noGrp="1"/>
-          </p:cNvSpPr>
-          <p:nvPr>
-            <p:ph idx="1"/>
-          </p:nvPr>
-        </p:nvSpPr>
-        <p:spPr/>
-        <p:txBody>
-          <a:bodyPr/>
-          <a:lstStyle/>
-          <a:p>
-            <a:pPr lvl="0"/>
-            <a:r>
-              <a:rPr/>
-              <a:t>Arrive at 5am – nothing to eat or drink after midnight.</a:t>
-            </a:r>
-          </a:p>
-          <a:p>
-            <a:pPr lvl="0"/>
-            <a:r>
-              <a:rPr/>
-              <a:t>Medicines OK w/ a sip of water</a:t>
-            </a:r>
-          </a:p>
-          <a:p>
-            <a:pPr lvl="0"/>
-            <a:r>
-              <a:rPr/>
-              <a:t>sip of black coffee but </a:t>
-            </a:r>
-            <a:r>
-              <a:rPr b="1"/>
-              <a:t>no cream</a:t>
-            </a:r>
-            <a:r>
-              <a:rPr/>
-              <a:t>.</a:t>
-            </a:r>
-          </a:p>
-          <a:p>
-            <a:pPr lvl="0"/>
-            <a:r>
-              <a:rPr/>
-              <a:t>Surgery will be cancelled if you have cream/milk</a:t>
-            </a:r>
-          </a:p>
-          <a:p>
-            <a:pPr lvl="0"/>
-            <a:r>
-              <a:rPr/>
-              <a:t>Waiting room for family and friends on 5th floor</a:t>
-            </a:r>
-          </a:p>
-        </p:txBody>
-      </p:sp>
-    </p:spTree>
-  </p:cSld>
-</p:sld>
-</file>
-
-<file path=ppt/slides/slide34.xml><?xml version="1.0" encoding="utf-8"?>
-<p:sld xmlns:a="http://schemas.openxmlformats.org/drawingml/2006/main" xmlns:r="http://schemas.openxmlformats.org/officeDocument/2006/relationships" xmlns:p="http://schemas.openxmlformats.org/presentationml/2006/main">
-  <p:cSld>
-    <p:spTree>
-      <p:nvGrpSpPr>
-        <p:cNvPr id="1" name=""/>
-        <p:cNvGrpSpPr/>
-        <p:nvPr/>
-      </p:nvGrpSpPr>
-      <p:grpSpPr>
-        <a:xfrm>
-          <a:off x="0" y="0"/>
-          <a:ext cx="0" cy="0"/>
-          <a:chOff x="0" y="0"/>
-          <a:chExt cx="0" cy="0"/>
-        </a:xfrm>
-      </p:grpSpPr>
-      <p:sp>
-        <p:nvSpPr>
-          <p:cNvPr id="2" name="Title 1"/>
-          <p:cNvSpPr>
-            <a:spLocks noGrp="1"/>
-          </p:cNvSpPr>
-          <p:nvPr>
-            <p:ph type="title"/>
-          </p:nvPr>
-        </p:nvSpPr>
-        <p:spPr>
-          <a:xfrm>
-            <a:off x="284309" y="205979"/>
-            <a:ext cx="8552330" cy="662317"/>
-          </a:xfrm>
-        </p:spPr>
-        <p:txBody>
-          <a:bodyPr/>
-          <a:lstStyle/>
-          <a:p>
-            <a:pPr lvl="0" indent="0" marL="0">
-              <a:buNone/>
-            </a:pPr>
-            <a:r>
-              <a:rPr/>
-              <a:t>Epidural Catheter for Pain Control</a:t>
-            </a:r>
-          </a:p>
-        </p:txBody>
-      </p:sp>
-      <p:sp>
-        <p:nvSpPr>
-          <p:cNvPr id="3" name="Content Placeholder 2"/>
-          <p:cNvSpPr>
-            <a:spLocks noGrp="1"/>
-          </p:cNvSpPr>
-          <p:nvPr>
-            <p:ph idx="1"/>
-          </p:nvPr>
-        </p:nvSpPr>
-        <p:spPr/>
-        <p:txBody>
-          <a:bodyPr/>
-          <a:lstStyle/>
-          <a:p>
-            <a:pPr lvl="0"/>
-            <a:r>
-              <a:rPr/>
-              <a:t>Remains in place for 2-5 days</a:t>
-            </a:r>
-          </a:p>
-          <a:p>
-            <a:pPr lvl="0"/>
-            <a:r>
-              <a:rPr/>
-              <a:t>Dosage can be adjusted as needed</a:t>
-            </a:r>
-          </a:p>
-          <a:p>
-            <a:pPr lvl="0"/>
-            <a:r>
-              <a:rPr/>
-              <a:t>Can make it more difficult to urinate</a:t>
-            </a:r>
-          </a:p>
-          <a:p>
-            <a:pPr lvl="0"/>
-            <a:r>
-              <a:rPr/>
-              <a:t>May require foley catheter in bladder</a:t>
-            </a:r>
-          </a:p>
-          <a:p>
-            <a:pPr lvl="0"/>
-            <a:r>
-              <a:rPr/>
-              <a:t>Foley catheter removed after epidural removed</a:t>
-            </a:r>
-          </a:p>
-        </p:txBody>
-      </p:sp>
-    </p:spTree>
-  </p:cSld>
-</p:sld>
-</file>
-
-<file path=ppt/slides/slide35.xml><?xml version="1.0" encoding="utf-8"?>
-<p:sld xmlns:a="http://schemas.openxmlformats.org/drawingml/2006/main" xmlns:r="http://schemas.openxmlformats.org/officeDocument/2006/relationships" xmlns:p="http://schemas.openxmlformats.org/presentationml/2006/main">
-  <p:cSld>
-    <p:spTree>
-      <p:nvGrpSpPr>
-        <p:cNvPr id="1" name=""/>
-        <p:cNvGrpSpPr/>
-        <p:nvPr/>
-      </p:nvGrpSpPr>
-      <p:grpSpPr>
-        <a:xfrm>
-          <a:off x="0" y="0"/>
-          <a:ext cx="0" cy="0"/>
-          <a:chOff x="0" y="0"/>
-          <a:chExt cx="0" cy="0"/>
-        </a:xfrm>
-      </p:grpSpPr>
-      <p:sp>
-        <p:nvSpPr>
-          <p:cNvPr id="2" name="Title 1"/>
-          <p:cNvSpPr>
-            <a:spLocks noGrp="1"/>
-          </p:cNvSpPr>
-          <p:nvPr>
-            <p:ph type="title"/>
-          </p:nvPr>
-        </p:nvSpPr>
-        <p:spPr>
-          <a:xfrm>
-            <a:off x="284309" y="205979"/>
-            <a:ext cx="8552330" cy="662317"/>
-          </a:xfrm>
-        </p:spPr>
-        <p:txBody>
-          <a:bodyPr/>
-          <a:lstStyle/>
-          <a:p>
-            <a:pPr lvl="0" indent="0" marL="0">
-              <a:buNone/>
-            </a:pPr>
-            <a:r>
-              <a:rPr/>
-              <a:t>Intensive Care Unit (ICU) (2-4 days)</a:t>
-            </a:r>
-          </a:p>
-        </p:txBody>
-      </p:sp>
-      <p:sp>
-        <p:nvSpPr>
-          <p:cNvPr id="3" name="Content Placeholder 2"/>
-          <p:cNvSpPr>
-            <a:spLocks noGrp="1"/>
-          </p:cNvSpPr>
-          <p:nvPr>
-            <p:ph idx="1"/>
-          </p:nvPr>
-        </p:nvSpPr>
-        <p:spPr/>
-        <p:txBody>
-          <a:bodyPr/>
-          <a:lstStyle/>
-          <a:p>
-            <a:pPr lvl="0"/>
-            <a:r>
-              <a:rPr/>
-              <a:t>Surgical ICU on 11th floor</a:t>
-            </a:r>
-          </a:p>
-          <a:p>
-            <a:pPr lvl="0"/>
-            <a:r>
-              <a:rPr/>
-              <a:t>NG tube in nose to drain stomach and esophagus</a:t>
-            </a:r>
-          </a:p>
-          <a:p>
-            <a:pPr lvl="0"/>
-            <a:r>
-              <a:rPr/>
-              <a:t>Catheter in bladder</a:t>
-            </a:r>
-          </a:p>
-          <a:p>
-            <a:pPr lvl="0"/>
-            <a:r>
-              <a:rPr/>
-              <a:t>Chest tube right chest</a:t>
-            </a:r>
-          </a:p>
-          <a:p>
-            <a:pPr lvl="0"/>
-            <a:r>
-              <a:rPr/>
-              <a:t>Abdominal drains (usually 2)</a:t>
-            </a:r>
-          </a:p>
-          <a:p>
-            <a:pPr lvl="0"/>
-            <a:r>
-              <a:rPr/>
-              <a:t>Feeding jejunostomy (usually stays in 8 wks)</a:t>
-            </a:r>
-          </a:p>
-        </p:txBody>
-      </p:sp>
-    </p:spTree>
-  </p:cSld>
-</p:sld>
-</file>
-
 <file path=ppt/slides/slide36.xml><?xml version="1.0" encoding="utf-8"?>
 <p:sld xmlns:a="http://schemas.openxmlformats.org/drawingml/2006/main" xmlns:r="http://schemas.openxmlformats.org/officeDocument/2006/relationships" xmlns:p="http://schemas.openxmlformats.org/presentationml/2006/main">
   <p:cSld>
@@ -7042,7 +7082,7 @@
             </a:pPr>
             <a:r>
               <a:rPr/>
-              <a:t>Intensive Care Unit (ICU)</a:t>
+              <a:t>Epidural Catheter for Pain Control</a:t>
             </a:r>
           </a:p>
         </p:txBody>
@@ -7065,35 +7105,35 @@
             <a:pPr lvl="0"/>
             <a:r>
               <a:rPr/>
-              <a:t>Bladder catheter removed → check that bladder empties properly</a:t>
-            </a:r>
-          </a:p>
-          <a:p>
-            <a:pPr lvl="0"/>
-            <a:r>
-              <a:rPr/>
-              <a:t>Chest tube removed (day 2-4) → follow-up x-ray</a:t>
-            </a:r>
-          </a:p>
-          <a:p>
-            <a:pPr lvl="0"/>
-            <a:r>
-              <a:rPr/>
-              <a:t>Fluid emptied from drains every few hours</a:t>
-            </a:r>
-          </a:p>
-          <a:p>
-            <a:pPr lvl="0"/>
-            <a:r>
-              <a:rPr/>
-              <a:t>Start tube feedings by feeding</a:t>
-            </a:r>
-          </a:p>
-          <a:p>
-            <a:pPr lvl="0"/>
-            <a:r>
-              <a:rPr/>
-              <a:t>Feeding jejunostomy (stays in 8 weeks)</a:t>
+              <a:t>Remains in place for 2-5 days</a:t>
+            </a:r>
+          </a:p>
+          <a:p>
+            <a:pPr lvl="0"/>
+            <a:r>
+              <a:rPr/>
+              <a:t>Dosage can be adjusted as needed</a:t>
+            </a:r>
+          </a:p>
+          <a:p>
+            <a:pPr lvl="0"/>
+            <a:r>
+              <a:rPr/>
+              <a:t>Can make it more difficult to urinate</a:t>
+            </a:r>
+          </a:p>
+          <a:p>
+            <a:pPr lvl="0"/>
+            <a:r>
+              <a:rPr/>
+              <a:t>May require foley catheter in bladder</a:t>
+            </a:r>
+          </a:p>
+          <a:p>
+            <a:pPr lvl="0"/>
+            <a:r>
+              <a:rPr/>
+              <a:t>Foley catheter removed after epidural removed</a:t>
             </a:r>
           </a:p>
         </p:txBody>
@@ -7145,7 +7185,7 @@
             </a:pPr>
             <a:r>
               <a:rPr/>
-              <a:t>Ward - 6Tower</a:t>
+              <a:t>Intensive Care Unit (ICU) (2-4 days)</a:t>
             </a:r>
           </a:p>
         </p:txBody>
@@ -7168,42 +7208,42 @@
             <a:pPr lvl="0"/>
             <a:r>
               <a:rPr/>
-              <a:t>Jejunostomy feeds started</a:t>
-            </a:r>
-          </a:p>
-          <a:p>
-            <a:pPr lvl="0"/>
-            <a:r>
-              <a:rPr/>
-              <a:t>Up in a chair most of the day</a:t>
-            </a:r>
-          </a:p>
-          <a:p>
-            <a:pPr lvl="0"/>
-            <a:r>
-              <a:rPr/>
-              <a:t>Walking in the halls</a:t>
-            </a:r>
-          </a:p>
-          <a:p>
-            <a:pPr lvl="1"/>
-            <a:r>
-              <a:rPr/>
-              <a:t>Start with assistance</a:t>
-            </a:r>
-          </a:p>
-          <a:p>
-            <a:pPr lvl="1"/>
-            <a:r>
-              <a:rPr/>
-              <a:t>Improves lung function</a:t>
-            </a:r>
-          </a:p>
-          <a:p>
-            <a:pPr lvl="1"/>
-            <a:r>
-              <a:rPr/>
-              <a:t>Prevents loss of muscle strength</a:t>
+              <a:t>Surgical ICU on 11th floor</a:t>
+            </a:r>
+          </a:p>
+          <a:p>
+            <a:pPr lvl="0"/>
+            <a:r>
+              <a:rPr/>
+              <a:t>NG tube in nose to drain stomach and esophagus</a:t>
+            </a:r>
+          </a:p>
+          <a:p>
+            <a:pPr lvl="0"/>
+            <a:r>
+              <a:rPr/>
+              <a:t>Catheter in bladder</a:t>
+            </a:r>
+          </a:p>
+          <a:p>
+            <a:pPr lvl="0"/>
+            <a:r>
+              <a:rPr/>
+              <a:t>Chest tube right chest</a:t>
+            </a:r>
+          </a:p>
+          <a:p>
+            <a:pPr lvl="0"/>
+            <a:r>
+              <a:rPr/>
+              <a:t>Abdominal drains (usually 2)</a:t>
+            </a:r>
+          </a:p>
+          <a:p>
+            <a:pPr lvl="0"/>
+            <a:r>
+              <a:rPr/>
+              <a:t>Feeding jejunostomy (usually stays in 8 wks)</a:t>
             </a:r>
           </a:p>
         </p:txBody>
@@ -7255,7 +7295,7 @@
             </a:pPr>
             <a:r>
               <a:rPr/>
-              <a:t>Jejunostomy Feeds</a:t>
+              <a:t>Intensive Care Unit (ICU)</a:t>
             </a:r>
           </a:p>
         </p:txBody>
@@ -7275,49 +7315,38 @@
           <a:bodyPr/>
           <a:lstStyle/>
           <a:p>
-            <a:pPr lvl="0" indent="0" marL="0">
-              <a:buNone/>
-            </a:pPr>
-            <a:r>
-              <a:rPr/>
-              <a:t>Jejunostomy tube feeds</a:t>
-            </a:r>
-          </a:p>
-          <a:p>
-            <a:pPr lvl="0"/>
-            <a:r>
-              <a:rPr/>
-              <a:t>Start continuous (24 hours)</a:t>
-            </a:r>
-          </a:p>
-          <a:p>
-            <a:pPr lvl="0"/>
-            <a:r>
-              <a:rPr/>
-              <a:t>Convert to night-time only (16 hours)</a:t>
-            </a:r>
-          </a:p>
-          <a:p>
-            <a:pPr lvl="0" indent="0" marL="0">
-              <a:buNone/>
-            </a:pPr>
-            <a:r>
-              <a:rPr/>
-              <a:t>Water administered through feeding tube</a:t>
-            </a:r>
-          </a:p>
-          <a:p>
-            <a:pPr lvl="0"/>
-            <a:r>
-              <a:rPr/>
-              <a:t>Usually 8oz 4 times/day</a:t>
-            </a:r>
-          </a:p>
-          <a:p>
-            <a:pPr lvl="0"/>
-            <a:r>
-              <a:rPr/>
-              <a:t>Important to prevent dehydration</a:t>
+            <a:pPr lvl="0"/>
+            <a:r>
+              <a:rPr/>
+              <a:t>Bladder catheter removed → check that bladder empties properly</a:t>
+            </a:r>
+          </a:p>
+          <a:p>
+            <a:pPr lvl="0"/>
+            <a:r>
+              <a:rPr/>
+              <a:t>Chest tube removed (day 2-4) → follow-up x-ray</a:t>
+            </a:r>
+          </a:p>
+          <a:p>
+            <a:pPr lvl="0"/>
+            <a:r>
+              <a:rPr/>
+              <a:t>Fluid emptied from drains every few hours</a:t>
+            </a:r>
+          </a:p>
+          <a:p>
+            <a:pPr lvl="0"/>
+            <a:r>
+              <a:rPr/>
+              <a:t>Start tube feedings by feeding</a:t>
+            </a:r>
+          </a:p>
+          <a:p>
+            <a:pPr lvl="0"/>
+            <a:r>
+              <a:rPr/>
+              <a:t>Feeding jejunostomy (stays in 8 weeks)</a:t>
             </a:r>
           </a:p>
         </p:txBody>
@@ -7356,20 +7385,20 @@
         </p:nvSpPr>
         <p:spPr>
           <a:xfrm>
-            <a:off x="315045" y="205979"/>
-            <a:ext cx="8529278" cy="857250"/>
-          </a:xfrm>
-        </p:spPr>
-        <p:txBody>
-          <a:bodyPr/>
-          <a:lstStyle/>
-          <a:p>
-            <a:pPr lvl="0" indent="0" marL="0">
-              <a:buNone/>
-            </a:pPr>
-            <a:r>
-              <a:rPr/>
-              <a:t>Jejunostomy Tube</a:t>
+            <a:off x="284309" y="205979"/>
+            <a:ext cx="8552330" cy="662317"/>
+          </a:xfrm>
+        </p:spPr>
+        <p:txBody>
+          <a:bodyPr/>
+          <a:lstStyle/>
+          <a:p>
+            <a:pPr lvl="0" indent="0" marL="0">
+              <a:buNone/>
+            </a:pPr>
+            <a:r>
+              <a:rPr/>
+              <a:t>Ward - 6Tower</a:t>
             </a:r>
           </a:p>
         </p:txBody>
@@ -7381,7 +7410,7 @@
             <a:spLocks noGrp="1"/>
           </p:cNvSpPr>
           <p:nvPr>
-            <p:ph idx="1" sz="half"/>
+            <p:ph idx="1"/>
           </p:nvPr>
         </p:nvSpPr>
         <p:spPr/>
@@ -7392,62 +7421,46 @@
             <a:pPr lvl="0"/>
             <a:r>
               <a:rPr/>
-              <a:t>Nutrition to bypasses the esophagus and stomach</a:t>
-            </a:r>
-          </a:p>
-          <a:p>
-            <a:pPr lvl="0"/>
-            <a:r>
-              <a:rPr/>
-              <a:t>Placed in small intestine</a:t>
-            </a:r>
-          </a:p>
-          <a:p>
-            <a:pPr lvl="0"/>
-            <a:r>
-              <a:rPr/>
-              <a:t>Pump administers feedings slowly</a:t>
-            </a:r>
-          </a:p>
-          <a:p>
-            <a:pPr lvl="0"/>
-            <a:r>
-              <a:rPr/>
-              <a:t>Feeding done at night</a:t>
-            </a:r>
-          </a:p>
-        </p:txBody>
-      </p:sp>
-      <p:pic>
-        <p:nvPicPr>
-          <p:cNvPr descr="images/nutrition_jtube.png" id="0" name="Picture 1"/>
-          <p:cNvPicPr>
-            <a:picLocks noGrp="1" noChangeAspect="1"/>
-          </p:cNvPicPr>
-          <p:nvPr/>
-        </p:nvPicPr>
-        <p:blipFill>
-          <a:blip r:embed="rId2"/>
-          <a:stretch>
-            <a:fillRect/>
-          </a:stretch>
-        </p:blipFill>
-        <p:spPr bwMode="auto">
-          <a:xfrm>
-            <a:off x="4902200" y="1193800"/>
-            <a:ext cx="3644900" cy="3733800"/>
-          </a:xfrm>
-          <a:prstGeom prst="rect">
-            <a:avLst/>
-          </a:prstGeom>
-          <a:noFill/>
-          <a:ln w="9525">
-            <a:noFill/>
-            <a:headEnd/>
-            <a:tailEnd/>
-          </a:ln>
-        </p:spPr>
-      </p:pic>
+              <a:t>Jejunostomy feeds started</a:t>
+            </a:r>
+          </a:p>
+          <a:p>
+            <a:pPr lvl="0"/>
+            <a:r>
+              <a:rPr/>
+              <a:t>Up in a chair most of the day</a:t>
+            </a:r>
+          </a:p>
+          <a:p>
+            <a:pPr lvl="0"/>
+            <a:r>
+              <a:rPr/>
+              <a:t>Walking in the halls</a:t>
+            </a:r>
+          </a:p>
+          <a:p>
+            <a:pPr lvl="1"/>
+            <a:r>
+              <a:rPr/>
+              <a:t>Start with assistance</a:t>
+            </a:r>
+          </a:p>
+          <a:p>
+            <a:pPr lvl="1"/>
+            <a:r>
+              <a:rPr/>
+              <a:t>Improves lung function</a:t>
+            </a:r>
+          </a:p>
+          <a:p>
+            <a:pPr lvl="1"/>
+            <a:r>
+              <a:rPr/>
+              <a:t>Prevents loss of muscle strength</a:t>
+            </a:r>
+          </a:p>
+        </p:txBody>
+      </p:sp>
     </p:spTree>
   </p:cSld>
 </p:sld>
@@ -7597,7 +7610,7 @@
             </a:pPr>
             <a:r>
               <a:rPr/>
-              <a:t>Jejunostomy Typical Regimen</a:t>
+              <a:t>Jejunostomy Feeds</a:t>
             </a:r>
           </a:p>
         </p:txBody>
@@ -7617,40 +7630,49 @@
           <a:bodyPr/>
           <a:lstStyle/>
           <a:p>
-            <a:pPr lvl="0"/>
-            <a:r>
-              <a:rPr/>
-              <a:t>Jejunostomy tube feeds for 16 hours (6pm-10am)</a:t>
-            </a:r>
-          </a:p>
-          <a:p>
-            <a:pPr lvl="1"/>
-            <a:r>
-              <a:rPr/>
-              <a:t>Men: 75mL/hour x 16 hours = 5 cartons</a:t>
-            </a:r>
-          </a:p>
-          <a:p>
-            <a:pPr lvl="1"/>
-            <a:r>
-              <a:rPr/>
-              <a:t>Women: 60mL/hour x 16 hours = 4 cartons</a:t>
-            </a:r>
-          </a:p>
-          <a:p>
-            <a:pPr lvl="0"/>
-            <a:r>
-              <a:rPr/>
-              <a:t>Water 240ml (8oz) via syringe 4x/day</a:t>
-            </a:r>
-          </a:p>
-          <a:p>
-            <a:pPr lvl="0" indent="0" marL="0">
-              <a:buNone/>
-            </a:pPr>
-            <a:r>
-              <a:rPr/>
-              <a:t>Hospital nurses will teach use of the feeding tube</a:t>
+            <a:pPr lvl="0" indent="0" marL="0">
+              <a:buNone/>
+            </a:pPr>
+            <a:r>
+              <a:rPr/>
+              <a:t>Jejunostomy tube feeds</a:t>
+            </a:r>
+          </a:p>
+          <a:p>
+            <a:pPr lvl="0"/>
+            <a:r>
+              <a:rPr/>
+              <a:t>Start continuous (24 hours)</a:t>
+            </a:r>
+          </a:p>
+          <a:p>
+            <a:pPr lvl="0"/>
+            <a:r>
+              <a:rPr/>
+              <a:t>Convert to night-time only (16 hours)</a:t>
+            </a:r>
+          </a:p>
+          <a:p>
+            <a:pPr lvl="0" indent="0" marL="0">
+              <a:buNone/>
+            </a:pPr>
+            <a:r>
+              <a:rPr/>
+              <a:t>Water administered through feeding tube</a:t>
+            </a:r>
+          </a:p>
+          <a:p>
+            <a:pPr lvl="0"/>
+            <a:r>
+              <a:rPr/>
+              <a:t>Usually 8oz 4 times/day</a:t>
+            </a:r>
+          </a:p>
+          <a:p>
+            <a:pPr lvl="0"/>
+            <a:r>
+              <a:rPr/>
+              <a:t>Important to prevent dehydration</a:t>
             </a:r>
           </a:p>
         </p:txBody>
@@ -7689,20 +7711,20 @@
         </p:nvSpPr>
         <p:spPr>
           <a:xfrm>
-            <a:off x="284309" y="205979"/>
-            <a:ext cx="8552330" cy="662317"/>
-          </a:xfrm>
-        </p:spPr>
-        <p:txBody>
-          <a:bodyPr/>
-          <a:lstStyle/>
-          <a:p>
-            <a:pPr lvl="0" indent="0" marL="0">
-              <a:buNone/>
-            </a:pPr>
-            <a:r>
-              <a:rPr/>
-              <a:t>Jejunostomy Feeds with Diabetes</a:t>
+            <a:off x="315045" y="205979"/>
+            <a:ext cx="8529278" cy="857250"/>
+          </a:xfrm>
+        </p:spPr>
+        <p:txBody>
+          <a:bodyPr/>
+          <a:lstStyle/>
+          <a:p>
+            <a:pPr lvl="0" indent="0" marL="0">
+              <a:buNone/>
+            </a:pPr>
+            <a:r>
+              <a:rPr/>
+              <a:t>Jejunostomy Tube</a:t>
             </a:r>
           </a:p>
         </p:txBody>
@@ -7714,7 +7736,7 @@
             <a:spLocks noGrp="1"/>
           </p:cNvSpPr>
           <p:nvPr>
-            <p:ph idx="1"/>
+            <p:ph idx="1" sz="half"/>
           </p:nvPr>
         </p:nvSpPr>
         <p:spPr/>
@@ -7722,60 +7744,65 @@
           <a:bodyPr/>
           <a:lstStyle/>
           <a:p>
-            <a:pPr lvl="0" indent="0" marL="0">
-              <a:buNone/>
-            </a:pPr>
-            <a:r>
-              <a:rPr/>
-              <a:t>Jejunostomy feedings elevate blood sugars</a:t>
-            </a:r>
-          </a:p>
-          <a:p>
-            <a:pPr lvl="0"/>
-            <a:r>
-              <a:rPr/>
-              <a:t>Insulin may be required along with feeds</a:t>
-            </a:r>
-          </a:p>
-          <a:p>
-            <a:pPr lvl="0" indent="0" marL="0">
-              <a:buNone/>
-            </a:pPr>
-            <a:r>
-              <a:rPr/>
-              <a:t>Typical Pattern for tube feeds</a:t>
-            </a:r>
-          </a:p>
-          <a:p>
-            <a:pPr lvl="0"/>
-            <a:r>
-              <a:rPr/>
-              <a:t>Feeds run via pump from 6pm to 10am</a:t>
-            </a:r>
-          </a:p>
-          <a:p>
-            <a:pPr lvl="0"/>
-            <a:r>
-              <a:rPr/>
-              <a:t>Insulin at 6pm (70/30 insulin)</a:t>
-            </a:r>
-          </a:p>
-          <a:p>
-            <a:pPr lvl="0"/>
-            <a:r>
-              <a:rPr/>
-              <a:t>Insulin at Midnight (70/30 insulin)</a:t>
-            </a:r>
-          </a:p>
-          <a:p>
-            <a:pPr lvl="0"/>
-            <a:r>
-              <a:rPr/>
-              <a:t>No insulin if tube feedings are not run</a:t>
-            </a:r>
-          </a:p>
-        </p:txBody>
-      </p:sp>
+            <a:pPr lvl="0"/>
+            <a:r>
+              <a:rPr/>
+              <a:t>Nutrition to bypasses the esophagus and stomach</a:t>
+            </a:r>
+          </a:p>
+          <a:p>
+            <a:pPr lvl="0"/>
+            <a:r>
+              <a:rPr/>
+              <a:t>Placed in small intestine</a:t>
+            </a:r>
+          </a:p>
+          <a:p>
+            <a:pPr lvl="0"/>
+            <a:r>
+              <a:rPr/>
+              <a:t>Pump administers feedings slowly</a:t>
+            </a:r>
+          </a:p>
+          <a:p>
+            <a:pPr lvl="0"/>
+            <a:r>
+              <a:rPr/>
+              <a:t>Feeding done at night</a:t>
+            </a:r>
+          </a:p>
+        </p:txBody>
+      </p:sp>
+      <p:pic>
+        <p:nvPicPr>
+          <p:cNvPr descr="images/nutrition_jtube.png" id="0" name="Picture 1"/>
+          <p:cNvPicPr>
+            <a:picLocks noGrp="1" noChangeAspect="1"/>
+          </p:cNvPicPr>
+          <p:nvPr/>
+        </p:nvPicPr>
+        <p:blipFill>
+          <a:blip r:embed="rId2"/>
+          <a:stretch>
+            <a:fillRect/>
+          </a:stretch>
+        </p:blipFill>
+        <p:spPr bwMode="auto">
+          <a:xfrm>
+            <a:off x="4902200" y="1193800"/>
+            <a:ext cx="3644900" cy="3733800"/>
+          </a:xfrm>
+          <a:prstGeom prst="rect">
+            <a:avLst/>
+          </a:prstGeom>
+          <a:noFill/>
+          <a:ln w="9525">
+            <a:noFill/>
+            <a:headEnd/>
+            <a:tailEnd/>
+          </a:ln>
+        </p:spPr>
+      </p:pic>
     </p:spTree>
   </p:cSld>
 </p:sld>
@@ -7810,20 +7837,20 @@
         </p:nvSpPr>
         <p:spPr>
           <a:xfrm>
-            <a:off x="315045" y="205979"/>
-            <a:ext cx="8529278" cy="857250"/>
-          </a:xfrm>
-        </p:spPr>
-        <p:txBody>
-          <a:bodyPr/>
-          <a:lstStyle/>
-          <a:p>
-            <a:pPr lvl="0" indent="0" marL="0">
-              <a:buNone/>
-            </a:pPr>
-            <a:r>
-              <a:rPr/>
-              <a:t>Jejunostomy Video</a:t>
+            <a:off x="284309" y="205979"/>
+            <a:ext cx="8552330" cy="662317"/>
+          </a:xfrm>
+        </p:spPr>
+        <p:txBody>
+          <a:bodyPr/>
+          <a:lstStyle/>
+          <a:p>
+            <a:pPr lvl="0" indent="0" marL="0">
+              <a:buNone/>
+            </a:pPr>
+            <a:r>
+              <a:rPr/>
+              <a:t>Jejunostomy Typical Regimen</a:t>
             </a:r>
           </a:p>
         </p:txBody>
@@ -7835,7 +7862,7 @@
             <a:spLocks noGrp="1"/>
           </p:cNvSpPr>
           <p:nvPr>
-            <p:ph idx="1" sz="half"/>
+            <p:ph idx="1"/>
           </p:nvPr>
         </p:nvSpPr>
         <p:spPr/>
@@ -7843,46 +7870,44 @@
           <a:bodyPr/>
           <a:lstStyle/>
           <a:p>
-            <a:pPr lvl="0" indent="0" marL="0">
-              <a:buNone/>
-            </a:pPr>
-            <a:r>
-              <a:rPr/>
-              <a:t>A video is available to help become familiar with the feeding jejunostomy</a:t>
-            </a:r>
-          </a:p>
-        </p:txBody>
-      </p:sp>
-      <p:pic>
-        <p:nvPicPr>
-          <p:cNvPr descr="images/nutrition_jejunostomy_qrcode.png" id="0" name="Picture 1"/>
-          <p:cNvPicPr>
-            <a:picLocks noGrp="1" noChangeAspect="1"/>
-          </p:cNvPicPr>
-          <p:nvPr/>
-        </p:nvPicPr>
-        <p:blipFill>
-          <a:blip r:embed="rId2"/>
-          <a:stretch>
-            <a:fillRect/>
-          </a:stretch>
-        </p:blipFill>
-        <p:spPr bwMode="auto">
-          <a:xfrm>
-            <a:off x="5067300" y="1193800"/>
-            <a:ext cx="3327400" cy="3733800"/>
-          </a:xfrm>
-          <a:prstGeom prst="rect">
-            <a:avLst/>
-          </a:prstGeom>
-          <a:noFill/>
-          <a:ln w="9525">
-            <a:noFill/>
-            <a:headEnd/>
-            <a:tailEnd/>
-          </a:ln>
-        </p:spPr>
-      </p:pic>
+            <a:pPr lvl="0"/>
+            <a:r>
+              <a:rPr/>
+              <a:t>Jejunostomy tube feeds for 16 hours (6pm-10am)</a:t>
+            </a:r>
+          </a:p>
+          <a:p>
+            <a:pPr lvl="1"/>
+            <a:r>
+              <a:rPr/>
+              <a:t>Men: 75mL/hour x 16 hours = 5 cartons</a:t>
+            </a:r>
+          </a:p>
+          <a:p>
+            <a:pPr lvl="1"/>
+            <a:r>
+              <a:rPr/>
+              <a:t>Women: 60mL/hour x 16 hours = 4 cartons</a:t>
+            </a:r>
+          </a:p>
+          <a:p>
+            <a:pPr lvl="0"/>
+            <a:r>
+              <a:rPr/>
+              <a:t>Water 240ml (8oz) via syringe 4x/day</a:t>
+            </a:r>
+          </a:p>
+          <a:p>
+            <a:pPr lvl="0" indent="0" marL="0">
+              <a:buNone/>
+            </a:pPr>
+            <a:r>
+              <a:rPr/>
+              <a:t>Hospital nurses will teach use of the feeding tube</a:t>
+            </a:r>
+          </a:p>
+        </p:txBody>
+      </p:sp>
     </p:spTree>
   </p:cSld>
 </p:sld>
@@ -7930,7 +7955,7 @@
             </a:pPr>
             <a:r>
               <a:rPr/>
-              <a:t>Activity after Surgery</a:t>
+              <a:t>Jejunostomy Feeds with Diabetes</a:t>
             </a:r>
           </a:p>
         </p:txBody>
@@ -7950,38 +7975,56 @@
           <a:bodyPr/>
           <a:lstStyle/>
           <a:p>
-            <a:pPr lvl="0"/>
-            <a:r>
-              <a:rPr/>
-              <a:t>Up in chair most of the day</a:t>
-            </a:r>
-          </a:p>
-          <a:p>
-            <a:pPr lvl="0"/>
-            <a:r>
-              <a:rPr/>
-              <a:t>Walking with help from nurse/Physical Therapist</a:t>
-            </a:r>
-          </a:p>
-          <a:p>
-            <a:pPr lvl="0"/>
-            <a:r>
-              <a:rPr/>
-              <a:t>Goals:</a:t>
-            </a:r>
-          </a:p>
-          <a:p>
-            <a:pPr lvl="1"/>
-            <a:r>
-              <a:rPr/>
-              <a:t>Improve lung function</a:t>
-            </a:r>
-          </a:p>
-          <a:p>
-            <a:pPr lvl="1"/>
-            <a:r>
-              <a:rPr/>
-              <a:t>Prevent muscle loss</a:t>
+            <a:pPr lvl="0" indent="0" marL="0">
+              <a:buNone/>
+            </a:pPr>
+            <a:r>
+              <a:rPr/>
+              <a:t>Jejunostomy feedings elevate blood sugars</a:t>
+            </a:r>
+          </a:p>
+          <a:p>
+            <a:pPr lvl="0"/>
+            <a:r>
+              <a:rPr/>
+              <a:t>Insulin may be required along with feeds</a:t>
+            </a:r>
+          </a:p>
+          <a:p>
+            <a:pPr lvl="0" indent="0" marL="0">
+              <a:buNone/>
+            </a:pPr>
+            <a:r>
+              <a:rPr/>
+              <a:t>Typical Pattern for tube feeds</a:t>
+            </a:r>
+          </a:p>
+          <a:p>
+            <a:pPr lvl="0"/>
+            <a:r>
+              <a:rPr/>
+              <a:t>Feeds run via pump from 6pm to 10am</a:t>
+            </a:r>
+          </a:p>
+          <a:p>
+            <a:pPr lvl="0"/>
+            <a:r>
+              <a:rPr/>
+              <a:t>Insulin at 6pm (70/30 insulin)</a:t>
+            </a:r>
+          </a:p>
+          <a:p>
+            <a:pPr lvl="0"/>
+            <a:r>
+              <a:rPr/>
+              <a:t>Insulin at Midnight (70/30 insulin)</a:t>
+            </a:r>
+          </a:p>
+          <a:p>
+            <a:pPr lvl="0"/>
+            <a:r>
+              <a:rPr/>
+              <a:t>No insulin if tube feedings are not run</a:t>
             </a:r>
           </a:p>
         </p:txBody>
@@ -7992,6 +8035,216 @@
 </file>
 
 <file path=ppt/slides/slide44.xml><?xml version="1.0" encoding="utf-8"?>
+<p:sld xmlns:a="http://schemas.openxmlformats.org/drawingml/2006/main" xmlns:r="http://schemas.openxmlformats.org/officeDocument/2006/relationships" xmlns:p="http://schemas.openxmlformats.org/presentationml/2006/main">
+  <p:cSld>
+    <p:spTree>
+      <p:nvGrpSpPr>
+        <p:cNvPr id="1" name=""/>
+        <p:cNvGrpSpPr/>
+        <p:nvPr/>
+      </p:nvGrpSpPr>
+      <p:grpSpPr>
+        <a:xfrm>
+          <a:off x="0" y="0"/>
+          <a:ext cx="0" cy="0"/>
+          <a:chOff x="0" y="0"/>
+          <a:chExt cx="0" cy="0"/>
+        </a:xfrm>
+      </p:grpSpPr>
+      <p:sp>
+        <p:nvSpPr>
+          <p:cNvPr id="2" name="Title 1"/>
+          <p:cNvSpPr>
+            <a:spLocks noGrp="1"/>
+          </p:cNvSpPr>
+          <p:nvPr>
+            <p:ph type="title"/>
+          </p:nvPr>
+        </p:nvSpPr>
+        <p:spPr>
+          <a:xfrm>
+            <a:off x="315045" y="205979"/>
+            <a:ext cx="8529278" cy="857250"/>
+          </a:xfrm>
+        </p:spPr>
+        <p:txBody>
+          <a:bodyPr/>
+          <a:lstStyle/>
+          <a:p>
+            <a:pPr lvl="0" indent="0" marL="0">
+              <a:buNone/>
+            </a:pPr>
+            <a:r>
+              <a:rPr/>
+              <a:t>Jejunostomy Video</a:t>
+            </a:r>
+          </a:p>
+        </p:txBody>
+      </p:sp>
+      <p:sp>
+        <p:nvSpPr>
+          <p:cNvPr id="3" name="Content Placeholder 2"/>
+          <p:cNvSpPr>
+            <a:spLocks noGrp="1"/>
+          </p:cNvSpPr>
+          <p:nvPr>
+            <p:ph idx="1" sz="half"/>
+          </p:nvPr>
+        </p:nvSpPr>
+        <p:spPr/>
+        <p:txBody>
+          <a:bodyPr/>
+          <a:lstStyle/>
+          <a:p>
+            <a:pPr lvl="0" indent="0" marL="0">
+              <a:buNone/>
+            </a:pPr>
+            <a:r>
+              <a:rPr/>
+              <a:t>A video is available to help become familiar with the feeding jejunostomy</a:t>
+            </a:r>
+          </a:p>
+        </p:txBody>
+      </p:sp>
+      <p:pic>
+        <p:nvPicPr>
+          <p:cNvPr descr="images/nutrition_jejunostomy_qrcode.png" id="0" name="Picture 1"/>
+          <p:cNvPicPr>
+            <a:picLocks noGrp="1" noChangeAspect="1"/>
+          </p:cNvPicPr>
+          <p:nvPr/>
+        </p:nvPicPr>
+        <p:blipFill>
+          <a:blip r:embed="rId2"/>
+          <a:stretch>
+            <a:fillRect/>
+          </a:stretch>
+        </p:blipFill>
+        <p:spPr bwMode="auto">
+          <a:xfrm>
+            <a:off x="5067300" y="1193800"/>
+            <a:ext cx="3327400" cy="3733800"/>
+          </a:xfrm>
+          <a:prstGeom prst="rect">
+            <a:avLst/>
+          </a:prstGeom>
+          <a:noFill/>
+          <a:ln w="9525">
+            <a:noFill/>
+            <a:headEnd/>
+            <a:tailEnd/>
+          </a:ln>
+        </p:spPr>
+      </p:pic>
+    </p:spTree>
+  </p:cSld>
+</p:sld>
+</file>
+
+<file path=ppt/slides/slide45.xml><?xml version="1.0" encoding="utf-8"?>
+<p:sld xmlns:a="http://schemas.openxmlformats.org/drawingml/2006/main" xmlns:r="http://schemas.openxmlformats.org/officeDocument/2006/relationships" xmlns:p="http://schemas.openxmlformats.org/presentationml/2006/main">
+  <p:cSld>
+    <p:spTree>
+      <p:nvGrpSpPr>
+        <p:cNvPr id="1" name=""/>
+        <p:cNvGrpSpPr/>
+        <p:nvPr/>
+      </p:nvGrpSpPr>
+      <p:grpSpPr>
+        <a:xfrm>
+          <a:off x="0" y="0"/>
+          <a:ext cx="0" cy="0"/>
+          <a:chOff x="0" y="0"/>
+          <a:chExt cx="0" cy="0"/>
+        </a:xfrm>
+      </p:grpSpPr>
+      <p:sp>
+        <p:nvSpPr>
+          <p:cNvPr id="2" name="Title 1"/>
+          <p:cNvSpPr>
+            <a:spLocks noGrp="1"/>
+          </p:cNvSpPr>
+          <p:nvPr>
+            <p:ph type="title"/>
+          </p:nvPr>
+        </p:nvSpPr>
+        <p:spPr>
+          <a:xfrm>
+            <a:off x="284309" y="205979"/>
+            <a:ext cx="8552330" cy="662317"/>
+          </a:xfrm>
+        </p:spPr>
+        <p:txBody>
+          <a:bodyPr/>
+          <a:lstStyle/>
+          <a:p>
+            <a:pPr lvl="0" indent="0" marL="0">
+              <a:buNone/>
+            </a:pPr>
+            <a:r>
+              <a:rPr/>
+              <a:t>Activity after Surgery</a:t>
+            </a:r>
+          </a:p>
+        </p:txBody>
+      </p:sp>
+      <p:sp>
+        <p:nvSpPr>
+          <p:cNvPr id="3" name="Content Placeholder 2"/>
+          <p:cNvSpPr>
+            <a:spLocks noGrp="1"/>
+          </p:cNvSpPr>
+          <p:nvPr>
+            <p:ph idx="1"/>
+          </p:nvPr>
+        </p:nvSpPr>
+        <p:spPr/>
+        <p:txBody>
+          <a:bodyPr/>
+          <a:lstStyle/>
+          <a:p>
+            <a:pPr lvl="0"/>
+            <a:r>
+              <a:rPr/>
+              <a:t>Up in chair most of the day</a:t>
+            </a:r>
+          </a:p>
+          <a:p>
+            <a:pPr lvl="0"/>
+            <a:r>
+              <a:rPr/>
+              <a:t>Walking with help from nurse/Physical Therapist</a:t>
+            </a:r>
+          </a:p>
+          <a:p>
+            <a:pPr lvl="0"/>
+            <a:r>
+              <a:rPr/>
+              <a:t>Goals:</a:t>
+            </a:r>
+          </a:p>
+          <a:p>
+            <a:pPr lvl="1"/>
+            <a:r>
+              <a:rPr/>
+              <a:t>Improve lung function</a:t>
+            </a:r>
+          </a:p>
+          <a:p>
+            <a:pPr lvl="1"/>
+            <a:r>
+              <a:rPr/>
+              <a:t>Prevent muscle loss</a:t>
+            </a:r>
+          </a:p>
+        </p:txBody>
+      </p:sp>
+    </p:spTree>
+  </p:cSld>
+</p:sld>
+</file>
+
+<file path=ppt/slides/slide46.xml><?xml version="1.0" encoding="utf-8"?>
 <p:sld xmlns:a="http://schemas.openxmlformats.org/drawingml/2006/main" xmlns:r="http://schemas.openxmlformats.org/officeDocument/2006/relationships" xmlns:p="http://schemas.openxmlformats.org/presentationml/2006/main">
   <p:cSld>
     <p:spTree>
@@ -8123,7 +8376,7 @@
 </p:sld>
 </file>
 
-<file path=ppt/slides/slide45.xml><?xml version="1.0" encoding="utf-8"?>
+<file path=ppt/slides/slide47.xml><?xml version="1.0" encoding="utf-8"?>
 <p:sld xmlns:a="http://schemas.openxmlformats.org/drawingml/2006/main" xmlns:r="http://schemas.openxmlformats.org/officeDocument/2006/relationships" xmlns:p="http://schemas.openxmlformats.org/presentationml/2006/main">
   <p:cSld>
     <p:spTree>
@@ -8222,7 +8475,7 @@
                 <a:pPr lvl="0"/>
                 <a:r>
                   <a:rPr/>
-                  <a:t>70% of patients </a:t>
+                  <a:t>80% of patients </a:t>
                 </a:r>
                 <a14:m>
                   <m:oMath xmlns:m="http://schemas.openxmlformats.org/officeDocument/2006/math">
@@ -8248,233 +8501,6 @@
 </p:sld>
 </file>
 
-<file path=ppt/slides/slide46.xml><?xml version="1.0" encoding="utf-8"?>
-<p:sld xmlns:a="http://schemas.openxmlformats.org/drawingml/2006/main" xmlns:r="http://schemas.openxmlformats.org/officeDocument/2006/relationships" xmlns:p="http://schemas.openxmlformats.org/presentationml/2006/main">
-  <p:cSld>
-    <p:spTree>
-      <p:nvGrpSpPr>
-        <p:cNvPr id="1" name=""/>
-        <p:cNvGrpSpPr/>
-        <p:nvPr/>
-      </p:nvGrpSpPr>
-      <p:grpSpPr>
-        <a:xfrm>
-          <a:off x="0" y="0"/>
-          <a:ext cx="0" cy="0"/>
-          <a:chOff x="0" y="0"/>
-          <a:chExt cx="0" cy="0"/>
-        </a:xfrm>
-      </p:grpSpPr>
-      <p:sp>
-        <p:nvSpPr>
-          <p:cNvPr id="2" name="Title 1"/>
-          <p:cNvSpPr>
-            <a:spLocks noGrp="1"/>
-          </p:cNvSpPr>
-          <p:nvPr>
-            <p:ph type="title"/>
-          </p:nvPr>
-        </p:nvSpPr>
-        <p:spPr>
-          <a:xfrm>
-            <a:off x="284309" y="205979"/>
-            <a:ext cx="8552330" cy="662317"/>
-          </a:xfrm>
-        </p:spPr>
-        <p:txBody>
-          <a:bodyPr/>
-          <a:lstStyle/>
-          <a:p>
-            <a:pPr lvl="0" indent="0" marL="0">
-              <a:buNone/>
-            </a:pPr>
-            <a:r>
-              <a:rPr/>
-              <a:t>Oral Intake at Home</a:t>
-            </a:r>
-          </a:p>
-        </p:txBody>
-      </p:sp>
-      <p:sp>
-        <p:nvSpPr>
-          <p:cNvPr id="3" name="Content Placeholder 2"/>
-          <p:cNvSpPr>
-            <a:spLocks noGrp="1"/>
-          </p:cNvSpPr>
-          <p:nvPr>
-            <p:ph idx="1"/>
-          </p:nvPr>
-        </p:nvSpPr>
-        <p:spPr/>
-        <p:txBody>
-          <a:bodyPr/>
-          <a:lstStyle/>
-          <a:p>
-            <a:pPr lvl="0" indent="0" marL="0">
-              <a:buNone/>
-            </a:pPr>
-            <a:r>
-              <a:rPr/>
-              <a:t>Most are taking protein shakes when they go home</a:t>
-            </a:r>
-          </a:p>
-          <a:p>
-            <a:pPr lvl="0" indent="0" marL="0">
-              <a:buNone/>
-            </a:pPr>
-            <a:r>
-              <a:rPr/>
-              <a:t>Protein shakes are started after tolerating water</a:t>
-            </a:r>
-            <a:br/>
-          </a:p>
-          <a:p>
-            <a:pPr lvl="0"/>
-            <a:r>
-              <a:rPr/>
-              <a:t>2 oz per hour to start</a:t>
-            </a:r>
-          </a:p>
-          <a:p>
-            <a:pPr lvl="0"/>
-            <a:r>
-              <a:rPr/>
-              <a:t>4 oz per hour if 2oz are tolerated well</a:t>
-            </a:r>
-          </a:p>
-        </p:txBody>
-      </p:sp>
-    </p:spTree>
-  </p:cSld>
-</p:sld>
-</file>
-
-<file path=ppt/slides/slide47.xml><?xml version="1.0" encoding="utf-8"?>
-<p:sld xmlns:a="http://schemas.openxmlformats.org/drawingml/2006/main" xmlns:r="http://schemas.openxmlformats.org/officeDocument/2006/relationships" xmlns:p="http://schemas.openxmlformats.org/presentationml/2006/main">
-  <p:cSld>
-    <p:spTree>
-      <p:nvGrpSpPr>
-        <p:cNvPr id="1" name=""/>
-        <p:cNvGrpSpPr/>
-        <p:nvPr/>
-      </p:nvGrpSpPr>
-      <p:grpSpPr>
-        <a:xfrm>
-          <a:off x="0" y="0"/>
-          <a:ext cx="0" cy="0"/>
-          <a:chOff x="0" y="0"/>
-          <a:chExt cx="0" cy="0"/>
-        </a:xfrm>
-      </p:grpSpPr>
-      <p:sp>
-        <p:nvSpPr>
-          <p:cNvPr id="2" name="Title 1"/>
-          <p:cNvSpPr>
-            <a:spLocks noGrp="1"/>
-          </p:cNvSpPr>
-          <p:nvPr>
-            <p:ph type="title"/>
-          </p:nvPr>
-        </p:nvSpPr>
-        <p:spPr>
-          <a:xfrm>
-            <a:off x="284309" y="205979"/>
-            <a:ext cx="8552330" cy="662317"/>
-          </a:xfrm>
-        </p:spPr>
-        <p:txBody>
-          <a:bodyPr/>
-          <a:lstStyle/>
-          <a:p>
-            <a:pPr lvl="0" indent="0" marL="0">
-              <a:buNone/>
-            </a:pPr>
-            <a:r>
-              <a:rPr/>
-              <a:t>Discharge</a:t>
-            </a:r>
-          </a:p>
-        </p:txBody>
-      </p:sp>
-      <p:sp>
-        <p:nvSpPr>
-          <p:cNvPr id="3" name="Content Placeholder 2"/>
-          <p:cNvSpPr>
-            <a:spLocks noGrp="1"/>
-          </p:cNvSpPr>
-          <p:nvPr>
-            <p:ph idx="1"/>
-          </p:nvPr>
-        </p:nvSpPr>
-        <p:spPr/>
-        <p:txBody>
-          <a:bodyPr/>
-          <a:lstStyle/>
-          <a:p>
-            <a:pPr lvl="0" indent="0" marL="0">
-              <a:buNone/>
-            </a:pPr>
-            <a:r>
-              <a:rPr/>
-              <a:t>Goal: ready to leave day #6/7 after surgery</a:t>
-            </a:r>
-          </a:p>
-          <a:p>
-            <a:pPr lvl="0"/>
-            <a:r>
-              <a:rPr/>
-              <a:t>Night-time tube feedings (6pm to 10am)</a:t>
-            </a:r>
-          </a:p>
-          <a:p>
-            <a:pPr lvl="0"/>
-            <a:r>
-              <a:rPr/>
-              <a:t>Nutrition by mouth (70% of patients)</a:t>
-            </a:r>
-          </a:p>
-          <a:p>
-            <a:pPr lvl="1"/>
-            <a:r>
-              <a:rPr/>
-              <a:t>1 oz of water per hour by mouth OR</a:t>
-            </a:r>
-          </a:p>
-          <a:p>
-            <a:pPr lvl="1"/>
-            <a:r>
-              <a:rPr/>
-              <a:t>Protein shakes 4oz every 2 hours</a:t>
-            </a:r>
-          </a:p>
-          <a:p>
-            <a:pPr lvl="0"/>
-            <a:r>
-              <a:rPr/>
-              <a:t>Water through tube 8oz four times per day</a:t>
-            </a:r>
-          </a:p>
-          <a:p>
-            <a:pPr lvl="0"/>
-            <a:r>
-              <a:rPr/>
-              <a:t>Home care nursing (feeding tube teaching)</a:t>
-            </a:r>
-          </a:p>
-          <a:p>
-            <a:pPr lvl="0"/>
-            <a:r>
-              <a:rPr/>
-              <a:t>Home infusion (tube feeding supplies)</a:t>
-            </a:r>
-          </a:p>
-        </p:txBody>
-      </p:sp>
-    </p:spTree>
-  </p:cSld>
-</p:sld>
-</file>
-
 <file path=ppt/slides/slide48.xml><?xml version="1.0" encoding="utf-8"?>
 <p:sld xmlns:a="http://schemas.openxmlformats.org/drawingml/2006/main" xmlns:r="http://schemas.openxmlformats.org/officeDocument/2006/relationships" xmlns:p="http://schemas.openxmlformats.org/presentationml/2006/main">
   <p:cSld>
@@ -8517,7 +8543,7 @@
             </a:pPr>
             <a:r>
               <a:rPr/>
-              <a:t>Nutrition after Surgery</a:t>
+              <a:t>Jejunostomy tube</a:t>
             </a:r>
           </a:p>
         </p:txBody>
@@ -8542,55 +8568,16 @@
             </a:pPr>
             <a:r>
               <a:rPr/>
-              <a:t>At discharge home:</a:t>
-            </a:r>
-          </a:p>
-          <a:p>
-            <a:pPr lvl="0"/>
-            <a:r>
-              <a:rPr/>
-              <a:t>Protein shakes 4oz every 2 hrs</a:t>
-            </a:r>
-          </a:p>
-          <a:p>
-            <a:pPr lvl="0"/>
-            <a:r>
-              <a:rPr/>
-              <a:t>Tube feeds 4-5 cans at night (6pm-10am)</a:t>
-            </a:r>
-          </a:p>
-          <a:p>
-            <a:pPr lvl="0" indent="0" marL="0">
-              <a:buNone/>
-            </a:pPr>
-            <a:r>
-              <a:rPr/>
-              <a:t>10-12 Days: Increase protein shakes</a:t>
-            </a:r>
-          </a:p>
-          <a:p>
-            <a:pPr lvl="0"/>
-            <a:r>
-              <a:rPr/>
-              <a:t>Tube feeds 3-4 cans at night</a:t>
-            </a:r>
-          </a:p>
-          <a:p>
-            <a:pPr lvl="0" indent="0" marL="0">
-              <a:buNone/>
-            </a:pPr>
-            <a:r>
-              <a:rPr/>
-              <a:t>Three weeks: Post-esophagectomy Diet</a:t>
-            </a:r>
-          </a:p>
-          <a:p>
-            <a:pPr lvl="0" indent="0" marL="0">
-              <a:buNone/>
-            </a:pPr>
-            <a:r>
-              <a:rPr/>
-              <a:t>8-12 weeks: Remove feeding tube (in office)</a:t>
+              <a:t>Jejunostomy tube bypasses the stomach and injects tube feeding formula directly in to the small intestine (jejunum)</a:t>
+            </a:r>
+          </a:p>
+          <a:p>
+            <a:pPr lvl="0" indent="0" marL="0">
+              <a:buNone/>
+            </a:pPr>
+            <a:r>
+              <a:rPr/>
+              <a:t>Pump administers the feedings slowly over hours</a:t>
             </a:r>
           </a:p>
         </p:txBody>
@@ -8601,6 +8588,646 @@
 </file>
 
 <file path=ppt/slides/slide49.xml><?xml version="1.0" encoding="utf-8"?>
+<p:sld xmlns:a="http://schemas.openxmlformats.org/drawingml/2006/main" xmlns:r="http://schemas.openxmlformats.org/officeDocument/2006/relationships" xmlns:p="http://schemas.openxmlformats.org/presentationml/2006/main">
+  <p:cSld>
+    <p:spTree>
+      <p:nvGrpSpPr>
+        <p:cNvPr id="1" name=""/>
+        <p:cNvGrpSpPr/>
+        <p:nvPr/>
+      </p:nvGrpSpPr>
+      <p:grpSpPr>
+        <a:xfrm>
+          <a:off x="0" y="0"/>
+          <a:ext cx="0" cy="0"/>
+          <a:chOff x="0" y="0"/>
+          <a:chExt cx="0" cy="0"/>
+        </a:xfrm>
+      </p:grpSpPr>
+      <p:sp>
+        <p:nvSpPr>
+          <p:cNvPr id="2" name="Title 1"/>
+          <p:cNvSpPr>
+            <a:spLocks noGrp="1"/>
+          </p:cNvSpPr>
+          <p:nvPr>
+            <p:ph type="title"/>
+          </p:nvPr>
+        </p:nvSpPr>
+        <p:spPr>
+          <a:xfrm>
+            <a:off x="284309" y="205979"/>
+            <a:ext cx="8552330" cy="662317"/>
+          </a:xfrm>
+        </p:spPr>
+        <p:txBody>
+          <a:bodyPr/>
+          <a:lstStyle/>
+          <a:p>
+            <a:pPr lvl="0" indent="0" marL="0">
+              <a:buNone/>
+            </a:pPr>
+            <a:r>
+              <a:rPr/>
+              <a:t>Jejunostomy feeding</a:t>
+            </a:r>
+          </a:p>
+        </p:txBody>
+      </p:sp>
+      <p:sp>
+        <p:nvSpPr>
+          <p:cNvPr id="3" name="Content Placeholder 2"/>
+          <p:cNvSpPr>
+            <a:spLocks noGrp="1"/>
+          </p:cNvSpPr>
+          <p:nvPr>
+            <p:ph idx="1"/>
+          </p:nvPr>
+        </p:nvSpPr>
+        <p:spPr/>
+        <p:txBody>
+          <a:bodyPr/>
+          <a:lstStyle/>
+          <a:p>
+            <a:pPr lvl="0"/>
+            <a:r>
+              <a:rPr/>
+              <a:t>Start with continuous feeds (24 hours/day)</a:t>
+            </a:r>
+          </a:p>
+          <a:p>
+            <a:pPr lvl="0"/>
+            <a:r>
+              <a:rPr/>
+              <a:t>Convert to nocturnal (night-time): 6pm to 10pm</a:t>
+            </a:r>
+          </a:p>
+          <a:p>
+            <a:pPr lvl="0" indent="0" marL="0">
+              <a:buNone/>
+            </a:pPr>
+            <a:r>
+              <a:rPr/>
+              <a:t>The feeding bag holds only 4 cartons of feeds - May need to “top off’ bag after a few hours</a:t>
+            </a:r>
+          </a:p>
+          <a:p>
+            <a:pPr lvl="0" indent="0" marL="0">
+              <a:buNone/>
+            </a:pPr>
+            <a:r>
+              <a:rPr/>
+              <a:t>Water through the tube - Important to prevent dehydration - 250mL (8 oz) 4 times per day</a:t>
+            </a:r>
+          </a:p>
+        </p:txBody>
+      </p:sp>
+    </p:spTree>
+  </p:cSld>
+</p:sld>
+</file>
+
+<file path=ppt/slides/slide5.xml><?xml version="1.0" encoding="utf-8"?>
+<p:sld xmlns:a="http://schemas.openxmlformats.org/drawingml/2006/main" xmlns:r="http://schemas.openxmlformats.org/officeDocument/2006/relationships" xmlns:p="http://schemas.openxmlformats.org/presentationml/2006/main">
+  <p:cSld>
+    <p:spTree>
+      <p:nvGrpSpPr>
+        <p:cNvPr id="1" name=""/>
+        <p:cNvGrpSpPr/>
+        <p:nvPr/>
+      </p:nvGrpSpPr>
+      <p:grpSpPr>
+        <a:xfrm>
+          <a:off x="0" y="0"/>
+          <a:ext cx="0" cy="0"/>
+          <a:chOff x="0" y="0"/>
+          <a:chExt cx="0" cy="0"/>
+        </a:xfrm>
+      </p:grpSpPr>
+      <p:sp>
+        <p:nvSpPr>
+          <p:cNvPr id="2" name="Title 1"/>
+          <p:cNvSpPr>
+            <a:spLocks noGrp="1"/>
+          </p:cNvSpPr>
+          <p:nvPr>
+            <p:ph type="title"/>
+          </p:nvPr>
+        </p:nvSpPr>
+        <p:spPr>
+          <a:xfrm>
+            <a:off x="284309" y="205979"/>
+            <a:ext cx="8552330" cy="662317"/>
+          </a:xfrm>
+        </p:spPr>
+        <p:txBody>
+          <a:bodyPr/>
+          <a:lstStyle/>
+          <a:p>
+            <a:pPr lvl="0" indent="0" marL="0">
+              <a:buNone/>
+            </a:pPr>
+            <a:r>
+              <a:rPr/>
+              <a:t>Exercies Prior to Surgery</a:t>
+            </a:r>
+          </a:p>
+        </p:txBody>
+      </p:sp>
+      <p:sp>
+        <p:nvSpPr>
+          <p:cNvPr id="3" name="Content Placeholder 2"/>
+          <p:cNvSpPr>
+            <a:spLocks noGrp="1"/>
+          </p:cNvSpPr>
+          <p:nvPr>
+            <p:ph idx="1"/>
+          </p:nvPr>
+        </p:nvSpPr>
+        <p:spPr/>
+        <p:txBody>
+          <a:bodyPr/>
+          <a:lstStyle/>
+          <a:p>
+            <a:pPr lvl="0" indent="0" marL="0">
+              <a:buNone/>
+            </a:pPr>
+            <a:r>
+              <a:rPr/>
+              <a:t>Goal: 30minutes/day of vigorous exercise 6 days/week</a:t>
+            </a:r>
+          </a:p>
+          <a:p>
+            <a:pPr lvl="0" indent="0" marL="0">
+              <a:buNone/>
+            </a:pPr>
+            <a:r>
+              <a:rPr/>
+              <a:t>Vigorous: Working hard enough you can’t carry a conversation</a:t>
+            </a:r>
+          </a:p>
+          <a:p>
+            <a:pPr lvl="0" indent="0" marL="0">
+              <a:buNone/>
+            </a:pPr>
+            <a:r>
+              <a:rPr/>
+              <a:t>Types of Exercise:</a:t>
+            </a:r>
+          </a:p>
+          <a:p>
+            <a:pPr lvl="0"/>
+            <a:r>
+              <a:rPr/>
+              <a:t>Walking: Outside, Treadmilll, or an indoor Mall</a:t>
+            </a:r>
+          </a:p>
+          <a:p>
+            <a:pPr lvl="0"/>
+            <a:r>
+              <a:rPr/>
+              <a:t>Stationary Exercise Bike</a:t>
+            </a:r>
+          </a:p>
+          <a:p>
+            <a:pPr lvl="0" indent="0" marL="0">
+              <a:buNone/>
+            </a:pPr>
+            <a:r>
+              <a:rPr/>
+              <a:t>Lifting light weights and stretching are helpful in addition</a:t>
+            </a:r>
+          </a:p>
+        </p:txBody>
+      </p:sp>
+    </p:spTree>
+  </p:cSld>
+</p:sld>
+</file>
+
+<file path=ppt/slides/slide50.xml><?xml version="1.0" encoding="utf-8"?>
+<p:sld xmlns:a="http://schemas.openxmlformats.org/drawingml/2006/main" xmlns:r="http://schemas.openxmlformats.org/officeDocument/2006/relationships" xmlns:p="http://schemas.openxmlformats.org/presentationml/2006/main">
+  <p:cSld>
+    <p:spTree>
+      <p:nvGrpSpPr>
+        <p:cNvPr id="1" name=""/>
+        <p:cNvGrpSpPr/>
+        <p:nvPr/>
+      </p:nvGrpSpPr>
+      <p:grpSpPr>
+        <a:xfrm>
+          <a:off x="0" y="0"/>
+          <a:ext cx="0" cy="0"/>
+          <a:chOff x="0" y="0"/>
+          <a:chExt cx="0" cy="0"/>
+        </a:xfrm>
+      </p:grpSpPr>
+      <p:sp>
+        <p:nvSpPr>
+          <p:cNvPr id="2" name="Title 1"/>
+          <p:cNvSpPr>
+            <a:spLocks noGrp="1"/>
+          </p:cNvSpPr>
+          <p:nvPr>
+            <p:ph type="title"/>
+          </p:nvPr>
+        </p:nvSpPr>
+        <p:spPr>
+          <a:xfrm>
+            <a:off x="284309" y="205979"/>
+            <a:ext cx="8552330" cy="662317"/>
+          </a:xfrm>
+        </p:spPr>
+        <p:txBody>
+          <a:bodyPr/>
+          <a:lstStyle/>
+          <a:p>
+            <a:pPr lvl="0" indent="0" marL="0">
+              <a:buNone/>
+            </a:pPr>
+            <a:r>
+              <a:rPr/>
+              <a:t>Oral Intake at Home</a:t>
+            </a:r>
+          </a:p>
+        </p:txBody>
+      </p:sp>
+      <p:sp>
+        <p:nvSpPr>
+          <p:cNvPr id="3" name="Content Placeholder 2"/>
+          <p:cNvSpPr>
+            <a:spLocks noGrp="1"/>
+          </p:cNvSpPr>
+          <p:nvPr>
+            <p:ph idx="1"/>
+          </p:nvPr>
+        </p:nvSpPr>
+        <p:spPr/>
+        <p:txBody>
+          <a:bodyPr/>
+          <a:lstStyle/>
+          <a:p>
+            <a:pPr lvl="0" indent="0" marL="0">
+              <a:buNone/>
+            </a:pPr>
+            <a:r>
+              <a:rPr/>
+              <a:t>Most are taking protein shakes when they go home</a:t>
+            </a:r>
+          </a:p>
+          <a:p>
+            <a:pPr lvl="0" indent="0" marL="0">
+              <a:buNone/>
+            </a:pPr>
+            <a:r>
+              <a:rPr/>
+              <a:t>Protein shakes are started after tolerating water</a:t>
+            </a:r>
+            <a:br/>
+          </a:p>
+          <a:p>
+            <a:pPr lvl="0"/>
+            <a:r>
+              <a:rPr/>
+              <a:t>2 oz per hour to start</a:t>
+            </a:r>
+          </a:p>
+          <a:p>
+            <a:pPr lvl="0"/>
+            <a:r>
+              <a:rPr/>
+              <a:t>4 oz per hour if 2oz are tolerated well</a:t>
+            </a:r>
+          </a:p>
+        </p:txBody>
+      </p:sp>
+    </p:spTree>
+  </p:cSld>
+</p:sld>
+</file>
+
+<file path=ppt/slides/slide51.xml><?xml version="1.0" encoding="utf-8"?>
+<p:sld xmlns:a="http://schemas.openxmlformats.org/drawingml/2006/main" xmlns:r="http://schemas.openxmlformats.org/officeDocument/2006/relationships" xmlns:p="http://schemas.openxmlformats.org/presentationml/2006/main">
+  <p:cSld>
+    <p:spTree>
+      <p:nvGrpSpPr>
+        <p:cNvPr id="1" name=""/>
+        <p:cNvGrpSpPr/>
+        <p:nvPr/>
+      </p:nvGrpSpPr>
+      <p:grpSpPr>
+        <a:xfrm>
+          <a:off x="0" y="0"/>
+          <a:ext cx="0" cy="0"/>
+          <a:chOff x="0" y="0"/>
+          <a:chExt cx="0" cy="0"/>
+        </a:xfrm>
+      </p:grpSpPr>
+      <p:sp>
+        <p:nvSpPr>
+          <p:cNvPr id="2" name="Title 1"/>
+          <p:cNvSpPr>
+            <a:spLocks noGrp="1"/>
+          </p:cNvSpPr>
+          <p:nvPr>
+            <p:ph type="title"/>
+          </p:nvPr>
+        </p:nvSpPr>
+        <p:spPr>
+          <a:xfrm>
+            <a:off x="284309" y="205979"/>
+            <a:ext cx="8552330" cy="662317"/>
+          </a:xfrm>
+        </p:spPr>
+        <p:txBody>
+          <a:bodyPr/>
+          <a:lstStyle/>
+          <a:p>
+            <a:pPr lvl="0" indent="0" marL="0">
+              <a:buNone/>
+            </a:pPr>
+            <a:r>
+              <a:rPr/>
+              <a:t>Drains and Tubes</a:t>
+            </a:r>
+          </a:p>
+        </p:txBody>
+      </p:sp>
+      <p:sp>
+        <p:nvSpPr>
+          <p:cNvPr id="3" name="Content Placeholder 2"/>
+          <p:cNvSpPr>
+            <a:spLocks noGrp="1"/>
+          </p:cNvSpPr>
+          <p:nvPr>
+            <p:ph idx="1"/>
+          </p:nvPr>
+        </p:nvSpPr>
+        <p:spPr/>
+        <p:txBody>
+          <a:bodyPr/>
+          <a:lstStyle/>
+          <a:p>
+            <a:pPr lvl="0" indent="0" marL="0">
+              <a:buNone/>
+            </a:pPr>
+            <a:r>
+              <a:rPr/>
+              <a:t>Chest Tube (right side): Removed 4-6 days after surgery (depending upon output) Abdomiaal drains: Removed 4-7 days after surgery Discharge with 1 abdominal drain in 10% of cases Epidural catheter: Removed 4-5 days after surgery Bladder catheter: Removed after epicura catheter removed</a:t>
+            </a:r>
+          </a:p>
+        </p:txBody>
+      </p:sp>
+    </p:spTree>
+  </p:cSld>
+</p:sld>
+</file>
+
+<file path=ppt/slides/slide52.xml><?xml version="1.0" encoding="utf-8"?>
+<p:sld xmlns:a="http://schemas.openxmlformats.org/drawingml/2006/main" xmlns:r="http://schemas.openxmlformats.org/officeDocument/2006/relationships" xmlns:p="http://schemas.openxmlformats.org/presentationml/2006/main">
+  <p:cSld>
+    <p:spTree>
+      <p:nvGrpSpPr>
+        <p:cNvPr id="1" name=""/>
+        <p:cNvGrpSpPr/>
+        <p:nvPr/>
+      </p:nvGrpSpPr>
+      <p:grpSpPr>
+        <a:xfrm>
+          <a:off x="0" y="0"/>
+          <a:ext cx="0" cy="0"/>
+          <a:chOff x="0" y="0"/>
+          <a:chExt cx="0" cy="0"/>
+        </a:xfrm>
+      </p:grpSpPr>
+      <p:sp>
+        <p:nvSpPr>
+          <p:cNvPr id="2" name="Title 1"/>
+          <p:cNvSpPr>
+            <a:spLocks noGrp="1"/>
+          </p:cNvSpPr>
+          <p:nvPr>
+            <p:ph type="title"/>
+          </p:nvPr>
+        </p:nvSpPr>
+        <p:spPr>
+          <a:xfrm>
+            <a:off x="284309" y="205979"/>
+            <a:ext cx="8552330" cy="662317"/>
+          </a:xfrm>
+        </p:spPr>
+        <p:txBody>
+          <a:bodyPr/>
+          <a:lstStyle/>
+          <a:p>
+            <a:pPr lvl="0" indent="0" marL="0">
+              <a:buNone/>
+            </a:pPr>
+            <a:r>
+              <a:rPr/>
+              <a:t>Discharge</a:t>
+            </a:r>
+          </a:p>
+        </p:txBody>
+      </p:sp>
+      <p:sp>
+        <p:nvSpPr>
+          <p:cNvPr id="3" name="Content Placeholder 2"/>
+          <p:cNvSpPr>
+            <a:spLocks noGrp="1"/>
+          </p:cNvSpPr>
+          <p:nvPr>
+            <p:ph idx="1"/>
+          </p:nvPr>
+        </p:nvSpPr>
+        <p:spPr/>
+        <p:txBody>
+          <a:bodyPr/>
+          <a:lstStyle/>
+          <a:p>
+            <a:pPr lvl="0" indent="0" marL="0">
+              <a:buNone/>
+            </a:pPr>
+            <a:r>
+              <a:rPr/>
+              <a:t>Goal: ready to leave day #7 after surgery</a:t>
+            </a:r>
+          </a:p>
+          <a:p>
+            <a:pPr lvl="0"/>
+            <a:r>
+              <a:rPr/>
+              <a:t>Night-time tube feedings (6pm to 10am)</a:t>
+            </a:r>
+          </a:p>
+          <a:p>
+            <a:pPr lvl="0"/>
+            <a:r>
+              <a:rPr/>
+              <a:t>Nutrition by mouth (90% of patients)</a:t>
+            </a:r>
+          </a:p>
+          <a:p>
+            <a:pPr lvl="1"/>
+            <a:r>
+              <a:rPr/>
+              <a:t>Protein shakes or water 4oz every 2 hours</a:t>
+            </a:r>
+          </a:p>
+          <a:p>
+            <a:pPr lvl="0"/>
+            <a:r>
+              <a:rPr/>
+              <a:t>Water through tube 8oz four times per day</a:t>
+            </a:r>
+          </a:p>
+          <a:p>
+            <a:pPr lvl="0"/>
+            <a:r>
+              <a:rPr/>
+              <a:t>Home care nursing (feeding tube teaching)</a:t>
+            </a:r>
+          </a:p>
+          <a:p>
+            <a:pPr lvl="0"/>
+            <a:r>
+              <a:rPr/>
+              <a:t>Home infusion (tube feeding supplies)</a:t>
+            </a:r>
+          </a:p>
+        </p:txBody>
+      </p:sp>
+    </p:spTree>
+  </p:cSld>
+</p:sld>
+</file>
+
+<file path=ppt/slides/slide53.xml><?xml version="1.0" encoding="utf-8"?>
+<p:sld xmlns:a="http://schemas.openxmlformats.org/drawingml/2006/main" xmlns:r="http://schemas.openxmlformats.org/officeDocument/2006/relationships" xmlns:p="http://schemas.openxmlformats.org/presentationml/2006/main">
+  <p:cSld>
+    <p:spTree>
+      <p:nvGrpSpPr>
+        <p:cNvPr id="1" name=""/>
+        <p:cNvGrpSpPr/>
+        <p:nvPr/>
+      </p:nvGrpSpPr>
+      <p:grpSpPr>
+        <a:xfrm>
+          <a:off x="0" y="0"/>
+          <a:ext cx="0" cy="0"/>
+          <a:chOff x="0" y="0"/>
+          <a:chExt cx="0" cy="0"/>
+        </a:xfrm>
+      </p:grpSpPr>
+      <p:sp>
+        <p:nvSpPr>
+          <p:cNvPr id="2" name="Title 1"/>
+          <p:cNvSpPr>
+            <a:spLocks noGrp="1"/>
+          </p:cNvSpPr>
+          <p:nvPr>
+            <p:ph type="title"/>
+          </p:nvPr>
+        </p:nvSpPr>
+        <p:spPr>
+          <a:xfrm>
+            <a:off x="284309" y="205979"/>
+            <a:ext cx="8552330" cy="662317"/>
+          </a:xfrm>
+        </p:spPr>
+        <p:txBody>
+          <a:bodyPr/>
+          <a:lstStyle/>
+          <a:p>
+            <a:pPr lvl="0" indent="0" marL="0">
+              <a:buNone/>
+            </a:pPr>
+            <a:r>
+              <a:rPr/>
+              <a:t>Nutrition after Surgery</a:t>
+            </a:r>
+          </a:p>
+        </p:txBody>
+      </p:sp>
+      <p:sp>
+        <p:nvSpPr>
+          <p:cNvPr id="3" name="Content Placeholder 2"/>
+          <p:cNvSpPr>
+            <a:spLocks noGrp="1"/>
+          </p:cNvSpPr>
+          <p:nvPr>
+            <p:ph idx="1"/>
+          </p:nvPr>
+        </p:nvSpPr>
+        <p:spPr/>
+        <p:txBody>
+          <a:bodyPr/>
+          <a:lstStyle/>
+          <a:p>
+            <a:pPr lvl="0" indent="0" marL="0">
+              <a:buNone/>
+            </a:pPr>
+            <a:r>
+              <a:rPr/>
+              <a:t>At discharge home:</a:t>
+            </a:r>
+          </a:p>
+          <a:p>
+            <a:pPr lvl="0"/>
+            <a:r>
+              <a:rPr/>
+              <a:t>Protein shakes 4oz every 2 hrs</a:t>
+            </a:r>
+          </a:p>
+          <a:p>
+            <a:pPr lvl="0"/>
+            <a:r>
+              <a:rPr/>
+              <a:t>Tube feeds 4-5 cans at night (6pm-10am)</a:t>
+            </a:r>
+          </a:p>
+          <a:p>
+            <a:pPr lvl="0" indent="0" marL="0">
+              <a:buNone/>
+            </a:pPr>
+            <a:r>
+              <a:rPr/>
+              <a:t>10-12 Days: Increase protein shakes</a:t>
+            </a:r>
+          </a:p>
+          <a:p>
+            <a:pPr lvl="0"/>
+            <a:r>
+              <a:rPr/>
+              <a:t>Tube feeds 3-4 cans at night</a:t>
+            </a:r>
+          </a:p>
+          <a:p>
+            <a:pPr lvl="0" indent="0" marL="0">
+              <a:buNone/>
+            </a:pPr>
+            <a:r>
+              <a:rPr/>
+              <a:t>Three weeks: Post-esophagectomy Diet</a:t>
+            </a:r>
+          </a:p>
+          <a:p>
+            <a:pPr lvl="0" indent="0" marL="0">
+              <a:buNone/>
+            </a:pPr>
+            <a:r>
+              <a:rPr/>
+              <a:t>8-12 weeks: Remove feeding tube (in office)</a:t>
+            </a:r>
+          </a:p>
+        </p:txBody>
+      </p:sp>
+    </p:spTree>
+  </p:cSld>
+</p:sld>
+</file>
+
+<file path=ppt/slides/slide54.xml><?xml version="1.0" encoding="utf-8"?>
 <p:sld xmlns:a="http://schemas.openxmlformats.org/drawingml/2006/main" xmlns:r="http://schemas.openxmlformats.org/officeDocument/2006/relationships" xmlns:p="http://schemas.openxmlformats.org/presentationml/2006/main">
   <p:cSld>
     <p:spTree>
@@ -8757,7 +9384,7 @@
 </p:sld>
 </file>
 
-<file path=ppt/slides/slide5.xml><?xml version="1.0" encoding="utf-8"?>
+<file path=ppt/slides/slide55.xml><?xml version="1.0" encoding="utf-8"?>
 <p:sld xmlns:a="http://schemas.openxmlformats.org/drawingml/2006/main" xmlns:r="http://schemas.openxmlformats.org/officeDocument/2006/relationships" xmlns:p="http://schemas.openxmlformats.org/presentationml/2006/main">
   <p:cSld>
     <p:spTree>
@@ -8799,7 +9426,7 @@
             </a:pPr>
             <a:r>
               <a:rPr/>
-              <a:t>Exercies Prior to Surgery</a:t>
+              <a:t>Post-esophagectomy Diet</a:t>
             </a:r>
           </a:p>
         </p:txBody>
@@ -8819,53 +9446,59 @@
           <a:bodyPr/>
           <a:lstStyle/>
           <a:p>
-            <a:pPr lvl="0" indent="0" marL="0">
-              <a:buNone/>
-            </a:pPr>
-            <a:r>
-              <a:rPr/>
-              <a:t>Goal: 30minutes/day of vigorous exercise 6 days/week</a:t>
-            </a:r>
-          </a:p>
-          <a:p>
-            <a:pPr lvl="0" indent="0" marL="0">
-              <a:buNone/>
-            </a:pPr>
-            <a:r>
-              <a:rPr/>
-              <a:t>Vigorous: Working hard enough you can’t carry a conversation</a:t>
-            </a:r>
-          </a:p>
-          <a:p>
-            <a:pPr lvl="0" indent="0" marL="0">
-              <a:buNone/>
-            </a:pPr>
-            <a:r>
-              <a:rPr/>
-              <a:t>Types of Exercise:</a:t>
-            </a:r>
-          </a:p>
-          <a:p>
-            <a:pPr lvl="0"/>
-            <a:r>
-              <a:rPr/>
-              <a:t>Walking: Outside, Treadmilll, or an indoor Mall</a:t>
-            </a:r>
-          </a:p>
-          <a:p>
-            <a:pPr lvl="0"/>
-            <a:r>
-              <a:rPr/>
-              <a:t>Stationary Exercise Bike</a:t>
-            </a:r>
-          </a:p>
-          <a:p>
-            <a:pPr lvl="0" indent="0" marL="0">
-              <a:buNone/>
-            </a:pPr>
-            <a:r>
-              <a:rPr/>
-              <a:t>Lifting light weights and stretching are helpful in addition</a:t>
+            <a:pPr lvl="0"/>
+            <a:r>
+              <a:rPr/>
+              <a:t>Soft Consistency</a:t>
+            </a:r>
+          </a:p>
+          <a:p>
+            <a:pPr lvl="0"/>
+            <a:r>
+              <a:rPr/>
+              <a:t>High Protein</a:t>
+            </a:r>
+          </a:p>
+          <a:p>
+            <a:pPr lvl="0"/>
+            <a:r>
+              <a:rPr/>
+              <a:t>Avoid sugary liquids (can cause ‘dumping’)</a:t>
+            </a:r>
+          </a:p>
+          <a:p>
+            <a:pPr lvl="0"/>
+            <a:r>
+              <a:rPr/>
+              <a:t>Avoid raw vegetables (and salads)</a:t>
+            </a:r>
+          </a:p>
+          <a:p>
+            <a:pPr lvl="0"/>
+            <a:r>
+              <a:rPr/>
+              <a:t>Eating</a:t>
+            </a:r>
+          </a:p>
+          <a:p>
+            <a:pPr lvl="1"/>
+            <a:r>
+              <a:rPr/>
+              <a:t>Small, frequent meals</a:t>
+            </a:r>
+          </a:p>
+          <a:p>
+            <a:pPr lvl="1"/>
+            <a:r>
+              <a:rPr/>
+              <a:t>Sit up for 30-45 minutes after eating</a:t>
+            </a:r>
+          </a:p>
+          <a:p>
+            <a:pPr lvl="1"/>
+            <a:r>
+              <a:rPr/>
+              <a:t>Avoid eating within 2 hours of bedtime</a:t>
             </a:r>
           </a:p>
         </p:txBody>
@@ -8875,7 +9508,7 @@
 </p:sld>
 </file>
 
-<file path=ppt/slides/slide50.xml><?xml version="1.0" encoding="utf-8"?>
+<file path=ppt/slides/slide56.xml><?xml version="1.0" encoding="utf-8"?>
 <p:sld xmlns:a="http://schemas.openxmlformats.org/drawingml/2006/main" xmlns:r="http://schemas.openxmlformats.org/officeDocument/2006/relationships" xmlns:p="http://schemas.openxmlformats.org/presentationml/2006/main">
   <p:cSld>
     <p:spTree>
@@ -8917,7 +9550,7 @@
             </a:pPr>
             <a:r>
               <a:rPr/>
-              <a:t>Post-esophagectomy Diet</a:t>
+              <a:t>Medicines at Home - Pain</a:t>
             </a:r>
           </a:p>
         </p:txBody>
@@ -8937,59 +9570,58 @@
           <a:bodyPr/>
           <a:lstStyle/>
           <a:p>
-            <a:pPr lvl="0"/>
-            <a:r>
-              <a:rPr/>
-              <a:t>Soft Consistency</a:t>
-            </a:r>
-          </a:p>
-          <a:p>
-            <a:pPr lvl="0"/>
-            <a:r>
-              <a:rPr/>
-              <a:t>High Protein</a:t>
-            </a:r>
-          </a:p>
-          <a:p>
-            <a:pPr lvl="0"/>
-            <a:r>
-              <a:rPr/>
-              <a:t>Avoid sugary liquids (can cause ‘dumping’)</a:t>
-            </a:r>
-          </a:p>
-          <a:p>
-            <a:pPr lvl="0"/>
-            <a:r>
-              <a:rPr/>
-              <a:t>Avoid raw vegetables (and salads)</a:t>
-            </a:r>
-          </a:p>
-          <a:p>
-            <a:pPr lvl="0"/>
-            <a:r>
-              <a:rPr/>
-              <a:t>Eating</a:t>
-            </a:r>
-          </a:p>
-          <a:p>
-            <a:pPr lvl="1"/>
-            <a:r>
-              <a:rPr/>
-              <a:t>Small, frequent meals</a:t>
-            </a:r>
-          </a:p>
-          <a:p>
-            <a:pPr lvl="1"/>
-            <a:r>
-              <a:rPr/>
-              <a:t>Sit up for 30-45 minutes after eating</a:t>
-            </a:r>
-          </a:p>
-          <a:p>
-            <a:pPr lvl="1"/>
-            <a:r>
-              <a:rPr/>
-              <a:t>Avoid eating within 2 hours of bedtime</a:t>
+            <a:pPr lvl="0" indent="0" marL="0">
+              <a:buNone/>
+            </a:pPr>
+            <a:r>
+              <a:rPr/>
+              <a:t>Acetaminophen (Tylenol) 1000mg 4x/day</a:t>
+            </a:r>
+          </a:p>
+          <a:p>
+            <a:pPr lvl="0" indent="0" marL="0">
+              <a:buNone/>
+            </a:pPr>
+            <a:r>
+              <a:rPr/>
+              <a:t>Gabapentin 300mg 3 times/day</a:t>
+            </a:r>
+          </a:p>
+          <a:p>
+            <a:pPr lvl="0" indent="0" marL="0">
+              <a:buNone/>
+            </a:pPr>
+            <a:r>
+              <a:rPr/>
+              <a:t>Oxycodone</a:t>
+            </a:r>
+          </a:p>
+          <a:p>
+            <a:pPr lvl="0"/>
+            <a:r>
+              <a:rPr/>
+              <a:t>As needed in addition to Tylenol/gabapentin</a:t>
+            </a:r>
+          </a:p>
+          <a:p>
+            <a:pPr lvl="0"/>
+            <a:r>
+              <a:rPr/>
+              <a:t>Will begin reducing dose at first postop visit</a:t>
+            </a:r>
+          </a:p>
+          <a:p>
+            <a:pPr lvl="0"/>
+            <a:r>
+              <a:rPr/>
+              <a:t>Can usually discontinue by 4 weeks</a:t>
+            </a:r>
+          </a:p>
+          <a:p>
+            <a:pPr lvl="0"/>
+            <a:r>
+              <a:rPr/>
+              <a:t>NO DRIVING WHILE ON OXYCODONE</a:t>
             </a:r>
           </a:p>
         </p:txBody>
@@ -8999,7 +9631,7 @@
 </p:sld>
 </file>
 
-<file path=ppt/slides/slide51.xml><?xml version="1.0" encoding="utf-8"?>
+<file path=ppt/slides/slide57.xml><?xml version="1.0" encoding="utf-8"?>
 <p:sld xmlns:a="http://schemas.openxmlformats.org/drawingml/2006/main" xmlns:r="http://schemas.openxmlformats.org/officeDocument/2006/relationships" xmlns:p="http://schemas.openxmlformats.org/presentationml/2006/main">
   <p:cSld>
     <p:spTree>
@@ -9041,7 +9673,7 @@
             </a:pPr>
             <a:r>
               <a:rPr/>
-              <a:t>Medicines at Home - Pain</a:t>
+              <a:t>Non-steroidals Anti Inflammatory (NSAID)</a:t>
             </a:r>
           </a:p>
         </p:txBody>
@@ -9066,53 +9698,30 @@
             </a:pPr>
             <a:r>
               <a:rPr/>
-              <a:t>Acetaminophen (Tylenol) 1000mg 4x/day</a:t>
-            </a:r>
-          </a:p>
-          <a:p>
-            <a:pPr lvl="0" indent="0" marL="0">
-              <a:buNone/>
-            </a:pPr>
-            <a:r>
-              <a:rPr/>
-              <a:t>Gabapentin 300mg 3 times/day</a:t>
-            </a:r>
-          </a:p>
-          <a:p>
-            <a:pPr lvl="0" indent="0" marL="0">
-              <a:buNone/>
-            </a:pPr>
-            <a:r>
-              <a:rPr/>
-              <a:t>Oxycodone</a:t>
-            </a:r>
-          </a:p>
-          <a:p>
-            <a:pPr lvl="0"/>
-            <a:r>
-              <a:rPr/>
-              <a:t>As needed in addition to Tylenol/gabapentin</a:t>
-            </a:r>
-          </a:p>
-          <a:p>
-            <a:pPr lvl="0"/>
-            <a:r>
-              <a:rPr/>
-              <a:t>Will begin reducing dose at first postop visit</a:t>
-            </a:r>
-          </a:p>
-          <a:p>
-            <a:pPr lvl="0"/>
-            <a:r>
-              <a:rPr/>
-              <a:t>Can usually discontinue by 4 weeks</a:t>
-            </a:r>
-          </a:p>
-          <a:p>
-            <a:pPr lvl="0"/>
-            <a:r>
-              <a:rPr/>
-              <a:t>NO DRIVING WHILE ON OXYCODONE</a:t>
+              <a:t>Non-steroidal anti-inflammatories (Celebrex)</a:t>
+            </a:r>
+          </a:p>
+          <a:p>
+            <a:pPr lvl="0"/>
+            <a:r>
+              <a:rPr/>
+              <a:t>200 mg every 12 hours starting at 2 weeks</a:t>
+            </a:r>
+          </a:p>
+          <a:p>
+            <a:pPr lvl="0" indent="0" marL="0">
+              <a:buNone/>
+            </a:pPr>
+            <a:r>
+              <a:rPr/>
+              <a:t>NO GOODY POWDERS OR BCs</a:t>
+            </a:r>
+          </a:p>
+          <a:p>
+            <a:pPr lvl="0"/>
+            <a:r>
+              <a:rPr/>
+              <a:t>(Can cause permanent scarring at the surgery site)</a:t>
             </a:r>
           </a:p>
         </p:txBody>
@@ -9122,7 +9731,7 @@
 </p:sld>
 </file>
 
-<file path=ppt/slides/slide52.xml><?xml version="1.0" encoding="utf-8"?>
+<file path=ppt/slides/slide58.xml><?xml version="1.0" encoding="utf-8"?>
 <p:sld xmlns:a="http://schemas.openxmlformats.org/drawingml/2006/main" xmlns:r="http://schemas.openxmlformats.org/officeDocument/2006/relationships" xmlns:p="http://schemas.openxmlformats.org/presentationml/2006/main">
   <p:cSld>
     <p:spTree>
@@ -9164,7 +9773,7 @@
             </a:pPr>
             <a:r>
               <a:rPr/>
-              <a:t>Non-steroidals Anti Inflammatory (NSAID)</a:t>
+              <a:t>Acid Blockers = Proton Pump Inhibitors</a:t>
             </a:r>
           </a:p>
         </p:txBody>
@@ -9189,30 +9798,28 @@
             </a:pPr>
             <a:r>
               <a:rPr/>
-              <a:t>Non-steroidal anti-inflammatories (Celebrex)</a:t>
-            </a:r>
-          </a:p>
-          <a:p>
-            <a:pPr lvl="0"/>
-            <a:r>
-              <a:rPr/>
-              <a:t>200 mg every 12 hours starting at 2 weeks</a:t>
-            </a:r>
-          </a:p>
-          <a:p>
-            <a:pPr lvl="0" indent="0" marL="0">
-              <a:buNone/>
-            </a:pPr>
-            <a:r>
-              <a:rPr/>
-              <a:t>NO GOODY POWDERS OR BCs</a:t>
-            </a:r>
-          </a:p>
-          <a:p>
-            <a:pPr lvl="0"/>
-            <a:r>
-              <a:rPr/>
-              <a:t>(Can cause permanent scarring at the surgery site)</a:t>
+              <a:t>Examples include ompeprazole and pantoprazole</a:t>
+            </a:r>
+          </a:p>
+          <a:p>
+            <a:pPr lvl="0"/>
+            <a:r>
+              <a:rPr/>
+              <a:t>Will stay on for at 1-2 years to prevent acid reflux</a:t>
+            </a:r>
+          </a:p>
+          <a:p>
+            <a:pPr lvl="0"/>
+            <a:r>
+              <a:rPr/>
+              <a:t>Important in preventing scarring at anastomosis (new connection between esophagus and stomach)</a:t>
+            </a:r>
+          </a:p>
+          <a:p>
+            <a:pPr lvl="0"/>
+            <a:r>
+              <a:rPr/>
+              <a:t>To administer through feeding tube, open capsule and resuspend beads in 60mL (2oz) of water</a:t>
             </a:r>
           </a:p>
         </p:txBody>
@@ -9222,7 +9829,7 @@
 </p:sld>
 </file>
 
-<file path=ppt/slides/slide53.xml><?xml version="1.0" encoding="utf-8"?>
+<file path=ppt/slides/slide59.xml><?xml version="1.0" encoding="utf-8"?>
 <p:sld xmlns:a="http://schemas.openxmlformats.org/drawingml/2006/main" xmlns:r="http://schemas.openxmlformats.org/officeDocument/2006/relationships" xmlns:p="http://schemas.openxmlformats.org/presentationml/2006/main">
   <p:cSld>
     <p:spTree>
@@ -9264,7 +9871,7 @@
             </a:pPr>
             <a:r>
               <a:rPr/>
-              <a:t>Acid Blockers = Proton Pump Inhibitors</a:t>
+              <a:t>Medicines at Home</a:t>
             </a:r>
           </a:p>
         </p:txBody>
@@ -9289,28 +9896,51 @@
             </a:pPr>
             <a:r>
               <a:rPr/>
-              <a:t>Examples include ompeprazole and pantoprazole</a:t>
-            </a:r>
-          </a:p>
-          <a:p>
-            <a:pPr lvl="0"/>
-            <a:r>
-              <a:rPr/>
-              <a:t>Will stay on for at 1-2 years to prevent acid reflux</a:t>
-            </a:r>
-          </a:p>
-          <a:p>
-            <a:pPr lvl="0"/>
-            <a:r>
-              <a:rPr/>
-              <a:t>Important in preventing scarring at anastomosis (new connection between esophagus and stomach)</a:t>
-            </a:r>
-          </a:p>
-          <a:p>
-            <a:pPr lvl="0"/>
-            <a:r>
-              <a:rPr/>
-              <a:t>To administer through feeding tube, open capsule and resuspend beads in 60mL (2oz) of water</a:t>
+              <a:t>Reglan – Helps stomach empty</a:t>
+            </a:r>
+          </a:p>
+          <a:p>
+            <a:pPr lvl="0"/>
+            <a:r>
+              <a:rPr/>
+              <a:t>Will plan to stop after six weeks</a:t>
+            </a:r>
+          </a:p>
+          <a:p>
+            <a:pPr lvl="0"/>
+            <a:r>
+              <a:rPr/>
+              <a:t>0.1% risk of tardive dyskinesia (nervous tic)</a:t>
+            </a:r>
+          </a:p>
+          <a:p>
+            <a:pPr lvl="0" indent="0" marL="0">
+              <a:buNone/>
+            </a:pPr>
+            <a:r>
+              <a:rPr/>
+              <a:t>Remeron – Helps improve appetite</a:t>
+            </a:r>
+          </a:p>
+          <a:p>
+            <a:pPr lvl="0"/>
+            <a:r>
+              <a:rPr/>
+              <a:t>Can cause vivid dreams</a:t>
+            </a:r>
+          </a:p>
+          <a:p>
+            <a:pPr lvl="0"/>
+            <a:r>
+              <a:rPr/>
+              <a:t>Used for several weeks after surgery</a:t>
+            </a:r>
+          </a:p>
+          <a:p>
+            <a:pPr lvl="0"/>
+            <a:r>
+              <a:rPr/>
+              <a:t>Will stop within first three months of surgery</a:t>
             </a:r>
           </a:p>
         </p:txBody>
@@ -9320,7 +9950,7 @@
 </p:sld>
 </file>
 
-<file path=ppt/slides/slide54.xml><?xml version="1.0" encoding="utf-8"?>
+<file path=ppt/slides/slide6.xml><?xml version="1.0" encoding="utf-8"?>
 <p:sld xmlns:a="http://schemas.openxmlformats.org/drawingml/2006/main" xmlns:r="http://schemas.openxmlformats.org/officeDocument/2006/relationships" xmlns:p="http://schemas.openxmlformats.org/presentationml/2006/main">
   <p:cSld>
     <p:spTree>
@@ -9362,7 +9992,7 @@
             </a:pPr>
             <a:r>
               <a:rPr/>
-              <a:t>Medicines at Home</a:t>
+              <a:t>Day Prior to Surgery</a:t>
             </a:r>
           </a:p>
         </p:txBody>
@@ -9382,56 +10012,24 @@
           <a:bodyPr/>
           <a:lstStyle/>
           <a:p>
-            <a:pPr lvl="0" indent="0" marL="0">
-              <a:buNone/>
-            </a:pPr>
-            <a:r>
-              <a:rPr/>
-              <a:t>Reglan – Helps stomach empty</a:t>
-            </a:r>
-          </a:p>
-          <a:p>
-            <a:pPr lvl="0"/>
-            <a:r>
-              <a:rPr/>
-              <a:t>Will plan to stop after six weeks</a:t>
-            </a:r>
-          </a:p>
-          <a:p>
-            <a:pPr lvl="0"/>
-            <a:r>
-              <a:rPr/>
-              <a:t>0.1% risk of tardive dyskinesia (nervous tic)</a:t>
-            </a:r>
-          </a:p>
-          <a:p>
-            <a:pPr lvl="0" indent="0" marL="0">
-              <a:buNone/>
-            </a:pPr>
-            <a:r>
-              <a:rPr/>
-              <a:t>Remeron – Helps improve appetite</a:t>
-            </a:r>
-          </a:p>
-          <a:p>
-            <a:pPr lvl="0"/>
-            <a:r>
-              <a:rPr/>
-              <a:t>Can cause vivid dreams</a:t>
-            </a:r>
-          </a:p>
-          <a:p>
-            <a:pPr lvl="0"/>
-            <a:r>
-              <a:rPr/>
-              <a:t>Used for several weeks after surgery</a:t>
-            </a:r>
-          </a:p>
-          <a:p>
-            <a:pPr lvl="0"/>
-            <a:r>
-              <a:rPr/>
-              <a:t>Will stop within first three months of surgery</a:t>
+            <a:pPr lvl="0"/>
+            <a:r>
+              <a:rPr/>
+              <a:t>Clear liquids for dinner evening prior</a:t>
+            </a:r>
+          </a:p>
+          <a:p>
+            <a:pPr lvl="0"/>
+            <a:r>
+              <a:rPr/>
+              <a:t>You will receive instructions regarding medicines</a:t>
+            </a:r>
+          </a:p>
+          <a:p>
+            <a:pPr lvl="0"/>
+            <a:r>
+              <a:rPr/>
+              <a:t>Stop tube feeds at midnight night before</a:t>
             </a:r>
           </a:p>
         </p:txBody>
@@ -9441,7 +10039,7 @@
 </p:sld>
 </file>
 
-<file path=ppt/slides/slide55.xml><?xml version="1.0" encoding="utf-8"?>
+<file path=ppt/slides/slide60.xml><?xml version="1.0" encoding="utf-8"?>
 <p:sld xmlns:a="http://schemas.openxmlformats.org/drawingml/2006/main" xmlns:r="http://schemas.openxmlformats.org/officeDocument/2006/relationships" xmlns:p="http://schemas.openxmlformats.org/presentationml/2006/main">
   <p:cSld>
     <p:spTree>
@@ -9570,638 +10168,6 @@
 </p:sld>
 </file>
 
-<file path=ppt/slides/slide56.xml><?xml version="1.0" encoding="utf-8"?>
-<p:sld xmlns:a="http://schemas.openxmlformats.org/drawingml/2006/main" xmlns:r="http://schemas.openxmlformats.org/officeDocument/2006/relationships" xmlns:p="http://schemas.openxmlformats.org/presentationml/2006/main">
-  <p:cSld>
-    <p:spTree>
-      <p:nvGrpSpPr>
-        <p:cNvPr id="1" name=""/>
-        <p:cNvGrpSpPr/>
-        <p:nvPr/>
-      </p:nvGrpSpPr>
-      <p:grpSpPr>
-        <a:xfrm>
-          <a:off x="0" y="0"/>
-          <a:ext cx="0" cy="0"/>
-          <a:chOff x="0" y="0"/>
-          <a:chExt cx="0" cy="0"/>
-        </a:xfrm>
-      </p:grpSpPr>
-      <p:sp>
-        <p:nvSpPr>
-          <p:cNvPr id="2" name="Title 1"/>
-          <p:cNvSpPr>
-            <a:spLocks noGrp="1"/>
-          </p:cNvSpPr>
-          <p:nvPr>
-            <p:ph type="title"/>
-          </p:nvPr>
-        </p:nvSpPr>
-        <p:spPr>
-          <a:xfrm>
-            <a:off x="315045" y="205979"/>
-            <a:ext cx="8529278" cy="857250"/>
-          </a:xfrm>
-        </p:spPr>
-        <p:txBody>
-          <a:bodyPr/>
-          <a:lstStyle/>
-          <a:p>
-            <a:pPr lvl="0" indent="0" marL="0">
-              <a:buNone/>
-            </a:pPr>
-            <a:r>
-              <a:rPr/>
-              <a:t>Sleeping at Home</a:t>
-            </a:r>
-          </a:p>
-        </p:txBody>
-      </p:sp>
-      <p:sp>
-        <p:nvSpPr>
-          <p:cNvPr id="3" name="Content Placeholder 2"/>
-          <p:cNvSpPr>
-            <a:spLocks noGrp="1"/>
-          </p:cNvSpPr>
-          <p:nvPr>
-            <p:ph idx="1" sz="half"/>
-          </p:nvPr>
-        </p:nvSpPr>
-        <p:spPr/>
-        <p:txBody>
-          <a:bodyPr/>
-          <a:lstStyle/>
-          <a:p>
-            <a:pPr lvl="0" indent="0" marL="0">
-              <a:buNone/>
-            </a:pPr>
-            <a:r>
-              <a:rPr/>
-              <a:t>Reflux can occur the first few weeks/months after surgery</a:t>
-            </a:r>
-          </a:p>
-          <a:p>
-            <a:pPr lvl="0" indent="0" marL="0">
-              <a:buNone/>
-            </a:pPr>
-            <a:r>
-              <a:rPr/>
-              <a:t>This improves over the first few months</a:t>
-            </a:r>
-          </a:p>
-          <a:p>
-            <a:pPr lvl="0" indent="0" marL="0">
-              <a:buNone/>
-            </a:pPr>
-            <a:r>
-              <a:rPr/>
-              <a:t>A wedge pillow can be helpful for sleep</a:t>
-            </a:r>
-          </a:p>
-        </p:txBody>
-      </p:sp>
-      <p:pic>
-        <p:nvPicPr>
-          <p:cNvPr descr="images/wedge_pillow_comm.jpg" id="0" name="Picture 1"/>
-          <p:cNvPicPr>
-            <a:picLocks noGrp="1" noChangeAspect="1"/>
-          </p:cNvPicPr>
-          <p:nvPr/>
-        </p:nvPicPr>
-        <p:blipFill>
-          <a:blip r:embed="rId2"/>
-          <a:stretch>
-            <a:fillRect/>
-          </a:stretch>
-        </p:blipFill>
-        <p:spPr bwMode="auto">
-          <a:xfrm>
-            <a:off x="4864100" y="1193800"/>
-            <a:ext cx="3733800" cy="3733800"/>
-          </a:xfrm>
-          <a:prstGeom prst="rect">
-            <a:avLst/>
-          </a:prstGeom>
-          <a:noFill/>
-          <a:ln w="9525">
-            <a:noFill/>
-            <a:headEnd/>
-            <a:tailEnd/>
-          </a:ln>
-        </p:spPr>
-      </p:pic>
-    </p:spTree>
-  </p:cSld>
-</p:sld>
-</file>
-
-<file path=ppt/slides/slide57.xml><?xml version="1.0" encoding="utf-8"?>
-<p:sld xmlns:a="http://schemas.openxmlformats.org/drawingml/2006/main" xmlns:r="http://schemas.openxmlformats.org/officeDocument/2006/relationships" xmlns:p="http://schemas.openxmlformats.org/presentationml/2006/main">
-  <p:cSld>
-    <p:spTree>
-      <p:nvGrpSpPr>
-        <p:cNvPr id="1" name=""/>
-        <p:cNvGrpSpPr/>
-        <p:nvPr/>
-      </p:nvGrpSpPr>
-      <p:grpSpPr>
-        <a:xfrm>
-          <a:off x="0" y="0"/>
-          <a:ext cx="0" cy="0"/>
-          <a:chOff x="0" y="0"/>
-          <a:chExt cx="0" cy="0"/>
-        </a:xfrm>
-      </p:grpSpPr>
-      <p:sp>
-        <p:nvSpPr>
-          <p:cNvPr id="2" name="Title 1"/>
-          <p:cNvSpPr>
-            <a:spLocks noGrp="1"/>
-          </p:cNvSpPr>
-          <p:nvPr>
-            <p:ph type="title"/>
-          </p:nvPr>
-        </p:nvSpPr>
-        <p:spPr>
-          <a:xfrm>
-            <a:off x="284309" y="205979"/>
-            <a:ext cx="8552330" cy="662317"/>
-          </a:xfrm>
-        </p:spPr>
-        <p:txBody>
-          <a:bodyPr/>
-          <a:lstStyle/>
-          <a:p>
-            <a:pPr lvl="0" indent="0" marL="0">
-              <a:buNone/>
-            </a:pPr>
-            <a:r>
-              <a:rPr/>
-              <a:t>Postoperative Visit at 7-10 Days</a:t>
-            </a:r>
-          </a:p>
-        </p:txBody>
-      </p:sp>
-      <p:sp>
-        <p:nvSpPr>
-          <p:cNvPr id="3" name="Content Placeholder 2"/>
-          <p:cNvSpPr>
-            <a:spLocks noGrp="1"/>
-          </p:cNvSpPr>
-          <p:nvPr>
-            <p:ph idx="1"/>
-          </p:nvPr>
-        </p:nvSpPr>
-        <p:spPr/>
-        <p:txBody>
-          <a:bodyPr/>
-          <a:lstStyle/>
-          <a:p>
-            <a:pPr lvl="0" indent="0" marL="0">
-              <a:buNone/>
-            </a:pPr>
-            <a:r>
-              <a:rPr/>
-              <a:t>Check surgical site</a:t>
-            </a:r>
-          </a:p>
-          <a:p>
-            <a:pPr lvl="0"/>
-            <a:r>
-              <a:rPr/>
-              <a:t>Remove staples (if needed)</a:t>
-            </a:r>
-          </a:p>
-          <a:p>
-            <a:pPr lvl="0" indent="0" marL="0">
-              <a:buNone/>
-            </a:pPr>
-            <a:r>
-              <a:rPr/>
-              <a:t>Adjust medicines as needed</a:t>
-            </a:r>
-          </a:p>
-          <a:p>
-            <a:pPr lvl="0"/>
-            <a:r>
-              <a:rPr/>
-              <a:t>Insulin (for diabetic patients on insulin)</a:t>
-            </a:r>
-          </a:p>
-          <a:p>
-            <a:pPr lvl="0"/>
-            <a:r>
-              <a:rPr/>
-              <a:t>Reduce beta blocker medicines</a:t>
-            </a:r>
-          </a:p>
-          <a:p>
-            <a:pPr lvl="0" indent="0" marL="0">
-              <a:buNone/>
-            </a:pPr>
-            <a:r>
-              <a:rPr/>
-              <a:t>Advance diet</a:t>
-            </a:r>
-          </a:p>
-          <a:p>
-            <a:pPr lvl="0" indent="0" marL="0">
-              <a:buNone/>
-            </a:pPr>
-            <a:r>
-              <a:rPr/>
-              <a:t>Reduce tube feeds</a:t>
-            </a:r>
-          </a:p>
-        </p:txBody>
-      </p:sp>
-    </p:spTree>
-  </p:cSld>
-</p:sld>
-</file>
-
-<file path=ppt/slides/slide58.xml><?xml version="1.0" encoding="utf-8"?>
-<p:sld xmlns:a="http://schemas.openxmlformats.org/drawingml/2006/main" xmlns:r="http://schemas.openxmlformats.org/officeDocument/2006/relationships" xmlns:p="http://schemas.openxmlformats.org/presentationml/2006/main">
-  <p:cSld>
-    <p:spTree>
-      <p:nvGrpSpPr>
-        <p:cNvPr id="1" name=""/>
-        <p:cNvGrpSpPr/>
-        <p:nvPr/>
-      </p:nvGrpSpPr>
-      <p:grpSpPr>
-        <a:xfrm>
-          <a:off x="0" y="0"/>
-          <a:ext cx="0" cy="0"/>
-          <a:chOff x="0" y="0"/>
-          <a:chExt cx="0" cy="0"/>
-        </a:xfrm>
-      </p:grpSpPr>
-      <p:sp>
-        <p:nvSpPr>
-          <p:cNvPr id="2" name="Title 1"/>
-          <p:cNvSpPr>
-            <a:spLocks noGrp="1"/>
-          </p:cNvSpPr>
-          <p:nvPr>
-            <p:ph type="title"/>
-          </p:nvPr>
-        </p:nvSpPr>
-        <p:spPr>
-          <a:xfrm>
-            <a:off x="284309" y="205979"/>
-            <a:ext cx="8552330" cy="662317"/>
-          </a:xfrm>
-        </p:spPr>
-        <p:txBody>
-          <a:bodyPr/>
-          <a:lstStyle/>
-          <a:p>
-            <a:pPr lvl="0" indent="0" marL="0">
-              <a:buNone/>
-            </a:pPr>
-            <a:r>
-              <a:rPr/>
-              <a:t>After surgery</a:t>
-            </a:r>
-          </a:p>
-        </p:txBody>
-      </p:sp>
-      <p:sp>
-        <p:nvSpPr>
-          <p:cNvPr id="3" name="Content Placeholder 2"/>
-          <p:cNvSpPr>
-            <a:spLocks noGrp="1"/>
-          </p:cNvSpPr>
-          <p:nvPr>
-            <p:ph idx="1"/>
-          </p:nvPr>
-        </p:nvSpPr>
-        <p:spPr/>
-        <p:txBody>
-          <a:bodyPr/>
-          <a:lstStyle/>
-          <a:p>
-            <a:pPr lvl="0" indent="0" marL="0">
-              <a:buNone/>
-            </a:pPr>
-            <a:r>
-              <a:rPr/>
-              <a:t>Wean off medicines added after surgery</a:t>
-            </a:r>
-          </a:p>
-          <a:p>
-            <a:pPr lvl="0"/>
-            <a:r>
-              <a:rPr/>
-              <a:t>Pain medicines</a:t>
-            </a:r>
-          </a:p>
-          <a:p>
-            <a:pPr lvl="0"/>
-            <a:r>
-              <a:rPr/>
-              <a:t>Beta-blockers</a:t>
-            </a:r>
-          </a:p>
-          <a:p>
-            <a:pPr lvl="0"/>
-            <a:r>
-              <a:rPr/>
-              <a:t>Reglan and Remeron</a:t>
-            </a:r>
-          </a:p>
-          <a:p>
-            <a:pPr lvl="0" indent="0" marL="0">
-              <a:buNone/>
-            </a:pPr>
-            <a:r>
-              <a:rPr/>
-              <a:t>Continue acid blockers for at least 1 year</a:t>
-            </a:r>
-          </a:p>
-        </p:txBody>
-      </p:sp>
-    </p:spTree>
-  </p:cSld>
-</p:sld>
-</file>
-
-<file path=ppt/slides/slide59.xml><?xml version="1.0" encoding="utf-8"?>
-<p:sld xmlns:a="http://schemas.openxmlformats.org/drawingml/2006/main" xmlns:r="http://schemas.openxmlformats.org/officeDocument/2006/relationships" xmlns:p="http://schemas.openxmlformats.org/presentationml/2006/main">
-  <p:cSld>
-    <p:spTree>
-      <p:nvGrpSpPr>
-        <p:cNvPr id="1" name=""/>
-        <p:cNvGrpSpPr/>
-        <p:nvPr/>
-      </p:nvGrpSpPr>
-      <p:grpSpPr>
-        <a:xfrm>
-          <a:off x="0" y="0"/>
-          <a:ext cx="0" cy="0"/>
-          <a:chOff x="0" y="0"/>
-          <a:chExt cx="0" cy="0"/>
-        </a:xfrm>
-      </p:grpSpPr>
-      <p:sp>
-        <p:nvSpPr>
-          <p:cNvPr id="2" name="Title 1"/>
-          <p:cNvSpPr>
-            <a:spLocks noGrp="1"/>
-          </p:cNvSpPr>
-          <p:nvPr>
-            <p:ph type="title"/>
-          </p:nvPr>
-        </p:nvSpPr>
-        <p:spPr>
-          <a:xfrm>
-            <a:off x="284309" y="205979"/>
-            <a:ext cx="8552330" cy="662317"/>
-          </a:xfrm>
-        </p:spPr>
-        <p:txBody>
-          <a:bodyPr/>
-          <a:lstStyle/>
-          <a:p>
-            <a:pPr lvl="0" indent="0" marL="0">
-              <a:buNone/>
-            </a:pPr>
-            <a:r>
-              <a:rPr/>
-              <a:t>Jejunostomy Removal</a:t>
-            </a:r>
-          </a:p>
-        </p:txBody>
-      </p:sp>
-      <p:sp>
-        <p:nvSpPr>
-          <p:cNvPr id="3" name="Content Placeholder 2"/>
-          <p:cNvSpPr>
-            <a:spLocks noGrp="1"/>
-          </p:cNvSpPr>
-          <p:nvPr>
-            <p:ph idx="1"/>
-          </p:nvPr>
-        </p:nvSpPr>
-        <p:spPr/>
-        <p:txBody>
-          <a:bodyPr/>
-          <a:lstStyle/>
-          <a:p>
-            <a:pPr lvl="0" indent="0" marL="0">
-              <a:buNone/>
-            </a:pPr>
-            <a:r>
-              <a:rPr/>
-              <a:t>Jejunostomy tube is removed in the office once you can take in enough nutrients by mouth</a:t>
-            </a:r>
-          </a:p>
-          <a:p>
-            <a:pPr lvl="0" indent="0" marL="0">
-              <a:buNone/>
-            </a:pPr>
-            <a:r>
-              <a:rPr/>
-              <a:t>Removal usually around 8 weeks after surgery</a:t>
-            </a:r>
-          </a:p>
-          <a:p>
-            <a:pPr lvl="0" indent="0" marL="0">
-              <a:buNone/>
-            </a:pPr>
-            <a:r>
-              <a:rPr/>
-              <a:t>May take 30 minutes and some local anesthetic to loosen up the tube for removal.</a:t>
-            </a:r>
-          </a:p>
-        </p:txBody>
-      </p:sp>
-    </p:spTree>
-  </p:cSld>
-</p:sld>
-</file>
-
-<file path=ppt/slides/slide6.xml><?xml version="1.0" encoding="utf-8"?>
-<p:sld xmlns:a="http://schemas.openxmlformats.org/drawingml/2006/main" xmlns:r="http://schemas.openxmlformats.org/officeDocument/2006/relationships" xmlns:p="http://schemas.openxmlformats.org/presentationml/2006/main">
-  <p:cSld>
-    <p:spTree>
-      <p:nvGrpSpPr>
-        <p:cNvPr id="1" name=""/>
-        <p:cNvGrpSpPr/>
-        <p:nvPr/>
-      </p:nvGrpSpPr>
-      <p:grpSpPr>
-        <a:xfrm>
-          <a:off x="0" y="0"/>
-          <a:ext cx="0" cy="0"/>
-          <a:chOff x="0" y="0"/>
-          <a:chExt cx="0" cy="0"/>
-        </a:xfrm>
-      </p:grpSpPr>
-      <p:sp>
-        <p:nvSpPr>
-          <p:cNvPr id="2" name="Title 1"/>
-          <p:cNvSpPr>
-            <a:spLocks noGrp="1"/>
-          </p:cNvSpPr>
-          <p:nvPr>
-            <p:ph type="title"/>
-          </p:nvPr>
-        </p:nvSpPr>
-        <p:spPr>
-          <a:xfrm>
-            <a:off x="284309" y="205979"/>
-            <a:ext cx="8552330" cy="662317"/>
-          </a:xfrm>
-        </p:spPr>
-        <p:txBody>
-          <a:bodyPr/>
-          <a:lstStyle/>
-          <a:p>
-            <a:pPr lvl="0" indent="0" marL="0">
-              <a:buNone/>
-            </a:pPr>
-            <a:r>
-              <a:rPr/>
-              <a:t>Day Prior to Surgery</a:t>
-            </a:r>
-          </a:p>
-        </p:txBody>
-      </p:sp>
-      <p:sp>
-        <p:nvSpPr>
-          <p:cNvPr id="3" name="Content Placeholder 2"/>
-          <p:cNvSpPr>
-            <a:spLocks noGrp="1"/>
-          </p:cNvSpPr>
-          <p:nvPr>
-            <p:ph idx="1"/>
-          </p:nvPr>
-        </p:nvSpPr>
-        <p:spPr/>
-        <p:txBody>
-          <a:bodyPr/>
-          <a:lstStyle/>
-          <a:p>
-            <a:pPr lvl="0"/>
-            <a:r>
-              <a:rPr/>
-              <a:t>Clear liquids for dinner evening prior</a:t>
-            </a:r>
-          </a:p>
-          <a:p>
-            <a:pPr lvl="0"/>
-            <a:r>
-              <a:rPr/>
-              <a:t>You will receive instructions regarding medicines</a:t>
-            </a:r>
-          </a:p>
-        </p:txBody>
-      </p:sp>
-    </p:spTree>
-  </p:cSld>
-</p:sld>
-</file>
-
-<file path=ppt/slides/slide60.xml><?xml version="1.0" encoding="utf-8"?>
-<p:sld xmlns:a="http://schemas.openxmlformats.org/drawingml/2006/main" xmlns:r="http://schemas.openxmlformats.org/officeDocument/2006/relationships" xmlns:p="http://schemas.openxmlformats.org/presentationml/2006/main">
-  <p:cSld>
-    <p:spTree>
-      <p:nvGrpSpPr>
-        <p:cNvPr id="1" name=""/>
-        <p:cNvGrpSpPr/>
-        <p:nvPr/>
-      </p:nvGrpSpPr>
-      <p:grpSpPr>
-        <a:xfrm>
-          <a:off x="0" y="0"/>
-          <a:ext cx="0" cy="0"/>
-          <a:chOff x="0" y="0"/>
-          <a:chExt cx="0" cy="0"/>
-        </a:xfrm>
-      </p:grpSpPr>
-      <p:sp>
-        <p:nvSpPr>
-          <p:cNvPr id="2" name="Title 1"/>
-          <p:cNvSpPr>
-            <a:spLocks noGrp="1"/>
-          </p:cNvSpPr>
-          <p:nvPr>
-            <p:ph type="title"/>
-          </p:nvPr>
-        </p:nvSpPr>
-        <p:spPr>
-          <a:xfrm>
-            <a:off x="284309" y="205979"/>
-            <a:ext cx="8552330" cy="662317"/>
-          </a:xfrm>
-        </p:spPr>
-        <p:txBody>
-          <a:bodyPr/>
-          <a:lstStyle/>
-          <a:p>
-            <a:pPr lvl="0" indent="0" marL="0">
-              <a:buNone/>
-            </a:pPr>
-            <a:r>
-              <a:rPr/>
-              <a:t>Nutritional Monitoring after Surgery</a:t>
-            </a:r>
-          </a:p>
-        </p:txBody>
-      </p:sp>
-      <p:sp>
-        <p:nvSpPr>
-          <p:cNvPr id="3" name="Content Placeholder 2"/>
-          <p:cNvSpPr>
-            <a:spLocks noGrp="1"/>
-          </p:cNvSpPr>
-          <p:nvPr>
-            <p:ph idx="1"/>
-          </p:nvPr>
-        </p:nvSpPr>
-        <p:spPr/>
-        <p:txBody>
-          <a:bodyPr/>
-          <a:lstStyle/>
-          <a:p>
-            <a:pPr lvl="0" indent="0" marL="0">
-              <a:buNone/>
-            </a:pPr>
-            <a:r>
-              <a:rPr/>
-              <a:t>You may have difficulty absorbing some nutrients:</a:t>
-            </a:r>
-          </a:p>
-          <a:p>
-            <a:pPr lvl="0"/>
-            <a:r>
-              <a:rPr/>
-              <a:t>Iron</a:t>
-            </a:r>
-          </a:p>
-          <a:p>
-            <a:pPr lvl="0"/>
-            <a:r>
-              <a:rPr/>
-              <a:t>Vitamin B12</a:t>
-            </a:r>
-          </a:p>
-          <a:p>
-            <a:pPr lvl="0"/>
-            <a:r>
-              <a:rPr/>
-              <a:t>Vitamin D</a:t>
-            </a:r>
-          </a:p>
-        </p:txBody>
-      </p:sp>
-    </p:spTree>
-  </p:cSld>
-</p:sld>
-</file>
-
 <file path=ppt/slides/slide61.xml><?xml version="1.0" encoding="utf-8"?>
 <p:sld xmlns:a="http://schemas.openxmlformats.org/drawingml/2006/main" xmlns:r="http://schemas.openxmlformats.org/officeDocument/2006/relationships" xmlns:p="http://schemas.openxmlformats.org/presentationml/2006/main">
   <p:cSld>
@@ -10231,20 +10197,20 @@
         </p:nvSpPr>
         <p:spPr>
           <a:xfrm>
-            <a:off x="284309" y="205979"/>
-            <a:ext cx="8552330" cy="662317"/>
-          </a:xfrm>
-        </p:spPr>
-        <p:txBody>
-          <a:bodyPr/>
-          <a:lstStyle/>
-          <a:p>
-            <a:pPr lvl="0" indent="0" marL="0">
-              <a:buNone/>
-            </a:pPr>
-            <a:r>
-              <a:rPr/>
-              <a:t>Nutritional Monitoring after Surgery</a:t>
+            <a:off x="315045" y="205979"/>
+            <a:ext cx="8529278" cy="857250"/>
+          </a:xfrm>
+        </p:spPr>
+        <p:txBody>
+          <a:bodyPr/>
+          <a:lstStyle/>
+          <a:p>
+            <a:pPr lvl="0" indent="0" marL="0">
+              <a:buNone/>
+            </a:pPr>
+            <a:r>
+              <a:rPr/>
+              <a:t>Sleeping at Home</a:t>
             </a:r>
           </a:p>
         </p:txBody>
@@ -10256,7 +10222,7 @@
             <a:spLocks noGrp="1"/>
           </p:cNvSpPr>
           <p:nvPr>
-            <p:ph idx="1"/>
+            <p:ph idx="1" sz="half"/>
           </p:nvPr>
         </p:nvSpPr>
         <p:spPr/>
@@ -10269,32 +10235,59 @@
             </a:pPr>
             <a:r>
               <a:rPr/>
-              <a:t>About 3 months after the jejunostomy tube is removed, we will check blood levels:</a:t>
-            </a:r>
-          </a:p>
-          <a:p>
-            <a:pPr lvl="0"/>
-            <a:r>
-              <a:rPr/>
-              <a:t>Iron (ferritin)</a:t>
-            </a:r>
-          </a:p>
-          <a:p>
-            <a:pPr lvl="0"/>
-            <a:r>
-              <a:rPr/>
-              <a:t>Vitamin B12</a:t>
-            </a:r>
-          </a:p>
-          <a:p>
-            <a:pPr lvl="0"/>
-            <a:r>
-              <a:rPr/>
-              <a:t>Vitamin D</a:t>
-            </a:r>
-          </a:p>
-        </p:txBody>
-      </p:sp>
+              <a:t>Reflux can occur the first few weeks/months after surgery</a:t>
+            </a:r>
+          </a:p>
+          <a:p>
+            <a:pPr lvl="0" indent="0" marL="0">
+              <a:buNone/>
+            </a:pPr>
+            <a:r>
+              <a:rPr/>
+              <a:t>This improves over the first few months</a:t>
+            </a:r>
+          </a:p>
+          <a:p>
+            <a:pPr lvl="0" indent="0" marL="0">
+              <a:buNone/>
+            </a:pPr>
+            <a:r>
+              <a:rPr/>
+              <a:t>A wedge pillow can be helpful for sleep</a:t>
+            </a:r>
+          </a:p>
+        </p:txBody>
+      </p:sp>
+      <p:pic>
+        <p:nvPicPr>
+          <p:cNvPr descr="images/wedge_pillow_comm.jpg" id="0" name="Picture 1"/>
+          <p:cNvPicPr>
+            <a:picLocks noGrp="1" noChangeAspect="1"/>
+          </p:cNvPicPr>
+          <p:nvPr/>
+        </p:nvPicPr>
+        <p:blipFill>
+          <a:blip r:embed="rId2"/>
+          <a:stretch>
+            <a:fillRect/>
+          </a:stretch>
+        </p:blipFill>
+        <p:spPr bwMode="auto">
+          <a:xfrm>
+            <a:off x="4864100" y="1193800"/>
+            <a:ext cx="3733800" cy="3733800"/>
+          </a:xfrm>
+          <a:prstGeom prst="rect">
+            <a:avLst/>
+          </a:prstGeom>
+          <a:noFill/>
+          <a:ln w="9525">
+            <a:noFill/>
+            <a:headEnd/>
+            <a:tailEnd/>
+          </a:ln>
+        </p:spPr>
+      </p:pic>
     </p:spTree>
   </p:cSld>
 </p:sld>
@@ -10342,7 +10335,7 @@
             </a:pPr>
             <a:r>
               <a:rPr/>
-              <a:t>Nutritional Replacements after Surgery</a:t>
+              <a:t>Follow Up Clinic Visit 7-10 days after Discharge</a:t>
             </a:r>
           </a:p>
         </p:txBody>
@@ -10367,51 +10360,51 @@
             </a:pPr>
             <a:r>
               <a:rPr/>
-              <a:t>Vitamin or iron replacements can be ordered by:</a:t>
-            </a:r>
-          </a:p>
-          <a:p>
-            <a:pPr lvl="0"/>
-            <a:r>
-              <a:rPr/>
-              <a:t>Primary Care Provider (PCP)</a:t>
-            </a:r>
-          </a:p>
-          <a:p>
-            <a:pPr lvl="0"/>
-            <a:r>
-              <a:rPr/>
-              <a:t>Medical Oncologist</a:t>
-            </a:r>
-          </a:p>
-          <a:p>
-            <a:pPr lvl="0"/>
-            <a:r>
-              <a:rPr/>
-              <a:t>Surgeon</a:t>
-            </a:r>
-          </a:p>
-          <a:p>
-            <a:pPr lvl="0" indent="0" marL="0">
-              <a:buNone/>
-            </a:pPr>
-            <a:r>
-              <a:rPr/>
-              <a:t>If levels are low</a:t>
-            </a:r>
-          </a:p>
-          <a:p>
-            <a:pPr lvl="0"/>
-            <a:r>
-              <a:rPr/>
-              <a:t>Replacement</a:t>
-            </a:r>
-          </a:p>
-          <a:p>
-            <a:pPr lvl="0"/>
-            <a:r>
-              <a:rPr/>
-              <a:t>Repeat testing in 3-6 months</a:t>
+              <a:t>In-person clinic visit with Dr Salo or Kate Duncan</a:t>
+            </a:r>
+          </a:p>
+          <a:p>
+            <a:pPr lvl="0"/>
+            <a:r>
+              <a:rPr/>
+              <a:t>Check surgical site</a:t>
+            </a:r>
+          </a:p>
+          <a:p>
+            <a:pPr lvl="0"/>
+            <a:r>
+              <a:rPr/>
+              <a:t>Remove staples (if needed)</a:t>
+            </a:r>
+          </a:p>
+          <a:p>
+            <a:pPr lvl="0"/>
+            <a:r>
+              <a:rPr/>
+              <a:t>Remove abdominal drains (if needed)</a:t>
+            </a:r>
+          </a:p>
+          <a:p>
+            <a:pPr lvl="0" indent="0" marL="0">
+              <a:buNone/>
+            </a:pPr>
+            <a:r>
+              <a:rPr/>
+              <a:t>Meet with dietitian:</a:t>
+            </a:r>
+          </a:p>
+          <a:p>
+            <a:pPr lvl="0"/>
+            <a:r>
+              <a:rPr/>
+              <a:t>Reduce tube feeds</a:t>
+            </a:r>
+          </a:p>
+          <a:p>
+            <a:pPr lvl="0"/>
+            <a:r>
+              <a:rPr/>
+              <a:t>Advance diet by mouth</a:t>
             </a:r>
           </a:p>
         </p:txBody>
@@ -10463,93 +10456,86 @@
             </a:pPr>
             <a:r>
               <a:rPr/>
-              <a:t>Team Members - Physicians</a:t>
-            </a:r>
-          </a:p>
-        </p:txBody>
-      </p:sp>
-      <p:sp>
-        <p:nvSpPr>
-          <p:cNvPr id="3" name="Content Placeholder 2"/>
-          <p:cNvSpPr>
-            <a:spLocks noGrp="1"/>
-          </p:cNvSpPr>
-          <p:nvPr>
-            <p:ph idx="1"/>
-          </p:nvPr>
-        </p:nvSpPr>
-        <p:spPr/>
-        <p:txBody>
-          <a:bodyPr/>
-          <a:lstStyle/>
-          <a:p>
-            <a:pPr lvl="0" indent="0" marL="0">
-              <a:buNone/>
-            </a:pPr>
-            <a:r>
-              <a:rPr/>
-              <a:t>Primary Care Provider</a:t>
-            </a:r>
-          </a:p>
-          <a:p>
-            <a:pPr lvl="0" indent="0" marL="0">
-              <a:buNone/>
-            </a:pPr>
-            <a:r>
-              <a:rPr/>
-              <a:t>Gastroenterologist</a:t>
-            </a:r>
-          </a:p>
-          <a:p>
-            <a:pPr lvl="0" indent="0" marL="0">
-              <a:buNone/>
-            </a:pPr>
-            <a:r>
-              <a:rPr/>
-              <a:t>Medical Oncologist (chemotherapy)</a:t>
-            </a:r>
-          </a:p>
-          <a:p>
-            <a:pPr lvl="0" indent="0" marL="0">
-              <a:buNone/>
-            </a:pPr>
-            <a:r>
-              <a:rPr/>
-              <a:t>Radiation Oncologist (radiation)</a:t>
-            </a:r>
-          </a:p>
-          <a:p>
-            <a:pPr lvl="0" indent="0" marL="0">
-              <a:buNone/>
-            </a:pPr>
-            <a:r>
-              <a:rPr/>
-              <a:t>Surgeons</a:t>
-            </a:r>
-          </a:p>
-          <a:p>
-            <a:pPr lvl="0"/>
-            <a:r>
-              <a:rPr/>
-              <a:t>Jonathan Salo MD</a:t>
-            </a:r>
-          </a:p>
-          <a:p>
-            <a:pPr lvl="0"/>
-            <a:r>
-              <a:rPr/>
-              <a:t>Kelli Salter MD</a:t>
-            </a:r>
-          </a:p>
-          <a:p>
-            <a:pPr lvl="0"/>
-            <a:r>
-              <a:rPr/>
-              <a:t>Michael Roach MD</a:t>
-            </a:r>
-          </a:p>
-        </p:txBody>
-      </p:sp>
+              <a:t>Adjust Medicines after Surgery</a:t>
+            </a:r>
+          </a:p>
+        </p:txBody>
+      </p:sp>
+      <mc:AlternateContent xmlns:mc="http://schemas.openxmlformats.org/markup-compatibility/2006">
+        <mc:Choice xmlns:a14="http://schemas.microsoft.com/office/drawing/2010/main" Requires="a14">
+          <p:sp>
+            <p:nvSpPr>
+              <p:cNvPr id="3" name="Content Placeholder 2"/>
+              <p:cNvSpPr>
+                <a:spLocks noGrp="1"/>
+              </p:cNvSpPr>
+              <p:nvPr>
+                <p:ph idx="1"/>
+              </p:nvPr>
+            </p:nvSpPr>
+            <p:spPr/>
+            <p:txBody>
+              <a:bodyPr/>
+              <a:lstStyle/>
+              <a:p>
+                <a:pPr lvl="0" indent="0" marL="0">
+                  <a:buNone/>
+                </a:pPr>
+                <a:r>
+                  <a:rPr/>
+                  <a:t>Reglan: Discontinue 6 weeks after surgery Remeron: Discontinue 12 weeks after surgery Pain Medicines:</a:t>
+                </a:r>
+              </a:p>
+              <a:p>
+                <a:pPr lvl="0"/>
+                <a:r>
+                  <a:rPr/>
+                  <a:t>Wean oxycodone within 6 weeks of surgery</a:t>
+                </a:r>
+              </a:p>
+              <a:p>
+                <a:pPr lvl="0"/>
+                <a:r>
+                  <a:rPr/>
+                  <a:t>Discontinue gabapentin and acetaminophen (Tylenol) within 8 weeks</a:t>
+                </a:r>
+              </a:p>
+              <a:p>
+                <a:pPr lvl="0" indent="0" marL="0">
+                  <a:buNone/>
+                </a:pPr>
+                <a:r>
+                  <a:rPr/>
+                  <a:t>Continue acid blockers (PPI) for at least 1 year</a:t>
+                </a:r>
+              </a:p>
+              <a:p>
+                <a:pPr lvl="0" indent="0" marL="0">
+                  <a:buNone/>
+                </a:pPr>
+                <a:r>
+                  <a:rPr/>
+                  <a:t>Reduce metoprolol to once/day for 7 dayus </a:t>
+                </a:r>
+                <a14:m>
+                  <m:oMath xmlns:m="http://schemas.openxmlformats.org/officeDocument/2006/math">
+                    <m:r>
+                      <m:rPr>
+                        <m:sty m:val="p"/>
+                      </m:rPr>
+                      <m:t>→</m:t>
+                    </m:r>
+                  </m:oMath>
+                </a14:m>
+                <a:r>
+                  <a:rPr/>
+                  <a:t> discontinue</a:t>
+                </a:r>
+              </a:p>
+            </p:txBody>
+          </p:sp>
+        </mc:Choice>
+      </mc:AlternateContent>
     </p:spTree>
   </p:cSld>
 </p:sld>
@@ -10597,6 +10583,552 @@
             </a:pPr>
             <a:r>
               <a:rPr/>
+              <a:t>Jejunostomy Removal</a:t>
+            </a:r>
+          </a:p>
+        </p:txBody>
+      </p:sp>
+      <p:sp>
+        <p:nvSpPr>
+          <p:cNvPr id="3" name="Content Placeholder 2"/>
+          <p:cNvSpPr>
+            <a:spLocks noGrp="1"/>
+          </p:cNvSpPr>
+          <p:nvPr>
+            <p:ph idx="1"/>
+          </p:nvPr>
+        </p:nvSpPr>
+        <p:spPr/>
+        <p:txBody>
+          <a:bodyPr/>
+          <a:lstStyle/>
+          <a:p>
+            <a:pPr lvl="0" indent="0" marL="0">
+              <a:buNone/>
+            </a:pPr>
+            <a:r>
+              <a:rPr/>
+              <a:t>Jejunostomy tube is removed in the office once you can take in enough nutrients by mouth</a:t>
+            </a:r>
+          </a:p>
+          <a:p>
+            <a:pPr lvl="0" indent="0" marL="0">
+              <a:buNone/>
+            </a:pPr>
+            <a:r>
+              <a:rPr/>
+              <a:t>Removal usually around 8 weeks after surgery</a:t>
+            </a:r>
+          </a:p>
+          <a:p>
+            <a:pPr lvl="0" indent="0" marL="0">
+              <a:buNone/>
+            </a:pPr>
+            <a:r>
+              <a:rPr/>
+              <a:t>May take 5 minutes and some local anesthetic to loosen up the tube for removal.</a:t>
+            </a:r>
+          </a:p>
+        </p:txBody>
+      </p:sp>
+    </p:spTree>
+  </p:cSld>
+</p:sld>
+</file>
+
+<file path=ppt/slides/slide65.xml><?xml version="1.0" encoding="utf-8"?>
+<p:sld xmlns:a="http://schemas.openxmlformats.org/drawingml/2006/main" xmlns:r="http://schemas.openxmlformats.org/officeDocument/2006/relationships" xmlns:p="http://schemas.openxmlformats.org/presentationml/2006/main">
+  <p:cSld>
+    <p:spTree>
+      <p:nvGrpSpPr>
+        <p:cNvPr id="1" name=""/>
+        <p:cNvGrpSpPr/>
+        <p:nvPr/>
+      </p:nvGrpSpPr>
+      <p:grpSpPr>
+        <a:xfrm>
+          <a:off x="0" y="0"/>
+          <a:ext cx="0" cy="0"/>
+          <a:chOff x="0" y="0"/>
+          <a:chExt cx="0" cy="0"/>
+        </a:xfrm>
+      </p:grpSpPr>
+      <p:sp>
+        <p:nvSpPr>
+          <p:cNvPr id="2" name="Title 1"/>
+          <p:cNvSpPr>
+            <a:spLocks noGrp="1"/>
+          </p:cNvSpPr>
+          <p:nvPr>
+            <p:ph type="title"/>
+          </p:nvPr>
+        </p:nvSpPr>
+        <p:spPr>
+          <a:xfrm>
+            <a:off x="284309" y="205979"/>
+            <a:ext cx="8552330" cy="662317"/>
+          </a:xfrm>
+        </p:spPr>
+        <p:txBody>
+          <a:bodyPr/>
+          <a:lstStyle/>
+          <a:p>
+            <a:pPr lvl="0" indent="0" marL="0">
+              <a:buNone/>
+            </a:pPr>
+            <a:r>
+              <a:rPr/>
+              <a:t>Nutritional Monitoring after Surgery</a:t>
+            </a:r>
+          </a:p>
+        </p:txBody>
+      </p:sp>
+      <p:sp>
+        <p:nvSpPr>
+          <p:cNvPr id="3" name="Content Placeholder 2"/>
+          <p:cNvSpPr>
+            <a:spLocks noGrp="1"/>
+          </p:cNvSpPr>
+          <p:nvPr>
+            <p:ph idx="1"/>
+          </p:nvPr>
+        </p:nvSpPr>
+        <p:spPr/>
+        <p:txBody>
+          <a:bodyPr/>
+          <a:lstStyle/>
+          <a:p>
+            <a:pPr lvl="0" indent="0" marL="0">
+              <a:buNone/>
+            </a:pPr>
+            <a:r>
+              <a:rPr/>
+              <a:t>You may have difficulty absorbing some nutrients:</a:t>
+            </a:r>
+          </a:p>
+          <a:p>
+            <a:pPr lvl="0"/>
+            <a:r>
+              <a:rPr/>
+              <a:t>Iron</a:t>
+            </a:r>
+          </a:p>
+          <a:p>
+            <a:pPr lvl="0"/>
+            <a:r>
+              <a:rPr/>
+              <a:t>Vitamin B12</a:t>
+            </a:r>
+          </a:p>
+          <a:p>
+            <a:pPr lvl="0"/>
+            <a:r>
+              <a:rPr/>
+              <a:t>Vitamin D</a:t>
+            </a:r>
+          </a:p>
+        </p:txBody>
+      </p:sp>
+    </p:spTree>
+  </p:cSld>
+</p:sld>
+</file>
+
+<file path=ppt/slides/slide66.xml><?xml version="1.0" encoding="utf-8"?>
+<p:sld xmlns:a="http://schemas.openxmlformats.org/drawingml/2006/main" xmlns:r="http://schemas.openxmlformats.org/officeDocument/2006/relationships" xmlns:p="http://schemas.openxmlformats.org/presentationml/2006/main">
+  <p:cSld>
+    <p:spTree>
+      <p:nvGrpSpPr>
+        <p:cNvPr id="1" name=""/>
+        <p:cNvGrpSpPr/>
+        <p:nvPr/>
+      </p:nvGrpSpPr>
+      <p:grpSpPr>
+        <a:xfrm>
+          <a:off x="0" y="0"/>
+          <a:ext cx="0" cy="0"/>
+          <a:chOff x="0" y="0"/>
+          <a:chExt cx="0" cy="0"/>
+        </a:xfrm>
+      </p:grpSpPr>
+      <p:sp>
+        <p:nvSpPr>
+          <p:cNvPr id="2" name="Title 1"/>
+          <p:cNvSpPr>
+            <a:spLocks noGrp="1"/>
+          </p:cNvSpPr>
+          <p:nvPr>
+            <p:ph type="title"/>
+          </p:nvPr>
+        </p:nvSpPr>
+        <p:spPr>
+          <a:xfrm>
+            <a:off x="284309" y="205979"/>
+            <a:ext cx="8552330" cy="662317"/>
+          </a:xfrm>
+        </p:spPr>
+        <p:txBody>
+          <a:bodyPr/>
+          <a:lstStyle/>
+          <a:p>
+            <a:pPr lvl="0" indent="0" marL="0">
+              <a:buNone/>
+            </a:pPr>
+            <a:r>
+              <a:rPr/>
+              <a:t>Nutritional Monitoring after Surgery</a:t>
+            </a:r>
+          </a:p>
+        </p:txBody>
+      </p:sp>
+      <p:sp>
+        <p:nvSpPr>
+          <p:cNvPr id="3" name="Content Placeholder 2"/>
+          <p:cNvSpPr>
+            <a:spLocks noGrp="1"/>
+          </p:cNvSpPr>
+          <p:nvPr>
+            <p:ph idx="1"/>
+          </p:nvPr>
+        </p:nvSpPr>
+        <p:spPr/>
+        <p:txBody>
+          <a:bodyPr/>
+          <a:lstStyle/>
+          <a:p>
+            <a:pPr lvl="0" indent="0" marL="0">
+              <a:buNone/>
+            </a:pPr>
+            <a:r>
+              <a:rPr/>
+              <a:t>About 3 months after the jejunostomy tube is removed, we will check blood levels:</a:t>
+            </a:r>
+          </a:p>
+          <a:p>
+            <a:pPr lvl="0"/>
+            <a:r>
+              <a:rPr/>
+              <a:t>Iron (ferritin)</a:t>
+            </a:r>
+          </a:p>
+          <a:p>
+            <a:pPr lvl="0"/>
+            <a:r>
+              <a:rPr/>
+              <a:t>Vitamin B12</a:t>
+            </a:r>
+          </a:p>
+          <a:p>
+            <a:pPr lvl="0"/>
+            <a:r>
+              <a:rPr/>
+              <a:t>Vitamin D</a:t>
+            </a:r>
+          </a:p>
+        </p:txBody>
+      </p:sp>
+    </p:spTree>
+  </p:cSld>
+</p:sld>
+</file>
+
+<file path=ppt/slides/slide67.xml><?xml version="1.0" encoding="utf-8"?>
+<p:sld xmlns:a="http://schemas.openxmlformats.org/drawingml/2006/main" xmlns:r="http://schemas.openxmlformats.org/officeDocument/2006/relationships" xmlns:p="http://schemas.openxmlformats.org/presentationml/2006/main">
+  <p:cSld>
+    <p:spTree>
+      <p:nvGrpSpPr>
+        <p:cNvPr id="1" name=""/>
+        <p:cNvGrpSpPr/>
+        <p:nvPr/>
+      </p:nvGrpSpPr>
+      <p:grpSpPr>
+        <a:xfrm>
+          <a:off x="0" y="0"/>
+          <a:ext cx="0" cy="0"/>
+          <a:chOff x="0" y="0"/>
+          <a:chExt cx="0" cy="0"/>
+        </a:xfrm>
+      </p:grpSpPr>
+      <p:sp>
+        <p:nvSpPr>
+          <p:cNvPr id="2" name="Title 1"/>
+          <p:cNvSpPr>
+            <a:spLocks noGrp="1"/>
+          </p:cNvSpPr>
+          <p:nvPr>
+            <p:ph type="title"/>
+          </p:nvPr>
+        </p:nvSpPr>
+        <p:spPr>
+          <a:xfrm>
+            <a:off x="284309" y="205979"/>
+            <a:ext cx="8552330" cy="662317"/>
+          </a:xfrm>
+        </p:spPr>
+        <p:txBody>
+          <a:bodyPr/>
+          <a:lstStyle/>
+          <a:p>
+            <a:pPr lvl="0" indent="0" marL="0">
+              <a:buNone/>
+            </a:pPr>
+            <a:r>
+              <a:rPr/>
+              <a:t>Nutritional Replacements after Surgery</a:t>
+            </a:r>
+          </a:p>
+        </p:txBody>
+      </p:sp>
+      <p:sp>
+        <p:nvSpPr>
+          <p:cNvPr id="3" name="Content Placeholder 2"/>
+          <p:cNvSpPr>
+            <a:spLocks noGrp="1"/>
+          </p:cNvSpPr>
+          <p:nvPr>
+            <p:ph idx="1"/>
+          </p:nvPr>
+        </p:nvSpPr>
+        <p:spPr/>
+        <p:txBody>
+          <a:bodyPr/>
+          <a:lstStyle/>
+          <a:p>
+            <a:pPr lvl="0" indent="0" marL="0">
+              <a:buNone/>
+            </a:pPr>
+            <a:r>
+              <a:rPr/>
+              <a:t>Vitamin or iron replacements can be ordered by:</a:t>
+            </a:r>
+          </a:p>
+          <a:p>
+            <a:pPr lvl="0"/>
+            <a:r>
+              <a:rPr/>
+              <a:t>Primary Care Provider (PCP)</a:t>
+            </a:r>
+          </a:p>
+          <a:p>
+            <a:pPr lvl="0"/>
+            <a:r>
+              <a:rPr/>
+              <a:t>Medical Oncologist</a:t>
+            </a:r>
+          </a:p>
+          <a:p>
+            <a:pPr lvl="0"/>
+            <a:r>
+              <a:rPr/>
+              <a:t>Surgeon</a:t>
+            </a:r>
+          </a:p>
+          <a:p>
+            <a:pPr lvl="0" indent="0" marL="0">
+              <a:buNone/>
+            </a:pPr>
+            <a:r>
+              <a:rPr/>
+              <a:t>If levels are low</a:t>
+            </a:r>
+          </a:p>
+          <a:p>
+            <a:pPr lvl="0"/>
+            <a:r>
+              <a:rPr/>
+              <a:t>Replacement</a:t>
+            </a:r>
+          </a:p>
+          <a:p>
+            <a:pPr lvl="0"/>
+            <a:r>
+              <a:rPr/>
+              <a:t>Repeat testing in 3-6 months</a:t>
+            </a:r>
+          </a:p>
+        </p:txBody>
+      </p:sp>
+    </p:spTree>
+  </p:cSld>
+</p:sld>
+</file>
+
+<file path=ppt/slides/slide68.xml><?xml version="1.0" encoding="utf-8"?>
+<p:sld xmlns:a="http://schemas.openxmlformats.org/drawingml/2006/main" xmlns:r="http://schemas.openxmlformats.org/officeDocument/2006/relationships" xmlns:p="http://schemas.openxmlformats.org/presentationml/2006/main">
+  <p:cSld>
+    <p:spTree>
+      <p:nvGrpSpPr>
+        <p:cNvPr id="1" name=""/>
+        <p:cNvGrpSpPr/>
+        <p:nvPr/>
+      </p:nvGrpSpPr>
+      <p:grpSpPr>
+        <a:xfrm>
+          <a:off x="0" y="0"/>
+          <a:ext cx="0" cy="0"/>
+          <a:chOff x="0" y="0"/>
+          <a:chExt cx="0" cy="0"/>
+        </a:xfrm>
+      </p:grpSpPr>
+      <p:sp>
+        <p:nvSpPr>
+          <p:cNvPr id="2" name="Title 1"/>
+          <p:cNvSpPr>
+            <a:spLocks noGrp="1"/>
+          </p:cNvSpPr>
+          <p:nvPr>
+            <p:ph type="title"/>
+          </p:nvPr>
+        </p:nvSpPr>
+        <p:spPr>
+          <a:xfrm>
+            <a:off x="284309" y="205979"/>
+            <a:ext cx="8552330" cy="662317"/>
+          </a:xfrm>
+        </p:spPr>
+        <p:txBody>
+          <a:bodyPr/>
+          <a:lstStyle/>
+          <a:p>
+            <a:pPr lvl="0" indent="0" marL="0">
+              <a:buNone/>
+            </a:pPr>
+            <a:r>
+              <a:rPr/>
+              <a:t>Team Members - Physicians</a:t>
+            </a:r>
+          </a:p>
+        </p:txBody>
+      </p:sp>
+      <p:sp>
+        <p:nvSpPr>
+          <p:cNvPr id="3" name="Content Placeholder 2"/>
+          <p:cNvSpPr>
+            <a:spLocks noGrp="1"/>
+          </p:cNvSpPr>
+          <p:nvPr>
+            <p:ph idx="1"/>
+          </p:nvPr>
+        </p:nvSpPr>
+        <p:spPr/>
+        <p:txBody>
+          <a:bodyPr/>
+          <a:lstStyle/>
+          <a:p>
+            <a:pPr lvl="0" indent="0" marL="0">
+              <a:buNone/>
+            </a:pPr>
+            <a:r>
+              <a:rPr/>
+              <a:t>Primary Care Provider</a:t>
+            </a:r>
+          </a:p>
+          <a:p>
+            <a:pPr lvl="0" indent="0" marL="0">
+              <a:buNone/>
+            </a:pPr>
+            <a:r>
+              <a:rPr/>
+              <a:t>Gastroenterologist</a:t>
+            </a:r>
+          </a:p>
+          <a:p>
+            <a:pPr lvl="0" indent="0" marL="0">
+              <a:buNone/>
+            </a:pPr>
+            <a:r>
+              <a:rPr/>
+              <a:t>Medical Oncologist (chemotherapy)</a:t>
+            </a:r>
+          </a:p>
+          <a:p>
+            <a:pPr lvl="0" indent="0" marL="0">
+              <a:buNone/>
+            </a:pPr>
+            <a:r>
+              <a:rPr/>
+              <a:t>Radiation Oncologist (radiation)</a:t>
+            </a:r>
+          </a:p>
+          <a:p>
+            <a:pPr lvl="0" indent="0" marL="0">
+              <a:buNone/>
+            </a:pPr>
+            <a:r>
+              <a:rPr/>
+              <a:t>Surgeons</a:t>
+            </a:r>
+          </a:p>
+          <a:p>
+            <a:pPr lvl="0"/>
+            <a:r>
+              <a:rPr/>
+              <a:t>Jonathan Salo MD</a:t>
+            </a:r>
+          </a:p>
+          <a:p>
+            <a:pPr lvl="0"/>
+            <a:r>
+              <a:rPr/>
+              <a:t>Kelli Salter MD</a:t>
+            </a:r>
+          </a:p>
+          <a:p>
+            <a:pPr lvl="0"/>
+            <a:r>
+              <a:rPr/>
+              <a:t>Michael Roach MD</a:t>
+            </a:r>
+          </a:p>
+        </p:txBody>
+      </p:sp>
+    </p:spTree>
+  </p:cSld>
+</p:sld>
+</file>
+
+<file path=ppt/slides/slide69.xml><?xml version="1.0" encoding="utf-8"?>
+<p:sld xmlns:a="http://schemas.openxmlformats.org/drawingml/2006/main" xmlns:r="http://schemas.openxmlformats.org/officeDocument/2006/relationships" xmlns:p="http://schemas.openxmlformats.org/presentationml/2006/main">
+  <p:cSld>
+    <p:spTree>
+      <p:nvGrpSpPr>
+        <p:cNvPr id="1" name=""/>
+        <p:cNvGrpSpPr/>
+        <p:nvPr/>
+      </p:nvGrpSpPr>
+      <p:grpSpPr>
+        <a:xfrm>
+          <a:off x="0" y="0"/>
+          <a:ext cx="0" cy="0"/>
+          <a:chOff x="0" y="0"/>
+          <a:chExt cx="0" cy="0"/>
+        </a:xfrm>
+      </p:grpSpPr>
+      <p:sp>
+        <p:nvSpPr>
+          <p:cNvPr id="2" name="Title 1"/>
+          <p:cNvSpPr>
+            <a:spLocks noGrp="1"/>
+          </p:cNvSpPr>
+          <p:nvPr>
+            <p:ph type="title"/>
+          </p:nvPr>
+        </p:nvSpPr>
+        <p:spPr>
+          <a:xfrm>
+            <a:off x="284309" y="205979"/>
+            <a:ext cx="8552330" cy="662317"/>
+          </a:xfrm>
+        </p:spPr>
+        <p:txBody>
+          <a:bodyPr/>
+          <a:lstStyle/>
+          <a:p>
+            <a:pPr lvl="0" indent="0" marL="0">
+              <a:buNone/>
+            </a:pPr>
+            <a:r>
+              <a:rPr/>
               <a:t>Team Members - Support Staff</a:t>
             </a:r>
           </a:p>
@@ -10663,21 +11195,7 @@
             </a:pPr>
             <a:r>
               <a:rPr/>
-              <a:t>Navigators</a:t>
-            </a:r>
-          </a:p>
-          <a:p>
-            <a:pPr lvl="0"/>
-            <a:r>
-              <a:rPr/>
-              <a:t>Laura Swift</a:t>
-            </a:r>
-          </a:p>
-          <a:p>
-            <a:pPr lvl="0"/>
-            <a:r>
-              <a:rPr/>
-              <a:t>Lorna Espinal</a:t>
+              <a:t>Navigators: Laura Swift RN &amp; Lorna Espinal RN</a:t>
             </a:r>
           </a:p>
           <a:p>
@@ -10738,7 +11256,7 @@
             </a:pPr>
             <a:r>
               <a:rPr/>
-              <a:t>Day of Surgery</a:t>
+              <a:t>Morning of Surgery</a:t>
             </a:r>
           </a:p>
         </p:txBody>
@@ -10859,7 +11377,7 @@
             </a:pPr>
             <a:r>
               <a:rPr/>
-              <a:t>Medicines the Day of Surgery</a:t>
+              <a:t>Medicines the Morning of Surgery</a:t>
             </a:r>
           </a:p>
         </p:txBody>
@@ -10956,7 +11474,7 @@
             </a:pPr>
             <a:r>
               <a:rPr/>
-              <a:t>Preparation for Surgery</a:t>
+              <a:t>Hospitality House</a:t>
             </a:r>
           </a:p>
         </p:txBody>
@@ -10976,47 +11494,38 @@
           <a:bodyPr/>
           <a:lstStyle/>
           <a:p>
-            <a:pPr lvl="0" indent="0" marL="0">
-              <a:buNone/>
-            </a:pPr>
-            <a:r>
-              <a:rPr/>
-              <a:t>Medical evaluation may be needed before surgery:</a:t>
-            </a:r>
-          </a:p>
-          <a:p>
-            <a:pPr lvl="0"/>
-            <a:r>
-              <a:rPr/>
-              <a:t>Pulmonary Function Tests to test lung function</a:t>
-            </a:r>
-          </a:p>
-          <a:p>
-            <a:pPr lvl="0"/>
-            <a:r>
-              <a:rPr/>
-              <a:t>Cardiology evaluation to test heart function</a:t>
-            </a:r>
-          </a:p>
-          <a:p>
-            <a:pPr lvl="1"/>
-            <a:r>
-              <a:rPr/>
-              <a:t>Echocardiogram</a:t>
-            </a:r>
-          </a:p>
-          <a:p>
-            <a:pPr lvl="1"/>
-            <a:r>
-              <a:rPr/>
-              <a:t>Stress Test</a:t>
-            </a:r>
-          </a:p>
-          <a:p>
-            <a:pPr lvl="1"/>
-            <a:r>
-              <a:rPr/>
-              <a:t>Holter monitor</a:t>
+            <a:pPr lvl="0"/>
+            <a:r>
+              <a:rPr/>
+              <a:t>Guest house for patients and families</a:t>
+            </a:r>
+          </a:p>
+          <a:p>
+            <a:pPr lvl="0"/>
+            <a:r>
+              <a:rPr/>
+              <a:t>Located walking distance from hospital</a:t>
+            </a:r>
+          </a:p>
+          <a:p>
+            <a:pPr lvl="0"/>
+            <a:r>
+              <a:rPr/>
+              <a:t>Shuttle service available</a:t>
+            </a:r>
+          </a:p>
+          <a:p>
+            <a:pPr lvl="0"/>
+            <a:r>
+              <a:rPr/>
+              <a:t>Make reservation request through clinic nurses</a:t>
+            </a:r>
+          </a:p>
+          <a:p>
+            <a:pPr lvl="0"/>
+            <a:r>
+              <a:rPr/>
+              <a:t>Cost $50 per night</a:t>
             </a:r>
           </a:p>
         </p:txBody>

--- a/lci_esophagectomy_consult.pptx
+++ b/lci_esophagectomy_consult.pptx
@@ -74,6 +74,9 @@
     <p:sldId id="322" r:id="rId68"/>
     <p:sldId id="323" r:id="rId69"/>
     <p:sldId id="324" r:id="rId70"/>
+    <p:sldId id="325" r:id="rId71"/>
+    <p:sldId id="326" r:id="rId72"/>
+    <p:sldId id="327" r:id="rId73"/>
   </p:sldIdLst>
   <p:sldSz cx="9144000" cy="5143500" type="screen16x9"/>
   <p:notesSz cx="6858000" cy="9144000"/>
@@ -3804,7 +3807,7 @@
             </a:pPr>
             <a:r>
               <a:rPr/>
-              <a:t>Visitor’s Policy</a:t>
+              <a:t>What to Bring to the Hospital</a:t>
             </a:r>
           </a:p>
         </p:txBody>
@@ -3824,65 +3827,31 @@
           <a:bodyPr/>
           <a:lstStyle/>
           <a:p>
-            <a:pPr lvl="0" indent="0" marL="0">
-              <a:buNone/>
-            </a:pPr>
-            <a:r>
-              <a:rPr/>
-              <a:t>Intensive Care Unit</a:t>
-            </a:r>
-          </a:p>
-          <a:p>
-            <a:pPr lvl="0"/>
-            <a:r>
-              <a:rPr/>
-              <a:t>Two visitors at a time 8am - 8pm</a:t>
-            </a:r>
-          </a:p>
-          <a:p>
-            <a:pPr lvl="0"/>
-            <a:r>
-              <a:rPr/>
-              <a:t>One “Care Partner” can stay overnight in ICU</a:t>
-            </a:r>
-          </a:p>
-          <a:p>
-            <a:pPr lvl="0" indent="0" marL="0">
-              <a:buNone/>
-            </a:pPr>
-            <a:r>
-              <a:rPr/>
-              <a:t>Ward</a:t>
-            </a:r>
-          </a:p>
-          <a:p>
-            <a:pPr lvl="0"/>
-            <a:r>
-              <a:rPr/>
-              <a:t>All rooms are private rooms</a:t>
-            </a:r>
-          </a:p>
-          <a:p>
-            <a:pPr lvl="0"/>
-            <a:r>
-              <a:rPr/>
-              <a:t>Day bed available for a family member</a:t>
-            </a:r>
-          </a:p>
-          <a:p>
-            <a:pPr lvl="0"/>
-            <a:r>
-              <a:rPr/>
-              <a:t>Visiting hours 8am - 8pm</a:t>
-            </a:r>
-          </a:p>
-          <a:p>
-            <a:pPr lvl="0" indent="0" marL="0">
-              <a:buNone/>
-            </a:pPr>
-            <a:r>
-              <a:rPr/>
-              <a:t>No visitors please who have a cough or fever!</a:t>
+            <a:pPr lvl="0"/>
+            <a:r>
+              <a:rPr/>
+              <a:t>No jewelery or valuables</a:t>
+            </a:r>
+          </a:p>
+          <a:p>
+            <a:pPr lvl="0"/>
+            <a:r>
+              <a:rPr/>
+              <a:t>Cell phone and charger</a:t>
+            </a:r>
+          </a:p>
+          <a:p>
+            <a:pPr lvl="0"/>
+            <a:r>
+              <a:rPr/>
+              <a:t>Insurance cards??</a:t>
+            </a:r>
+          </a:p>
+          <a:p>
+            <a:pPr lvl="0"/>
+            <a:r>
+              <a:rPr/>
+              <a:t>Underweaer??</a:t>
             </a:r>
           </a:p>
         </p:txBody>
@@ -3934,7 +3903,7 @@
             </a:pPr>
             <a:r>
               <a:rPr/>
-              <a:t>Preparation for Surgery</a:t>
+              <a:t>Visitor’s Policy</a:t>
             </a:r>
           </a:p>
         </p:txBody>
@@ -3959,42 +3928,60 @@
             </a:pPr>
             <a:r>
               <a:rPr/>
-              <a:t>Medical evaluation may be needed before surgery:</a:t>
-            </a:r>
-          </a:p>
-          <a:p>
-            <a:pPr lvl="0"/>
-            <a:r>
-              <a:rPr/>
-              <a:t>Pulmonary Function Tests to test lung function</a:t>
-            </a:r>
-          </a:p>
-          <a:p>
-            <a:pPr lvl="0"/>
-            <a:r>
-              <a:rPr/>
-              <a:t>Cardiology evaluation to test heart function</a:t>
-            </a:r>
-          </a:p>
-          <a:p>
-            <a:pPr lvl="1"/>
-            <a:r>
-              <a:rPr/>
-              <a:t>Echocardiogram</a:t>
-            </a:r>
-          </a:p>
-          <a:p>
-            <a:pPr lvl="1"/>
-            <a:r>
-              <a:rPr/>
-              <a:t>Stress Test</a:t>
-            </a:r>
-          </a:p>
-          <a:p>
-            <a:pPr lvl="1"/>
-            <a:r>
-              <a:rPr/>
-              <a:t>Holter monitor</a:t>
+              <a:t>Intensive Care Unit</a:t>
+            </a:r>
+          </a:p>
+          <a:p>
+            <a:pPr lvl="0"/>
+            <a:r>
+              <a:rPr/>
+              <a:t>Two visitors at a time 8am - 8pm</a:t>
+            </a:r>
+          </a:p>
+          <a:p>
+            <a:pPr lvl="0"/>
+            <a:r>
+              <a:rPr/>
+              <a:t>One “Care Partner” can stay overnight in ICU</a:t>
+            </a:r>
+          </a:p>
+          <a:p>
+            <a:pPr lvl="0" indent="0" marL="0">
+              <a:buNone/>
+            </a:pPr>
+            <a:r>
+              <a:rPr/>
+              <a:t>Ward</a:t>
+            </a:r>
+          </a:p>
+          <a:p>
+            <a:pPr lvl="0"/>
+            <a:r>
+              <a:rPr/>
+              <a:t>All rooms are private rooms</a:t>
+            </a:r>
+          </a:p>
+          <a:p>
+            <a:pPr lvl="0"/>
+            <a:r>
+              <a:rPr/>
+              <a:t>Day bed available for a family member</a:t>
+            </a:r>
+          </a:p>
+          <a:p>
+            <a:pPr lvl="0"/>
+            <a:r>
+              <a:rPr/>
+              <a:t>Visiting hours 8am - 8pm</a:t>
+            </a:r>
+          </a:p>
+          <a:p>
+            <a:pPr lvl="0" indent="0" marL="0">
+              <a:buNone/>
+            </a:pPr>
+            <a:r>
+              <a:rPr/>
+              <a:t>No visitors please who have a cough or fever!</a:t>
             </a:r>
           </a:p>
         </p:txBody>
@@ -4005,6 +3992,118 @@
 </file>
 
 <file path=ppt/slides/slide14.xml><?xml version="1.0" encoding="utf-8"?>
+<p:sld xmlns:a="http://schemas.openxmlformats.org/drawingml/2006/main" xmlns:r="http://schemas.openxmlformats.org/officeDocument/2006/relationships" xmlns:p="http://schemas.openxmlformats.org/presentationml/2006/main">
+  <p:cSld>
+    <p:spTree>
+      <p:nvGrpSpPr>
+        <p:cNvPr id="1" name=""/>
+        <p:cNvGrpSpPr/>
+        <p:nvPr/>
+      </p:nvGrpSpPr>
+      <p:grpSpPr>
+        <a:xfrm>
+          <a:off x="0" y="0"/>
+          <a:ext cx="0" cy="0"/>
+          <a:chOff x="0" y="0"/>
+          <a:chExt cx="0" cy="0"/>
+        </a:xfrm>
+      </p:grpSpPr>
+      <p:sp>
+        <p:nvSpPr>
+          <p:cNvPr id="2" name="Title 1"/>
+          <p:cNvSpPr>
+            <a:spLocks noGrp="1"/>
+          </p:cNvSpPr>
+          <p:nvPr>
+            <p:ph type="title"/>
+          </p:nvPr>
+        </p:nvSpPr>
+        <p:spPr>
+          <a:xfrm>
+            <a:off x="284309" y="205979"/>
+            <a:ext cx="8552330" cy="662317"/>
+          </a:xfrm>
+        </p:spPr>
+        <p:txBody>
+          <a:bodyPr/>
+          <a:lstStyle/>
+          <a:p>
+            <a:pPr lvl="0" indent="0" marL="0">
+              <a:buNone/>
+            </a:pPr>
+            <a:r>
+              <a:rPr/>
+              <a:t>Preparation for Surgery</a:t>
+            </a:r>
+          </a:p>
+        </p:txBody>
+      </p:sp>
+      <p:sp>
+        <p:nvSpPr>
+          <p:cNvPr id="3" name="Content Placeholder 2"/>
+          <p:cNvSpPr>
+            <a:spLocks noGrp="1"/>
+          </p:cNvSpPr>
+          <p:nvPr>
+            <p:ph idx="1"/>
+          </p:nvPr>
+        </p:nvSpPr>
+        <p:spPr/>
+        <p:txBody>
+          <a:bodyPr/>
+          <a:lstStyle/>
+          <a:p>
+            <a:pPr lvl="0" indent="0" marL="0">
+              <a:buNone/>
+            </a:pPr>
+            <a:r>
+              <a:rPr/>
+              <a:t>Medical evaluation may be needed before surgery:</a:t>
+            </a:r>
+          </a:p>
+          <a:p>
+            <a:pPr lvl="0"/>
+            <a:r>
+              <a:rPr/>
+              <a:t>Pulmonary Function Tests to test lung function</a:t>
+            </a:r>
+          </a:p>
+          <a:p>
+            <a:pPr lvl="0"/>
+            <a:r>
+              <a:rPr/>
+              <a:t>Cardiology evaluation to test heart function</a:t>
+            </a:r>
+          </a:p>
+          <a:p>
+            <a:pPr lvl="1"/>
+            <a:r>
+              <a:rPr/>
+              <a:t>Echocardiogram</a:t>
+            </a:r>
+          </a:p>
+          <a:p>
+            <a:pPr lvl="1"/>
+            <a:r>
+              <a:rPr/>
+              <a:t>Stress Test</a:t>
+            </a:r>
+          </a:p>
+          <a:p>
+            <a:pPr lvl="1"/>
+            <a:r>
+              <a:rPr/>
+              <a:t>Holter monitor</a:t>
+            </a:r>
+          </a:p>
+        </p:txBody>
+      </p:sp>
+    </p:spTree>
+  </p:cSld>
+</p:sld>
+</file>
+
+<file path=ppt/slides/slide15.xml><?xml version="1.0" encoding="utf-8"?>
 <p:sld xmlns:a="http://schemas.openxmlformats.org/drawingml/2006/main" xmlns:r="http://schemas.openxmlformats.org/officeDocument/2006/relationships" xmlns:p="http://schemas.openxmlformats.org/presentationml/2006/main">
   <p:cSld>
     <p:spTree>
@@ -4192,129 +4291,6 @@
 </p:sld>
 </file>
 
-<file path=ppt/slides/slide15.xml><?xml version="1.0" encoding="utf-8"?>
-<p:sld xmlns:a="http://schemas.openxmlformats.org/drawingml/2006/main" xmlns:r="http://schemas.openxmlformats.org/officeDocument/2006/relationships" xmlns:p="http://schemas.openxmlformats.org/presentationml/2006/main">
-  <p:cSld>
-    <p:spTree>
-      <p:nvGrpSpPr>
-        <p:cNvPr id="1" name=""/>
-        <p:cNvGrpSpPr/>
-        <p:nvPr/>
-      </p:nvGrpSpPr>
-      <p:grpSpPr>
-        <a:xfrm>
-          <a:off x="0" y="0"/>
-          <a:ext cx="0" cy="0"/>
-          <a:chOff x="0" y="0"/>
-          <a:chExt cx="0" cy="0"/>
-        </a:xfrm>
-      </p:grpSpPr>
-      <p:sp>
-        <p:nvSpPr>
-          <p:cNvPr id="2" name="Title 1"/>
-          <p:cNvSpPr>
-            <a:spLocks noGrp="1"/>
-          </p:cNvSpPr>
-          <p:nvPr>
-            <p:ph type="title"/>
-          </p:nvPr>
-        </p:nvSpPr>
-        <p:spPr>
-          <a:xfrm>
-            <a:off x="284309" y="205979"/>
-            <a:ext cx="8552330" cy="662317"/>
-          </a:xfrm>
-        </p:spPr>
-        <p:txBody>
-          <a:bodyPr/>
-          <a:lstStyle/>
-          <a:p>
-            <a:pPr lvl="0" indent="0" marL="0">
-              <a:buNone/>
-            </a:pPr>
-            <a:r>
-              <a:rPr/>
-              <a:t>Preoperative Visits</a:t>
-            </a:r>
-          </a:p>
-        </p:txBody>
-      </p:sp>
-      <p:sp>
-        <p:nvSpPr>
-          <p:cNvPr id="3" name="Content Placeholder 2"/>
-          <p:cNvSpPr>
-            <a:spLocks noGrp="1"/>
-          </p:cNvSpPr>
-          <p:nvPr>
-            <p:ph idx="1"/>
-          </p:nvPr>
-        </p:nvSpPr>
-        <p:spPr/>
-        <p:txBody>
-          <a:bodyPr/>
-          <a:lstStyle/>
-          <a:p>
-            <a:pPr lvl="0" indent="0" marL="0">
-              <a:buNone/>
-            </a:pPr>
-            <a:r>
-              <a:rPr/>
-              <a:t>Medical Oncology - Monitor chemotherapy and side effects</a:t>
-            </a:r>
-          </a:p>
-          <a:p>
-            <a:pPr lvl="0" indent="0" marL="0">
-              <a:buNone/>
-            </a:pPr>
-            <a:r>
-              <a:rPr/>
-              <a:t>Radiation Oncology - Monitor radiation and side effects</a:t>
-            </a:r>
-          </a:p>
-          <a:p>
-            <a:pPr lvl="0" indent="0" marL="0">
-              <a:buNone/>
-            </a:pPr>
-            <a:r>
-              <a:rPr/>
-              <a:t>Surgical Oncology</a:t>
-            </a:r>
-          </a:p>
-          <a:p>
-            <a:pPr lvl="0"/>
-            <a:r>
-              <a:rPr/>
-              <a:t>Consult visit with Dr Salo</a:t>
-            </a:r>
-          </a:p>
-          <a:p>
-            <a:pPr lvl="0"/>
-            <a:r>
-              <a:rPr/>
-              <a:t>Mid-treatment visits with Dr Salo / Kate Duncan</a:t>
-            </a:r>
-          </a:p>
-          <a:p>
-            <a:pPr lvl="0"/>
-            <a:r>
-              <a:rPr/>
-              <a:t>Preop visit with Dr Salo (may be virtual)</a:t>
-            </a:r>
-          </a:p>
-          <a:p>
-            <a:pPr lvl="0"/>
-            <a:r>
-              <a:rPr/>
-              <a:t>In-person preop visit with Kate Duncan and Liz Koch</a:t>
-            </a:r>
-          </a:p>
-        </p:txBody>
-      </p:sp>
-    </p:spTree>
-  </p:cSld>
-</p:sld>
-</file>
-
 <file path=ppt/slides/slide16.xml><?xml version="1.0" encoding="utf-8"?>
 <p:sld xmlns:a="http://schemas.openxmlformats.org/drawingml/2006/main" xmlns:r="http://schemas.openxmlformats.org/officeDocument/2006/relationships" xmlns:p="http://schemas.openxmlformats.org/presentationml/2006/main">
   <p:cSld>
@@ -4357,7 +4333,7 @@
             </a:pPr>
             <a:r>
               <a:rPr/>
-              <a:t>Surgery for Esophageal Cancer</a:t>
+              <a:t>Preoperative Visits</a:t>
             </a:r>
           </a:p>
         </p:txBody>
@@ -4382,28 +4358,53 @@
             </a:pPr>
             <a:r>
               <a:rPr/>
-              <a:t>Surgery for esophageal cancer is performed for:</a:t>
-            </a:r>
-          </a:p>
-          <a:p>
-            <a:pPr lvl="0"/>
-            <a:r>
-              <a:rPr/>
-              <a:t>Superficial Tumors (T1) not removed by endoscopy</a:t>
-            </a:r>
-          </a:p>
-          <a:p>
-            <a:pPr lvl="0"/>
-            <a:r>
-              <a:rPr/>
-              <a:t>Localized Tumors (T2 N0 M0)</a:t>
-            </a:r>
-          </a:p>
-          <a:p>
-            <a:pPr lvl="0"/>
-            <a:r>
-              <a:rPr/>
-              <a:t>Locally Advanced (T3 M0) after preop therapy</a:t>
+              <a:t>Medical Oncology - Monitor chemotherapy and side effects</a:t>
+            </a:r>
+          </a:p>
+          <a:p>
+            <a:pPr lvl="0" indent="0" marL="0">
+              <a:buNone/>
+            </a:pPr>
+            <a:r>
+              <a:rPr/>
+              <a:t>Radiation Oncology - Monitor radiation and side effects</a:t>
+            </a:r>
+          </a:p>
+          <a:p>
+            <a:pPr lvl="0" indent="0" marL="0">
+              <a:buNone/>
+            </a:pPr>
+            <a:r>
+              <a:rPr/>
+              <a:t>Surgical Oncology</a:t>
+            </a:r>
+          </a:p>
+          <a:p>
+            <a:pPr lvl="0"/>
+            <a:r>
+              <a:rPr/>
+              <a:t>Consult visit with Dr Salo</a:t>
+            </a:r>
+          </a:p>
+          <a:p>
+            <a:pPr lvl="0"/>
+            <a:r>
+              <a:rPr/>
+              <a:t>Mid-treatment visits with Dr Salo / Kate Duncan</a:t>
+            </a:r>
+          </a:p>
+          <a:p>
+            <a:pPr lvl="0"/>
+            <a:r>
+              <a:rPr/>
+              <a:t>Preop visit with Dr Salo (may be virtual)</a:t>
+            </a:r>
+          </a:p>
+          <a:p>
+            <a:pPr lvl="0"/>
+            <a:r>
+              <a:rPr/>
+              <a:t>In-person preop visit with Kate Duncan and Liz Koch</a:t>
             </a:r>
           </a:p>
         </p:txBody>
@@ -4442,20 +4443,20 @@
         </p:nvSpPr>
         <p:spPr>
           <a:xfrm>
-            <a:off x="315045" y="205979"/>
-            <a:ext cx="8529278" cy="857250"/>
-          </a:xfrm>
-        </p:spPr>
-        <p:txBody>
-          <a:bodyPr/>
-          <a:lstStyle/>
-          <a:p>
-            <a:pPr lvl="0" indent="0" marL="0">
-              <a:buNone/>
-            </a:pPr>
-            <a:r>
-              <a:rPr/>
-              <a:t>Goals of Surgery</a:t>
+            <a:off x="284309" y="205979"/>
+            <a:ext cx="8552330" cy="662317"/>
+          </a:xfrm>
+        </p:spPr>
+        <p:txBody>
+          <a:bodyPr/>
+          <a:lstStyle/>
+          <a:p>
+            <a:pPr lvl="0" indent="0" marL="0">
+              <a:buNone/>
+            </a:pPr>
+            <a:r>
+              <a:rPr/>
+              <a:t>Surgery for Esophageal Cancer</a:t>
             </a:r>
           </a:p>
         </p:txBody>
@@ -4467,7 +4468,7 @@
             <a:spLocks noGrp="1"/>
           </p:cNvSpPr>
           <p:nvPr>
-            <p:ph idx="1" sz="half"/>
+            <p:ph idx="1"/>
           </p:nvPr>
         </p:nvSpPr>
         <p:spPr/>
@@ -4475,58 +4476,37 @@
           <a:bodyPr/>
           <a:lstStyle/>
           <a:p>
-            <a:pPr lvl="0"/>
-            <a:r>
-              <a:rPr/>
-              <a:t>Remove tumor from esophagus</a:t>
-            </a:r>
-          </a:p>
-          <a:p>
-            <a:pPr lvl="0"/>
-            <a:r>
-              <a:rPr/>
-              <a:t>Remove surrounding lymph nodes</a:t>
-            </a:r>
-          </a:p>
-          <a:p>
-            <a:pPr lvl="0"/>
-            <a:r>
-              <a:rPr/>
-              <a:t>Create a new esophagus</a:t>
-            </a:r>
-          </a:p>
-        </p:txBody>
-      </p:sp>
-      <p:pic>
-        <p:nvPicPr>
-          <p:cNvPr descr="images/Eso_Resection1_ai.png" id="0" name="Picture 1"/>
-          <p:cNvPicPr>
-            <a:picLocks noGrp="1" noChangeAspect="1"/>
-          </p:cNvPicPr>
-          <p:nvPr/>
-        </p:nvPicPr>
-        <p:blipFill>
-          <a:blip r:embed="rId2"/>
-          <a:stretch>
-            <a:fillRect/>
-          </a:stretch>
-        </p:blipFill>
-        <p:spPr bwMode="auto">
-          <a:xfrm>
-            <a:off x="4914900" y="1193800"/>
-            <a:ext cx="3632200" cy="3733800"/>
-          </a:xfrm>
-          <a:prstGeom prst="rect">
-            <a:avLst/>
-          </a:prstGeom>
-          <a:noFill/>
-          <a:ln w="9525">
-            <a:noFill/>
-            <a:headEnd/>
-            <a:tailEnd/>
-          </a:ln>
-        </p:spPr>
-      </p:pic>
+            <a:pPr lvl="0" indent="0" marL="0">
+              <a:buNone/>
+            </a:pPr>
+            <a:r>
+              <a:rPr/>
+              <a:t>Surgery for esophageal cancer is performed for:</a:t>
+            </a:r>
+          </a:p>
+          <a:p>
+            <a:pPr lvl="0"/>
+            <a:r>
+              <a:rPr/>
+              <a:t>Superficial Tumors (T1) not removed by endoscopy</a:t>
+            </a:r>
+          </a:p>
+          <a:p>
+            <a:pPr lvl="0"/>
+            <a:r>
+              <a:rPr/>
+              <a:t>Localized Tumors (T2 N0 M0)</a:t>
+            </a:r>
+          </a:p>
+          <a:p>
+            <a:pPr lvl="0"/>
+            <a:r>
+              <a:rPr/>
+              <a:t>Locally Advanced (T3 M0) after preop therapy</a:t>
+            </a:r>
+          </a:p>
+        </p:txBody>
+      </p:sp>
     </p:spTree>
   </p:cSld>
 </p:sld>
@@ -4574,7 +4554,7 @@
             </a:pPr>
             <a:r>
               <a:rPr/>
-              <a:t>Ivor Lewis (Transthoracic) Esophagectomy</a:t>
+              <a:t>Goals of Surgery</a:t>
             </a:r>
           </a:p>
         </p:txBody>
@@ -4597,28 +4577,28 @@
             <a:pPr lvl="0"/>
             <a:r>
               <a:rPr/>
-              <a:t>Removes tumor and lower 1/2 esophagus</a:t>
-            </a:r>
-          </a:p>
-          <a:p>
-            <a:pPr lvl="0"/>
-            <a:r>
-              <a:rPr/>
-              <a:t>Removes surrounding lymph nodes</a:t>
-            </a:r>
-          </a:p>
-          <a:p>
-            <a:pPr lvl="0"/>
-            <a:r>
-              <a:rPr/>
-              <a:t>GI tract reconstructed</a:t>
+              <a:t>Remove tumor from esophagus</a:t>
+            </a:r>
+          </a:p>
+          <a:p>
+            <a:pPr lvl="0"/>
+            <a:r>
+              <a:rPr/>
+              <a:t>Remove surrounding lymph nodes</a:t>
+            </a:r>
+          </a:p>
+          <a:p>
+            <a:pPr lvl="0"/>
+            <a:r>
+              <a:rPr/>
+              <a:t>Create a new esophagus</a:t>
             </a:r>
           </a:p>
         </p:txBody>
       </p:sp>
       <p:pic>
         <p:nvPicPr>
-          <p:cNvPr descr="images/Eso_Resection2_ai.png" id="0" name="Picture 1"/>
+          <p:cNvPr descr="images/Eso_Resection1_ai.png" id="0" name="Picture 1"/>
           <p:cNvPicPr>
             <a:picLocks noGrp="1" noChangeAspect="1"/>
           </p:cNvPicPr>
@@ -4693,7 +4673,7 @@
             </a:pPr>
             <a:r>
               <a:rPr/>
-              <a:t>Reconstruction</a:t>
+              <a:t>Ivor Lewis (Transthoracic) Esophagectomy</a:t>
             </a:r>
           </a:p>
         </p:txBody>
@@ -4713,19 +4693,31 @@
           <a:bodyPr/>
           <a:lstStyle/>
           <a:p>
-            <a:pPr lvl="0" indent="0" marL="0">
-              <a:buNone/>
-            </a:pPr>
-            <a:r>
-              <a:rPr/>
-              <a:t>New esophagus is created from the stomach in the abdomen by fashioning it into a tube.</a:t>
+            <a:pPr lvl="0"/>
+            <a:r>
+              <a:rPr/>
+              <a:t>Removes tumor and lower 1/2 esophagus</a:t>
+            </a:r>
+          </a:p>
+          <a:p>
+            <a:pPr lvl="0"/>
+            <a:r>
+              <a:rPr/>
+              <a:t>Removes surrounding lymph nodes</a:t>
+            </a:r>
+          </a:p>
+          <a:p>
+            <a:pPr lvl="0"/>
+            <a:r>
+              <a:rPr/>
+              <a:t>GI tract reconstructed</a:t>
             </a:r>
           </a:p>
         </p:txBody>
       </p:sp>
       <p:pic>
         <p:nvPicPr>
-          <p:cNvPr descr="images/Eso_Resection3_ai.png" id="0" name="Picture 1"/>
+          <p:cNvPr descr="images/Eso_Resection2_ai.png" id="0" name="Picture 1"/>
           <p:cNvPicPr>
             <a:picLocks noGrp="1" noChangeAspect="1"/>
           </p:cNvPicPr>
@@ -4934,6 +4926,113 @@
             </a:pPr>
             <a:r>
               <a:rPr/>
+              <a:t>Reconstruction</a:t>
+            </a:r>
+          </a:p>
+        </p:txBody>
+      </p:sp>
+      <p:sp>
+        <p:nvSpPr>
+          <p:cNvPr id="3" name="Content Placeholder 2"/>
+          <p:cNvSpPr>
+            <a:spLocks noGrp="1"/>
+          </p:cNvSpPr>
+          <p:nvPr>
+            <p:ph idx="1" sz="half"/>
+          </p:nvPr>
+        </p:nvSpPr>
+        <p:spPr/>
+        <p:txBody>
+          <a:bodyPr/>
+          <a:lstStyle/>
+          <a:p>
+            <a:pPr lvl="0" indent="0" marL="0">
+              <a:buNone/>
+            </a:pPr>
+            <a:r>
+              <a:rPr/>
+              <a:t>New esophagus is created from the stomach in the abdomen by fashioning it into a tube.</a:t>
+            </a:r>
+          </a:p>
+        </p:txBody>
+      </p:sp>
+      <p:pic>
+        <p:nvPicPr>
+          <p:cNvPr descr="images/Eso_Resection3_ai.png" id="0" name="Picture 1"/>
+          <p:cNvPicPr>
+            <a:picLocks noGrp="1" noChangeAspect="1"/>
+          </p:cNvPicPr>
+          <p:nvPr/>
+        </p:nvPicPr>
+        <p:blipFill>
+          <a:blip r:embed="rId2"/>
+          <a:stretch>
+            <a:fillRect/>
+          </a:stretch>
+        </p:blipFill>
+        <p:spPr bwMode="auto">
+          <a:xfrm>
+            <a:off x="4914900" y="1193800"/>
+            <a:ext cx="3632200" cy="3733800"/>
+          </a:xfrm>
+          <a:prstGeom prst="rect">
+            <a:avLst/>
+          </a:prstGeom>
+          <a:noFill/>
+          <a:ln w="9525">
+            <a:noFill/>
+            <a:headEnd/>
+            <a:tailEnd/>
+          </a:ln>
+        </p:spPr>
+      </p:pic>
+    </p:spTree>
+  </p:cSld>
+</p:sld>
+</file>
+
+<file path=ppt/slides/slide21.xml><?xml version="1.0" encoding="utf-8"?>
+<p:sld xmlns:a="http://schemas.openxmlformats.org/drawingml/2006/main" xmlns:r="http://schemas.openxmlformats.org/officeDocument/2006/relationships" xmlns:p="http://schemas.openxmlformats.org/presentationml/2006/main">
+  <p:cSld>
+    <p:spTree>
+      <p:nvGrpSpPr>
+        <p:cNvPr id="1" name=""/>
+        <p:cNvGrpSpPr/>
+        <p:nvPr/>
+      </p:nvGrpSpPr>
+      <p:grpSpPr>
+        <a:xfrm>
+          <a:off x="0" y="0"/>
+          <a:ext cx="0" cy="0"/>
+          <a:chOff x="0" y="0"/>
+          <a:chExt cx="0" cy="0"/>
+        </a:xfrm>
+      </p:grpSpPr>
+      <p:sp>
+        <p:nvSpPr>
+          <p:cNvPr id="2" name="Title 1"/>
+          <p:cNvSpPr>
+            <a:spLocks noGrp="1"/>
+          </p:cNvSpPr>
+          <p:nvPr>
+            <p:ph type="title"/>
+          </p:nvPr>
+        </p:nvSpPr>
+        <p:spPr>
+          <a:xfrm>
+            <a:off x="315045" y="205979"/>
+            <a:ext cx="8529278" cy="857250"/>
+          </a:xfrm>
+        </p:spPr>
+        <p:txBody>
+          <a:bodyPr/>
+          <a:lstStyle/>
+          <a:p>
+            <a:pPr lvl="0" indent="0" marL="0">
+              <a:buNone/>
+            </a:pPr>
+            <a:r>
+              <a:rPr/>
               <a:t>Ivor Lewis esophagectomy</a:t>
             </a:r>
           </a:p>
@@ -5007,7 +5106,7 @@
 </p:sld>
 </file>
 
-<file path=ppt/slides/slide21.xml><?xml version="1.0" encoding="utf-8"?>
+<file path=ppt/slides/slide22.xml><?xml version="1.0" encoding="utf-8"?>
 <p:sld xmlns:a="http://schemas.openxmlformats.org/drawingml/2006/main" xmlns:r="http://schemas.openxmlformats.org/officeDocument/2006/relationships" xmlns:p="http://schemas.openxmlformats.org/presentationml/2006/main">
   <p:cSld>
     <p:spTree>
@@ -5144,122 +5243,6 @@
 </p:sld>
 </file>
 
-<file path=ppt/slides/slide22.xml><?xml version="1.0" encoding="utf-8"?>
-<p:sld xmlns:a="http://schemas.openxmlformats.org/drawingml/2006/main" xmlns:r="http://schemas.openxmlformats.org/officeDocument/2006/relationships" xmlns:p="http://schemas.openxmlformats.org/presentationml/2006/main">
-  <p:cSld>
-    <p:spTree>
-      <p:nvGrpSpPr>
-        <p:cNvPr id="1" name=""/>
-        <p:cNvGrpSpPr/>
-        <p:nvPr/>
-      </p:nvGrpSpPr>
-      <p:grpSpPr>
-        <a:xfrm>
-          <a:off x="0" y="0"/>
-          <a:ext cx="0" cy="0"/>
-          <a:chOff x="0" y="0"/>
-          <a:chExt cx="0" cy="0"/>
-        </a:xfrm>
-      </p:grpSpPr>
-      <p:sp>
-        <p:nvSpPr>
-          <p:cNvPr id="2" name="Title 1"/>
-          <p:cNvSpPr>
-            <a:spLocks noGrp="1"/>
-          </p:cNvSpPr>
-          <p:nvPr>
-            <p:ph type="title"/>
-          </p:nvPr>
-        </p:nvSpPr>
-        <p:spPr>
-          <a:xfrm>
-            <a:off x="315045" y="205979"/>
-            <a:ext cx="8529278" cy="857250"/>
-          </a:xfrm>
-        </p:spPr>
-        <p:txBody>
-          <a:bodyPr/>
-          <a:lstStyle/>
-          <a:p>
-            <a:pPr lvl="0" indent="0" marL="0">
-              <a:buNone/>
-            </a:pPr>
-            <a:r>
-              <a:rPr/>
-              <a:t>Open Ivor Lewis</a:t>
-            </a:r>
-          </a:p>
-        </p:txBody>
-      </p:sp>
-      <p:sp>
-        <p:nvSpPr>
-          <p:cNvPr id="3" name="Content Placeholder 2"/>
-          <p:cNvSpPr>
-            <a:spLocks noGrp="1"/>
-          </p:cNvSpPr>
-          <p:nvPr>
-            <p:ph idx="1" sz="half"/>
-          </p:nvPr>
-        </p:nvSpPr>
-        <p:spPr/>
-        <p:txBody>
-          <a:bodyPr/>
-          <a:lstStyle/>
-          <a:p>
-            <a:pPr lvl="0" indent="0" marL="0">
-              <a:buNone/>
-            </a:pPr>
-            <a:r>
-              <a:rPr/>
-              <a:t>Mininally-invasive approach feasible in 98% of cases</a:t>
-            </a:r>
-          </a:p>
-          <a:p>
-            <a:pPr lvl="0" indent="0" marL="0">
-              <a:buNone/>
-            </a:pPr>
-            <a:r>
-              <a:rPr/>
-              <a:t>In some cases, an open approach is still necessary (2%)</a:t>
-            </a:r>
-          </a:p>
-        </p:txBody>
-      </p:sp>
-      <p:pic>
-        <p:nvPicPr>
-          <p:cNvPr descr="images/IvorLewisArtboard.png" id="0" name="Picture 1"/>
-          <p:cNvPicPr>
-            <a:picLocks noGrp="1" noChangeAspect="1"/>
-          </p:cNvPicPr>
-          <p:nvPr/>
-        </p:nvPicPr>
-        <p:blipFill>
-          <a:blip r:embed="rId2"/>
-          <a:stretch>
-            <a:fillRect/>
-          </a:stretch>
-        </p:blipFill>
-        <p:spPr bwMode="auto">
-          <a:xfrm>
-            <a:off x="4914900" y="1193800"/>
-            <a:ext cx="3632200" cy="3733800"/>
-          </a:xfrm>
-          <a:prstGeom prst="rect">
-            <a:avLst/>
-          </a:prstGeom>
-          <a:noFill/>
-          <a:ln w="9525">
-            <a:noFill/>
-            <a:headEnd/>
-            <a:tailEnd/>
-          </a:ln>
-        </p:spPr>
-      </p:pic>
-    </p:spTree>
-  </p:cSld>
-</p:sld>
-</file>
-
 <file path=ppt/slides/slide23.xml><?xml version="1.0" encoding="utf-8"?>
 <p:sld xmlns:a="http://schemas.openxmlformats.org/drawingml/2006/main" xmlns:r="http://schemas.openxmlformats.org/officeDocument/2006/relationships" xmlns:p="http://schemas.openxmlformats.org/presentationml/2006/main">
   <p:cSld>
@@ -5302,7 +5285,7 @@
             </a:pPr>
             <a:r>
               <a:rPr/>
-              <a:t>Total Esophagectomy</a:t>
+              <a:t>Open Ivor Lewis</a:t>
             </a:r>
           </a:p>
         </p:txBody>
@@ -5327,23 +5310,23 @@
             </a:pPr>
             <a:r>
               <a:rPr/>
-              <a:t>For patients with tumors in the upper esophagus, we need to remove more of the esophagus</a:t>
-            </a:r>
-          </a:p>
-          <a:p>
-            <a:pPr lvl="0" indent="0" marL="0">
-              <a:buNone/>
-            </a:pPr>
-            <a:r>
-              <a:rPr/>
-              <a:t>We need to remove the whole esophagus, including the portion in the neck</a:t>
+              <a:t>Mininally-invasive approach feasible in 98% of cases</a:t>
+            </a:r>
+          </a:p>
+          <a:p>
+            <a:pPr lvl="0" indent="0" marL="0">
+              <a:buNone/>
+            </a:pPr>
+            <a:r>
+              <a:rPr/>
+              <a:t>In some cases, an open approach is still necessary (2%)</a:t>
             </a:r>
           </a:p>
         </p:txBody>
       </p:sp>
       <p:pic>
         <p:nvPicPr>
-          <p:cNvPr descr="images/Eso_ProxTumorArtboard.png" id="0" name="Picture 1"/>
+          <p:cNvPr descr="images/IvorLewisArtboard.png" id="0" name="Picture 1"/>
           <p:cNvPicPr>
             <a:picLocks noGrp="1" noChangeAspect="1"/>
           </p:cNvPicPr>
@@ -5418,14 +5401,48 @@
             </a:pPr>
             <a:r>
               <a:rPr/>
-              <a:t>McKeown Esophagectomy</a:t>
+              <a:t>Total Esophagectomy</a:t>
+            </a:r>
+          </a:p>
+        </p:txBody>
+      </p:sp>
+      <p:sp>
+        <p:nvSpPr>
+          <p:cNvPr id="3" name="Content Placeholder 2"/>
+          <p:cNvSpPr>
+            <a:spLocks noGrp="1"/>
+          </p:cNvSpPr>
+          <p:nvPr>
+            <p:ph idx="1" sz="half"/>
+          </p:nvPr>
+        </p:nvSpPr>
+        <p:spPr/>
+        <p:txBody>
+          <a:bodyPr/>
+          <a:lstStyle/>
+          <a:p>
+            <a:pPr lvl="0" indent="0" marL="0">
+              <a:buNone/>
+            </a:pPr>
+            <a:r>
+              <a:rPr/>
+              <a:t>For patients with tumors in the upper esophagus, we need to remove more of the esophagus</a:t>
+            </a:r>
+          </a:p>
+          <a:p>
+            <a:pPr lvl="0" indent="0" marL="0">
+              <a:buNone/>
+            </a:pPr>
+            <a:r>
+              <a:rPr/>
+              <a:t>We need to remove the whole esophagus, including the portion in the neck</a:t>
             </a:r>
           </a:p>
         </p:txBody>
       </p:sp>
       <p:pic>
         <p:nvPicPr>
-          <p:cNvPr descr="images/Eso_ResectionTotalArtboard.png" id="0" name="Picture 1"/>
+          <p:cNvPr descr="images/Eso_ProxTumorArtboard.png" id="0" name="Picture 1"/>
           <p:cNvPicPr>
             <a:picLocks noGrp="1" noChangeAspect="1"/>
           </p:cNvPicPr>
@@ -5433,36 +5450,6 @@
         </p:nvPicPr>
         <p:blipFill>
           <a:blip r:embed="rId2"/>
-          <a:stretch>
-            <a:fillRect/>
-          </a:stretch>
-        </p:blipFill>
-        <p:spPr bwMode="auto">
-          <a:xfrm>
-            <a:off x="571500" y="1193800"/>
-            <a:ext cx="3632200" cy="3733800"/>
-          </a:xfrm>
-          <a:prstGeom prst="rect">
-            <a:avLst/>
-          </a:prstGeom>
-          <a:noFill/>
-          <a:ln w="9525">
-            <a:noFill/>
-            <a:headEnd/>
-            <a:tailEnd/>
-          </a:ln>
-        </p:spPr>
-      </p:pic>
-      <p:pic>
-        <p:nvPicPr>
-          <p:cNvPr descr="images/Eso_MIE_McKeownArtboard.png" id="0" name="Picture 1"/>
-          <p:cNvPicPr>
-            <a:picLocks noGrp="1" noChangeAspect="1"/>
-          </p:cNvPicPr>
-          <p:nvPr/>
-        </p:nvPicPr>
-        <p:blipFill>
-          <a:blip r:embed="rId3"/>
           <a:stretch>
             <a:fillRect/>
           </a:stretch>
@@ -5517,72 +5504,84 @@
         </p:nvSpPr>
         <p:spPr>
           <a:xfrm>
-            <a:off x="284309" y="205979"/>
-            <a:ext cx="8552330" cy="662317"/>
-          </a:xfrm>
-        </p:spPr>
-        <p:txBody>
-          <a:bodyPr/>
-          <a:lstStyle/>
-          <a:p>
-            <a:pPr lvl="0" indent="0" marL="0">
-              <a:buNone/>
-            </a:pPr>
-            <a:r>
-              <a:rPr/>
-              <a:t>Risks of Esophagectomy</a:t>
-            </a:r>
-          </a:p>
-        </p:txBody>
-      </p:sp>
-      <p:sp>
-        <p:nvSpPr>
-          <p:cNvPr id="3" name="Content Placeholder 2"/>
-          <p:cNvSpPr>
-            <a:spLocks noGrp="1"/>
-          </p:cNvSpPr>
-          <p:nvPr>
-            <p:ph idx="1"/>
-          </p:nvPr>
-        </p:nvSpPr>
-        <p:spPr/>
-        <p:txBody>
-          <a:bodyPr/>
-          <a:lstStyle/>
-          <a:p>
-            <a:pPr lvl="0" indent="0" marL="0">
-              <a:buNone/>
-            </a:pPr>
-            <a:r>
-              <a:rPr/>
-              <a:t>Esophagectomy is a complex operation, with a real risk of complications.</a:t>
-            </a:r>
-          </a:p>
-          <a:p>
-            <a:pPr lvl="0" indent="0" marL="0">
-              <a:buNone/>
-            </a:pPr>
-            <a:r>
-              <a:rPr/>
-              <a:t>Two significant complications:</a:t>
-            </a:r>
-          </a:p>
-          <a:p>
-            <a:pPr lvl="0"/>
-            <a:r>
-              <a:rPr/>
-              <a:t>Anastomotic leak</a:t>
-            </a:r>
-          </a:p>
-          <a:p>
-            <a:pPr lvl="0"/>
-            <a:r>
-              <a:rPr/>
-              <a:t>Pneumonia</a:t>
-            </a:r>
-          </a:p>
-        </p:txBody>
-      </p:sp>
+            <a:off x="315045" y="205979"/>
+            <a:ext cx="8529278" cy="857250"/>
+          </a:xfrm>
+        </p:spPr>
+        <p:txBody>
+          <a:bodyPr/>
+          <a:lstStyle/>
+          <a:p>
+            <a:pPr lvl="0" indent="0" marL="0">
+              <a:buNone/>
+            </a:pPr>
+            <a:r>
+              <a:rPr/>
+              <a:t>McKeown Esophagectomy</a:t>
+            </a:r>
+          </a:p>
+        </p:txBody>
+      </p:sp>
+      <p:pic>
+        <p:nvPicPr>
+          <p:cNvPr descr="images/Eso_ResectionTotalArtboard.png" id="0" name="Picture 1"/>
+          <p:cNvPicPr>
+            <a:picLocks noGrp="1" noChangeAspect="1"/>
+          </p:cNvPicPr>
+          <p:nvPr/>
+        </p:nvPicPr>
+        <p:blipFill>
+          <a:blip r:embed="rId2"/>
+          <a:stretch>
+            <a:fillRect/>
+          </a:stretch>
+        </p:blipFill>
+        <p:spPr bwMode="auto">
+          <a:xfrm>
+            <a:off x="571500" y="1193800"/>
+            <a:ext cx="3632200" cy="3733800"/>
+          </a:xfrm>
+          <a:prstGeom prst="rect">
+            <a:avLst/>
+          </a:prstGeom>
+          <a:noFill/>
+          <a:ln w="9525">
+            <a:noFill/>
+            <a:headEnd/>
+            <a:tailEnd/>
+          </a:ln>
+        </p:spPr>
+      </p:pic>
+      <p:pic>
+        <p:nvPicPr>
+          <p:cNvPr descr="images/Eso_MIE_McKeownArtboard.png" id="0" name="Picture 1"/>
+          <p:cNvPicPr>
+            <a:picLocks noGrp="1" noChangeAspect="1"/>
+          </p:cNvPicPr>
+          <p:nvPr/>
+        </p:nvPicPr>
+        <p:blipFill>
+          <a:blip r:embed="rId3"/>
+          <a:stretch>
+            <a:fillRect/>
+          </a:stretch>
+        </p:blipFill>
+        <p:spPr bwMode="auto">
+          <a:xfrm>
+            <a:off x="4914900" y="1193800"/>
+            <a:ext cx="3632200" cy="3733800"/>
+          </a:xfrm>
+          <a:prstGeom prst="rect">
+            <a:avLst/>
+          </a:prstGeom>
+          <a:noFill/>
+          <a:ln w="9525">
+            <a:noFill/>
+            <a:headEnd/>
+            <a:tailEnd/>
+          </a:ln>
+        </p:spPr>
+      </p:pic>
     </p:spTree>
   </p:cSld>
 </p:sld>
@@ -5617,20 +5616,20 @@
         </p:nvSpPr>
         <p:spPr>
           <a:xfrm>
-            <a:off x="315045" y="205979"/>
-            <a:ext cx="8529278" cy="857250"/>
-          </a:xfrm>
-        </p:spPr>
-        <p:txBody>
-          <a:bodyPr/>
-          <a:lstStyle/>
-          <a:p>
-            <a:pPr lvl="0" indent="0" marL="0">
-              <a:buNone/>
-            </a:pPr>
-            <a:r>
-              <a:rPr/>
-              <a:t>Anastomotic Leak</a:t>
+            <a:off x="284309" y="205979"/>
+            <a:ext cx="8552330" cy="662317"/>
+          </a:xfrm>
+        </p:spPr>
+        <p:txBody>
+          <a:bodyPr/>
+          <a:lstStyle/>
+          <a:p>
+            <a:pPr lvl="0" indent="0" marL="0">
+              <a:buNone/>
+            </a:pPr>
+            <a:r>
+              <a:rPr/>
+              <a:t>Risks of Esophagectomy</a:t>
             </a:r>
           </a:p>
         </p:txBody>
@@ -5642,7 +5641,7 @@
             <a:spLocks noGrp="1"/>
           </p:cNvSpPr>
           <p:nvPr>
-            <p:ph idx="1" sz="half"/>
+            <p:ph idx="1"/>
           </p:nvPr>
         </p:nvSpPr>
         <p:spPr/>
@@ -5655,41 +5654,34 @@
             </a:pPr>
             <a:r>
               <a:rPr/>
-              <a:t>The anastomosis is surgical connection between the esophagus and the stomach.</a:t>
-            </a:r>
-          </a:p>
-        </p:txBody>
-      </p:sp>
-      <p:pic>
-        <p:nvPicPr>
-          <p:cNvPr descr="images/Eso_IvorLewis_Anastomosis.png" id="0" name="Picture 1"/>
-          <p:cNvPicPr>
-            <a:picLocks noGrp="1" noChangeAspect="1"/>
-          </p:cNvPicPr>
-          <p:nvPr/>
-        </p:nvPicPr>
-        <p:blipFill>
-          <a:blip r:embed="rId2"/>
-          <a:stretch>
-            <a:fillRect/>
-          </a:stretch>
-        </p:blipFill>
-        <p:spPr bwMode="auto">
-          <a:xfrm>
-            <a:off x="4914900" y="1193800"/>
-            <a:ext cx="3632200" cy="3733800"/>
-          </a:xfrm>
-          <a:prstGeom prst="rect">
-            <a:avLst/>
-          </a:prstGeom>
-          <a:noFill/>
-          <a:ln w="9525">
-            <a:noFill/>
-            <a:headEnd/>
-            <a:tailEnd/>
-          </a:ln>
-        </p:spPr>
-      </p:pic>
+              <a:t>Esophagectomy is a complex operation, with a real risk of complications.</a:t>
+            </a:r>
+          </a:p>
+          <a:p>
+            <a:pPr lvl="0" indent="0" marL="0">
+              <a:buNone/>
+            </a:pPr>
+            <a:r>
+              <a:rPr/>
+              <a:t>Two significant complications:</a:t>
+            </a:r>
+          </a:p>
+          <a:p>
+            <a:pPr lvl="0"/>
+            <a:r>
+              <a:rPr/>
+              <a:t>Anastomotic leak</a:t>
+            </a:r>
+          </a:p>
+          <a:p>
+            <a:pPr lvl="0"/>
+            <a:r>
+              <a:rPr/>
+              <a:t>Pneumonia</a:t>
+            </a:r>
+          </a:p>
+        </p:txBody>
+      </p:sp>
     </p:spTree>
   </p:cSld>
 </p:sld>
@@ -5762,35 +5754,14 @@
             </a:pPr>
             <a:r>
               <a:rPr/>
-              <a:t>If healing doesn’t occur:</a:t>
-            </a:r>
-          </a:p>
-          <a:p>
-            <a:pPr lvl="0"/>
-            <a:r>
-              <a:rPr/>
-              <a:t>Leakage of fluid from the esophagus</a:t>
-            </a:r>
-          </a:p>
-          <a:p>
-            <a:pPr lvl="0"/>
-            <a:r>
-              <a:rPr/>
-              <a:t>Infection in the space between the lungs</a:t>
-            </a:r>
-          </a:p>
-          <a:p>
-            <a:pPr lvl="0"/>
-            <a:r>
-              <a:rPr/>
-              <a:t>Requires additional time in the hospital</a:t>
+              <a:t>The anastomosis is surgical connection between the esophagus and the stomach.</a:t>
             </a:r>
           </a:p>
         </p:txBody>
       </p:sp>
       <p:pic>
         <p:nvPicPr>
-          <p:cNvPr descr="images/Eso_IvorLewis_Leak.png" id="0" name="Picture 1"/>
+          <p:cNvPr descr="images/Eso_IvorLewis_Anastomosis.png" id="0" name="Picture 1"/>
           <p:cNvPicPr>
             <a:picLocks noGrp="1" noChangeAspect="1"/>
           </p:cNvPicPr>
@@ -5890,28 +5861,28 @@
             </a:pPr>
             <a:r>
               <a:rPr/>
-              <a:t>If leak occurs:</a:t>
-            </a:r>
-          </a:p>
-          <a:p>
-            <a:pPr lvl="0"/>
-            <a:r>
-              <a:rPr/>
-              <a:t>Some leaks will seal</a:t>
-            </a:r>
-          </a:p>
-          <a:p>
-            <a:pPr lvl="0"/>
-            <a:r>
-              <a:rPr/>
-              <a:t>Stent may be required to help healing</a:t>
-            </a:r>
-          </a:p>
-          <a:p>
-            <a:pPr lvl="0"/>
-            <a:r>
-              <a:rPr/>
-              <a:t>Occasionally additional surgey is required</a:t>
+              <a:t>If healing doesn’t occur:</a:t>
+            </a:r>
+          </a:p>
+          <a:p>
+            <a:pPr lvl="0"/>
+            <a:r>
+              <a:rPr/>
+              <a:t>Leakage of fluid from the esophagus</a:t>
+            </a:r>
+          </a:p>
+          <a:p>
+            <a:pPr lvl="0"/>
+            <a:r>
+              <a:rPr/>
+              <a:t>Infection in the space between the lungs</a:t>
+            </a:r>
+          </a:p>
+          <a:p>
+            <a:pPr lvl="0"/>
+            <a:r>
+              <a:rPr/>
+              <a:t>Requires additional time in the hospital</a:t>
             </a:r>
           </a:p>
         </p:txBody>
@@ -6018,28 +5989,28 @@
             </a:pPr>
             <a:r>
               <a:rPr/>
-              <a:t>Risk of leak depends on:</a:t>
-            </a:r>
-          </a:p>
-          <a:p>
-            <a:pPr lvl="0"/>
-            <a:r>
-              <a:rPr/>
-              <a:t>Type of operation performed</a:t>
-            </a:r>
-          </a:p>
-          <a:p>
-            <a:pPr lvl="0"/>
-            <a:r>
-              <a:rPr/>
-              <a:t>Nutritional status of patient</a:t>
-            </a:r>
-          </a:p>
-          <a:p>
-            <a:pPr lvl="0"/>
-            <a:r>
-              <a:rPr/>
-              <a:t>Experience of the surgeon</a:t>
+              <a:t>If leak occurs:</a:t>
+            </a:r>
+          </a:p>
+          <a:p>
+            <a:pPr lvl="0"/>
+            <a:r>
+              <a:rPr/>
+              <a:t>Some leaks will seal</a:t>
+            </a:r>
+          </a:p>
+          <a:p>
+            <a:pPr lvl="0"/>
+            <a:r>
+              <a:rPr/>
+              <a:t>Stent may be required to help healing</a:t>
+            </a:r>
+          </a:p>
+          <a:p>
+            <a:pPr lvl="0"/>
+            <a:r>
+              <a:rPr/>
+              <a:t>Occasionally additional surgey is required</a:t>
             </a:r>
           </a:p>
         </p:txBody>
@@ -6248,7 +6219,7 @@
             </a:pPr>
             <a:r>
               <a:rPr/>
-              <a:t>Pneumonia</a:t>
+              <a:t>Anastomotic Leak</a:t>
             </a:r>
           </a:p>
         </p:txBody>
@@ -6268,31 +6239,40 @@
           <a:bodyPr/>
           <a:lstStyle/>
           <a:p>
-            <a:pPr lvl="0"/>
-            <a:r>
-              <a:rPr/>
-              <a:t>Occurs in 10-15% of patients after esophagectomy.</a:t>
-            </a:r>
-          </a:p>
-          <a:p>
-            <a:pPr lvl="0"/>
-            <a:r>
-              <a:rPr/>
-              <a:t>Requires treatment with antibiotics</a:t>
-            </a:r>
-          </a:p>
-          <a:p>
-            <a:pPr lvl="0"/>
-            <a:r>
-              <a:rPr/>
-              <a:t>Requires a longer hospitalization.</a:t>
+            <a:pPr lvl="0" indent="0" marL="0">
+              <a:buNone/>
+            </a:pPr>
+            <a:r>
+              <a:rPr/>
+              <a:t>Risk of leak depends on:</a:t>
+            </a:r>
+          </a:p>
+          <a:p>
+            <a:pPr lvl="0"/>
+            <a:r>
+              <a:rPr/>
+              <a:t>Type of operation performed</a:t>
+            </a:r>
+          </a:p>
+          <a:p>
+            <a:pPr lvl="0"/>
+            <a:r>
+              <a:rPr/>
+              <a:t>Nutritional status of patient</a:t>
+            </a:r>
+          </a:p>
+          <a:p>
+            <a:pPr lvl="0"/>
+            <a:r>
+              <a:rPr/>
+              <a:t>Experience of the surgeon</a:t>
             </a:r>
           </a:p>
         </p:txBody>
       </p:sp>
       <p:pic>
         <p:nvPicPr>
-          <p:cNvPr descr="images/Eso_LungsArtboard.png" id="0" name="Picture 1"/>
+          <p:cNvPr descr="images/Eso_IvorLewis_Leak.png" id="0" name="Picture 1"/>
           <p:cNvPicPr>
             <a:picLocks noGrp="1" noChangeAspect="1"/>
           </p:cNvPicPr>
@@ -6354,20 +6334,20 @@
         </p:nvSpPr>
         <p:spPr>
           <a:xfrm>
-            <a:off x="284309" y="205979"/>
-            <a:ext cx="8552330" cy="662317"/>
-          </a:xfrm>
-        </p:spPr>
-        <p:txBody>
-          <a:bodyPr/>
-          <a:lstStyle/>
-          <a:p>
-            <a:pPr lvl="0" indent="0" marL="0">
-              <a:buNone/>
-            </a:pPr>
-            <a:r>
-              <a:rPr/>
-              <a:t>Preventing Pneumonia</a:t>
+            <a:off x="315045" y="205979"/>
+            <a:ext cx="8529278" cy="857250"/>
+          </a:xfrm>
+        </p:spPr>
+        <p:txBody>
+          <a:bodyPr/>
+          <a:lstStyle/>
+          <a:p>
+            <a:pPr lvl="0" indent="0" marL="0">
+              <a:buNone/>
+            </a:pPr>
+            <a:r>
+              <a:rPr/>
+              <a:t>Pneumonia</a:t>
             </a:r>
           </a:p>
         </p:txBody>
@@ -6379,7 +6359,7 @@
             <a:spLocks noGrp="1"/>
           </p:cNvSpPr>
           <p:nvPr>
-            <p:ph idx="1"/>
+            <p:ph idx="1" sz="half"/>
           </p:nvPr>
         </p:nvSpPr>
         <p:spPr/>
@@ -6387,60 +6367,58 @@
           <a:bodyPr/>
           <a:lstStyle/>
           <a:p>
-            <a:pPr lvl="0" indent="0" marL="0">
-              <a:buNone/>
-            </a:pPr>
-            <a:r>
-              <a:rPr/>
-              <a:t>Several ways to help prevent pneumonia:</a:t>
-            </a:r>
-          </a:p>
-          <a:p>
-            <a:pPr lvl="0"/>
-            <a:r>
-              <a:rPr/>
-              <a:t>Deep breathing</a:t>
-            </a:r>
-          </a:p>
-          <a:p>
-            <a:pPr lvl="0"/>
-            <a:r>
-              <a:rPr/>
-              <a:t>Coughing</a:t>
-            </a:r>
-          </a:p>
-          <a:p>
-            <a:pPr lvl="0"/>
-            <a:r>
-              <a:rPr/>
-              <a:t>Walking</a:t>
-            </a:r>
-          </a:p>
-          <a:p>
-            <a:pPr lvl="0" indent="0" marL="0">
-              <a:buNone/>
-            </a:pPr>
-            <a:r>
-              <a:rPr/>
-              <a:t>After surgery, this means:</a:t>
-            </a:r>
-          </a:p>
-          <a:p>
-            <a:pPr lvl="0"/>
-            <a:r>
-              <a:rPr/>
-              <a:t>Sitting in a chair most of the day</a:t>
-            </a:r>
-          </a:p>
-          <a:p>
-            <a:pPr lvl="0"/>
-            <a:r>
-              <a:rPr/>
-              <a:t>Walking in the halls as soon as possible</a:t>
-            </a:r>
-          </a:p>
-        </p:txBody>
-      </p:sp>
+            <a:pPr lvl="0"/>
+            <a:r>
+              <a:rPr/>
+              <a:t>Occurs in 10-15% of patients after esophagectomy.</a:t>
+            </a:r>
+          </a:p>
+          <a:p>
+            <a:pPr lvl="0"/>
+            <a:r>
+              <a:rPr/>
+              <a:t>Requires treatment with antibiotics</a:t>
+            </a:r>
+          </a:p>
+          <a:p>
+            <a:pPr lvl="0"/>
+            <a:r>
+              <a:rPr/>
+              <a:t>Requires a longer hospitalization.</a:t>
+            </a:r>
+          </a:p>
+        </p:txBody>
+      </p:sp>
+      <p:pic>
+        <p:nvPicPr>
+          <p:cNvPr descr="images/Eso_LungsArtboard.png" id="0" name="Picture 1"/>
+          <p:cNvPicPr>
+            <a:picLocks noGrp="1" noChangeAspect="1"/>
+          </p:cNvPicPr>
+          <p:nvPr/>
+        </p:nvPicPr>
+        <p:blipFill>
+          <a:blip r:embed="rId2"/>
+          <a:stretch>
+            <a:fillRect/>
+          </a:stretch>
+        </p:blipFill>
+        <p:spPr bwMode="auto">
+          <a:xfrm>
+            <a:off x="4914900" y="1193800"/>
+            <a:ext cx="3632200" cy="3733800"/>
+          </a:xfrm>
+          <a:prstGeom prst="rect">
+            <a:avLst/>
+          </a:prstGeom>
+          <a:noFill/>
+          <a:ln w="9525">
+            <a:noFill/>
+            <a:headEnd/>
+            <a:tailEnd/>
+          </a:ln>
+        </p:spPr>
+      </p:pic>
     </p:spTree>
   </p:cSld>
 </p:sld>
@@ -6475,84 +6453,93 @@
         </p:nvSpPr>
         <p:spPr>
           <a:xfrm>
-            <a:off x="315045" y="205979"/>
-            <a:ext cx="8529278" cy="857250"/>
-          </a:xfrm>
-        </p:spPr>
-        <p:txBody>
-          <a:bodyPr/>
-          <a:lstStyle/>
-          <a:p>
-            <a:pPr lvl="0" indent="0" marL="0">
-              <a:buNone/>
-            </a:pPr>
-            <a:r>
-              <a:rPr/>
-              <a:t>Minimally-invasive Esophagectomy</a:t>
-            </a:r>
-          </a:p>
-        </p:txBody>
-      </p:sp>
-      <p:pic>
-        <p:nvPicPr>
-          <p:cNvPr descr="images/mie_abd.png" id="0" name="Picture 1"/>
-          <p:cNvPicPr>
-            <a:picLocks noGrp="1" noChangeAspect="1"/>
-          </p:cNvPicPr>
-          <p:nvPr/>
-        </p:nvPicPr>
-        <p:blipFill>
-          <a:blip r:embed="rId2"/>
-          <a:stretch>
-            <a:fillRect/>
-          </a:stretch>
-        </p:blipFill>
-        <p:spPr bwMode="auto">
-          <a:xfrm>
-            <a:off x="304800" y="1498600"/>
-            <a:ext cx="4178300" cy="3136900"/>
-          </a:xfrm>
-          <a:prstGeom prst="rect">
-            <a:avLst/>
-          </a:prstGeom>
-          <a:noFill/>
-          <a:ln w="9525">
-            <a:noFill/>
-            <a:headEnd/>
-            <a:tailEnd/>
-          </a:ln>
-        </p:spPr>
-      </p:pic>
-      <p:pic>
-        <p:nvPicPr>
-          <p:cNvPr descr="images/mie_chest.png" id="0" name="Picture 1"/>
-          <p:cNvPicPr>
-            <a:picLocks noGrp="1" noChangeAspect="1"/>
-          </p:cNvPicPr>
-          <p:nvPr/>
-        </p:nvPicPr>
-        <p:blipFill>
-          <a:blip r:embed="rId3"/>
-          <a:stretch>
-            <a:fillRect/>
-          </a:stretch>
-        </p:blipFill>
-        <p:spPr bwMode="auto">
-          <a:xfrm>
-            <a:off x="4635500" y="1485900"/>
-            <a:ext cx="4191000" cy="3149600"/>
-          </a:xfrm>
-          <a:prstGeom prst="rect">
-            <a:avLst/>
-          </a:prstGeom>
-          <a:noFill/>
-          <a:ln w="9525">
-            <a:noFill/>
-            <a:headEnd/>
-            <a:tailEnd/>
-          </a:ln>
-        </p:spPr>
-      </p:pic>
+            <a:off x="284309" y="205979"/>
+            <a:ext cx="8552330" cy="662317"/>
+          </a:xfrm>
+        </p:spPr>
+        <p:txBody>
+          <a:bodyPr/>
+          <a:lstStyle/>
+          <a:p>
+            <a:pPr lvl="0" indent="0" marL="0">
+              <a:buNone/>
+            </a:pPr>
+            <a:r>
+              <a:rPr/>
+              <a:t>Preventing Pneumonia</a:t>
+            </a:r>
+          </a:p>
+        </p:txBody>
+      </p:sp>
+      <p:sp>
+        <p:nvSpPr>
+          <p:cNvPr id="3" name="Content Placeholder 2"/>
+          <p:cNvSpPr>
+            <a:spLocks noGrp="1"/>
+          </p:cNvSpPr>
+          <p:nvPr>
+            <p:ph idx="1"/>
+          </p:nvPr>
+        </p:nvSpPr>
+        <p:spPr/>
+        <p:txBody>
+          <a:bodyPr/>
+          <a:lstStyle/>
+          <a:p>
+            <a:pPr lvl="0" indent="0" marL="0">
+              <a:buNone/>
+            </a:pPr>
+            <a:r>
+              <a:rPr/>
+              <a:t>Several ways to help prevent pneumonia:</a:t>
+            </a:r>
+          </a:p>
+          <a:p>
+            <a:pPr lvl="0"/>
+            <a:r>
+              <a:rPr/>
+              <a:t>Deep breathing</a:t>
+            </a:r>
+          </a:p>
+          <a:p>
+            <a:pPr lvl="0"/>
+            <a:r>
+              <a:rPr/>
+              <a:t>Coughing</a:t>
+            </a:r>
+          </a:p>
+          <a:p>
+            <a:pPr lvl="0"/>
+            <a:r>
+              <a:rPr/>
+              <a:t>Walking</a:t>
+            </a:r>
+          </a:p>
+          <a:p>
+            <a:pPr lvl="0" indent="0" marL="0">
+              <a:buNone/>
+            </a:pPr>
+            <a:r>
+              <a:rPr/>
+              <a:t>After surgery, this means:</a:t>
+            </a:r>
+          </a:p>
+          <a:p>
+            <a:pPr lvl="0"/>
+            <a:r>
+              <a:rPr/>
+              <a:t>Sitting in a chair most of the day</a:t>
+            </a:r>
+          </a:p>
+          <a:p>
+            <a:pPr lvl="0"/>
+            <a:r>
+              <a:rPr/>
+              <a:t>Walking in the halls as soon as possible</a:t>
+            </a:r>
+          </a:p>
+        </p:txBody>
+      </p:sp>
     </p:spTree>
   </p:cSld>
 </p:sld>
@@ -6587,84 +6574,84 @@
         </p:nvSpPr>
         <p:spPr>
           <a:xfrm>
-            <a:off x="284309" y="205979"/>
-            <a:ext cx="8552330" cy="662317"/>
-          </a:xfrm>
-        </p:spPr>
-        <p:txBody>
-          <a:bodyPr/>
-          <a:lstStyle/>
-          <a:p>
-            <a:pPr lvl="0" indent="0" marL="0">
-              <a:buNone/>
-            </a:pPr>
-            <a:r>
-              <a:rPr/>
-              <a:t>Risks of Surgery</a:t>
-            </a:r>
-          </a:p>
-        </p:txBody>
-      </p:sp>
-      <p:sp>
-        <p:nvSpPr>
-          <p:cNvPr id="3" name="Content Placeholder 2"/>
-          <p:cNvSpPr>
-            <a:spLocks noGrp="1"/>
-          </p:cNvSpPr>
-          <p:nvPr>
-            <p:ph idx="1"/>
-          </p:nvPr>
-        </p:nvSpPr>
-        <p:spPr/>
-        <p:txBody>
-          <a:bodyPr/>
-          <a:lstStyle/>
-          <a:p>
-            <a:pPr lvl="0" indent="0" marL="0">
-              <a:buNone/>
-            </a:pPr>
-            <a:r>
-              <a:rPr/>
-              <a:t>Risks related to anesthesia</a:t>
-            </a:r>
-          </a:p>
-          <a:p>
-            <a:pPr lvl="0"/>
-            <a:r>
-              <a:rPr/>
-              <a:t>Heart attack (5%)</a:t>
-            </a:r>
-          </a:p>
-          <a:p>
-            <a:pPr lvl="0"/>
-            <a:r>
-              <a:rPr/>
-              <a:t>Irregular heart rhythm (15%)</a:t>
-            </a:r>
-          </a:p>
-          <a:p>
-            <a:pPr lvl="0"/>
-            <a:r>
-              <a:rPr/>
-              <a:t>Pneumonia (10%)</a:t>
-            </a:r>
-          </a:p>
-          <a:p>
-            <a:pPr lvl="0"/>
-            <a:r>
-              <a:rPr/>
-              <a:t>Blood clots in legs (&lt;5%)</a:t>
-            </a:r>
-          </a:p>
-          <a:p>
-            <a:pPr lvl="0"/>
-            <a:r>
-              <a:rPr/>
-              <a:t>Pulmonary embolism (2%)</a:t>
-            </a:r>
-          </a:p>
-        </p:txBody>
-      </p:sp>
+            <a:off x="315045" y="205979"/>
+            <a:ext cx="8529278" cy="857250"/>
+          </a:xfrm>
+        </p:spPr>
+        <p:txBody>
+          <a:bodyPr/>
+          <a:lstStyle/>
+          <a:p>
+            <a:pPr lvl="0" indent="0" marL="0">
+              <a:buNone/>
+            </a:pPr>
+            <a:r>
+              <a:rPr/>
+              <a:t>Minimally-invasive Esophagectomy</a:t>
+            </a:r>
+          </a:p>
+        </p:txBody>
+      </p:sp>
+      <p:pic>
+        <p:nvPicPr>
+          <p:cNvPr descr="images/mie_abd.png" id="0" name="Picture 1"/>
+          <p:cNvPicPr>
+            <a:picLocks noGrp="1" noChangeAspect="1"/>
+          </p:cNvPicPr>
+          <p:nvPr/>
+        </p:nvPicPr>
+        <p:blipFill>
+          <a:blip r:embed="rId2"/>
+          <a:stretch>
+            <a:fillRect/>
+          </a:stretch>
+        </p:blipFill>
+        <p:spPr bwMode="auto">
+          <a:xfrm>
+            <a:off x="304800" y="1498600"/>
+            <a:ext cx="4178300" cy="3136900"/>
+          </a:xfrm>
+          <a:prstGeom prst="rect">
+            <a:avLst/>
+          </a:prstGeom>
+          <a:noFill/>
+          <a:ln w="9525">
+            <a:noFill/>
+            <a:headEnd/>
+            <a:tailEnd/>
+          </a:ln>
+        </p:spPr>
+      </p:pic>
+      <p:pic>
+        <p:nvPicPr>
+          <p:cNvPr descr="images/mie_chest.png" id="0" name="Picture 1"/>
+          <p:cNvPicPr>
+            <a:picLocks noGrp="1" noChangeAspect="1"/>
+          </p:cNvPicPr>
+          <p:nvPr/>
+        </p:nvPicPr>
+        <p:blipFill>
+          <a:blip r:embed="rId3"/>
+          <a:stretch>
+            <a:fillRect/>
+          </a:stretch>
+        </p:blipFill>
+        <p:spPr bwMode="auto">
+          <a:xfrm>
+            <a:off x="4635500" y="1485900"/>
+            <a:ext cx="4191000" cy="3149600"/>
+          </a:xfrm>
+          <a:prstGeom prst="rect">
+            <a:avLst/>
+          </a:prstGeom>
+          <a:noFill/>
+          <a:ln w="9525">
+            <a:noFill/>
+            <a:headEnd/>
+            <a:tailEnd/>
+          </a:ln>
+        </p:spPr>
+      </p:pic>
     </p:spTree>
   </p:cSld>
 </p:sld>
@@ -6737,49 +6724,42 @@
             </a:pPr>
             <a:r>
               <a:rPr/>
-              <a:t>Risks related to Surgery</a:t>
-            </a:r>
-          </a:p>
-          <a:p>
-            <a:pPr lvl="0"/>
-            <a:r>
-              <a:rPr/>
-              <a:t>Anastomotic leak (5%)</a:t>
-            </a:r>
-          </a:p>
-          <a:p>
-            <a:pPr lvl="0"/>
-            <a:r>
-              <a:rPr/>
-              <a:t>Stricture at anastomosis (15%)</a:t>
-            </a:r>
-          </a:p>
-          <a:p>
-            <a:pPr lvl="0"/>
-            <a:r>
-              <a:rPr/>
-              <a:t>Death within 90 days of surgery</a:t>
-            </a:r>
-          </a:p>
-          <a:p>
-            <a:pPr lvl="1"/>
-            <a:r>
-              <a:rPr/>
-              <a:t>Low risk patients = 2%</a:t>
-            </a:r>
-          </a:p>
-          <a:p>
-            <a:pPr lvl="1"/>
-            <a:r>
-              <a:rPr/>
-              <a:t>Intermediate risk = 10%</a:t>
-            </a:r>
-          </a:p>
-          <a:p>
-            <a:pPr lvl="1"/>
-            <a:r>
-              <a:rPr/>
-              <a:t>High risk = 30%</a:t>
+              <a:t>Risks related to anesthesia</a:t>
+            </a:r>
+          </a:p>
+          <a:p>
+            <a:pPr lvl="0"/>
+            <a:r>
+              <a:rPr/>
+              <a:t>Heart attack (5%)</a:t>
+            </a:r>
+          </a:p>
+          <a:p>
+            <a:pPr lvl="0"/>
+            <a:r>
+              <a:rPr/>
+              <a:t>Irregular heart rhythm (15%)</a:t>
+            </a:r>
+          </a:p>
+          <a:p>
+            <a:pPr lvl="0"/>
+            <a:r>
+              <a:rPr/>
+              <a:t>Pneumonia (10%)</a:t>
+            </a:r>
+          </a:p>
+          <a:p>
+            <a:pPr lvl="0"/>
+            <a:r>
+              <a:rPr/>
+              <a:t>Blood clots in legs (&lt;5%)</a:t>
+            </a:r>
+          </a:p>
+          <a:p>
+            <a:pPr lvl="0"/>
+            <a:r>
+              <a:rPr/>
+              <a:t>Pulmonary embolism (2%)</a:t>
             </a:r>
           </a:p>
         </p:txBody>
@@ -6790,6 +6770,125 @@
 </file>
 
 <file path=ppt/slides/slide35.xml><?xml version="1.0" encoding="utf-8"?>
+<p:sld xmlns:a="http://schemas.openxmlformats.org/drawingml/2006/main" xmlns:r="http://schemas.openxmlformats.org/officeDocument/2006/relationships" xmlns:p="http://schemas.openxmlformats.org/presentationml/2006/main">
+  <p:cSld>
+    <p:spTree>
+      <p:nvGrpSpPr>
+        <p:cNvPr id="1" name=""/>
+        <p:cNvGrpSpPr/>
+        <p:nvPr/>
+      </p:nvGrpSpPr>
+      <p:grpSpPr>
+        <a:xfrm>
+          <a:off x="0" y="0"/>
+          <a:ext cx="0" cy="0"/>
+          <a:chOff x="0" y="0"/>
+          <a:chExt cx="0" cy="0"/>
+        </a:xfrm>
+      </p:grpSpPr>
+      <p:sp>
+        <p:nvSpPr>
+          <p:cNvPr id="2" name="Title 1"/>
+          <p:cNvSpPr>
+            <a:spLocks noGrp="1"/>
+          </p:cNvSpPr>
+          <p:nvPr>
+            <p:ph type="title"/>
+          </p:nvPr>
+        </p:nvSpPr>
+        <p:spPr>
+          <a:xfrm>
+            <a:off x="284309" y="205979"/>
+            <a:ext cx="8552330" cy="662317"/>
+          </a:xfrm>
+        </p:spPr>
+        <p:txBody>
+          <a:bodyPr/>
+          <a:lstStyle/>
+          <a:p>
+            <a:pPr lvl="0" indent="0" marL="0">
+              <a:buNone/>
+            </a:pPr>
+            <a:r>
+              <a:rPr/>
+              <a:t>Risks of Surgery</a:t>
+            </a:r>
+          </a:p>
+        </p:txBody>
+      </p:sp>
+      <p:sp>
+        <p:nvSpPr>
+          <p:cNvPr id="3" name="Content Placeholder 2"/>
+          <p:cNvSpPr>
+            <a:spLocks noGrp="1"/>
+          </p:cNvSpPr>
+          <p:nvPr>
+            <p:ph idx="1"/>
+          </p:nvPr>
+        </p:nvSpPr>
+        <p:spPr/>
+        <p:txBody>
+          <a:bodyPr/>
+          <a:lstStyle/>
+          <a:p>
+            <a:pPr lvl="0" indent="0" marL="0">
+              <a:buNone/>
+            </a:pPr>
+            <a:r>
+              <a:rPr/>
+              <a:t>Risks related to Surgery</a:t>
+            </a:r>
+          </a:p>
+          <a:p>
+            <a:pPr lvl="0"/>
+            <a:r>
+              <a:rPr/>
+              <a:t>Anastomotic leak (5%)</a:t>
+            </a:r>
+          </a:p>
+          <a:p>
+            <a:pPr lvl="0"/>
+            <a:r>
+              <a:rPr/>
+              <a:t>Stricture at anastomosis (15%)</a:t>
+            </a:r>
+          </a:p>
+          <a:p>
+            <a:pPr lvl="0"/>
+            <a:r>
+              <a:rPr/>
+              <a:t>Death within 90 days of surgery</a:t>
+            </a:r>
+          </a:p>
+          <a:p>
+            <a:pPr lvl="1"/>
+            <a:r>
+              <a:rPr/>
+              <a:t>Low risk patients = 2%</a:t>
+            </a:r>
+          </a:p>
+          <a:p>
+            <a:pPr lvl="1"/>
+            <a:r>
+              <a:rPr/>
+              <a:t>Intermediate risk = 10%</a:t>
+            </a:r>
+          </a:p>
+          <a:p>
+            <a:pPr lvl="1"/>
+            <a:r>
+              <a:rPr/>
+              <a:t>High risk = 30%</a:t>
+            </a:r>
+          </a:p>
+        </p:txBody>
+      </p:sp>
+    </p:spTree>
+  </p:cSld>
+</p:sld>
+</file>
+
+<file path=ppt/slides/slide36.xml><?xml version="1.0" encoding="utf-8"?>
 <p:sld xmlns:a="http://schemas.openxmlformats.org/drawingml/2006/main" xmlns:r="http://schemas.openxmlformats.org/officeDocument/2006/relationships" xmlns:p="http://schemas.openxmlformats.org/presentationml/2006/main">
   <p:cSld>
     <p:spTree>
@@ -7040,109 +7139,6 @@
 </p:sld>
 </file>
 
-<file path=ppt/slides/slide36.xml><?xml version="1.0" encoding="utf-8"?>
-<p:sld xmlns:a="http://schemas.openxmlformats.org/drawingml/2006/main" xmlns:r="http://schemas.openxmlformats.org/officeDocument/2006/relationships" xmlns:p="http://schemas.openxmlformats.org/presentationml/2006/main">
-  <p:cSld>
-    <p:spTree>
-      <p:nvGrpSpPr>
-        <p:cNvPr id="1" name=""/>
-        <p:cNvGrpSpPr/>
-        <p:nvPr/>
-      </p:nvGrpSpPr>
-      <p:grpSpPr>
-        <a:xfrm>
-          <a:off x="0" y="0"/>
-          <a:ext cx="0" cy="0"/>
-          <a:chOff x="0" y="0"/>
-          <a:chExt cx="0" cy="0"/>
-        </a:xfrm>
-      </p:grpSpPr>
-      <p:sp>
-        <p:nvSpPr>
-          <p:cNvPr id="2" name="Title 1"/>
-          <p:cNvSpPr>
-            <a:spLocks noGrp="1"/>
-          </p:cNvSpPr>
-          <p:nvPr>
-            <p:ph type="title"/>
-          </p:nvPr>
-        </p:nvSpPr>
-        <p:spPr>
-          <a:xfrm>
-            <a:off x="284309" y="205979"/>
-            <a:ext cx="8552330" cy="662317"/>
-          </a:xfrm>
-        </p:spPr>
-        <p:txBody>
-          <a:bodyPr/>
-          <a:lstStyle/>
-          <a:p>
-            <a:pPr lvl="0" indent="0" marL="0">
-              <a:buNone/>
-            </a:pPr>
-            <a:r>
-              <a:rPr/>
-              <a:t>Epidural Catheter for Pain Control</a:t>
-            </a:r>
-          </a:p>
-        </p:txBody>
-      </p:sp>
-      <p:sp>
-        <p:nvSpPr>
-          <p:cNvPr id="3" name="Content Placeholder 2"/>
-          <p:cNvSpPr>
-            <a:spLocks noGrp="1"/>
-          </p:cNvSpPr>
-          <p:nvPr>
-            <p:ph idx="1"/>
-          </p:nvPr>
-        </p:nvSpPr>
-        <p:spPr/>
-        <p:txBody>
-          <a:bodyPr/>
-          <a:lstStyle/>
-          <a:p>
-            <a:pPr lvl="0"/>
-            <a:r>
-              <a:rPr/>
-              <a:t>Remains in place for 2-5 days</a:t>
-            </a:r>
-          </a:p>
-          <a:p>
-            <a:pPr lvl="0"/>
-            <a:r>
-              <a:rPr/>
-              <a:t>Dosage can be adjusted as needed</a:t>
-            </a:r>
-          </a:p>
-          <a:p>
-            <a:pPr lvl="0"/>
-            <a:r>
-              <a:rPr/>
-              <a:t>Can make it more difficult to urinate</a:t>
-            </a:r>
-          </a:p>
-          <a:p>
-            <a:pPr lvl="0"/>
-            <a:r>
-              <a:rPr/>
-              <a:t>May require foley catheter in bladder</a:t>
-            </a:r>
-          </a:p>
-          <a:p>
-            <a:pPr lvl="0"/>
-            <a:r>
-              <a:rPr/>
-              <a:t>Foley catheter removed after epidural removed</a:t>
-            </a:r>
-          </a:p>
-        </p:txBody>
-      </p:sp>
-    </p:spTree>
-  </p:cSld>
-</p:sld>
-</file>
-
 <file path=ppt/slides/slide37.xml><?xml version="1.0" encoding="utf-8"?>
 <p:sld xmlns:a="http://schemas.openxmlformats.org/drawingml/2006/main" xmlns:r="http://schemas.openxmlformats.org/officeDocument/2006/relationships" xmlns:p="http://schemas.openxmlformats.org/presentationml/2006/main">
   <p:cSld>
@@ -7185,7 +7181,7 @@
             </a:pPr>
             <a:r>
               <a:rPr/>
-              <a:t>Intensive Care Unit (ICU) (2-4 days)</a:t>
+              <a:t>Epidural Catheter for Pain Control</a:t>
             </a:r>
           </a:p>
         </p:txBody>
@@ -7208,42 +7204,35 @@
             <a:pPr lvl="0"/>
             <a:r>
               <a:rPr/>
-              <a:t>Surgical ICU on 11th floor</a:t>
-            </a:r>
-          </a:p>
-          <a:p>
-            <a:pPr lvl="0"/>
-            <a:r>
-              <a:rPr/>
-              <a:t>NG tube in nose to drain stomach and esophagus</a:t>
-            </a:r>
-          </a:p>
-          <a:p>
-            <a:pPr lvl="0"/>
-            <a:r>
-              <a:rPr/>
-              <a:t>Catheter in bladder</a:t>
-            </a:r>
-          </a:p>
-          <a:p>
-            <a:pPr lvl="0"/>
-            <a:r>
-              <a:rPr/>
-              <a:t>Chest tube right chest</a:t>
-            </a:r>
-          </a:p>
-          <a:p>
-            <a:pPr lvl="0"/>
-            <a:r>
-              <a:rPr/>
-              <a:t>Abdominal drains (usually 2)</a:t>
-            </a:r>
-          </a:p>
-          <a:p>
-            <a:pPr lvl="0"/>
-            <a:r>
-              <a:rPr/>
-              <a:t>Feeding jejunostomy (usually stays in 8 wks)</a:t>
+              <a:t>Remains in place for 2-5 days</a:t>
+            </a:r>
+          </a:p>
+          <a:p>
+            <a:pPr lvl="0"/>
+            <a:r>
+              <a:rPr/>
+              <a:t>Dosage can be adjusted as needed</a:t>
+            </a:r>
+          </a:p>
+          <a:p>
+            <a:pPr lvl="0"/>
+            <a:r>
+              <a:rPr/>
+              <a:t>Can make it more difficult to urinate</a:t>
+            </a:r>
+          </a:p>
+          <a:p>
+            <a:pPr lvl="0"/>
+            <a:r>
+              <a:rPr/>
+              <a:t>May require foley catheter in bladder</a:t>
+            </a:r>
+          </a:p>
+          <a:p>
+            <a:pPr lvl="0"/>
+            <a:r>
+              <a:rPr/>
+              <a:t>Foley catheter removed after epidural removed</a:t>
             </a:r>
           </a:p>
         </p:txBody>
@@ -7295,7 +7284,7 @@
             </a:pPr>
             <a:r>
               <a:rPr/>
-              <a:t>Intensive Care Unit (ICU)</a:t>
+              <a:t>Intensive Care Unit (ICU) (2-4 days)</a:t>
             </a:r>
           </a:p>
         </p:txBody>
@@ -7318,35 +7307,42 @@
             <a:pPr lvl="0"/>
             <a:r>
               <a:rPr/>
-              <a:t>Bladder catheter removed → check that bladder empties properly</a:t>
-            </a:r>
-          </a:p>
-          <a:p>
-            <a:pPr lvl="0"/>
-            <a:r>
-              <a:rPr/>
-              <a:t>Chest tube removed (day 2-4) → follow-up x-ray</a:t>
-            </a:r>
-          </a:p>
-          <a:p>
-            <a:pPr lvl="0"/>
-            <a:r>
-              <a:rPr/>
-              <a:t>Fluid emptied from drains every few hours</a:t>
-            </a:r>
-          </a:p>
-          <a:p>
-            <a:pPr lvl="0"/>
-            <a:r>
-              <a:rPr/>
-              <a:t>Start tube feedings by feeding</a:t>
-            </a:r>
-          </a:p>
-          <a:p>
-            <a:pPr lvl="0"/>
-            <a:r>
-              <a:rPr/>
-              <a:t>Feeding jejunostomy (stays in 8 weeks)</a:t>
+              <a:t>Surgical ICU on 11th floor</a:t>
+            </a:r>
+          </a:p>
+          <a:p>
+            <a:pPr lvl="0"/>
+            <a:r>
+              <a:rPr/>
+              <a:t>NG tube in nose to drain stomach and esophagus</a:t>
+            </a:r>
+          </a:p>
+          <a:p>
+            <a:pPr lvl="0"/>
+            <a:r>
+              <a:rPr/>
+              <a:t>Catheter in bladder</a:t>
+            </a:r>
+          </a:p>
+          <a:p>
+            <a:pPr lvl="0"/>
+            <a:r>
+              <a:rPr/>
+              <a:t>Chest tube right chest</a:t>
+            </a:r>
+          </a:p>
+          <a:p>
+            <a:pPr lvl="0"/>
+            <a:r>
+              <a:rPr/>
+              <a:t>Abdominal drains (usually 2)</a:t>
+            </a:r>
+          </a:p>
+          <a:p>
+            <a:pPr lvl="0"/>
+            <a:r>
+              <a:rPr/>
+              <a:t>Feeding jejunostomy (usually stays in 8 wks)</a:t>
             </a:r>
           </a:p>
         </p:txBody>
@@ -7398,7 +7394,7 @@
             </a:pPr>
             <a:r>
               <a:rPr/>
-              <a:t>Ward - 6Tower</a:t>
+              <a:t>Intensive Care Unit (ICU)</a:t>
             </a:r>
           </a:p>
         </p:txBody>
@@ -7421,42 +7417,35 @@
             <a:pPr lvl="0"/>
             <a:r>
               <a:rPr/>
-              <a:t>Jejunostomy feeds started</a:t>
-            </a:r>
-          </a:p>
-          <a:p>
-            <a:pPr lvl="0"/>
-            <a:r>
-              <a:rPr/>
-              <a:t>Up in a chair most of the day</a:t>
-            </a:r>
-          </a:p>
-          <a:p>
-            <a:pPr lvl="0"/>
-            <a:r>
-              <a:rPr/>
-              <a:t>Walking in the halls</a:t>
-            </a:r>
-          </a:p>
-          <a:p>
-            <a:pPr lvl="1"/>
-            <a:r>
-              <a:rPr/>
-              <a:t>Start with assistance</a:t>
-            </a:r>
-          </a:p>
-          <a:p>
-            <a:pPr lvl="1"/>
-            <a:r>
-              <a:rPr/>
-              <a:t>Improves lung function</a:t>
-            </a:r>
-          </a:p>
-          <a:p>
-            <a:pPr lvl="1"/>
-            <a:r>
-              <a:rPr/>
-              <a:t>Prevents loss of muscle strength</a:t>
+              <a:t>Bladder catheter removed → check that bladder empties properly</a:t>
+            </a:r>
+          </a:p>
+          <a:p>
+            <a:pPr lvl="0"/>
+            <a:r>
+              <a:rPr/>
+              <a:t>Chest tube removed (day 2-4) → follow-up x-ray</a:t>
+            </a:r>
+          </a:p>
+          <a:p>
+            <a:pPr lvl="0"/>
+            <a:r>
+              <a:rPr/>
+              <a:t>Fluid emptied from drains every few hours</a:t>
+            </a:r>
+          </a:p>
+          <a:p>
+            <a:pPr lvl="0"/>
+            <a:r>
+              <a:rPr/>
+              <a:t>Start tube feedings by feeding</a:t>
+            </a:r>
+          </a:p>
+          <a:p>
+            <a:pPr lvl="0"/>
+            <a:r>
+              <a:rPr/>
+              <a:t>Feeding jejunostomy (stays in 8 weeks)</a:t>
             </a:r>
           </a:p>
         </p:txBody>
@@ -7610,7 +7599,7 @@
             </a:pPr>
             <a:r>
               <a:rPr/>
-              <a:t>Jejunostomy Feeds</a:t>
+              <a:t>Ward - 6Tower</a:t>
             </a:r>
           </a:p>
         </p:txBody>
@@ -7630,49 +7619,45 @@
           <a:bodyPr/>
           <a:lstStyle/>
           <a:p>
-            <a:pPr lvl="0" indent="0" marL="0">
-              <a:buNone/>
-            </a:pPr>
-            <a:r>
-              <a:rPr/>
-              <a:t>Jejunostomy tube feeds</a:t>
-            </a:r>
-          </a:p>
-          <a:p>
-            <a:pPr lvl="0"/>
-            <a:r>
-              <a:rPr/>
-              <a:t>Start continuous (24 hours)</a:t>
-            </a:r>
-          </a:p>
-          <a:p>
-            <a:pPr lvl="0"/>
-            <a:r>
-              <a:rPr/>
-              <a:t>Convert to night-time only (16 hours)</a:t>
-            </a:r>
-          </a:p>
-          <a:p>
-            <a:pPr lvl="0" indent="0" marL="0">
-              <a:buNone/>
-            </a:pPr>
-            <a:r>
-              <a:rPr/>
-              <a:t>Water administered through feeding tube</a:t>
-            </a:r>
-          </a:p>
-          <a:p>
-            <a:pPr lvl="0"/>
-            <a:r>
-              <a:rPr/>
-              <a:t>Usually 8oz 4 times/day</a:t>
-            </a:r>
-          </a:p>
-          <a:p>
-            <a:pPr lvl="0"/>
-            <a:r>
-              <a:rPr/>
-              <a:t>Important to prevent dehydration</a:t>
+            <a:pPr lvl="0"/>
+            <a:r>
+              <a:rPr/>
+              <a:t>Jejunostomy feeds started</a:t>
+            </a:r>
+          </a:p>
+          <a:p>
+            <a:pPr lvl="0"/>
+            <a:r>
+              <a:rPr/>
+              <a:t>Up in a chair most of the day</a:t>
+            </a:r>
+          </a:p>
+          <a:p>
+            <a:pPr lvl="0"/>
+            <a:r>
+              <a:rPr/>
+              <a:t>Walking in the halls</a:t>
+            </a:r>
+          </a:p>
+          <a:p>
+            <a:pPr lvl="1"/>
+            <a:r>
+              <a:rPr/>
+              <a:t>Start with assistance</a:t>
+            </a:r>
+          </a:p>
+          <a:p>
+            <a:pPr lvl="1"/>
+            <a:r>
+              <a:rPr/>
+              <a:t>Improves lung function</a:t>
+            </a:r>
+          </a:p>
+          <a:p>
+            <a:pPr lvl="1"/>
+            <a:r>
+              <a:rPr/>
+              <a:t>Prevents loss of muscle strength</a:t>
             </a:r>
           </a:p>
         </p:txBody>
@@ -7711,20 +7696,20 @@
         </p:nvSpPr>
         <p:spPr>
           <a:xfrm>
-            <a:off x="315045" y="205979"/>
-            <a:ext cx="8529278" cy="857250"/>
-          </a:xfrm>
-        </p:spPr>
-        <p:txBody>
-          <a:bodyPr/>
-          <a:lstStyle/>
-          <a:p>
-            <a:pPr lvl="0" indent="0" marL="0">
-              <a:buNone/>
-            </a:pPr>
-            <a:r>
-              <a:rPr/>
-              <a:t>Jejunostomy Tube</a:t>
+            <a:off x="284309" y="205979"/>
+            <a:ext cx="8552330" cy="662317"/>
+          </a:xfrm>
+        </p:spPr>
+        <p:txBody>
+          <a:bodyPr/>
+          <a:lstStyle/>
+          <a:p>
+            <a:pPr lvl="0" indent="0" marL="0">
+              <a:buNone/>
+            </a:pPr>
+            <a:r>
+              <a:rPr/>
+              <a:t>Jejunostomy Feeds</a:t>
             </a:r>
           </a:p>
         </p:txBody>
@@ -7736,7 +7721,7 @@
             <a:spLocks noGrp="1"/>
           </p:cNvSpPr>
           <p:nvPr>
-            <p:ph idx="1" sz="half"/>
+            <p:ph idx="1"/>
           </p:nvPr>
         </p:nvSpPr>
         <p:spPr/>
@@ -7744,65 +7729,53 @@
           <a:bodyPr/>
           <a:lstStyle/>
           <a:p>
-            <a:pPr lvl="0"/>
-            <a:r>
-              <a:rPr/>
-              <a:t>Nutrition to bypasses the esophagus and stomach</a:t>
-            </a:r>
-          </a:p>
-          <a:p>
-            <a:pPr lvl="0"/>
-            <a:r>
-              <a:rPr/>
-              <a:t>Placed in small intestine</a:t>
-            </a:r>
-          </a:p>
-          <a:p>
-            <a:pPr lvl="0"/>
-            <a:r>
-              <a:rPr/>
-              <a:t>Pump administers feedings slowly</a:t>
-            </a:r>
-          </a:p>
-          <a:p>
-            <a:pPr lvl="0"/>
-            <a:r>
-              <a:rPr/>
-              <a:t>Feeding done at night</a:t>
-            </a:r>
-          </a:p>
-        </p:txBody>
-      </p:sp>
-      <p:pic>
-        <p:nvPicPr>
-          <p:cNvPr descr="images/nutrition_jtube.png" id="0" name="Picture 1"/>
-          <p:cNvPicPr>
-            <a:picLocks noGrp="1" noChangeAspect="1"/>
-          </p:cNvPicPr>
-          <p:nvPr/>
-        </p:nvPicPr>
-        <p:blipFill>
-          <a:blip r:embed="rId2"/>
-          <a:stretch>
-            <a:fillRect/>
-          </a:stretch>
-        </p:blipFill>
-        <p:spPr bwMode="auto">
-          <a:xfrm>
-            <a:off x="4902200" y="1193800"/>
-            <a:ext cx="3644900" cy="3733800"/>
-          </a:xfrm>
-          <a:prstGeom prst="rect">
-            <a:avLst/>
-          </a:prstGeom>
-          <a:noFill/>
-          <a:ln w="9525">
-            <a:noFill/>
-            <a:headEnd/>
-            <a:tailEnd/>
-          </a:ln>
-        </p:spPr>
-      </p:pic>
+            <a:pPr lvl="0" indent="0" marL="0">
+              <a:buNone/>
+            </a:pPr>
+            <a:r>
+              <a:rPr/>
+              <a:t>Jejunostomy tube feeds</a:t>
+            </a:r>
+          </a:p>
+          <a:p>
+            <a:pPr lvl="0"/>
+            <a:r>
+              <a:rPr/>
+              <a:t>Start continuous (24 hours)</a:t>
+            </a:r>
+          </a:p>
+          <a:p>
+            <a:pPr lvl="0"/>
+            <a:r>
+              <a:rPr/>
+              <a:t>Convert to night-time only (16 hours)</a:t>
+            </a:r>
+          </a:p>
+          <a:p>
+            <a:pPr lvl="0" indent="0" marL="0">
+              <a:buNone/>
+            </a:pPr>
+            <a:r>
+              <a:rPr/>
+              <a:t>Water administered through feeding tube</a:t>
+            </a:r>
+          </a:p>
+          <a:p>
+            <a:pPr lvl="0"/>
+            <a:r>
+              <a:rPr/>
+              <a:t>Usually 8oz 4 times/day</a:t>
+            </a:r>
+          </a:p>
+          <a:p>
+            <a:pPr lvl="0"/>
+            <a:r>
+              <a:rPr/>
+              <a:t>Important to prevent dehydration</a:t>
+            </a:r>
+          </a:p>
+        </p:txBody>
+      </p:sp>
     </p:spTree>
   </p:cSld>
 </p:sld>
@@ -7837,20 +7810,20 @@
         </p:nvSpPr>
         <p:spPr>
           <a:xfrm>
-            <a:off x="284309" y="205979"/>
-            <a:ext cx="8552330" cy="662317"/>
-          </a:xfrm>
-        </p:spPr>
-        <p:txBody>
-          <a:bodyPr/>
-          <a:lstStyle/>
-          <a:p>
-            <a:pPr lvl="0" indent="0" marL="0">
-              <a:buNone/>
-            </a:pPr>
-            <a:r>
-              <a:rPr/>
-              <a:t>Jejunostomy Typical Regimen</a:t>
+            <a:off x="315045" y="205979"/>
+            <a:ext cx="8529278" cy="857250"/>
+          </a:xfrm>
+        </p:spPr>
+        <p:txBody>
+          <a:bodyPr/>
+          <a:lstStyle/>
+          <a:p>
+            <a:pPr lvl="0" indent="0" marL="0">
+              <a:buNone/>
+            </a:pPr>
+            <a:r>
+              <a:rPr/>
+              <a:t>Jejunostomy Tube</a:t>
             </a:r>
           </a:p>
         </p:txBody>
@@ -7862,7 +7835,7 @@
             <a:spLocks noGrp="1"/>
           </p:cNvSpPr>
           <p:nvPr>
-            <p:ph idx="1"/>
+            <p:ph idx="1" sz="half"/>
           </p:nvPr>
         </p:nvSpPr>
         <p:spPr/>
@@ -7873,41 +7846,62 @@
             <a:pPr lvl="0"/>
             <a:r>
               <a:rPr/>
-              <a:t>Jejunostomy tube feeds for 16 hours (6pm-10am)</a:t>
-            </a:r>
-          </a:p>
-          <a:p>
-            <a:pPr lvl="1"/>
-            <a:r>
-              <a:rPr/>
-              <a:t>Men: 75mL/hour x 16 hours = 5 cartons</a:t>
-            </a:r>
-          </a:p>
-          <a:p>
-            <a:pPr lvl="1"/>
-            <a:r>
-              <a:rPr/>
-              <a:t>Women: 60mL/hour x 16 hours = 4 cartons</a:t>
-            </a:r>
-          </a:p>
-          <a:p>
-            <a:pPr lvl="0"/>
-            <a:r>
-              <a:rPr/>
-              <a:t>Water 240ml (8oz) via syringe 4x/day</a:t>
-            </a:r>
-          </a:p>
-          <a:p>
-            <a:pPr lvl="0" indent="0" marL="0">
-              <a:buNone/>
-            </a:pPr>
-            <a:r>
-              <a:rPr/>
-              <a:t>Hospital nurses will teach use of the feeding tube</a:t>
-            </a:r>
-          </a:p>
-        </p:txBody>
-      </p:sp>
+              <a:t>Nutrition to bypasses the esophagus and stomach</a:t>
+            </a:r>
+          </a:p>
+          <a:p>
+            <a:pPr lvl="0"/>
+            <a:r>
+              <a:rPr/>
+              <a:t>Placed in small intestine</a:t>
+            </a:r>
+          </a:p>
+          <a:p>
+            <a:pPr lvl="0"/>
+            <a:r>
+              <a:rPr/>
+              <a:t>Pump administers feedings slowly</a:t>
+            </a:r>
+          </a:p>
+          <a:p>
+            <a:pPr lvl="0"/>
+            <a:r>
+              <a:rPr/>
+              <a:t>Feeding done at night</a:t>
+            </a:r>
+          </a:p>
+        </p:txBody>
+      </p:sp>
+      <p:pic>
+        <p:nvPicPr>
+          <p:cNvPr descr="images/nutrition_jtube.png" id="0" name="Picture 1"/>
+          <p:cNvPicPr>
+            <a:picLocks noGrp="1" noChangeAspect="1"/>
+          </p:cNvPicPr>
+          <p:nvPr/>
+        </p:nvPicPr>
+        <p:blipFill>
+          <a:blip r:embed="rId2"/>
+          <a:stretch>
+            <a:fillRect/>
+          </a:stretch>
+        </p:blipFill>
+        <p:spPr bwMode="auto">
+          <a:xfrm>
+            <a:off x="4902200" y="1193800"/>
+            <a:ext cx="3644900" cy="3733800"/>
+          </a:xfrm>
+          <a:prstGeom prst="rect">
+            <a:avLst/>
+          </a:prstGeom>
+          <a:noFill/>
+          <a:ln w="9525">
+            <a:noFill/>
+            <a:headEnd/>
+            <a:tailEnd/>
+          </a:ln>
+        </p:spPr>
+      </p:pic>
     </p:spTree>
   </p:cSld>
 </p:sld>
@@ -7955,7 +7949,7 @@
             </a:pPr>
             <a:r>
               <a:rPr/>
-              <a:t>Jejunostomy Feeds with Diabetes</a:t>
+              <a:t>Jejunostomy Typical Regimen</a:t>
             </a:r>
           </a:p>
         </p:txBody>
@@ -7975,56 +7969,40 @@
           <a:bodyPr/>
           <a:lstStyle/>
           <a:p>
-            <a:pPr lvl="0" indent="0" marL="0">
-              <a:buNone/>
-            </a:pPr>
-            <a:r>
-              <a:rPr/>
-              <a:t>Jejunostomy feedings elevate blood sugars</a:t>
-            </a:r>
-          </a:p>
-          <a:p>
-            <a:pPr lvl="0"/>
-            <a:r>
-              <a:rPr/>
-              <a:t>Insulin may be required along with feeds</a:t>
-            </a:r>
-          </a:p>
-          <a:p>
-            <a:pPr lvl="0" indent="0" marL="0">
-              <a:buNone/>
-            </a:pPr>
-            <a:r>
-              <a:rPr/>
-              <a:t>Typical Pattern for tube feeds</a:t>
-            </a:r>
-          </a:p>
-          <a:p>
-            <a:pPr lvl="0"/>
-            <a:r>
-              <a:rPr/>
-              <a:t>Feeds run via pump from 6pm to 10am</a:t>
-            </a:r>
-          </a:p>
-          <a:p>
-            <a:pPr lvl="0"/>
-            <a:r>
-              <a:rPr/>
-              <a:t>Insulin at 6pm (70/30 insulin)</a:t>
-            </a:r>
-          </a:p>
-          <a:p>
-            <a:pPr lvl="0"/>
-            <a:r>
-              <a:rPr/>
-              <a:t>Insulin at Midnight (70/30 insulin)</a:t>
-            </a:r>
-          </a:p>
-          <a:p>
-            <a:pPr lvl="0"/>
-            <a:r>
-              <a:rPr/>
-              <a:t>No insulin if tube feedings are not run</a:t>
+            <a:pPr lvl="0"/>
+            <a:r>
+              <a:rPr/>
+              <a:t>Jejunostomy tube feeds for 16 hours (6pm-10am)</a:t>
+            </a:r>
+          </a:p>
+          <a:p>
+            <a:pPr lvl="1"/>
+            <a:r>
+              <a:rPr/>
+              <a:t>Men: 75mL/hour x 16 hours = 5 cartons</a:t>
+            </a:r>
+          </a:p>
+          <a:p>
+            <a:pPr lvl="1"/>
+            <a:r>
+              <a:rPr/>
+              <a:t>Women: 60mL/hour x 16 hours = 4 cartons</a:t>
+            </a:r>
+          </a:p>
+          <a:p>
+            <a:pPr lvl="0"/>
+            <a:r>
+              <a:rPr/>
+              <a:t>Water 240ml (8oz) via syringe 4x/day</a:t>
+            </a:r>
+          </a:p>
+          <a:p>
+            <a:pPr lvl="0" indent="0" marL="0">
+              <a:buNone/>
+            </a:pPr>
+            <a:r>
+              <a:rPr/>
+              <a:t>Hospital nurses will teach use of the feeding tube</a:t>
             </a:r>
           </a:p>
         </p:txBody>
@@ -8063,20 +8041,20 @@
         </p:nvSpPr>
         <p:spPr>
           <a:xfrm>
-            <a:off x="315045" y="205979"/>
-            <a:ext cx="8529278" cy="857250"/>
-          </a:xfrm>
-        </p:spPr>
-        <p:txBody>
-          <a:bodyPr/>
-          <a:lstStyle/>
-          <a:p>
-            <a:pPr lvl="0" indent="0" marL="0">
-              <a:buNone/>
-            </a:pPr>
-            <a:r>
-              <a:rPr/>
-              <a:t>Jejunostomy Video</a:t>
+            <a:off x="284309" y="205979"/>
+            <a:ext cx="8552330" cy="662317"/>
+          </a:xfrm>
+        </p:spPr>
+        <p:txBody>
+          <a:bodyPr/>
+          <a:lstStyle/>
+          <a:p>
+            <a:pPr lvl="0" indent="0" marL="0">
+              <a:buNone/>
+            </a:pPr>
+            <a:r>
+              <a:rPr/>
+              <a:t>Jejunostomy Feeds with Diabetes</a:t>
             </a:r>
           </a:p>
         </p:txBody>
@@ -8088,7 +8066,7 @@
             <a:spLocks noGrp="1"/>
           </p:cNvSpPr>
           <p:nvPr>
-            <p:ph idx="1" sz="half"/>
+            <p:ph idx="1"/>
           </p:nvPr>
         </p:nvSpPr>
         <p:spPr/>
@@ -8101,41 +8079,55 @@
             </a:pPr>
             <a:r>
               <a:rPr/>
-              <a:t>A video is available to help become familiar with the feeding jejunostomy</a:t>
-            </a:r>
-          </a:p>
-        </p:txBody>
-      </p:sp>
-      <p:pic>
-        <p:nvPicPr>
-          <p:cNvPr descr="images/nutrition_jejunostomy_qrcode.png" id="0" name="Picture 1"/>
-          <p:cNvPicPr>
-            <a:picLocks noGrp="1" noChangeAspect="1"/>
-          </p:cNvPicPr>
-          <p:nvPr/>
-        </p:nvPicPr>
-        <p:blipFill>
-          <a:blip r:embed="rId2"/>
-          <a:stretch>
-            <a:fillRect/>
-          </a:stretch>
-        </p:blipFill>
-        <p:spPr bwMode="auto">
-          <a:xfrm>
-            <a:off x="5067300" y="1193800"/>
-            <a:ext cx="3327400" cy="3733800"/>
-          </a:xfrm>
-          <a:prstGeom prst="rect">
-            <a:avLst/>
-          </a:prstGeom>
-          <a:noFill/>
-          <a:ln w="9525">
-            <a:noFill/>
-            <a:headEnd/>
-            <a:tailEnd/>
-          </a:ln>
-        </p:spPr>
-      </p:pic>
+              <a:t>Jejunostomy feedings elevate blood sugars</a:t>
+            </a:r>
+          </a:p>
+          <a:p>
+            <a:pPr lvl="0"/>
+            <a:r>
+              <a:rPr/>
+              <a:t>Insulin may be required along with feeds</a:t>
+            </a:r>
+          </a:p>
+          <a:p>
+            <a:pPr lvl="0" indent="0" marL="0">
+              <a:buNone/>
+            </a:pPr>
+            <a:r>
+              <a:rPr/>
+              <a:t>Typical Pattern for tube feeds</a:t>
+            </a:r>
+          </a:p>
+          <a:p>
+            <a:pPr lvl="0"/>
+            <a:r>
+              <a:rPr/>
+              <a:t>Feeds run via pump from 6pm to 10am</a:t>
+            </a:r>
+          </a:p>
+          <a:p>
+            <a:pPr lvl="0"/>
+            <a:r>
+              <a:rPr/>
+              <a:t>Insulin at 6pm (70/30 insulin)</a:t>
+            </a:r>
+          </a:p>
+          <a:p>
+            <a:pPr lvl="0"/>
+            <a:r>
+              <a:rPr/>
+              <a:t>Insulin at Midnight (70/30 insulin)</a:t>
+            </a:r>
+          </a:p>
+          <a:p>
+            <a:pPr lvl="0"/>
+            <a:r>
+              <a:rPr/>
+              <a:t>No insulin if tube feedings are not run</a:t>
+            </a:r>
+          </a:p>
+        </p:txBody>
+      </p:sp>
     </p:spTree>
   </p:cSld>
 </p:sld>
@@ -8170,20 +8162,20 @@
         </p:nvSpPr>
         <p:spPr>
           <a:xfrm>
-            <a:off x="284309" y="205979"/>
-            <a:ext cx="8552330" cy="662317"/>
-          </a:xfrm>
-        </p:spPr>
-        <p:txBody>
-          <a:bodyPr/>
-          <a:lstStyle/>
-          <a:p>
-            <a:pPr lvl="0" indent="0" marL="0">
-              <a:buNone/>
-            </a:pPr>
-            <a:r>
-              <a:rPr/>
-              <a:t>Activity after Surgery</a:t>
+            <a:off x="315045" y="205979"/>
+            <a:ext cx="8529278" cy="857250"/>
+          </a:xfrm>
+        </p:spPr>
+        <p:txBody>
+          <a:bodyPr/>
+          <a:lstStyle/>
+          <a:p>
+            <a:pPr lvl="0" indent="0" marL="0">
+              <a:buNone/>
+            </a:pPr>
+            <a:r>
+              <a:rPr/>
+              <a:t>Jejunostomy Video</a:t>
             </a:r>
           </a:p>
         </p:txBody>
@@ -8195,7 +8187,7 @@
             <a:spLocks noGrp="1"/>
           </p:cNvSpPr>
           <p:nvPr>
-            <p:ph idx="1"/>
+            <p:ph idx="1" sz="half"/>
           </p:nvPr>
         </p:nvSpPr>
         <p:spPr/>
@@ -8203,48 +8195,155 @@
           <a:bodyPr/>
           <a:lstStyle/>
           <a:p>
-            <a:pPr lvl="0"/>
-            <a:r>
-              <a:rPr/>
-              <a:t>Up in chair most of the day</a:t>
-            </a:r>
-          </a:p>
-          <a:p>
-            <a:pPr lvl="0"/>
-            <a:r>
-              <a:rPr/>
-              <a:t>Walking with help from nurse/Physical Therapist</a:t>
-            </a:r>
-          </a:p>
-          <a:p>
-            <a:pPr lvl="0"/>
-            <a:r>
-              <a:rPr/>
-              <a:t>Goals:</a:t>
-            </a:r>
-          </a:p>
-          <a:p>
-            <a:pPr lvl="1"/>
-            <a:r>
-              <a:rPr/>
-              <a:t>Improve lung function</a:t>
-            </a:r>
-          </a:p>
-          <a:p>
-            <a:pPr lvl="1"/>
-            <a:r>
-              <a:rPr/>
-              <a:t>Prevent muscle loss</a:t>
-            </a:r>
-          </a:p>
-        </p:txBody>
-      </p:sp>
+            <a:pPr lvl="0" indent="0" marL="0">
+              <a:buNone/>
+            </a:pPr>
+            <a:r>
+              <a:rPr/>
+              <a:t>A video is available to help become familiar with the feeding jejunostomy</a:t>
+            </a:r>
+          </a:p>
+        </p:txBody>
+      </p:sp>
+      <p:pic>
+        <p:nvPicPr>
+          <p:cNvPr descr="images/nutrition_jejunostomy_qrcode.png" id="0" name="Picture 1"/>
+          <p:cNvPicPr>
+            <a:picLocks noGrp="1" noChangeAspect="1"/>
+          </p:cNvPicPr>
+          <p:nvPr/>
+        </p:nvPicPr>
+        <p:blipFill>
+          <a:blip r:embed="rId2"/>
+          <a:stretch>
+            <a:fillRect/>
+          </a:stretch>
+        </p:blipFill>
+        <p:spPr bwMode="auto">
+          <a:xfrm>
+            <a:off x="5067300" y="1193800"/>
+            <a:ext cx="3327400" cy="3733800"/>
+          </a:xfrm>
+          <a:prstGeom prst="rect">
+            <a:avLst/>
+          </a:prstGeom>
+          <a:noFill/>
+          <a:ln w="9525">
+            <a:noFill/>
+            <a:headEnd/>
+            <a:tailEnd/>
+          </a:ln>
+        </p:spPr>
+      </p:pic>
     </p:spTree>
   </p:cSld>
 </p:sld>
 </file>
 
 <file path=ppt/slides/slide46.xml><?xml version="1.0" encoding="utf-8"?>
+<p:sld xmlns:a="http://schemas.openxmlformats.org/drawingml/2006/main" xmlns:r="http://schemas.openxmlformats.org/officeDocument/2006/relationships" xmlns:p="http://schemas.openxmlformats.org/presentationml/2006/main">
+  <p:cSld>
+    <p:spTree>
+      <p:nvGrpSpPr>
+        <p:cNvPr id="1" name=""/>
+        <p:cNvGrpSpPr/>
+        <p:nvPr/>
+      </p:nvGrpSpPr>
+      <p:grpSpPr>
+        <a:xfrm>
+          <a:off x="0" y="0"/>
+          <a:ext cx="0" cy="0"/>
+          <a:chOff x="0" y="0"/>
+          <a:chExt cx="0" cy="0"/>
+        </a:xfrm>
+      </p:grpSpPr>
+      <p:sp>
+        <p:nvSpPr>
+          <p:cNvPr id="2" name="Title 1"/>
+          <p:cNvSpPr>
+            <a:spLocks noGrp="1"/>
+          </p:cNvSpPr>
+          <p:nvPr>
+            <p:ph type="title"/>
+          </p:nvPr>
+        </p:nvSpPr>
+        <p:spPr>
+          <a:xfrm>
+            <a:off x="284309" y="205979"/>
+            <a:ext cx="8552330" cy="662317"/>
+          </a:xfrm>
+        </p:spPr>
+        <p:txBody>
+          <a:bodyPr/>
+          <a:lstStyle/>
+          <a:p>
+            <a:pPr lvl="0" indent="0" marL="0">
+              <a:buNone/>
+            </a:pPr>
+            <a:r>
+              <a:rPr/>
+              <a:t>Activity after Surgery</a:t>
+            </a:r>
+          </a:p>
+        </p:txBody>
+      </p:sp>
+      <p:sp>
+        <p:nvSpPr>
+          <p:cNvPr id="3" name="Content Placeholder 2"/>
+          <p:cNvSpPr>
+            <a:spLocks noGrp="1"/>
+          </p:cNvSpPr>
+          <p:nvPr>
+            <p:ph idx="1"/>
+          </p:nvPr>
+        </p:nvSpPr>
+        <p:spPr/>
+        <p:txBody>
+          <a:bodyPr/>
+          <a:lstStyle/>
+          <a:p>
+            <a:pPr lvl="0"/>
+            <a:r>
+              <a:rPr/>
+              <a:t>Up in chair most of the day</a:t>
+            </a:r>
+          </a:p>
+          <a:p>
+            <a:pPr lvl="0"/>
+            <a:r>
+              <a:rPr/>
+              <a:t>Walking with help from nurse/Physical Therapist</a:t>
+            </a:r>
+          </a:p>
+          <a:p>
+            <a:pPr lvl="0"/>
+            <a:r>
+              <a:rPr/>
+              <a:t>Goals:</a:t>
+            </a:r>
+          </a:p>
+          <a:p>
+            <a:pPr lvl="1"/>
+            <a:r>
+              <a:rPr/>
+              <a:t>Improve lung function</a:t>
+            </a:r>
+          </a:p>
+          <a:p>
+            <a:pPr lvl="1"/>
+            <a:r>
+              <a:rPr/>
+              <a:t>Prevent muscle loss</a:t>
+            </a:r>
+          </a:p>
+        </p:txBody>
+      </p:sp>
+    </p:spTree>
+  </p:cSld>
+</p:sld>
+</file>
+
+<file path=ppt/slides/slide47.xml><?xml version="1.0" encoding="utf-8"?>
 <p:sld xmlns:a="http://schemas.openxmlformats.org/drawingml/2006/main" xmlns:r="http://schemas.openxmlformats.org/officeDocument/2006/relationships" xmlns:p="http://schemas.openxmlformats.org/presentationml/2006/main">
   <p:cSld>
     <p:spTree>
@@ -8376,7 +8475,7 @@
 </p:sld>
 </file>
 
-<file path=ppt/slides/slide47.xml><?xml version="1.0" encoding="utf-8"?>
+<file path=ppt/slides/slide48.xml><?xml version="1.0" encoding="utf-8"?>
 <p:sld xmlns:a="http://schemas.openxmlformats.org/drawingml/2006/main" xmlns:r="http://schemas.openxmlformats.org/officeDocument/2006/relationships" xmlns:p="http://schemas.openxmlformats.org/presentationml/2006/main">
   <p:cSld>
     <p:spTree>
@@ -8501,92 +8600,6 @@
 </p:sld>
 </file>
 
-<file path=ppt/slides/slide48.xml><?xml version="1.0" encoding="utf-8"?>
-<p:sld xmlns:a="http://schemas.openxmlformats.org/drawingml/2006/main" xmlns:r="http://schemas.openxmlformats.org/officeDocument/2006/relationships" xmlns:p="http://schemas.openxmlformats.org/presentationml/2006/main">
-  <p:cSld>
-    <p:spTree>
-      <p:nvGrpSpPr>
-        <p:cNvPr id="1" name=""/>
-        <p:cNvGrpSpPr/>
-        <p:nvPr/>
-      </p:nvGrpSpPr>
-      <p:grpSpPr>
-        <a:xfrm>
-          <a:off x="0" y="0"/>
-          <a:ext cx="0" cy="0"/>
-          <a:chOff x="0" y="0"/>
-          <a:chExt cx="0" cy="0"/>
-        </a:xfrm>
-      </p:grpSpPr>
-      <p:sp>
-        <p:nvSpPr>
-          <p:cNvPr id="2" name="Title 1"/>
-          <p:cNvSpPr>
-            <a:spLocks noGrp="1"/>
-          </p:cNvSpPr>
-          <p:nvPr>
-            <p:ph type="title"/>
-          </p:nvPr>
-        </p:nvSpPr>
-        <p:spPr>
-          <a:xfrm>
-            <a:off x="284309" y="205979"/>
-            <a:ext cx="8552330" cy="662317"/>
-          </a:xfrm>
-        </p:spPr>
-        <p:txBody>
-          <a:bodyPr/>
-          <a:lstStyle/>
-          <a:p>
-            <a:pPr lvl="0" indent="0" marL="0">
-              <a:buNone/>
-            </a:pPr>
-            <a:r>
-              <a:rPr/>
-              <a:t>Jejunostomy tube</a:t>
-            </a:r>
-          </a:p>
-        </p:txBody>
-      </p:sp>
-      <p:sp>
-        <p:nvSpPr>
-          <p:cNvPr id="3" name="Content Placeholder 2"/>
-          <p:cNvSpPr>
-            <a:spLocks noGrp="1"/>
-          </p:cNvSpPr>
-          <p:nvPr>
-            <p:ph idx="1"/>
-          </p:nvPr>
-        </p:nvSpPr>
-        <p:spPr/>
-        <p:txBody>
-          <a:bodyPr/>
-          <a:lstStyle/>
-          <a:p>
-            <a:pPr lvl="0" indent="0" marL="0">
-              <a:buNone/>
-            </a:pPr>
-            <a:r>
-              <a:rPr/>
-              <a:t>Jejunostomy tube bypasses the stomach and injects tube feeding formula directly in to the small intestine (jejunum)</a:t>
-            </a:r>
-          </a:p>
-          <a:p>
-            <a:pPr lvl="0" indent="0" marL="0">
-              <a:buNone/>
-            </a:pPr>
-            <a:r>
-              <a:rPr/>
-              <a:t>Pump administers the feedings slowly over hours</a:t>
-            </a:r>
-          </a:p>
-        </p:txBody>
-      </p:sp>
-    </p:spTree>
-  </p:cSld>
-</p:sld>
-</file>
-
 <file path=ppt/slides/slide49.xml><?xml version="1.0" encoding="utf-8"?>
 <p:sld xmlns:a="http://schemas.openxmlformats.org/drawingml/2006/main" xmlns:r="http://schemas.openxmlformats.org/officeDocument/2006/relationships" xmlns:p="http://schemas.openxmlformats.org/presentationml/2006/main">
   <p:cSld>
@@ -8629,7 +8642,7 @@
             </a:pPr>
             <a:r>
               <a:rPr/>
-              <a:t>Jejunostomy feeding</a:t>
+              <a:t>Jejunostomy tube</a:t>
             </a:r>
           </a:p>
         </p:txBody>
@@ -8649,35 +8662,21 @@
           <a:bodyPr/>
           <a:lstStyle/>
           <a:p>
-            <a:pPr lvl="0"/>
-            <a:r>
-              <a:rPr/>
-              <a:t>Start with continuous feeds (24 hours/day)</a:t>
-            </a:r>
-          </a:p>
-          <a:p>
-            <a:pPr lvl="0"/>
-            <a:r>
-              <a:rPr/>
-              <a:t>Convert to nocturnal (night-time): 6pm to 10pm</a:t>
-            </a:r>
-          </a:p>
-          <a:p>
-            <a:pPr lvl="0" indent="0" marL="0">
-              <a:buNone/>
-            </a:pPr>
-            <a:r>
-              <a:rPr/>
-              <a:t>The feeding bag holds only 4 cartons of feeds - May need to “top off’ bag after a few hours</a:t>
-            </a:r>
-          </a:p>
-          <a:p>
-            <a:pPr lvl="0" indent="0" marL="0">
-              <a:buNone/>
-            </a:pPr>
-            <a:r>
-              <a:rPr/>
-              <a:t>Water through the tube - Important to prevent dehydration - 250mL (8 oz) 4 times per day</a:t>
+            <a:pPr lvl="0" indent="0" marL="0">
+              <a:buNone/>
+            </a:pPr>
+            <a:r>
+              <a:rPr/>
+              <a:t>Jejunostomy tube bypasses the stomach and injects tube feeding formula directly in to the small intestine (jejunum)</a:t>
+            </a:r>
+          </a:p>
+          <a:p>
+            <a:pPr lvl="0" indent="0" marL="0">
+              <a:buNone/>
+            </a:pPr>
+            <a:r>
+              <a:rPr/>
+              <a:t>Pump administers the feedings slowly over hours</a:t>
             </a:r>
           </a:p>
         </p:txBody>
@@ -8847,7 +8846,7 @@
             </a:pPr>
             <a:r>
               <a:rPr/>
-              <a:t>Oral Intake at Home</a:t>
+              <a:t>Jejunostomy feeding</a:t>
             </a:r>
           </a:p>
         </p:txBody>
@@ -8867,36 +8866,35 @@
           <a:bodyPr/>
           <a:lstStyle/>
           <a:p>
-            <a:pPr lvl="0" indent="0" marL="0">
-              <a:buNone/>
-            </a:pPr>
-            <a:r>
-              <a:rPr/>
-              <a:t>Most are taking protein shakes when they go home</a:t>
-            </a:r>
-          </a:p>
-          <a:p>
-            <a:pPr lvl="0" indent="0" marL="0">
-              <a:buNone/>
-            </a:pPr>
-            <a:r>
-              <a:rPr/>
-              <a:t>Protein shakes are started after tolerating water</a:t>
-            </a:r>
-            <a:br/>
-          </a:p>
-          <a:p>
-            <a:pPr lvl="0"/>
-            <a:r>
-              <a:rPr/>
-              <a:t>2 oz per hour to start</a:t>
-            </a:r>
-          </a:p>
-          <a:p>
-            <a:pPr lvl="0"/>
-            <a:r>
-              <a:rPr/>
-              <a:t>4 oz per hour if 2oz are tolerated well</a:t>
+            <a:pPr lvl="0"/>
+            <a:r>
+              <a:rPr/>
+              <a:t>Start with continuous feeds (24 hours/day)</a:t>
+            </a:r>
+          </a:p>
+          <a:p>
+            <a:pPr lvl="0"/>
+            <a:r>
+              <a:rPr/>
+              <a:t>Convert to nocturnal (night-time): 6pm to 10pm</a:t>
+            </a:r>
+          </a:p>
+          <a:p>
+            <a:pPr lvl="0" indent="0" marL="0">
+              <a:buNone/>
+            </a:pPr>
+            <a:r>
+              <a:rPr/>
+              <a:t>The feeding bag holds only 4 cartons of feeds - May need to “top off’ bag after a few hours</a:t>
+            </a:r>
+          </a:p>
+          <a:p>
+            <a:pPr lvl="0" indent="0" marL="0">
+              <a:buNone/>
+            </a:pPr>
+            <a:r>
+              <a:rPr/>
+              <a:t>Water through the tube - Important to prevent dehydration - 250mL (8 oz) 4 times per day</a:t>
             </a:r>
           </a:p>
         </p:txBody>
@@ -8948,7 +8946,7 @@
             </a:pPr>
             <a:r>
               <a:rPr/>
-              <a:t>Drains and Tubes</a:t>
+              <a:t>Oral Intake at Home</a:t>
             </a:r>
           </a:p>
         </p:txBody>
@@ -8973,7 +8971,31 @@
             </a:pPr>
             <a:r>
               <a:rPr/>
-              <a:t>Chest Tube (right side): Removed 4-6 days after surgery (depending upon output) Abdomiaal drains: Removed 4-7 days after surgery Discharge with 1 abdominal drain in 10% of cases Epidural catheter: Removed 4-5 days after surgery Bladder catheter: Removed after epicura catheter removed</a:t>
+              <a:t>Most are taking protein shakes when they go home</a:t>
+            </a:r>
+          </a:p>
+          <a:p>
+            <a:pPr lvl="0" indent="0" marL="0">
+              <a:buNone/>
+            </a:pPr>
+            <a:r>
+              <a:rPr/>
+              <a:t>Protein shakes are started after tolerating water</a:t>
+            </a:r>
+            <a:br/>
+          </a:p>
+          <a:p>
+            <a:pPr lvl="0"/>
+            <a:r>
+              <a:rPr/>
+              <a:t>2 oz per hour to start</a:t>
+            </a:r>
+          </a:p>
+          <a:p>
+            <a:pPr lvl="0"/>
+            <a:r>
+              <a:rPr/>
+              <a:t>4 oz per hour if 2oz are tolerated well</a:t>
             </a:r>
           </a:p>
         </p:txBody>
@@ -9025,7 +9047,7 @@
             </a:pPr>
             <a:r>
               <a:rPr/>
-              <a:t>Discharge</a:t>
+              <a:t>Drains and Tubes</a:t>
             </a:r>
           </a:p>
         </p:txBody>
@@ -9050,49 +9072,7 @@
             </a:pPr>
             <a:r>
               <a:rPr/>
-              <a:t>Goal: ready to leave day #7 after surgery</a:t>
-            </a:r>
-          </a:p>
-          <a:p>
-            <a:pPr lvl="0"/>
-            <a:r>
-              <a:rPr/>
-              <a:t>Night-time tube feedings (6pm to 10am)</a:t>
-            </a:r>
-          </a:p>
-          <a:p>
-            <a:pPr lvl="0"/>
-            <a:r>
-              <a:rPr/>
-              <a:t>Nutrition by mouth (90% of patients)</a:t>
-            </a:r>
-          </a:p>
-          <a:p>
-            <a:pPr lvl="1"/>
-            <a:r>
-              <a:rPr/>
-              <a:t>Protein shakes or water 4oz every 2 hours</a:t>
-            </a:r>
-          </a:p>
-          <a:p>
-            <a:pPr lvl="0"/>
-            <a:r>
-              <a:rPr/>
-              <a:t>Water through tube 8oz four times per day</a:t>
-            </a:r>
-          </a:p>
-          <a:p>
-            <a:pPr lvl="0"/>
-            <a:r>
-              <a:rPr/>
-              <a:t>Home care nursing (feeding tube teaching)</a:t>
-            </a:r>
-          </a:p>
-          <a:p>
-            <a:pPr lvl="0"/>
-            <a:r>
-              <a:rPr/>
-              <a:t>Home infusion (tube feeding supplies)</a:t>
+              <a:t>Chest Tube (right side): Removed 4-6 days after surgery (depending upon output) Abdomiaal drains: Removed 4-7 days after surgery Discharge with 1 abdominal drain in 10% of cases Epidural catheter: Removed 4-5 days after surgery Bladder catheter: Removed after epicura catheter removed</a:t>
             </a:r>
           </a:p>
         </p:txBody>
@@ -9144,7 +9124,7 @@
             </a:pPr>
             <a:r>
               <a:rPr/>
-              <a:t>Nutrition after Surgery</a:t>
+              <a:t>Discharge</a:t>
             </a:r>
           </a:p>
         </p:txBody>
@@ -9169,55 +9149,49 @@
             </a:pPr>
             <a:r>
               <a:rPr/>
-              <a:t>At discharge home:</a:t>
-            </a:r>
-          </a:p>
-          <a:p>
-            <a:pPr lvl="0"/>
-            <a:r>
-              <a:rPr/>
-              <a:t>Protein shakes 4oz every 2 hrs</a:t>
-            </a:r>
-          </a:p>
-          <a:p>
-            <a:pPr lvl="0"/>
-            <a:r>
-              <a:rPr/>
-              <a:t>Tube feeds 4-5 cans at night (6pm-10am)</a:t>
-            </a:r>
-          </a:p>
-          <a:p>
-            <a:pPr lvl="0" indent="0" marL="0">
-              <a:buNone/>
-            </a:pPr>
-            <a:r>
-              <a:rPr/>
-              <a:t>10-12 Days: Increase protein shakes</a:t>
-            </a:r>
-          </a:p>
-          <a:p>
-            <a:pPr lvl="0"/>
-            <a:r>
-              <a:rPr/>
-              <a:t>Tube feeds 3-4 cans at night</a:t>
-            </a:r>
-          </a:p>
-          <a:p>
-            <a:pPr lvl="0" indent="0" marL="0">
-              <a:buNone/>
-            </a:pPr>
-            <a:r>
-              <a:rPr/>
-              <a:t>Three weeks: Post-esophagectomy Diet</a:t>
-            </a:r>
-          </a:p>
-          <a:p>
-            <a:pPr lvl="0" indent="0" marL="0">
-              <a:buNone/>
-            </a:pPr>
-            <a:r>
-              <a:rPr/>
-              <a:t>8-12 weeks: Remove feeding tube (in office)</a:t>
+              <a:t>Goal: ready to leave day #7 after surgery</a:t>
+            </a:r>
+          </a:p>
+          <a:p>
+            <a:pPr lvl="0"/>
+            <a:r>
+              <a:rPr/>
+              <a:t>Night-time tube feedings (6pm to 10am)</a:t>
+            </a:r>
+          </a:p>
+          <a:p>
+            <a:pPr lvl="0"/>
+            <a:r>
+              <a:rPr/>
+              <a:t>Nutrition by mouth (90% of patients)</a:t>
+            </a:r>
+          </a:p>
+          <a:p>
+            <a:pPr lvl="1"/>
+            <a:r>
+              <a:rPr/>
+              <a:t>Protein shakes or water 4oz every 2 hours</a:t>
+            </a:r>
+          </a:p>
+          <a:p>
+            <a:pPr lvl="0"/>
+            <a:r>
+              <a:rPr/>
+              <a:t>Water through tube 8oz four times per day</a:t>
+            </a:r>
+          </a:p>
+          <a:p>
+            <a:pPr lvl="0"/>
+            <a:r>
+              <a:rPr/>
+              <a:t>Home care nursing (feeding tube teaching)</a:t>
+            </a:r>
+          </a:p>
+          <a:p>
+            <a:pPr lvl="0"/>
+            <a:r>
+              <a:rPr/>
+              <a:t>Home infusion (tube feeding supplies)</a:t>
             </a:r>
           </a:p>
         </p:txBody>
@@ -9228,6 +9202,131 @@
 </file>
 
 <file path=ppt/slides/slide54.xml><?xml version="1.0" encoding="utf-8"?>
+<p:sld xmlns:a="http://schemas.openxmlformats.org/drawingml/2006/main" xmlns:r="http://schemas.openxmlformats.org/officeDocument/2006/relationships" xmlns:p="http://schemas.openxmlformats.org/presentationml/2006/main">
+  <p:cSld>
+    <p:spTree>
+      <p:nvGrpSpPr>
+        <p:cNvPr id="1" name=""/>
+        <p:cNvGrpSpPr/>
+        <p:nvPr/>
+      </p:nvGrpSpPr>
+      <p:grpSpPr>
+        <a:xfrm>
+          <a:off x="0" y="0"/>
+          <a:ext cx="0" cy="0"/>
+          <a:chOff x="0" y="0"/>
+          <a:chExt cx="0" cy="0"/>
+        </a:xfrm>
+      </p:grpSpPr>
+      <p:sp>
+        <p:nvSpPr>
+          <p:cNvPr id="2" name="Title 1"/>
+          <p:cNvSpPr>
+            <a:spLocks noGrp="1"/>
+          </p:cNvSpPr>
+          <p:nvPr>
+            <p:ph type="title"/>
+          </p:nvPr>
+        </p:nvSpPr>
+        <p:spPr>
+          <a:xfrm>
+            <a:off x="284309" y="205979"/>
+            <a:ext cx="8552330" cy="662317"/>
+          </a:xfrm>
+        </p:spPr>
+        <p:txBody>
+          <a:bodyPr/>
+          <a:lstStyle/>
+          <a:p>
+            <a:pPr lvl="0" indent="0" marL="0">
+              <a:buNone/>
+            </a:pPr>
+            <a:r>
+              <a:rPr/>
+              <a:t>Nutrition after Surgery</a:t>
+            </a:r>
+          </a:p>
+        </p:txBody>
+      </p:sp>
+      <p:sp>
+        <p:nvSpPr>
+          <p:cNvPr id="3" name="Content Placeholder 2"/>
+          <p:cNvSpPr>
+            <a:spLocks noGrp="1"/>
+          </p:cNvSpPr>
+          <p:nvPr>
+            <p:ph idx="1"/>
+          </p:nvPr>
+        </p:nvSpPr>
+        <p:spPr/>
+        <p:txBody>
+          <a:bodyPr/>
+          <a:lstStyle/>
+          <a:p>
+            <a:pPr lvl="0" indent="0" marL="0">
+              <a:buNone/>
+            </a:pPr>
+            <a:r>
+              <a:rPr/>
+              <a:t>At discharge home:</a:t>
+            </a:r>
+          </a:p>
+          <a:p>
+            <a:pPr lvl="0"/>
+            <a:r>
+              <a:rPr/>
+              <a:t>Protein shakes 4oz every 2 hrs</a:t>
+            </a:r>
+          </a:p>
+          <a:p>
+            <a:pPr lvl="0"/>
+            <a:r>
+              <a:rPr/>
+              <a:t>Tube feeds 4-5 cans at night (6pm-10am)</a:t>
+            </a:r>
+          </a:p>
+          <a:p>
+            <a:pPr lvl="0" indent="0" marL="0">
+              <a:buNone/>
+            </a:pPr>
+            <a:r>
+              <a:rPr/>
+              <a:t>10-12 Days: Increase protein shakes</a:t>
+            </a:r>
+          </a:p>
+          <a:p>
+            <a:pPr lvl="0"/>
+            <a:r>
+              <a:rPr/>
+              <a:t>Tube feeds 3-4 cans at night</a:t>
+            </a:r>
+          </a:p>
+          <a:p>
+            <a:pPr lvl="0" indent="0" marL="0">
+              <a:buNone/>
+            </a:pPr>
+            <a:r>
+              <a:rPr/>
+              <a:t>Three weeks: Post-esophagectomy Diet</a:t>
+            </a:r>
+          </a:p>
+          <a:p>
+            <a:pPr lvl="0" indent="0" marL="0">
+              <a:buNone/>
+            </a:pPr>
+            <a:r>
+              <a:rPr/>
+              <a:t>8-12 weeks: Remove feeding tube (in office)</a:t>
+            </a:r>
+          </a:p>
+        </p:txBody>
+      </p:sp>
+    </p:spTree>
+  </p:cSld>
+</p:sld>
+</file>
+
+<file path=ppt/slides/slide55.xml><?xml version="1.0" encoding="utf-8"?>
 <p:sld xmlns:a="http://schemas.openxmlformats.org/drawingml/2006/main" xmlns:r="http://schemas.openxmlformats.org/officeDocument/2006/relationships" xmlns:p="http://schemas.openxmlformats.org/presentationml/2006/main">
   <p:cSld>
     <p:spTree>
@@ -9384,130 +9483,6 @@
 </p:sld>
 </file>
 
-<file path=ppt/slides/slide55.xml><?xml version="1.0" encoding="utf-8"?>
-<p:sld xmlns:a="http://schemas.openxmlformats.org/drawingml/2006/main" xmlns:r="http://schemas.openxmlformats.org/officeDocument/2006/relationships" xmlns:p="http://schemas.openxmlformats.org/presentationml/2006/main">
-  <p:cSld>
-    <p:spTree>
-      <p:nvGrpSpPr>
-        <p:cNvPr id="1" name=""/>
-        <p:cNvGrpSpPr/>
-        <p:nvPr/>
-      </p:nvGrpSpPr>
-      <p:grpSpPr>
-        <a:xfrm>
-          <a:off x="0" y="0"/>
-          <a:ext cx="0" cy="0"/>
-          <a:chOff x="0" y="0"/>
-          <a:chExt cx="0" cy="0"/>
-        </a:xfrm>
-      </p:grpSpPr>
-      <p:sp>
-        <p:nvSpPr>
-          <p:cNvPr id="2" name="Title 1"/>
-          <p:cNvSpPr>
-            <a:spLocks noGrp="1"/>
-          </p:cNvSpPr>
-          <p:nvPr>
-            <p:ph type="title"/>
-          </p:nvPr>
-        </p:nvSpPr>
-        <p:spPr>
-          <a:xfrm>
-            <a:off x="284309" y="205979"/>
-            <a:ext cx="8552330" cy="662317"/>
-          </a:xfrm>
-        </p:spPr>
-        <p:txBody>
-          <a:bodyPr/>
-          <a:lstStyle/>
-          <a:p>
-            <a:pPr lvl="0" indent="0" marL="0">
-              <a:buNone/>
-            </a:pPr>
-            <a:r>
-              <a:rPr/>
-              <a:t>Post-esophagectomy Diet</a:t>
-            </a:r>
-          </a:p>
-        </p:txBody>
-      </p:sp>
-      <p:sp>
-        <p:nvSpPr>
-          <p:cNvPr id="3" name="Content Placeholder 2"/>
-          <p:cNvSpPr>
-            <a:spLocks noGrp="1"/>
-          </p:cNvSpPr>
-          <p:nvPr>
-            <p:ph idx="1"/>
-          </p:nvPr>
-        </p:nvSpPr>
-        <p:spPr/>
-        <p:txBody>
-          <a:bodyPr/>
-          <a:lstStyle/>
-          <a:p>
-            <a:pPr lvl="0"/>
-            <a:r>
-              <a:rPr/>
-              <a:t>Soft Consistency</a:t>
-            </a:r>
-          </a:p>
-          <a:p>
-            <a:pPr lvl="0"/>
-            <a:r>
-              <a:rPr/>
-              <a:t>High Protein</a:t>
-            </a:r>
-          </a:p>
-          <a:p>
-            <a:pPr lvl="0"/>
-            <a:r>
-              <a:rPr/>
-              <a:t>Avoid sugary liquids (can cause ‘dumping’)</a:t>
-            </a:r>
-          </a:p>
-          <a:p>
-            <a:pPr lvl="0"/>
-            <a:r>
-              <a:rPr/>
-              <a:t>Avoid raw vegetables (and salads)</a:t>
-            </a:r>
-          </a:p>
-          <a:p>
-            <a:pPr lvl="0"/>
-            <a:r>
-              <a:rPr/>
-              <a:t>Eating</a:t>
-            </a:r>
-          </a:p>
-          <a:p>
-            <a:pPr lvl="1"/>
-            <a:r>
-              <a:rPr/>
-              <a:t>Small, frequent meals</a:t>
-            </a:r>
-          </a:p>
-          <a:p>
-            <a:pPr lvl="1"/>
-            <a:r>
-              <a:rPr/>
-              <a:t>Sit up for 30-45 minutes after eating</a:t>
-            </a:r>
-          </a:p>
-          <a:p>
-            <a:pPr lvl="1"/>
-            <a:r>
-              <a:rPr/>
-              <a:t>Avoid eating within 2 hours of bedtime</a:t>
-            </a:r>
-          </a:p>
-        </p:txBody>
-      </p:sp>
-    </p:spTree>
-  </p:cSld>
-</p:sld>
-</file>
-
 <file path=ppt/slides/slide56.xml><?xml version="1.0" encoding="utf-8"?>
 <p:sld xmlns:a="http://schemas.openxmlformats.org/drawingml/2006/main" xmlns:r="http://schemas.openxmlformats.org/officeDocument/2006/relationships" xmlns:p="http://schemas.openxmlformats.org/presentationml/2006/main">
   <p:cSld>
@@ -9550,7 +9525,7 @@
             </a:pPr>
             <a:r>
               <a:rPr/>
-              <a:t>Medicines at Home - Pain</a:t>
+              <a:t>Post-esophagectomy Diet</a:t>
             </a:r>
           </a:p>
         </p:txBody>
@@ -9570,58 +9545,59 @@
           <a:bodyPr/>
           <a:lstStyle/>
           <a:p>
-            <a:pPr lvl="0" indent="0" marL="0">
-              <a:buNone/>
-            </a:pPr>
-            <a:r>
-              <a:rPr/>
-              <a:t>Acetaminophen (Tylenol) 1000mg 4x/day</a:t>
-            </a:r>
-          </a:p>
-          <a:p>
-            <a:pPr lvl="0" indent="0" marL="0">
-              <a:buNone/>
-            </a:pPr>
-            <a:r>
-              <a:rPr/>
-              <a:t>Gabapentin 300mg 3 times/day</a:t>
-            </a:r>
-          </a:p>
-          <a:p>
-            <a:pPr lvl="0" indent="0" marL="0">
-              <a:buNone/>
-            </a:pPr>
-            <a:r>
-              <a:rPr/>
-              <a:t>Oxycodone</a:t>
-            </a:r>
-          </a:p>
-          <a:p>
-            <a:pPr lvl="0"/>
-            <a:r>
-              <a:rPr/>
-              <a:t>As needed in addition to Tylenol/gabapentin</a:t>
-            </a:r>
-          </a:p>
-          <a:p>
-            <a:pPr lvl="0"/>
-            <a:r>
-              <a:rPr/>
-              <a:t>Will begin reducing dose at first postop visit</a:t>
-            </a:r>
-          </a:p>
-          <a:p>
-            <a:pPr lvl="0"/>
-            <a:r>
-              <a:rPr/>
-              <a:t>Can usually discontinue by 4 weeks</a:t>
-            </a:r>
-          </a:p>
-          <a:p>
-            <a:pPr lvl="0"/>
-            <a:r>
-              <a:rPr/>
-              <a:t>NO DRIVING WHILE ON OXYCODONE</a:t>
+            <a:pPr lvl="0"/>
+            <a:r>
+              <a:rPr/>
+              <a:t>Soft Consistency</a:t>
+            </a:r>
+          </a:p>
+          <a:p>
+            <a:pPr lvl="0"/>
+            <a:r>
+              <a:rPr/>
+              <a:t>High Protein</a:t>
+            </a:r>
+          </a:p>
+          <a:p>
+            <a:pPr lvl="0"/>
+            <a:r>
+              <a:rPr/>
+              <a:t>Avoid sugary liquids (can cause ‘dumping’)</a:t>
+            </a:r>
+          </a:p>
+          <a:p>
+            <a:pPr lvl="0"/>
+            <a:r>
+              <a:rPr/>
+              <a:t>Avoid raw vegetables (and salads)</a:t>
+            </a:r>
+          </a:p>
+          <a:p>
+            <a:pPr lvl="0"/>
+            <a:r>
+              <a:rPr/>
+              <a:t>Eating</a:t>
+            </a:r>
+          </a:p>
+          <a:p>
+            <a:pPr lvl="1"/>
+            <a:r>
+              <a:rPr/>
+              <a:t>Small, frequent meals</a:t>
+            </a:r>
+          </a:p>
+          <a:p>
+            <a:pPr lvl="1"/>
+            <a:r>
+              <a:rPr/>
+              <a:t>Sit up for 30-45 minutes after eating</a:t>
+            </a:r>
+          </a:p>
+          <a:p>
+            <a:pPr lvl="1"/>
+            <a:r>
+              <a:rPr/>
+              <a:t>Avoid eating within 2 hours of bedtime</a:t>
             </a:r>
           </a:p>
         </p:txBody>
@@ -9673,7 +9649,7 @@
             </a:pPr>
             <a:r>
               <a:rPr/>
-              <a:t>Non-steroidals Anti Inflammatory (NSAID)</a:t>
+              <a:t>Medicines at Home - Pain</a:t>
             </a:r>
           </a:p>
         </p:txBody>
@@ -9698,30 +9674,53 @@
             </a:pPr>
             <a:r>
               <a:rPr/>
-              <a:t>Non-steroidal anti-inflammatories (Celebrex)</a:t>
-            </a:r>
-          </a:p>
-          <a:p>
-            <a:pPr lvl="0"/>
-            <a:r>
-              <a:rPr/>
-              <a:t>200 mg every 12 hours starting at 2 weeks</a:t>
-            </a:r>
-          </a:p>
-          <a:p>
-            <a:pPr lvl="0" indent="0" marL="0">
-              <a:buNone/>
-            </a:pPr>
-            <a:r>
-              <a:rPr/>
-              <a:t>NO GOODY POWDERS OR BCs</a:t>
-            </a:r>
-          </a:p>
-          <a:p>
-            <a:pPr lvl="0"/>
-            <a:r>
-              <a:rPr/>
-              <a:t>(Can cause permanent scarring at the surgery site)</a:t>
+              <a:t>Acetaminophen (Tylenol) 1000mg 4x/day</a:t>
+            </a:r>
+          </a:p>
+          <a:p>
+            <a:pPr lvl="0" indent="0" marL="0">
+              <a:buNone/>
+            </a:pPr>
+            <a:r>
+              <a:rPr/>
+              <a:t>Gabapentin 300mg 3 times/day</a:t>
+            </a:r>
+          </a:p>
+          <a:p>
+            <a:pPr lvl="0" indent="0" marL="0">
+              <a:buNone/>
+            </a:pPr>
+            <a:r>
+              <a:rPr/>
+              <a:t>Oxycodone</a:t>
+            </a:r>
+          </a:p>
+          <a:p>
+            <a:pPr lvl="0"/>
+            <a:r>
+              <a:rPr/>
+              <a:t>As needed in addition to Tylenol/gabapentin</a:t>
+            </a:r>
+          </a:p>
+          <a:p>
+            <a:pPr lvl="0"/>
+            <a:r>
+              <a:rPr/>
+              <a:t>Will begin reducing dose at first postop visit</a:t>
+            </a:r>
+          </a:p>
+          <a:p>
+            <a:pPr lvl="0"/>
+            <a:r>
+              <a:rPr/>
+              <a:t>Can usually discontinue by 4 weeks</a:t>
+            </a:r>
+          </a:p>
+          <a:p>
+            <a:pPr lvl="0"/>
+            <a:r>
+              <a:rPr/>
+              <a:t>NO DRIVING WHILE ON OXYCODONE</a:t>
             </a:r>
           </a:p>
         </p:txBody>
@@ -9773,7 +9772,7 @@
             </a:pPr>
             <a:r>
               <a:rPr/>
-              <a:t>Acid Blockers = Proton Pump Inhibitors</a:t>
+              <a:t>Non-steroidals Anti Inflammatory (NSAID)</a:t>
             </a:r>
           </a:p>
         </p:txBody>
@@ -9798,28 +9797,30 @@
             </a:pPr>
             <a:r>
               <a:rPr/>
-              <a:t>Examples include ompeprazole and pantoprazole</a:t>
-            </a:r>
-          </a:p>
-          <a:p>
-            <a:pPr lvl="0"/>
-            <a:r>
-              <a:rPr/>
-              <a:t>Will stay on for at 1-2 years to prevent acid reflux</a:t>
-            </a:r>
-          </a:p>
-          <a:p>
-            <a:pPr lvl="0"/>
-            <a:r>
-              <a:rPr/>
-              <a:t>Important in preventing scarring at anastomosis (new connection between esophagus and stomach)</a:t>
-            </a:r>
-          </a:p>
-          <a:p>
-            <a:pPr lvl="0"/>
-            <a:r>
-              <a:rPr/>
-              <a:t>To administer through feeding tube, open capsule and resuspend beads in 60mL (2oz) of water</a:t>
+              <a:t>Non-steroidal anti-inflammatories (Celebrex)</a:t>
+            </a:r>
+          </a:p>
+          <a:p>
+            <a:pPr lvl="0"/>
+            <a:r>
+              <a:rPr/>
+              <a:t>200 mg every 12 hours starting at 2 weeks</a:t>
+            </a:r>
+          </a:p>
+          <a:p>
+            <a:pPr lvl="0" indent="0" marL="0">
+              <a:buNone/>
+            </a:pPr>
+            <a:r>
+              <a:rPr/>
+              <a:t>NO GOODY POWDERS OR BCs</a:t>
+            </a:r>
+          </a:p>
+          <a:p>
+            <a:pPr lvl="0"/>
+            <a:r>
+              <a:rPr/>
+              <a:t>(Can cause permanent scarring at the surgery site)</a:t>
             </a:r>
           </a:p>
         </p:txBody>
@@ -9871,7 +9872,7 @@
             </a:pPr>
             <a:r>
               <a:rPr/>
-              <a:t>Medicines at Home</a:t>
+              <a:t>Acid Blockers = Proton Pump Inhibitors</a:t>
             </a:r>
           </a:p>
         </p:txBody>
@@ -9896,51 +9897,28 @@
             </a:pPr>
             <a:r>
               <a:rPr/>
-              <a:t>Reglan – Helps stomach empty</a:t>
-            </a:r>
-          </a:p>
-          <a:p>
-            <a:pPr lvl="0"/>
-            <a:r>
-              <a:rPr/>
-              <a:t>Will plan to stop after six weeks</a:t>
-            </a:r>
-          </a:p>
-          <a:p>
-            <a:pPr lvl="0"/>
-            <a:r>
-              <a:rPr/>
-              <a:t>0.1% risk of tardive dyskinesia (nervous tic)</a:t>
-            </a:r>
-          </a:p>
-          <a:p>
-            <a:pPr lvl="0" indent="0" marL="0">
-              <a:buNone/>
-            </a:pPr>
-            <a:r>
-              <a:rPr/>
-              <a:t>Remeron – Helps improve appetite</a:t>
-            </a:r>
-          </a:p>
-          <a:p>
-            <a:pPr lvl="0"/>
-            <a:r>
-              <a:rPr/>
-              <a:t>Can cause vivid dreams</a:t>
-            </a:r>
-          </a:p>
-          <a:p>
-            <a:pPr lvl="0"/>
-            <a:r>
-              <a:rPr/>
-              <a:t>Used for several weeks after surgery</a:t>
-            </a:r>
-          </a:p>
-          <a:p>
-            <a:pPr lvl="0"/>
-            <a:r>
-              <a:rPr/>
-              <a:t>Will stop within first three months of surgery</a:t>
+              <a:t>Examples include ompeprazole and pantoprazole</a:t>
+            </a:r>
+          </a:p>
+          <a:p>
+            <a:pPr lvl="0"/>
+            <a:r>
+              <a:rPr/>
+              <a:t>Will stay on for at 1-2 years to prevent acid reflux</a:t>
+            </a:r>
+          </a:p>
+          <a:p>
+            <a:pPr lvl="0"/>
+            <a:r>
+              <a:rPr/>
+              <a:t>Important in preventing scarring at anastomosis (new connection between esophagus and stomach)</a:t>
+            </a:r>
+          </a:p>
+          <a:p>
+            <a:pPr lvl="0"/>
+            <a:r>
+              <a:rPr/>
+              <a:t>To administer through feeding tube, open capsule and resuspend beads in 60mL (2oz) of water</a:t>
             </a:r>
           </a:p>
         </p:txBody>
@@ -10040,6 +10018,127 @@
 </file>
 
 <file path=ppt/slides/slide60.xml><?xml version="1.0" encoding="utf-8"?>
+<p:sld xmlns:a="http://schemas.openxmlformats.org/drawingml/2006/main" xmlns:r="http://schemas.openxmlformats.org/officeDocument/2006/relationships" xmlns:p="http://schemas.openxmlformats.org/presentationml/2006/main">
+  <p:cSld>
+    <p:spTree>
+      <p:nvGrpSpPr>
+        <p:cNvPr id="1" name=""/>
+        <p:cNvGrpSpPr/>
+        <p:nvPr/>
+      </p:nvGrpSpPr>
+      <p:grpSpPr>
+        <a:xfrm>
+          <a:off x="0" y="0"/>
+          <a:ext cx="0" cy="0"/>
+          <a:chOff x="0" y="0"/>
+          <a:chExt cx="0" cy="0"/>
+        </a:xfrm>
+      </p:grpSpPr>
+      <p:sp>
+        <p:nvSpPr>
+          <p:cNvPr id="2" name="Title 1"/>
+          <p:cNvSpPr>
+            <a:spLocks noGrp="1"/>
+          </p:cNvSpPr>
+          <p:nvPr>
+            <p:ph type="title"/>
+          </p:nvPr>
+        </p:nvSpPr>
+        <p:spPr>
+          <a:xfrm>
+            <a:off x="284309" y="205979"/>
+            <a:ext cx="8552330" cy="662317"/>
+          </a:xfrm>
+        </p:spPr>
+        <p:txBody>
+          <a:bodyPr/>
+          <a:lstStyle/>
+          <a:p>
+            <a:pPr lvl="0" indent="0" marL="0">
+              <a:buNone/>
+            </a:pPr>
+            <a:r>
+              <a:rPr/>
+              <a:t>Medicines at Home</a:t>
+            </a:r>
+          </a:p>
+        </p:txBody>
+      </p:sp>
+      <p:sp>
+        <p:nvSpPr>
+          <p:cNvPr id="3" name="Content Placeholder 2"/>
+          <p:cNvSpPr>
+            <a:spLocks noGrp="1"/>
+          </p:cNvSpPr>
+          <p:nvPr>
+            <p:ph idx="1"/>
+          </p:nvPr>
+        </p:nvSpPr>
+        <p:spPr/>
+        <p:txBody>
+          <a:bodyPr/>
+          <a:lstStyle/>
+          <a:p>
+            <a:pPr lvl="0" indent="0" marL="0">
+              <a:buNone/>
+            </a:pPr>
+            <a:r>
+              <a:rPr/>
+              <a:t>Reglan – Helps stomach empty</a:t>
+            </a:r>
+          </a:p>
+          <a:p>
+            <a:pPr lvl="0"/>
+            <a:r>
+              <a:rPr/>
+              <a:t>Will plan to stop after six weeks</a:t>
+            </a:r>
+          </a:p>
+          <a:p>
+            <a:pPr lvl="0"/>
+            <a:r>
+              <a:rPr/>
+              <a:t>0.1% risk of tardive dyskinesia (nervous tic)</a:t>
+            </a:r>
+          </a:p>
+          <a:p>
+            <a:pPr lvl="0" indent="0" marL="0">
+              <a:buNone/>
+            </a:pPr>
+            <a:r>
+              <a:rPr/>
+              <a:t>Remeron – Helps improve appetite</a:t>
+            </a:r>
+          </a:p>
+          <a:p>
+            <a:pPr lvl="0"/>
+            <a:r>
+              <a:rPr/>
+              <a:t>Can cause vivid dreams</a:t>
+            </a:r>
+          </a:p>
+          <a:p>
+            <a:pPr lvl="0"/>
+            <a:r>
+              <a:rPr/>
+              <a:t>Used for several weeks after surgery</a:t>
+            </a:r>
+          </a:p>
+          <a:p>
+            <a:pPr lvl="0"/>
+            <a:r>
+              <a:rPr/>
+              <a:t>Will stop within first three months of surgery</a:t>
+            </a:r>
+          </a:p>
+        </p:txBody>
+      </p:sp>
+    </p:spTree>
+  </p:cSld>
+</p:sld>
+</file>
+
+<file path=ppt/slides/slide61.xml><?xml version="1.0" encoding="utf-8"?>
 <p:sld xmlns:a="http://schemas.openxmlformats.org/drawingml/2006/main" xmlns:r="http://schemas.openxmlformats.org/officeDocument/2006/relationships" xmlns:p="http://schemas.openxmlformats.org/presentationml/2006/main">
   <p:cSld>
     <p:spTree>
@@ -10168,131 +10267,6 @@
 </p:sld>
 </file>
 
-<file path=ppt/slides/slide61.xml><?xml version="1.0" encoding="utf-8"?>
-<p:sld xmlns:a="http://schemas.openxmlformats.org/drawingml/2006/main" xmlns:r="http://schemas.openxmlformats.org/officeDocument/2006/relationships" xmlns:p="http://schemas.openxmlformats.org/presentationml/2006/main">
-  <p:cSld>
-    <p:spTree>
-      <p:nvGrpSpPr>
-        <p:cNvPr id="1" name=""/>
-        <p:cNvGrpSpPr/>
-        <p:nvPr/>
-      </p:nvGrpSpPr>
-      <p:grpSpPr>
-        <a:xfrm>
-          <a:off x="0" y="0"/>
-          <a:ext cx="0" cy="0"/>
-          <a:chOff x="0" y="0"/>
-          <a:chExt cx="0" cy="0"/>
-        </a:xfrm>
-      </p:grpSpPr>
-      <p:sp>
-        <p:nvSpPr>
-          <p:cNvPr id="2" name="Title 1"/>
-          <p:cNvSpPr>
-            <a:spLocks noGrp="1"/>
-          </p:cNvSpPr>
-          <p:nvPr>
-            <p:ph type="title"/>
-          </p:nvPr>
-        </p:nvSpPr>
-        <p:spPr>
-          <a:xfrm>
-            <a:off x="315045" y="205979"/>
-            <a:ext cx="8529278" cy="857250"/>
-          </a:xfrm>
-        </p:spPr>
-        <p:txBody>
-          <a:bodyPr/>
-          <a:lstStyle/>
-          <a:p>
-            <a:pPr lvl="0" indent="0" marL="0">
-              <a:buNone/>
-            </a:pPr>
-            <a:r>
-              <a:rPr/>
-              <a:t>Sleeping at Home</a:t>
-            </a:r>
-          </a:p>
-        </p:txBody>
-      </p:sp>
-      <p:sp>
-        <p:nvSpPr>
-          <p:cNvPr id="3" name="Content Placeholder 2"/>
-          <p:cNvSpPr>
-            <a:spLocks noGrp="1"/>
-          </p:cNvSpPr>
-          <p:nvPr>
-            <p:ph idx="1" sz="half"/>
-          </p:nvPr>
-        </p:nvSpPr>
-        <p:spPr/>
-        <p:txBody>
-          <a:bodyPr/>
-          <a:lstStyle/>
-          <a:p>
-            <a:pPr lvl="0" indent="0" marL="0">
-              <a:buNone/>
-            </a:pPr>
-            <a:r>
-              <a:rPr/>
-              <a:t>Reflux can occur the first few weeks/months after surgery</a:t>
-            </a:r>
-          </a:p>
-          <a:p>
-            <a:pPr lvl="0" indent="0" marL="0">
-              <a:buNone/>
-            </a:pPr>
-            <a:r>
-              <a:rPr/>
-              <a:t>This improves over the first few months</a:t>
-            </a:r>
-          </a:p>
-          <a:p>
-            <a:pPr lvl="0" indent="0" marL="0">
-              <a:buNone/>
-            </a:pPr>
-            <a:r>
-              <a:rPr/>
-              <a:t>A wedge pillow can be helpful for sleep</a:t>
-            </a:r>
-          </a:p>
-        </p:txBody>
-      </p:sp>
-      <p:pic>
-        <p:nvPicPr>
-          <p:cNvPr descr="images/wedge_pillow_comm.jpg" id="0" name="Picture 1"/>
-          <p:cNvPicPr>
-            <a:picLocks noGrp="1" noChangeAspect="1"/>
-          </p:cNvPicPr>
-          <p:nvPr/>
-        </p:nvPicPr>
-        <p:blipFill>
-          <a:blip r:embed="rId2"/>
-          <a:stretch>
-            <a:fillRect/>
-          </a:stretch>
-        </p:blipFill>
-        <p:spPr bwMode="auto">
-          <a:xfrm>
-            <a:off x="4864100" y="1193800"/>
-            <a:ext cx="3733800" cy="3733800"/>
-          </a:xfrm>
-          <a:prstGeom prst="rect">
-            <a:avLst/>
-          </a:prstGeom>
-          <a:noFill/>
-          <a:ln w="9525">
-            <a:noFill/>
-            <a:headEnd/>
-            <a:tailEnd/>
-          </a:ln>
-        </p:spPr>
-      </p:pic>
-    </p:spTree>
-  </p:cSld>
-</p:sld>
-</file>
-
 <file path=ppt/slides/slide62.xml><?xml version="1.0" encoding="utf-8"?>
 <p:sld xmlns:a="http://schemas.openxmlformats.org/drawingml/2006/main" xmlns:r="http://schemas.openxmlformats.org/officeDocument/2006/relationships" xmlns:p="http://schemas.openxmlformats.org/presentationml/2006/main">
   <p:cSld>
@@ -10322,20 +10296,20 @@
         </p:nvSpPr>
         <p:spPr>
           <a:xfrm>
-            <a:off x="284309" y="205979"/>
-            <a:ext cx="8552330" cy="662317"/>
-          </a:xfrm>
-        </p:spPr>
-        <p:txBody>
-          <a:bodyPr/>
-          <a:lstStyle/>
-          <a:p>
-            <a:pPr lvl="0" indent="0" marL="0">
-              <a:buNone/>
-            </a:pPr>
-            <a:r>
-              <a:rPr/>
-              <a:t>Follow Up Clinic Visit 7-10 days after Discharge</a:t>
+            <a:off x="315045" y="205979"/>
+            <a:ext cx="8529278" cy="857250"/>
+          </a:xfrm>
+        </p:spPr>
+        <p:txBody>
+          <a:bodyPr/>
+          <a:lstStyle/>
+          <a:p>
+            <a:pPr lvl="0" indent="0" marL="0">
+              <a:buNone/>
+            </a:pPr>
+            <a:r>
+              <a:rPr/>
+              <a:t>Sleeping at Home</a:t>
             </a:r>
           </a:p>
         </p:txBody>
@@ -10347,7 +10321,7 @@
             <a:spLocks noGrp="1"/>
           </p:cNvSpPr>
           <p:nvPr>
-            <p:ph idx="1"/>
+            <p:ph idx="1" sz="half"/>
           </p:nvPr>
         </p:nvSpPr>
         <p:spPr/>
@@ -10360,61 +10334,186 @@
             </a:pPr>
             <a:r>
               <a:rPr/>
-              <a:t>In-person clinic visit with Dr Salo or Kate Duncan</a:t>
-            </a:r>
-          </a:p>
-          <a:p>
-            <a:pPr lvl="0"/>
-            <a:r>
-              <a:rPr/>
-              <a:t>Check surgical site</a:t>
-            </a:r>
-          </a:p>
-          <a:p>
-            <a:pPr lvl="0"/>
-            <a:r>
-              <a:rPr/>
-              <a:t>Remove staples (if needed)</a:t>
-            </a:r>
-          </a:p>
-          <a:p>
-            <a:pPr lvl="0"/>
-            <a:r>
-              <a:rPr/>
-              <a:t>Remove abdominal drains (if needed)</a:t>
-            </a:r>
-          </a:p>
-          <a:p>
-            <a:pPr lvl="0" indent="0" marL="0">
-              <a:buNone/>
-            </a:pPr>
-            <a:r>
-              <a:rPr/>
-              <a:t>Meet with dietitian:</a:t>
-            </a:r>
-          </a:p>
-          <a:p>
-            <a:pPr lvl="0"/>
-            <a:r>
-              <a:rPr/>
-              <a:t>Reduce tube feeds</a:t>
-            </a:r>
-          </a:p>
-          <a:p>
-            <a:pPr lvl="0"/>
-            <a:r>
-              <a:rPr/>
-              <a:t>Advance diet by mouth</a:t>
-            </a:r>
-          </a:p>
-        </p:txBody>
-      </p:sp>
+              <a:t>Reflux can occur the first few weeks/months after surgery</a:t>
+            </a:r>
+          </a:p>
+          <a:p>
+            <a:pPr lvl="0" indent="0" marL="0">
+              <a:buNone/>
+            </a:pPr>
+            <a:r>
+              <a:rPr/>
+              <a:t>This improves over the first few months</a:t>
+            </a:r>
+          </a:p>
+          <a:p>
+            <a:pPr lvl="0" indent="0" marL="0">
+              <a:buNone/>
+            </a:pPr>
+            <a:r>
+              <a:rPr/>
+              <a:t>A wedge pillow can be helpful for sleep</a:t>
+            </a:r>
+          </a:p>
+        </p:txBody>
+      </p:sp>
+      <p:pic>
+        <p:nvPicPr>
+          <p:cNvPr descr="images/wedge_pillow_comm.jpg" id="0" name="Picture 1"/>
+          <p:cNvPicPr>
+            <a:picLocks noGrp="1" noChangeAspect="1"/>
+          </p:cNvPicPr>
+          <p:nvPr/>
+        </p:nvPicPr>
+        <p:blipFill>
+          <a:blip r:embed="rId2"/>
+          <a:stretch>
+            <a:fillRect/>
+          </a:stretch>
+        </p:blipFill>
+        <p:spPr bwMode="auto">
+          <a:xfrm>
+            <a:off x="4864100" y="1193800"/>
+            <a:ext cx="3733800" cy="3733800"/>
+          </a:xfrm>
+          <a:prstGeom prst="rect">
+            <a:avLst/>
+          </a:prstGeom>
+          <a:noFill/>
+          <a:ln w="9525">
+            <a:noFill/>
+            <a:headEnd/>
+            <a:tailEnd/>
+          </a:ln>
+        </p:spPr>
+      </p:pic>
     </p:spTree>
   </p:cSld>
 </p:sld>
 </file>
 
 <file path=ppt/slides/slide63.xml><?xml version="1.0" encoding="utf-8"?>
+<p:sld xmlns:a="http://schemas.openxmlformats.org/drawingml/2006/main" xmlns:r="http://schemas.openxmlformats.org/officeDocument/2006/relationships" xmlns:p="http://schemas.openxmlformats.org/presentationml/2006/main">
+  <p:cSld>
+    <p:spTree>
+      <p:nvGrpSpPr>
+        <p:cNvPr id="1" name=""/>
+        <p:cNvGrpSpPr/>
+        <p:nvPr/>
+      </p:nvGrpSpPr>
+      <p:grpSpPr>
+        <a:xfrm>
+          <a:off x="0" y="0"/>
+          <a:ext cx="0" cy="0"/>
+          <a:chOff x="0" y="0"/>
+          <a:chExt cx="0" cy="0"/>
+        </a:xfrm>
+      </p:grpSpPr>
+      <p:sp>
+        <p:nvSpPr>
+          <p:cNvPr id="2" name="Title 1"/>
+          <p:cNvSpPr>
+            <a:spLocks noGrp="1"/>
+          </p:cNvSpPr>
+          <p:nvPr>
+            <p:ph type="title"/>
+          </p:nvPr>
+        </p:nvSpPr>
+        <p:spPr>
+          <a:xfrm>
+            <a:off x="284309" y="205979"/>
+            <a:ext cx="8552330" cy="662317"/>
+          </a:xfrm>
+        </p:spPr>
+        <p:txBody>
+          <a:bodyPr/>
+          <a:lstStyle/>
+          <a:p>
+            <a:pPr lvl="0" indent="0" marL="0">
+              <a:buNone/>
+            </a:pPr>
+            <a:r>
+              <a:rPr/>
+              <a:t>Follow Up Clinic Visit 7-10 days after Discharge</a:t>
+            </a:r>
+          </a:p>
+        </p:txBody>
+      </p:sp>
+      <p:sp>
+        <p:nvSpPr>
+          <p:cNvPr id="3" name="Content Placeholder 2"/>
+          <p:cNvSpPr>
+            <a:spLocks noGrp="1"/>
+          </p:cNvSpPr>
+          <p:nvPr>
+            <p:ph idx="1"/>
+          </p:nvPr>
+        </p:nvSpPr>
+        <p:spPr/>
+        <p:txBody>
+          <a:bodyPr/>
+          <a:lstStyle/>
+          <a:p>
+            <a:pPr lvl="0" indent="0" marL="0">
+              <a:buNone/>
+            </a:pPr>
+            <a:r>
+              <a:rPr/>
+              <a:t>In-person clinic visit with Dr Salo or Kate Duncan</a:t>
+            </a:r>
+          </a:p>
+          <a:p>
+            <a:pPr lvl="0"/>
+            <a:r>
+              <a:rPr/>
+              <a:t>Check surgical site</a:t>
+            </a:r>
+          </a:p>
+          <a:p>
+            <a:pPr lvl="0"/>
+            <a:r>
+              <a:rPr/>
+              <a:t>Remove staples (if needed)</a:t>
+            </a:r>
+          </a:p>
+          <a:p>
+            <a:pPr lvl="0"/>
+            <a:r>
+              <a:rPr/>
+              <a:t>Remove abdominal drains (if needed)</a:t>
+            </a:r>
+          </a:p>
+          <a:p>
+            <a:pPr lvl="0" indent="0" marL="0">
+              <a:buNone/>
+            </a:pPr>
+            <a:r>
+              <a:rPr/>
+              <a:t>Meet with dietitian:</a:t>
+            </a:r>
+          </a:p>
+          <a:p>
+            <a:pPr lvl="0"/>
+            <a:r>
+              <a:rPr/>
+              <a:t>Reduce tube feeds</a:t>
+            </a:r>
+          </a:p>
+          <a:p>
+            <a:pPr lvl="0"/>
+            <a:r>
+              <a:rPr/>
+              <a:t>Advance diet by mouth</a:t>
+            </a:r>
+          </a:p>
+        </p:txBody>
+      </p:sp>
+    </p:spTree>
+  </p:cSld>
+</p:sld>
+</file>
+
+<file path=ppt/slides/slide64.xml><?xml version="1.0" encoding="utf-8"?>
 <p:sld xmlns:a="http://schemas.openxmlformats.org/drawingml/2006/main" xmlns:r="http://schemas.openxmlformats.org/officeDocument/2006/relationships" xmlns:p="http://schemas.openxmlformats.org/presentationml/2006/main">
   <p:cSld>
     <p:spTree>
@@ -10541,101 +10640,6 @@
 </p:sld>
 </file>
 
-<file path=ppt/slides/slide64.xml><?xml version="1.0" encoding="utf-8"?>
-<p:sld xmlns:a="http://schemas.openxmlformats.org/drawingml/2006/main" xmlns:r="http://schemas.openxmlformats.org/officeDocument/2006/relationships" xmlns:p="http://schemas.openxmlformats.org/presentationml/2006/main">
-  <p:cSld>
-    <p:spTree>
-      <p:nvGrpSpPr>
-        <p:cNvPr id="1" name=""/>
-        <p:cNvGrpSpPr/>
-        <p:nvPr/>
-      </p:nvGrpSpPr>
-      <p:grpSpPr>
-        <a:xfrm>
-          <a:off x="0" y="0"/>
-          <a:ext cx="0" cy="0"/>
-          <a:chOff x="0" y="0"/>
-          <a:chExt cx="0" cy="0"/>
-        </a:xfrm>
-      </p:grpSpPr>
-      <p:sp>
-        <p:nvSpPr>
-          <p:cNvPr id="2" name="Title 1"/>
-          <p:cNvSpPr>
-            <a:spLocks noGrp="1"/>
-          </p:cNvSpPr>
-          <p:nvPr>
-            <p:ph type="title"/>
-          </p:nvPr>
-        </p:nvSpPr>
-        <p:spPr>
-          <a:xfrm>
-            <a:off x="284309" y="205979"/>
-            <a:ext cx="8552330" cy="662317"/>
-          </a:xfrm>
-        </p:spPr>
-        <p:txBody>
-          <a:bodyPr/>
-          <a:lstStyle/>
-          <a:p>
-            <a:pPr lvl="0" indent="0" marL="0">
-              <a:buNone/>
-            </a:pPr>
-            <a:r>
-              <a:rPr/>
-              <a:t>Jejunostomy Removal</a:t>
-            </a:r>
-          </a:p>
-        </p:txBody>
-      </p:sp>
-      <p:sp>
-        <p:nvSpPr>
-          <p:cNvPr id="3" name="Content Placeholder 2"/>
-          <p:cNvSpPr>
-            <a:spLocks noGrp="1"/>
-          </p:cNvSpPr>
-          <p:nvPr>
-            <p:ph idx="1"/>
-          </p:nvPr>
-        </p:nvSpPr>
-        <p:spPr/>
-        <p:txBody>
-          <a:bodyPr/>
-          <a:lstStyle/>
-          <a:p>
-            <a:pPr lvl="0" indent="0" marL="0">
-              <a:buNone/>
-            </a:pPr>
-            <a:r>
-              <a:rPr/>
-              <a:t>Jejunostomy tube is removed in the office once you can take in enough nutrients by mouth</a:t>
-            </a:r>
-          </a:p>
-          <a:p>
-            <a:pPr lvl="0" indent="0" marL="0">
-              <a:buNone/>
-            </a:pPr>
-            <a:r>
-              <a:rPr/>
-              <a:t>Removal usually around 8 weeks after surgery</a:t>
-            </a:r>
-          </a:p>
-          <a:p>
-            <a:pPr lvl="0" indent="0" marL="0">
-              <a:buNone/>
-            </a:pPr>
-            <a:r>
-              <a:rPr/>
-              <a:t>May take 5 minutes and some local anesthetic to loosen up the tube for removal.</a:t>
-            </a:r>
-          </a:p>
-        </p:txBody>
-      </p:sp>
-    </p:spTree>
-  </p:cSld>
-</p:sld>
-</file>
-
 <file path=ppt/slides/slide65.xml><?xml version="1.0" encoding="utf-8"?>
 <p:sld xmlns:a="http://schemas.openxmlformats.org/drawingml/2006/main" xmlns:r="http://schemas.openxmlformats.org/officeDocument/2006/relationships" xmlns:p="http://schemas.openxmlformats.org/presentationml/2006/main">
   <p:cSld>
@@ -10678,7 +10682,7 @@
             </a:pPr>
             <a:r>
               <a:rPr/>
-              <a:t>Nutritional Monitoring after Surgery</a:t>
+              <a:t>Second Follow Up Visit</a:t>
             </a:r>
           </a:p>
         </p:txBody>
@@ -10703,28 +10707,35 @@
             </a:pPr>
             <a:r>
               <a:rPr/>
-              <a:t>You may have difficulty absorbing some nutrients:</a:t>
-            </a:r>
-          </a:p>
-          <a:p>
-            <a:pPr lvl="0"/>
-            <a:r>
-              <a:rPr/>
-              <a:t>Iron</a:t>
-            </a:r>
-          </a:p>
-          <a:p>
-            <a:pPr lvl="0"/>
-            <a:r>
-              <a:rPr/>
-              <a:t>Vitamin B12</a:t>
-            </a:r>
-          </a:p>
-          <a:p>
-            <a:pPr lvl="0"/>
-            <a:r>
-              <a:rPr/>
-              <a:t>Vitamin D</a:t>
+              <a:t>4-5 weeks after first post-operative visit</a:t>
+            </a:r>
+          </a:p>
+          <a:p>
+            <a:pPr lvl="0"/>
+            <a:r>
+              <a:rPr/>
+              <a:t>Discuss diet</a:t>
+            </a:r>
+          </a:p>
+          <a:p>
+            <a:pPr lvl="0"/>
+            <a:r>
+              <a:rPr/>
+              <a:t>Discuss medicines</a:t>
+            </a:r>
+          </a:p>
+          <a:p>
+            <a:pPr lvl="0"/>
+            <a:r>
+              <a:rPr/>
+              <a:t>Plan for jejunostomy removal</a:t>
+            </a:r>
+          </a:p>
+          <a:p>
+            <a:pPr lvl="0"/>
+            <a:r>
+              <a:rPr/>
+              <a:t>Evaluate readiness for chemotherapy after surgery (usually 6 weeks)</a:t>
             </a:r>
           </a:p>
         </p:txBody>
@@ -10776,7 +10787,7 @@
             </a:pPr>
             <a:r>
               <a:rPr/>
-              <a:t>Nutritional Monitoring after Surgery</a:t>
+              <a:t>Eating after Surgery</a:t>
             </a:r>
           </a:p>
         </p:txBody>
@@ -10801,28 +10812,25 @@
             </a:pPr>
             <a:r>
               <a:rPr/>
-              <a:t>About 3 months after the jejunostomy tube is removed, we will check blood levels:</a:t>
-            </a:r>
-          </a:p>
-          <a:p>
-            <a:pPr lvl="0"/>
-            <a:r>
-              <a:rPr/>
-              <a:t>Iron (ferritin)</a:t>
-            </a:r>
-          </a:p>
-          <a:p>
-            <a:pPr lvl="0"/>
-            <a:r>
-              <a:rPr/>
-              <a:t>Vitamin B12</a:t>
-            </a:r>
-          </a:p>
-          <a:p>
-            <a:pPr lvl="0"/>
-            <a:r>
-              <a:rPr/>
-              <a:t>Vitamin D</a:t>
+              <a:t>First Postoperative Visit: Start soft foods (Phase I diet)</a:t>
+            </a:r>
+          </a:p>
+          <a:p>
+            <a:pPr lvl="0" indent="0" marL="0">
+              <a:buNone/>
+            </a:pPr>
+            <a:r>
+              <a:rPr/>
+              <a:t>Weekly virtual visits with dietitian</a:t>
+            </a:r>
+          </a:p>
+          <a:p>
+            <a:pPr lvl="0" indent="0" marL="0">
+              <a:buNone/>
+            </a:pPr>
+            <a:r>
+              <a:rPr/>
+              <a:t>Jejunostomy removal generally at 8 weeks after surgery</a:t>
             </a:r>
           </a:p>
         </p:txBody>
@@ -10874,7 +10882,7 @@
             </a:pPr>
             <a:r>
               <a:rPr/>
-              <a:t>Nutritional Replacements after Surgery</a:t>
+              <a:t>Jejunostomy Removal</a:t>
             </a:r>
           </a:p>
         </p:txBody>
@@ -10899,51 +10907,25 @@
             </a:pPr>
             <a:r>
               <a:rPr/>
-              <a:t>Vitamin or iron replacements can be ordered by:</a:t>
-            </a:r>
-          </a:p>
-          <a:p>
-            <a:pPr lvl="0"/>
-            <a:r>
-              <a:rPr/>
-              <a:t>Primary Care Provider (PCP)</a:t>
-            </a:r>
-          </a:p>
-          <a:p>
-            <a:pPr lvl="0"/>
-            <a:r>
-              <a:rPr/>
-              <a:t>Medical Oncologist</a:t>
-            </a:r>
-          </a:p>
-          <a:p>
-            <a:pPr lvl="0"/>
-            <a:r>
-              <a:rPr/>
-              <a:t>Surgeon</a:t>
-            </a:r>
-          </a:p>
-          <a:p>
-            <a:pPr lvl="0" indent="0" marL="0">
-              <a:buNone/>
-            </a:pPr>
-            <a:r>
-              <a:rPr/>
-              <a:t>If levels are low</a:t>
-            </a:r>
-          </a:p>
-          <a:p>
-            <a:pPr lvl="0"/>
-            <a:r>
-              <a:rPr/>
-              <a:t>Replacement</a:t>
-            </a:r>
-          </a:p>
-          <a:p>
-            <a:pPr lvl="0"/>
-            <a:r>
-              <a:rPr/>
-              <a:t>Repeat testing in 3-6 months</a:t>
+              <a:t>Jejunostomy tube is removed in the office once you can take in enough nutrients by mouth</a:t>
+            </a:r>
+          </a:p>
+          <a:p>
+            <a:pPr lvl="0" indent="0" marL="0">
+              <a:buNone/>
+            </a:pPr>
+            <a:r>
+              <a:rPr/>
+              <a:t>Removal usually around 8 weeks after surgery (may be longer if chemotherapy planned after surgery)</a:t>
+            </a:r>
+          </a:p>
+          <a:p>
+            <a:pPr lvl="0" indent="0" marL="0">
+              <a:buNone/>
+            </a:pPr>
+            <a:r>
+              <a:rPr/>
+              <a:t>May take 30 minutes and some local anesthetic to loosen up the tube for removal.</a:t>
             </a:r>
           </a:p>
         </p:txBody>
@@ -10995,7 +10977,7 @@
             </a:pPr>
             <a:r>
               <a:rPr/>
-              <a:t>Team Members - Physicians</a:t>
+              <a:t>Nutritional Monitoring after Surgery</a:t>
             </a:r>
           </a:p>
         </p:txBody>
@@ -11020,64 +11002,28 @@
             </a:pPr>
             <a:r>
               <a:rPr/>
-              <a:t>Primary Care Provider</a:t>
-            </a:r>
-          </a:p>
-          <a:p>
-            <a:pPr lvl="0" indent="0" marL="0">
-              <a:buNone/>
-            </a:pPr>
-            <a:r>
-              <a:rPr/>
-              <a:t>Gastroenterologist</a:t>
-            </a:r>
-          </a:p>
-          <a:p>
-            <a:pPr lvl="0" indent="0" marL="0">
-              <a:buNone/>
-            </a:pPr>
-            <a:r>
-              <a:rPr/>
-              <a:t>Medical Oncologist (chemotherapy)</a:t>
-            </a:r>
-          </a:p>
-          <a:p>
-            <a:pPr lvl="0" indent="0" marL="0">
-              <a:buNone/>
-            </a:pPr>
-            <a:r>
-              <a:rPr/>
-              <a:t>Radiation Oncologist (radiation)</a:t>
-            </a:r>
-          </a:p>
-          <a:p>
-            <a:pPr lvl="0" indent="0" marL="0">
-              <a:buNone/>
-            </a:pPr>
-            <a:r>
-              <a:rPr/>
-              <a:t>Surgeons</a:t>
-            </a:r>
-          </a:p>
-          <a:p>
-            <a:pPr lvl="0"/>
-            <a:r>
-              <a:rPr/>
-              <a:t>Jonathan Salo MD</a:t>
-            </a:r>
-          </a:p>
-          <a:p>
-            <a:pPr lvl="0"/>
-            <a:r>
-              <a:rPr/>
-              <a:t>Kelli Salter MD</a:t>
-            </a:r>
-          </a:p>
-          <a:p>
-            <a:pPr lvl="0"/>
-            <a:r>
-              <a:rPr/>
-              <a:t>Michael Roach MD</a:t>
+              <a:t>You may have difficulty absorbing some nutrients:</a:t>
+            </a:r>
+          </a:p>
+          <a:p>
+            <a:pPr lvl="0"/>
+            <a:r>
+              <a:rPr/>
+              <a:t>Iron</a:t>
+            </a:r>
+          </a:p>
+          <a:p>
+            <a:pPr lvl="0"/>
+            <a:r>
+              <a:rPr/>
+              <a:t>Vitamin B12</a:t>
+            </a:r>
+          </a:p>
+          <a:p>
+            <a:pPr lvl="0"/>
+            <a:r>
+              <a:rPr/>
+              <a:t>Vitamin D</a:t>
             </a:r>
           </a:p>
         </p:txBody>
@@ -11129,7 +11075,7 @@
             </a:pPr>
             <a:r>
               <a:rPr/>
-              <a:t>Team Members - Support Staff</a:t>
+              <a:t>Nutritional Monitoring after Surgery</a:t>
             </a:r>
           </a:p>
         </p:txBody>
@@ -11154,57 +11100,28 @@
             </a:pPr>
             <a:r>
               <a:rPr/>
-              <a:t>Physician Assistant - Kate Duncan PA-C</a:t>
-            </a:r>
-          </a:p>
-          <a:p>
-            <a:pPr lvl="0" indent="0" marL="0">
-              <a:buNone/>
-            </a:pPr>
-            <a:r>
-              <a:rPr/>
-              <a:t>Dietitian - Liz Koch</a:t>
-            </a:r>
-          </a:p>
-          <a:p>
-            <a:pPr lvl="0" indent="0" marL="0">
-              <a:buNone/>
-            </a:pPr>
-            <a:r>
-              <a:rPr/>
-              <a:t>Nurses</a:t>
-            </a:r>
-          </a:p>
-          <a:p>
-            <a:pPr lvl="0"/>
-            <a:r>
-              <a:rPr/>
-              <a:t>Matthew Carpenter RN</a:t>
-            </a:r>
-          </a:p>
-          <a:p>
-            <a:pPr lvl="0"/>
-            <a:r>
-              <a:rPr/>
-              <a:t>Brandon Galloway LPN</a:t>
-            </a:r>
-          </a:p>
-          <a:p>
-            <a:pPr lvl="0" indent="0" marL="0">
-              <a:buNone/>
-            </a:pPr>
-            <a:r>
-              <a:rPr/>
-              <a:t>Navigators: Laura Swift RN &amp; Lorna Espinal RN</a:t>
-            </a:r>
-          </a:p>
-          <a:p>
-            <a:pPr lvl="0" indent="0" marL="0">
-              <a:buNone/>
-            </a:pPr>
-            <a:r>
-              <a:rPr/>
-              <a:t>Care Coordinator - Karen Julian-Martinez</a:t>
+              <a:t>About 3 months after the jejunostomy tube is removed, we will check blood levels:</a:t>
+            </a:r>
+          </a:p>
+          <a:p>
+            <a:pPr lvl="0"/>
+            <a:r>
+              <a:rPr/>
+              <a:t>Iron (ferritin)</a:t>
+            </a:r>
+          </a:p>
+          <a:p>
+            <a:pPr lvl="0"/>
+            <a:r>
+              <a:rPr/>
+              <a:t>Vitamin B12</a:t>
+            </a:r>
+          </a:p>
+          <a:p>
+            <a:pPr lvl="0"/>
+            <a:r>
+              <a:rPr/>
+              <a:t>Vitamin D</a:t>
             </a:r>
           </a:p>
         </p:txBody>
@@ -11326,6 +11243,388 @@
             <a:r>
               <a:rPr/>
               <a:t>Nothing to eat or drink after midnight</a:t>
+            </a:r>
+          </a:p>
+        </p:txBody>
+      </p:sp>
+    </p:spTree>
+  </p:cSld>
+</p:sld>
+</file>
+
+<file path=ppt/slides/slide70.xml><?xml version="1.0" encoding="utf-8"?>
+<p:sld xmlns:a="http://schemas.openxmlformats.org/drawingml/2006/main" xmlns:r="http://schemas.openxmlformats.org/officeDocument/2006/relationships" xmlns:p="http://schemas.openxmlformats.org/presentationml/2006/main">
+  <p:cSld>
+    <p:spTree>
+      <p:nvGrpSpPr>
+        <p:cNvPr id="1" name=""/>
+        <p:cNvGrpSpPr/>
+        <p:nvPr/>
+      </p:nvGrpSpPr>
+      <p:grpSpPr>
+        <a:xfrm>
+          <a:off x="0" y="0"/>
+          <a:ext cx="0" cy="0"/>
+          <a:chOff x="0" y="0"/>
+          <a:chExt cx="0" cy="0"/>
+        </a:xfrm>
+      </p:grpSpPr>
+      <p:sp>
+        <p:nvSpPr>
+          <p:cNvPr id="2" name="Title 1"/>
+          <p:cNvSpPr>
+            <a:spLocks noGrp="1"/>
+          </p:cNvSpPr>
+          <p:nvPr>
+            <p:ph type="title"/>
+          </p:nvPr>
+        </p:nvSpPr>
+        <p:spPr>
+          <a:xfrm>
+            <a:off x="284309" y="205979"/>
+            <a:ext cx="8552330" cy="662317"/>
+          </a:xfrm>
+        </p:spPr>
+        <p:txBody>
+          <a:bodyPr/>
+          <a:lstStyle/>
+          <a:p>
+            <a:pPr lvl="0" indent="0" marL="0">
+              <a:buNone/>
+            </a:pPr>
+            <a:r>
+              <a:rPr/>
+              <a:t>Nutritional Replacements after Surgery</a:t>
+            </a:r>
+          </a:p>
+        </p:txBody>
+      </p:sp>
+      <p:sp>
+        <p:nvSpPr>
+          <p:cNvPr id="3" name="Content Placeholder 2"/>
+          <p:cNvSpPr>
+            <a:spLocks noGrp="1"/>
+          </p:cNvSpPr>
+          <p:nvPr>
+            <p:ph idx="1"/>
+          </p:nvPr>
+        </p:nvSpPr>
+        <p:spPr/>
+        <p:txBody>
+          <a:bodyPr/>
+          <a:lstStyle/>
+          <a:p>
+            <a:pPr lvl="0" indent="0" marL="0">
+              <a:buNone/>
+            </a:pPr>
+            <a:r>
+              <a:rPr/>
+              <a:t>Vitamin or iron replacements can be ordered by:</a:t>
+            </a:r>
+          </a:p>
+          <a:p>
+            <a:pPr lvl="0"/>
+            <a:r>
+              <a:rPr/>
+              <a:t>Primary Care Provider (PCP)</a:t>
+            </a:r>
+          </a:p>
+          <a:p>
+            <a:pPr lvl="0"/>
+            <a:r>
+              <a:rPr/>
+              <a:t>Medical Oncologist</a:t>
+            </a:r>
+          </a:p>
+          <a:p>
+            <a:pPr lvl="0"/>
+            <a:r>
+              <a:rPr/>
+              <a:t>Surgeon</a:t>
+            </a:r>
+          </a:p>
+          <a:p>
+            <a:pPr lvl="0" indent="0" marL="0">
+              <a:buNone/>
+            </a:pPr>
+            <a:r>
+              <a:rPr/>
+              <a:t>If levels are low</a:t>
+            </a:r>
+          </a:p>
+          <a:p>
+            <a:pPr lvl="0"/>
+            <a:r>
+              <a:rPr/>
+              <a:t>Replacement</a:t>
+            </a:r>
+          </a:p>
+          <a:p>
+            <a:pPr lvl="0"/>
+            <a:r>
+              <a:rPr/>
+              <a:t>Repeat testing in 3-6 months</a:t>
+            </a:r>
+          </a:p>
+        </p:txBody>
+      </p:sp>
+    </p:spTree>
+  </p:cSld>
+</p:sld>
+</file>
+
+<file path=ppt/slides/slide71.xml><?xml version="1.0" encoding="utf-8"?>
+<p:sld xmlns:a="http://schemas.openxmlformats.org/drawingml/2006/main" xmlns:r="http://schemas.openxmlformats.org/officeDocument/2006/relationships" xmlns:p="http://schemas.openxmlformats.org/presentationml/2006/main">
+  <p:cSld>
+    <p:spTree>
+      <p:nvGrpSpPr>
+        <p:cNvPr id="1" name=""/>
+        <p:cNvGrpSpPr/>
+        <p:nvPr/>
+      </p:nvGrpSpPr>
+      <p:grpSpPr>
+        <a:xfrm>
+          <a:off x="0" y="0"/>
+          <a:ext cx="0" cy="0"/>
+          <a:chOff x="0" y="0"/>
+          <a:chExt cx="0" cy="0"/>
+        </a:xfrm>
+      </p:grpSpPr>
+      <p:sp>
+        <p:nvSpPr>
+          <p:cNvPr id="2" name="Title 1"/>
+          <p:cNvSpPr>
+            <a:spLocks noGrp="1"/>
+          </p:cNvSpPr>
+          <p:nvPr>
+            <p:ph type="title"/>
+          </p:nvPr>
+        </p:nvSpPr>
+        <p:spPr>
+          <a:xfrm>
+            <a:off x="284309" y="205979"/>
+            <a:ext cx="8552330" cy="662317"/>
+          </a:xfrm>
+        </p:spPr>
+        <p:txBody>
+          <a:bodyPr/>
+          <a:lstStyle/>
+          <a:p>
+            <a:pPr lvl="0" indent="0" marL="0">
+              <a:buNone/>
+            </a:pPr>
+            <a:r>
+              <a:rPr/>
+              <a:t>Team Members - Physicians</a:t>
+            </a:r>
+          </a:p>
+        </p:txBody>
+      </p:sp>
+      <p:sp>
+        <p:nvSpPr>
+          <p:cNvPr id="3" name="Content Placeholder 2"/>
+          <p:cNvSpPr>
+            <a:spLocks noGrp="1"/>
+          </p:cNvSpPr>
+          <p:nvPr>
+            <p:ph idx="1"/>
+          </p:nvPr>
+        </p:nvSpPr>
+        <p:spPr/>
+        <p:txBody>
+          <a:bodyPr/>
+          <a:lstStyle/>
+          <a:p>
+            <a:pPr lvl="0" indent="0" marL="0">
+              <a:buNone/>
+            </a:pPr>
+            <a:r>
+              <a:rPr/>
+              <a:t>Primary Care Provider</a:t>
+            </a:r>
+          </a:p>
+          <a:p>
+            <a:pPr lvl="0" indent="0" marL="0">
+              <a:buNone/>
+            </a:pPr>
+            <a:r>
+              <a:rPr/>
+              <a:t>Gastroenterologist</a:t>
+            </a:r>
+          </a:p>
+          <a:p>
+            <a:pPr lvl="0" indent="0" marL="0">
+              <a:buNone/>
+            </a:pPr>
+            <a:r>
+              <a:rPr/>
+              <a:t>Medical Oncologist (chemotherapy)</a:t>
+            </a:r>
+          </a:p>
+          <a:p>
+            <a:pPr lvl="0" indent="0" marL="0">
+              <a:buNone/>
+            </a:pPr>
+            <a:r>
+              <a:rPr/>
+              <a:t>Radiation Oncologist (radiation)</a:t>
+            </a:r>
+          </a:p>
+          <a:p>
+            <a:pPr lvl="0" indent="0" marL="0">
+              <a:buNone/>
+            </a:pPr>
+            <a:r>
+              <a:rPr/>
+              <a:t>Surgeons</a:t>
+            </a:r>
+          </a:p>
+          <a:p>
+            <a:pPr lvl="0"/>
+            <a:r>
+              <a:rPr/>
+              <a:t>Jonathan Salo MD</a:t>
+            </a:r>
+          </a:p>
+          <a:p>
+            <a:pPr lvl="0"/>
+            <a:r>
+              <a:rPr/>
+              <a:t>Kelli Salter MD</a:t>
+            </a:r>
+          </a:p>
+          <a:p>
+            <a:pPr lvl="0"/>
+            <a:r>
+              <a:rPr/>
+              <a:t>Michael Roach MD</a:t>
+            </a:r>
+          </a:p>
+        </p:txBody>
+      </p:sp>
+    </p:spTree>
+  </p:cSld>
+</p:sld>
+</file>
+
+<file path=ppt/slides/slide72.xml><?xml version="1.0" encoding="utf-8"?>
+<p:sld xmlns:a="http://schemas.openxmlformats.org/drawingml/2006/main" xmlns:r="http://schemas.openxmlformats.org/officeDocument/2006/relationships" xmlns:p="http://schemas.openxmlformats.org/presentationml/2006/main">
+  <p:cSld>
+    <p:spTree>
+      <p:nvGrpSpPr>
+        <p:cNvPr id="1" name=""/>
+        <p:cNvGrpSpPr/>
+        <p:nvPr/>
+      </p:nvGrpSpPr>
+      <p:grpSpPr>
+        <a:xfrm>
+          <a:off x="0" y="0"/>
+          <a:ext cx="0" cy="0"/>
+          <a:chOff x="0" y="0"/>
+          <a:chExt cx="0" cy="0"/>
+        </a:xfrm>
+      </p:grpSpPr>
+      <p:sp>
+        <p:nvSpPr>
+          <p:cNvPr id="2" name="Title 1"/>
+          <p:cNvSpPr>
+            <a:spLocks noGrp="1"/>
+          </p:cNvSpPr>
+          <p:nvPr>
+            <p:ph type="title"/>
+          </p:nvPr>
+        </p:nvSpPr>
+        <p:spPr>
+          <a:xfrm>
+            <a:off x="284309" y="205979"/>
+            <a:ext cx="8552330" cy="662317"/>
+          </a:xfrm>
+        </p:spPr>
+        <p:txBody>
+          <a:bodyPr/>
+          <a:lstStyle/>
+          <a:p>
+            <a:pPr lvl="0" indent="0" marL="0">
+              <a:buNone/>
+            </a:pPr>
+            <a:r>
+              <a:rPr/>
+              <a:t>Team Members - Support Staff</a:t>
+            </a:r>
+          </a:p>
+        </p:txBody>
+      </p:sp>
+      <p:sp>
+        <p:nvSpPr>
+          <p:cNvPr id="3" name="Content Placeholder 2"/>
+          <p:cNvSpPr>
+            <a:spLocks noGrp="1"/>
+          </p:cNvSpPr>
+          <p:nvPr>
+            <p:ph idx="1"/>
+          </p:nvPr>
+        </p:nvSpPr>
+        <p:spPr/>
+        <p:txBody>
+          <a:bodyPr/>
+          <a:lstStyle/>
+          <a:p>
+            <a:pPr lvl="0" indent="0" marL="0">
+              <a:buNone/>
+            </a:pPr>
+            <a:r>
+              <a:rPr/>
+              <a:t>Physician Assistant - Kate Duncan PA-C</a:t>
+            </a:r>
+          </a:p>
+          <a:p>
+            <a:pPr lvl="0" indent="0" marL="0">
+              <a:buNone/>
+            </a:pPr>
+            <a:r>
+              <a:rPr/>
+              <a:t>Dietitian - Liz Koch</a:t>
+            </a:r>
+          </a:p>
+          <a:p>
+            <a:pPr lvl="0" indent="0" marL="0">
+              <a:buNone/>
+            </a:pPr>
+            <a:r>
+              <a:rPr/>
+              <a:t>Nurses</a:t>
+            </a:r>
+          </a:p>
+          <a:p>
+            <a:pPr lvl="0"/>
+            <a:r>
+              <a:rPr/>
+              <a:t>Matthew Carpenter RN</a:t>
+            </a:r>
+          </a:p>
+          <a:p>
+            <a:pPr lvl="0"/>
+            <a:r>
+              <a:rPr/>
+              <a:t>Brandon Galloway LPN</a:t>
+            </a:r>
+          </a:p>
+          <a:p>
+            <a:pPr lvl="0" indent="0" marL="0">
+              <a:buNone/>
+            </a:pPr>
+            <a:r>
+              <a:rPr/>
+              <a:t>Navigators: Laura Swift RN &amp; Lorna Espinal RN</a:t>
+            </a:r>
+          </a:p>
+          <a:p>
+            <a:pPr lvl="0" indent="0" marL="0">
+              <a:buNone/>
+            </a:pPr>
+            <a:r>
+              <a:rPr/>
+              <a:t>Care Coordinator - Karen Julian-Martinez</a:t>
             </a:r>
           </a:p>
         </p:txBody>

--- a/lci_esophagectomy_consult.pptx
+++ b/lci_esophagectomy_consult.pptx
@@ -3638,7 +3638,7 @@
             <a:pPr lvl="0"/>
             <a:r>
               <a:rPr/>
-              <a:t>No jewelery or valuables</a:t>
+              <a:t>No jewelry or valuables</a:t>
             </a:r>
           </a:p>
           <a:p>
